--- a/MIT/6_390/week11/Reinforcement Learning - Tic-Tac-Toe/tutorial/PreAssignment.pptx
+++ b/MIT/6_390/week11/Reinforcement Learning - Tic-Tac-Toe/tutorial/PreAssignment.pptx
@@ -5,10 +5,10 @@
     <p:sldMasterId id="2147483697" r:id="rId2"/>
   </p:sldMasterIdLst>
   <p:notesMasterIdLst>
-    <p:notesMasterId r:id="rId18"/>
+    <p:notesMasterId r:id="rId19"/>
   </p:notesMasterIdLst>
   <p:handoutMasterIdLst>
-    <p:handoutMasterId r:id="rId19"/>
+    <p:handoutMasterId r:id="rId20"/>
   </p:handoutMasterIdLst>
   <p:sldIdLst>
     <p:sldId id="256" r:id="rId3"/>
@@ -19,13 +19,14 @@
     <p:sldId id="359" r:id="rId8"/>
     <p:sldId id="362" r:id="rId9"/>
     <p:sldId id="349" r:id="rId10"/>
-    <p:sldId id="354" r:id="rId11"/>
-    <p:sldId id="357" r:id="rId12"/>
-    <p:sldId id="363" r:id="rId13"/>
-    <p:sldId id="364" r:id="rId14"/>
-    <p:sldId id="365" r:id="rId15"/>
-    <p:sldId id="361" r:id="rId16"/>
-    <p:sldId id="290" r:id="rId17"/>
+    <p:sldId id="366" r:id="rId11"/>
+    <p:sldId id="354" r:id="rId12"/>
+    <p:sldId id="357" r:id="rId13"/>
+    <p:sldId id="363" r:id="rId14"/>
+    <p:sldId id="364" r:id="rId15"/>
+    <p:sldId id="365" r:id="rId16"/>
+    <p:sldId id="361" r:id="rId17"/>
+    <p:sldId id="290" r:id="rId18"/>
   </p:sldIdLst>
   <p:sldSz cx="9144000" cy="5143500" type="screen16x9"/>
   <p:notesSz cx="6858000" cy="9144000"/>
@@ -1742,7 +1743,7 @@
           <a:p>
             <a:fld id="{D7CD6017-FECC-4565-B4A9-CDF40B8AFEC4}" type="datetimeFigureOut">
               <a:rPr lang="en-IN" smtClean="0"/>
-              <a:t>20-03-2022</a:t>
+              <a:t>02/07/26</a:t>
             </a:fld>
             <a:endParaRPr lang="en-IN"/>
           </a:p>
@@ -1903,7 +1904,7 @@
   </inkml:definitions>
   <inkml:trace contextRef="#ctx0" brushRef="#br0">744 5714 496 0,'0'0'547'0,"0"0"-77"0,0 0-25 16,-2-15-47-16,2 15-46 0,0 0 41 0,0 0-34 16,-4-11 2-16,4 11-1 0,0 0-62 0,0 0-26 15,0 0-63-15,0 0-45 0,0 0-41 16,0 0-18-16,0 0-24 0,0 0-10 0,0 0 75 15,0 0 112-15,2 19 57 0,0-4-15 0,-2 3 9 16,2 2-8-16,-2 2 5 0,0 0 3 16,0 5-16-16,-2 2-143 0,0 1-150 0,0-2 0 15,0 2 0-15,0 0 0 0,0-3 0 0,0 1 0 16,0-2 0-16,0-2 0 0,-1-2 0 16,1 0 0-16,0-3 0 0,0 0 0 0,0-3 0 15,2-1 0-15,-2 0 0 0,2-15 0 0,-2 24 0 16,2-24 0-16,-2 17-276 0,2-17-315 0,0 0-124 15,0 13-105-15,0-13 181 0,0 0-3 16,0 0 12-16,0 0-73 0,-4-12-290 0,4 12-649 16</inkml:trace>
   <inkml:trace contextRef="#ctx0" brushRef="#br0" timeOffset="337">556 5814 1 0,'-4'-17'709'0,"-2"2"-132"16,2 0-41-16,-3 0-29 0,1 0-71 16,2 0 45-16,0 2-77 0,0-2 4 0,0 0-95 0,4 0-48 15,4-2-79-15,4-4-13 0,4 0-36 16,11-3-6-16,10-4-26 0,7 1-5 0,3 5-21 16,4-1-2-16,5 6-13 0,2 2 20 0,-2 3-48 15,-3 5 30-15,-5 2-24 0,-7 5 4 16,-4 3-13-16,-4 1 45 0,-2 4 65 0,-5 1 50 15,-1 4 62-15,-6 2 22 0,-7 2 19 0,-4 0-32 16,-6 5-25-16,-2-2-38 0,-7 5-32 16,-5 2-89-16,-3 1-80 0,-5 3 0 0,-3-3 0 15,-4 1 0-15,0-3 0 0,-2-2 0 0,4-6 0 16,2-3 0-16,-2 2 0 0,6-7 0 0,0 1-171 16,7-5-264-16,-1 0-108 0,1 1-149 15,3-3-36-15,3 0 110 0,10-4 40 0,-15 4-35 16,15-4-23-16,0 0-358 0,0 0-649 0</inkml:trace>
-  <inkml:trace contextRef="#ctx0" brushRef="#br0" timeOffset="534.85">1046 5954 478 0,'0'0'566'0,"16"9"-136"16,-16-9-29-16,13 11-24 0,-13-11-3 0,8 11 126 15,-8-11 12-15,6 15 0 0,-6-15-39 0,2 20-18 16,-2-20-30-16,0 22 59 0,-2-7 18 15,0-3-71-15,0 3-76 0,-2 0-62 0,2 0-59 16,-2 0-49-16,0 2-32 0,2-2-102 0,-2 0-51 16,1 0 0-16,-1 0 0 0,2 0-127 0,-2-2-360 15,2 1-220-15,0-2-214 0,-2 2 81 16,0-1 21-16,2 0-542 0,0 0-1028 0</inkml:trace>
+  <inkml:trace contextRef="#ctx0" brushRef="#br0" timeOffset="534.84">1046 5954 478 0,'0'0'566'0,"16"9"-136"16,-16-9-29-16,13 11-24 0,-13-11-3 0,8 11 126 15,-8-11 12-15,6 15 0 0,-6-15-39 0,2 20-18 16,-2-20-30-16,0 22 59 0,-2-7 18 15,0-3-71-15,0 3-76 0,-2 0-62 0,2 0-59 16,-2 0-49-16,0 2-32 0,2-2-102 0,-2 0-51 16,1 0 0-16,-1 0 0 0,2 0-127 0,-2-2-360 15,2 1-220-15,0-2-214 0,-2 2 81 16,0-1 21-16,2 0-542 0,0 0-1028 0</inkml:trace>
   <inkml:trace contextRef="#ctx0" brushRef="#br0" timeOffset="1270.99">686 7890 281 0,'0'0'463'0,"0"0"-94"0,0 0-65 16,-8 8-9-16,8-8-2 0,-6 16-10 0,2-6-5 15,-3 7 11-15,3 1-3 0,-2 1-36 0,0 7 34 16,0 3-71-16,0 5-9 0,-1 3-8 16,1 1-12-16,2-1 17 0,-2 2-37 0,2-2 2 15,0 1-41-15,-1-3 9 0,3-2-32 0,0-2-6 16,0-1-30-16,0-1-1 0,0-2-22 15,0-4 5-15,0-1-13 0,2-1 13 0,-2-4-22 16,0 1 6-16,2-3-69 0,-2 0-67 0,2-15-101 16,-2 23-61-16,2-23-104 0,-4 16-151 0,4-16-30 15,0 0-133-15,0 0-279 0,0 0-619 16</inkml:trace>
   <inkml:trace contextRef="#ctx0" brushRef="#br0" timeOffset="1683.25">463 8294 104 0,'0'0'592'16,"-10"-15"-124"-16,10 15-46 0,-9-12-24 0,9 12-42 16,-10-18-31-16,10 18-29 0,-6-20-5 0,4 9-37 15,0-3 27-15,2 1-86 0,0-2 14 16,0-2-33-16,2 0-17 0,2-3-18 0,4-2-5 15,0-3-6-15,5 0-21 0,1-4 6 16,5 0-27-16,2-5 6 0,3 0-33 0,5 1 23 16,0 3-10-16,2 0 4 0,0 3-9 0,2 1 29 15,0 3-24-15,-4 7-15 0,-2 2-12 16,0 6-4-16,-4 1-6 0,0 3 15 0,-3 4 29 0,-1 2 35 16,0 4 22-16,-3 3 27 0,-4 1 21 15,1 3 14-15,-5 3 19 0,-4 0-16 0,-2 3-10 16,-2 1-21-16,-6 3-32 0,-2 0-26 0,-5 5-22 15,-1-2-35-15,-5 1-57 0,-1-3 0 16,-1 0 0-16,-2-3 0 0,3-1 0 0,1-5 0 16,0-3 0-16,3 2 0 0,1-5 0 0,1-2-5 15,2-2-343-15,-1 0-129 0,13-5-137 16,-21 2-177-16,21-2 72 0,0 0 43 0,-14-2-25 16,14 2-526-16,0 0-866 0</inkml:trace>
   <inkml:trace contextRef="#ctx0" brushRef="#br0" timeOffset="1953.99">1000 8207 847 0,'0'0'660'0,"0"0"-77"0,15 4-104 16,-15-4 3-16,0 0-8 0,0 0-37 15,0 0-63-15,0 0-65 0,14 0-63 0,-14 0-56 16,0 0-44-16,0 0-54 0,0 0 1 0,7 13 7 15,-7-13 31-15,0 22 62 0,0-10 11 0,-2 1 9 16,-1 2-19-16,3-1-18 0,-2-1-31 0,2-13-6 16,0 28-13-16,0-28 3 0,2 23-22 15,-2-23 9-15,5 21 22 0,-5-21-45 0,10 20-12 16,-10-20-8-16,10 13-12 0,-10-13 0 0,17 12-9 16,-17-12 0-16,21 3-149 0,-21-3-214 15,28-3-307-15,-11-3-285 0,2-3-24 0,1-1-696 16,3 0-1354-16</inkml:trace>
@@ -1928,7 +1929,7 @@
   <inkml:trace contextRef="#ctx0" brushRef="#br1" timeOffset="34136.98">1798 7919 242 0,'0'0'425'15,"0"0"-65"-15,-4-13-71 0,4 13-21 0,0 0-43 16,-4-9-15-16,4 9-27 0,0 0-11 0,-6-10 3 15,6 10-10-15,0 0-14 0,0 0-13 16,-8-9-18-16,8 9-16 0,0 0-10 0,0 0-4 16,0 0-4-16,0 0 0 0,-7-9 0 0,7 9-6 15,0 0-4-15,0 0-6 0,0 0-6 16,0 0 10-16,0 0 6 0,0 0-1 0,0 0 19 16,0 0 32-16,7-9 26 0,-7 9-24 15,20-10-8-15,-5 6-39 0,1-3-2 0,1-1-28 16,-1 0-3-16,5 0-16 0,-2 1 7 0,-3-1-61 15,1 1-87-15,-3-1-52 0,-1 4-70 0,-1-2-29 16,0 1-57-16,-12 5-26 0,17-7-30 0,-17 7-64 16,0 0-85-16,8-5-255 0,-8 5-365 15</inkml:trace>
   <inkml:trace contextRef="#ctx0" brushRef="#br1" timeOffset="34383.21">1877 7797 47 0,'-10'3'651'0,"10"-3"-173"0,0 0-101 0,0 0-62 16,-13 7-36-16,13-7-35 0,-10 8 7 0,2 4 16 16,-1 0 1-16,-1 3-6 0,-2 3-18 0,-3 5-17 15,-1 3-16-15,-1 2-12 0,3 1 7 16,-1 1-8-16,-1 2 9 0,1-1-33 0,3 0-17 16,-1 1-21-16,3-2-25 0,2-5-18 0,1-1 0 15,3-3-4-15,2 0-13 0,0-1-12 0,4-1 12 16,2-2-25-16,1-1 12 0,3-2-24 15,2-5 8-15,1 3-22 0,1-5-70 0,4-3-178 16,-1-1-127-16,1-3-1 0,3-1-102 0,2-3-30 16,-3-3-76-16,1-1-634 0,2-3-835 15</inkml:trace>
   <inkml:trace contextRef="#ctx0" brushRef="#br1" timeOffset="34751.87">2073 8019 747 0,'-10'-11'562'16,"10"11"-112"-16,-8-10-57 0,8 10-59 0,-6-9-24 16,6 9-22-16,-7-9-28 0,7 9-39 0,-2-12-28 15,2 12-52-15,0-15-20 0,0 15-42 16,6-20 0-16,1 10-13 0,-1 0 23 0,2-1-4 15,-2 0 2-15,5 3-6 0,-3-1-11 0,0 3 1 16,0-1 4-16,-8 7-31 0,17-8-7 16,-17 8 6-16,0 0-13 0,17 1 43 0,-17-1 10 15,8 15 18-15,-8-15-2 0,4 26 21 0,-4-12-19 16,-2 6 10-16,-2-2 7 0,2 0 12 16,-5 1-38-16,3 1 4 0,0-2-24 0,0 0-15 15,0 0-9-15,0-1-9 0,0-2-10 0,2 0-4 16,0-1-8-16,-1-1-6 0,3-13-24 15,3 23-147-15,-3-23-169 0,4 19-73 0,-4-19-7 16,8 15-70-16,-8-15-48 0,8 11-59 0,-8-11-509 16,8 6-743-16</inkml:trace>
-  <inkml:trace contextRef="#ctx0" brushRef="#br1" timeOffset="34915.22">2284 8211 892 0,'0'0'708'0,"0"0"-107"16,0 0-74-16,0 0-6 0,8-4-7 0,-8 4-37 15,0 0-53-15,0 0-62 0,0 0-87 0,0 0-31 16,-12 2-53-16,12-2 40 0,-8 5-79 0,8-5 3 16,-15 10-63-16,15-10 10 0,-16 13-73 0,7-7-108 15,1 3-182-15,0-2-181 0,0 1 28 16,-3 0-66-16,3-1-62 0,0-1-140 0,0 0-455 16,-1 1-783-16</inkml:trace>
+  <inkml:trace contextRef="#ctx0" brushRef="#br1" timeOffset="34915.21">2284 8211 892 0,'0'0'708'0,"0"0"-107"16,0 0-74-16,0 0-6 0,8-4-7 0,-8 4-37 15,0 0-53-15,0 0-62 0,0 0-87 0,0 0-31 16,-12 2-53-16,12-2 40 0,-8 5-79 0,8-5 3 16,-15 10-63-16,15-10 10 0,-16 13-73 0,7-7-108 15,1 3-182-15,0-2-181 0,0 1 28 16,-3 0-66-16,3-1-62 0,0-1-140 0,0 0-455 16,-1 1-783-16</inkml:trace>
   <inkml:trace contextRef="#ctx0" brushRef="#br1" timeOffset="35299.97">2290 7956 92 0,'5'-15'791'0,"-1"2"-175"0,0 1-153 0,-4 12-93 16,6-18-95-16,-6 18-32 0,4-14-56 15,-4 14 18-15,0 0-14 0,0 0 5 0,0 0-50 16,0 0-7-16,4 9-45 0,-4-9-6 0,4 15-31 15,-4-15 3-15,9 16-24 0,-9-16 18 0,10 19-29 16,-4-11 11-16,-6-8-18 0,15 15 12 0,-5-8-18 16,0-3 15-16,1 0-16 0,-1 0 19 15,-10-4 18-15,21 4 38 0,-21-4 29 0,16 2 53 16,-16-2 9-16,17-3 23 0,-17 3-2 16,14-7 5-16,-14 7 71 0,11-11 0 0,-11 11-21 15,10-12-16-15,-10 12 1 0,6-15-14 0,-6 15-22 16,6-14 17-16,-6 14-36 0,4-10-2 0,-4 10-47 15,0 0-49-15,2-11-85 0,-2 11 0 16,0 0 0-16,0 0 0 0,0 0 0 0,0 0 0 16,0 0 0-16,0 0 0 0,0 0 0 0,5 20 0 15,-5-20 0-15,-2 28-273 0,-1-14-209 0,3 4-172 16,-2-2-99-16,2 3 60 0,2 0 88 16,1-1-36-16,-1 2-90 0,2 0-325 0,2-1-707 15</inkml:trace>
   <inkml:trace contextRef="#ctx0" brushRef="#br1" timeOffset="35485.39">2631 8234 296 0,'0'0'548'0,"17"0"-39"16,-17 0-32-16,0 0-10 0,14-6-6 0,-14 6 17 16,11-6 7-16,-11 6-5 0,0 0-29 15,10-9-42-15,-10 9-29 0,0 0-4 0,0 0 26 0,8-6-55 16,-8 6-59-16,0 0-45 0,0 0-61 16,0 0-16-16,0 0-27 0,0 0-17 0,-6 21-22 15,0-10-19-15,0 2-16 0,-2 1-23 0,-1-1-133 16,1 2-147-16,-2-1-187 0,1 1-181 15,-1-3-142-15,2 3 69 0,0-3-33 0,-1-1-712 16,3 1-1107-16</inkml:trace>
   <inkml:trace contextRef="#ctx0" brushRef="#br1" timeOffset="35784.87">2935 7985 834 0,'4'-21'818'0,"1"4"-146"0,-1 1-112 16,-2 1-38-16,-2 1-32 0,0 14-59 16,2-20-37-16,-2 20-53 0,0 0-54 0,0-15-48 15,0 15 21-15,0 0-9 0,-10 11-31 0,5 0-23 16,-1-1-23-16,2 5-4 0,0 0-4 0,0 0 2 16,0 2-18-16,2-1-12 0,0 0-30 15,-1 1-3-15,6-1-30 0,-1-1 19 0,0 1-26 16,4-2 15-16,0-2-9 0,2 0-3 15,3-3-40-15,-3 0-31 0,0-3 0 0,-8-6 0 16,19 6 0-16,-19-6 0 0,14 0 0 0,-14 0 0 16,11-6 0-16,-11 6 0 0,0 0-219 0,2-17-190 15,-2 17-137-15,-13-15-121 0,13 15-67 0,-16-8 130 16,5 3-83-16,11 5-685 0,-22 1-1041 16</inkml:trace>
@@ -1942,10 +1943,10 @@
   <inkml:trace contextRef="#ctx0" brushRef="#br1" timeOffset="64287.94">6263 4904 178 0,'0'0'716'0,"0"-15"-146"0,0 15-104 0,2-15-52 16,-2 15-59-16,9-20-14 0,-3 7-26 15,4 2-25-15,3-1-32 0,3-3-48 0,3 2-40 16,-1-1-35-16,3 0-24 0,2 5-26 0,-3-4-14 16,1 3-13-16,2 0-15 0,0 2-40 15,-1-1-39-15,3 3-41 0,-6-1-46 0,-3 3-10 16,1 0-35-16,-1 1-4 0,1-1-33 0,-3 3-2 15,-1 0-10-15,-13 1 8 0,23-2-3 16,-23 2-17-16,20-1 17 0,-20 1 0 0,17-2 6 16,-17 2 13-16,14 0 20 0,-14 0 31 0,17 0 30 15,-17 0 33-15,8-2 28 0,-8 2 43 0,0 0 28 16,19-6 22-16,-19 6 14 0,0 0 25 0,8-2 2 16,-8 2 2-16,0 0-5 0,0 0 10 15,10-5-4-15,-10 5-5 0,0 0-10 0,0 0-15 16,0 0 1-16,0 0-21 0,0 0 15 15,0 0-20-15,8-5 5 0,-8 5-14 0,0 0 7 16,0 0-12-16,0 0 9 0,0 0-10 0,0 0 13 16,0 0-8-16,0 0 18 0,0 0-12 15,0 0 21-15,0 0-15 0,0 0 28 0,-12-3-9 16,12 3 22-16,0 0-11 0,0 0 15 0,0 0-19 16,0 0 21-16,0 0-20 0,0 0 16 0,0 0-19 15,0 0 9-15,0 0-20 0,0 0 12 0,0 0-24 16,0 0 14-16,0 0-21 0,-10-1 12 15,10 1-27-15,0 0 22 0,0 0-17 0,0 0 14 16,0 0-19-16,0 0 18 0,0 0-22 0,0 0 18 16,-17 1-20-16,17-1 19 0,0 0-18 15,-14 4 21-15,14-4-18 0,-11 4 17 0,11-4-22 16,-16 7 17-16,16-7-22 0,-15 8 20 16,15-8-27-16,-12 11 26 0,12-11-30 0,-17 14 27 15,17-14-19-15,-10 15 14 0,10-15-17 0,-10 15 16 16,10-15 1-16,-6 17 0 0,6-17-2 15,0 13-3-15,0-13-11 0,2 11-20 0,-2-11-11 0,14 9-9 16,-14-9-16-16,10 4 16 0,-10-4-10 0,17-1 26 16,-17 1-9-16,19-6 20 0,-7-2-8 15,-6 3 20-15,2-5-15 0,5 3 23 0,-7-5-5 16,2 4 42-16,1-2-4 0,-5 1 45 16,4 1 6-16,-8 8 36 0,10-15-12 0,-10 15-10 15,9-11-25-15,-9 11-18 0,0 0-15 0,0 0 17 16,0 0 33-16,0 0 31 0,0 0 10 0,-13 23 8 15,7-9-2-15,-6 2-8 0,-1 6-12 0,-1 3-24 16,-9 8-2-16,-4 1-27 0,4 2-1 16,-3 0 23-16,-1 1-45 0,0 0 23 0,4 0-39 15,-4-3 22-15,2 0-69 0,3-1-29 0,1-7-63 16,4-2-22-16,3-6 53 0,2-3 25 16,1-3 10-16,3-6 7 0,8-6-6 0,-17 4 3 15,17-4 3-15,-6-9 2 0,6 9 9 0,4-23-8 16,3 10-2-16,1-4-4 0,6 0-5 15,3-5 5-15,6-3-12 0,-1 3-8 0,9-3-6 16,0-1-7-16,2 1 4 0,3 1-1 0,-3-1 17 16,0 3 8-16,0 0 4 0,-6 2 11 15,-1 0-5-15,-3 1 25 0,0 0-15 0,-7 3 20 16,3 1-10-16,-4 0 17 0,-3 3-10 0,-2 0 26 16,-1 0-7-16,3 1 22 0,-8 3-6 0,0-2 11 15,-4 10-6-15,11-16-7 0,-11 16-3 0,0 0-9 16,-5-15 2-16,5 15 0 0,-8-7-5 15,8 7 1-15,0 0 7 0,-14-4-7 0,14 4-6 16,-17 4 0-16,17-4-2 0,-16 10 4 16,7-3-3-16,1 0 3 0,0 3-8 0,2 1 7 15,-1-1-3-15,5 2 8 0,-2 0-11 0,0 0 2 16,4-12 2-16,0 21-4 0,0-21 4 0,4 19-2 16,-4-19 4-16,4 15-2 0,-4-15 7 15,13 9-1-15,-13-9 5 0,14 3-14 0,-14-3 8 16,19-1-6-16,-19 1 9 0,18-6-4 15,-18 6-7-15,21-8 8 0,-11 5 0 0,-1-1-4 16,1-1-3-16,-10 5 2 0,19-8 2 0,-19 8-7 16,16-7-2-16,-16 7-2 0,11-3 3 0,-11 3-1 15,0 0 3-15,12-2-6 0,-12 2 5 0,0 0 2 16,0 0 10-16,12 2 4 0,-12-2 4 16,0 0 10-16,0 0 0 0,11 8 2 0,-11-8 2 15,0 0-7-15,0 0-4 0,8 11-3 16,-8-11-2-16,0 0-2 0,0 0-2 0,8 11 1 0,-8-11-9 15,0 0-18-15,0 0-14 0,0 0 1 0,6 8-2 16,-6-8-4-16,0 0-14 0,17-8 6 16,-11 1 19-16,4 1-9 0,1-1 6 0,-1 0 5 15,3 0-4-15,-5-1 5 0,2 4 4 16,-2-2 7-16,-8 6-2 0,19-8-3 0,-19 8 5 16,17-5 1-16,-17 5 0 0,14-2 0 0,-14 2-1 15,0 0 3-15,15 0 4 0,-15 0 5 16,0 0 15-16,16 3 25 0,-16-3 32 0,0 0 33 15,19 0 36-15,-19 0 33 0,0 0 27 0,18 0 19 16,-18 0-28-16,17-8 89 0,-7 1-42 16,-2 2 14-16,3-5-25 0,1 0-10 0,-4-3-47 15,1 1-25-15,5-7-28 0,-4 1-16 0,3-2-20 16,-3-2-21-16,1 3 2 0,-1 1-18 0,-2 3 49 16,2 2-10-16,-1 0 16 0,-5 2-34 0,2 1-7 15,-2 0-34-15,-4 10-24 0,8-13-4 16,-8 13 0-16,0 0 0 0,0 0 0 0,0 0 0 15,7 13 0-15,-7-13 0 0,-2 23 0 0,-3-11 0 16,1 3 0-16,-4 0 0 0,2-1 0 16,-2 1 0-16,-1 3-274 0,-1-2-141 0,2 3-174 15,-7-3-139-15,3 2-10 0,-5-3 94 0,3 0-82 16,-1-3-570-16,3 0-945 0</inkml:trace>
   <inkml:trace contextRef="#ctx0" brushRef="#br1" timeOffset="64417">7216 4730 674 0,'0'0'705'16,"7"-14"-108"-16,-7 14-104 0,12-19-66 0,-2 8-46 16,7 0-52-16,-3-4-51 0,7 3-59 0,4-4-47 15,2 2-40-15,2 0-21 0,-1 1-71 0,3-1-134 16,-4 3-142-16,0 4-117 0,0-1-204 16,-4 1-485-16,0 1-694 0</inkml:trace>
   <inkml:trace contextRef="#ctx0" brushRef="#br1" timeOffset="66914.64">680 9370 258 0,'0'0'698'0,"0"0"-175"0,0 0-109 16,-10 5-80-16,10-5-59 0,0 0-37 0,0 0-34 16,0 0-29-16,0 0-32 0,0 0-25 15,0 0-21-15,0 0 3 0,0 0 30 0,0 0-3 16,0 0 71-16,20-3-52 0,-5-2 42 0,-1 2-64 16,1-3 28-16,-1 0-60 0,3-1 43 15,-5 1-27-15,3-1 36 0,-1 0 5 0,-3 0 31 16,1-1 9-16,-2 0 70 0,-1-2 7 0,-1-2-38 15,-2 3-17-15,-2-4-39 0,0 0-7 0,-2-1-35 16,-2 14 0-16,-2-26-6 0,0 15 2 0,-2-2 15 16,0 2-51-16,0 2-24 0,-2 0-3 15,-1 1-27-15,-1 1 0 0,-2 4-25 0,10 3 0 16,-23-5-12-16,9 10 32 0,-1-2-44 16,1 3 20-16,-3 4-18 0,1 1 17 0,-3 3-14 15,2 2 5-15,3-1-18 0,-1 4 51 0,3 0-12 16,2-1-42-16,1 4-6 0,5-3 3 15,0 0 55-15,2 0-12 0,4-1-46 0,2 0 8 16,3-2-1-16,1-1 42 0,2 0-17 0,3-3-62 16,-1-2-14-16,4 0-15 0,-1-2 0 15,1-2 9-15,3-2 13 0,-4-1 15 0,1-2 11 0,1-1 13 16,-3-1 1-16,1-2 10 0,-1-1 4 16,1-1 3-16,-5-4 6 0,2 0 0 0,1-1 1 15,-3 1 3-15,0-3 9 0,1 1-9 0,-1-2-6 16,-2 1 1-16,1 0 4 0,-1-1-1 15,-2 1 2-15,2 2-2 0,1 0 6 0,-3 0-6 16,0 2-1-16,-6 8-6 0,10-15-7 0,-10 15-2 16,9-7-2-16,-9 7-3 0,0 0 4 15,0 0 5-15,0 0 9 0,0 0 8 0,12 7 7 16,-12-7 0-16,0 18 7 0,0-18 3 0,-2 25 11 16,0-11-8-16,-2 0 16 0,2 0-19 0,-3 1-5 15,1-2 2-15,0 0-4 0,2 0 0 0,-2-2-1 16,2 1-1-16,2-12-18 0,-6 18 28 15,6-18-2-15,-2 12 1 0,2-12-4 0,0 0 15 16,0 0-22-16,0 0-12 0,0 0 10 16,0 0-9-16,0 0 25 0,10-15-23 0,-4 5-5 15,-2-3 1-15,5 1 8 0,-3-3 13 0,2 3-19 16,0-3-15-16,3 1 15 0,-3 0-11 16,2 0 9-16,-1 1-6 0,1 0 9 0,0 1-10 15,-4 3 9-15,3 0-8 0,-3 0 13 0,-6 9-11 16,10-12 7-16,-10 12-7 0,9-5 25 0,-9 5 36 15,0 0 44-15,0 0-9 0,6 8 12 0,-6-8-32 16,0 16 14-16,0-16-31 0,-4 25 0 16,2-12-15-16,-1-1-78 0,-3 3-151 0,4 0-178 15,-2-1-217-15,0 1-243 0,2 0 2 0,-4-1 64 16,4-2-628-16,2-12-1070 0</inkml:trace>
-  <inkml:trace contextRef="#ctx0" brushRef="#br1" timeOffset="67244.46">1273 9224 420 0,'2'-13'867'0,"-2"13"-169"0,2-21-120 15,-2 21-59-15,3-13-73 0,-3 13-35 16,0 0-94-16,2-13-48 0,-2 13-24 0,0 0 35 16,0 0 1-16,0 0-19 0,-2 21 45 0,2-21 12 15,-3 27-1-15,1-11-10 0,0 1-3 16,0 0-25-16,2 1-21 0,-2-1-27 0,0 1-29 15,2-3-136-15,-2 0-67 0,2 0 0 0,0-15 0 16,2 24 0-16,-2-24 0 0,2 17 0 16,-2-17 0-16,4 11 0 0,-4-11 0 0,0 0 0 15,17-3 0-15,-7-5 0 0,1-1 0 0,1-4 0 16,0-4 0-16,3-3 0 0,-3-1 0 0,5-5 0 16,-3 1 0-16,1-2 0 0,-3 3 0 0,1 3 0 15,-3-2 0-15,0 3 0 0,-2 2 0 16,-1 3 0-16,-1 2 0 0,0 0 0 0,-2 4 0 15,-4 9-696-15,6-17-306 0,-6 17 37 0,0 0 259 16,0 0-64-16,0 0-518 0,-16 7-936 16</inkml:trace>
+  <inkml:trace contextRef="#ctx0" brushRef="#br1" timeOffset="67244.45">1273 9224 420 0,'2'-13'867'0,"-2"13"-169"0,2-21-120 15,-2 21-59-15,3-13-73 0,-3 13-35 16,0 0-94-16,2-13-48 0,-2 13-24 0,0 0 35 16,0 0 1-16,0 0-19 0,-2 21 45 0,2-21 12 15,-3 27-1-15,1-11-10 0,0 1-3 16,0 0-25-16,2 1-21 0,-2-1-27 0,0 1-29 15,2-3-136-15,-2 0-67 0,2 0 0 0,0-15 0 16,2 24 0-16,-2-24 0 0,2 17 0 16,-2-17 0-16,4 11 0 0,-4-11 0 0,0 0 0 15,17-3 0-15,-7-5 0 0,1-1 0 0,1-4 0 16,0-4 0-16,3-3 0 0,-3-1 0 0,5-5 0 16,-3 1 0-16,1-2 0 0,-3 3 0 0,1 3 0 15,-3-2 0-15,0 3 0 0,-2 2 0 16,-1 3 0-16,-1 2 0 0,0 0 0 0,-2 4 0 15,-4 9-696-15,6-17-306 0,-6 17 37 0,0 0 259 16,0 0-64-16,0 0-518 0,-16 7-936 16</inkml:trace>
   <inkml:trace contextRef="#ctx0" brushRef="#br1" timeOffset="67546.25">304 10037 544 0,'-21'4'988'0,"3"-1"-235"0,1 2-113 16,1-2-129-16,16-3-40 0,-21 2-70 0,21-2 4 15,0 0-18-15,-8-7 18 0,14-3 62 16,8 2 49-16,7-4-35 0,10-3-32 0,14-7-38 16,24-8-49-16,7 0-362 0,7-3 0 0,6 3 0 15,6-1 0-15,4-2 0 0,0 3 0 0,2-2 0 16,-1 2 0-16,-3 1 0 0,-6 3 0 0,-6 3 0 15,-9 2 0-15,-18 4 0 0,-13 7 0 16,-9 0 0-16,-10 3 0 0,-1 1 0 0,-6 1 0 16,-3 2 0-16,-16 3 0 0,15 1-266 0,-15-1-618 15,-8 10-60-15,-7 3 168 0,-10 1 107 16,-12 9 65-16,-6 1-6 0,-28 14-473 16,-3-1-732-16</inkml:trace>
   <inkml:trace contextRef="#ctx0" brushRef="#br1" timeOffset="67764.87">434 10186 313 0,'-68'26'640'15,"12"-5"-108"-15,13-3 5 0,3-3-76 0,9-4 64 16,7-3-44-16,3 0-37 0,4-2-53 0,1-2-42 16,5 0-25-16,11-4 15 0,0 0 63 15,9-8 150-15,13-1 6 0,16-9-33 0,7-2-34 16,28-12-164-16,5-3-327 0,7-1 0 0,4 0 0 16,2 2 0-16,4-2 0 0,0 3 0 15,-4 0 0-15,0 3 0 0,-2 0 0 0,-7 3 0 16,-5 4 0-16,-15 5 0 0,-15 3 0 15,-1 3 0-15,-11 1 0 0,-4 0 0 0,-4 4 0 16,-4 2-872-16,-5 0-85 0,-3 2 11 0,-3 1 249 16,-12 2-92-16,15 0-461 0,-15 0-890 0</inkml:trace>
-  <inkml:trace contextRef="#ctx0" brushRef="#br1" timeOffset="102542.91">10848 5690 139 0,'0'0'415'0,"4"-6"-125"0,-4 6-11 16,0 0-61-16,9-7-20 0,-9 7-12 0,0 0-26 15,0 0 8-15,8-8-28 0,-8 8-3 0,0 0-23 16,8-11 8-16,-8 11-13 0,0 0 18 16,6-11-24-16,-6 11 27 0,0 0-30 0,5-12 9 15,-5 12-22-15,0 0 3 0,-5-17-31 0,5 17 3 16,-10-15-18-16,2 6 21 0,-5 1-9 0,3 0 21 15,-2-2-13-15,-3 0 24 0,-1 1-3 16,-3-3 3-16,0 1 3 0,3 1 5 0,-7-2-7 16,5 2-6-16,-1 0-10 0,-4 2-11 0,3 0-9 15,1 2-1-15,-4 2-4 0,5-1-6 16,-5 3-5-16,2 2 0 0,-2 2-6 0,-3 4 12 16,-3 3 8-16,-7 4 3 0,1 5 10 15,-2 7 2-15,-2 2-2 0,4 4-6 0,2 4 10 16,2 5 1-16,0 2 14 0,8 1-22 0,0 3 11 15,5-1-8-15,1 2 30 0,7-2 11 0,10-3 3 16,0-1 22-16,10-1 11 0,2 3-7 0,11-3 30 16,4-3-35-16,4-5 28 0,6-2-28 0,3-5 55 15,5-5 13-15,5-5 12 0,-1-3-3 16,5-4-24-16,4-5-26 0,0-6-110 0,2-3-46 16,-2-6 0-16,18-10 0 0,-6-6 0 15,-10-6 0-15,-10 2 0 0,-15-2 0 0,-4-6 0 16,-4-5 0-16,-9-2 0 0,-5-1 0 0,-7-4 0 15,-6 11 0-15,-8-12 0 0,-11 4 0 16,-12-18 0-16,-6 2 0 0,-4 8 0 0,-7 3 0 16,-1 4 0-16,-5 7 0 0,-2 2 0 0,4 13 0 15,11 7 0-15,-5 3-406 0,1 7-273 16,-7 6-114-16,11 5-22 0,-13 8 161 0,5 5-87 0,-24 15-562 16,7 3-957-16</inkml:trace>
+  <inkml:trace contextRef="#ctx0" brushRef="#br1" timeOffset="102542.9">10848 5690 139 0,'0'0'415'0,"4"-6"-125"0,-4 6-11 16,0 0-61-16,9-7-20 0,-9 7-12 0,0 0-26 15,0 0 8-15,8-8-28 0,-8 8-3 0,0 0-23 16,8-11 8-16,-8 11-13 0,0 0 18 16,6-11-24-16,-6 11 27 0,0 0-30 0,5-12 9 15,-5 12-22-15,0 0 3 0,-5-17-31 0,5 17 3 16,-10-15-18-16,2 6 21 0,-5 1-9 0,3 0 21 15,-2-2-13-15,-3 0 24 0,-1 1-3 16,-3-3 3-16,0 1 3 0,3 1 5 0,-7-2-7 16,5 2-6-16,-1 0-10 0,-4 2-11 0,3 0-9 15,1 2-1-15,-4 2-4 0,5-1-6 16,-5 3-5-16,2 2 0 0,-2 2-6 0,-3 4 12 16,-3 3 8-16,-7 4 3 0,1 5 10 15,-2 7 2-15,-2 2-2 0,4 4-6 0,2 4 10 16,2 5 1-16,0 2 14 0,8 1-22 0,0 3 11 15,5-1-8-15,1 2 30 0,7-2 11 0,10-3 3 16,0-1 22-16,10-1 11 0,2 3-7 0,11-3 30 16,4-3-35-16,4-5 28 0,6-2-28 0,3-5 55 15,5-5 13-15,5-5 12 0,-1-3-3 16,5-4-24-16,4-5-26 0,0-6-110 0,2-3-46 16,-2-6 0-16,18-10 0 0,-6-6 0 15,-10-6 0-15,-10 2 0 0,-15-2 0 0,-4-6 0 16,-4-5 0-16,-9-2 0 0,-5-1 0 0,-7-4 0 15,-6 11 0-15,-8-12 0 0,-11 4 0 16,-12-18 0-16,-6 2 0 0,-4 8 0 0,-7 3 0 16,-1 4 0-16,-5 7 0 0,-2 2 0 0,4 13 0 15,11 7 0-15,-5 3-406 0,1 7-273 16,-7 6-114-16,11 5-22 0,-13 8 161 0,5 5-87 0,-24 15-562 16,7 3-957-16</inkml:trace>
   <inkml:trace contextRef="#ctx0" brushRef="#br0" timeOffset="111894.17">3797 4904 24 0,'0'0'450'16,"0"0"-135"-16,0 0-24 0,0 0-47 0,0 0-26 15,0 0 1-15,0 0-20 0,0 0-15 0,11-5-39 16,-11 5 8-16,0 0-22 0,0 0 12 0,0 0-14 16,0 0 16-16,0 0-4 0,0 0 23 15,0 0-27-15,0 0 6 0,0 0-36 0,0 0 3 16,-4-15-38-16,4 15 7 0,0 0-21 15,-11-10 9-15,11 10-7 0,-14-7 13 0,14 7-12 16,-15-5 13-16,15 5-8 0,-16-7 15 0,16 7-3 16,-17-6-3-16,17 6-6 0,-21-4-8 15,21 4 2-15,-20-4-18 0,20 4 10 0,-23 0-13 16,23 0 9-16,-25-1-11 0,25 1 5 0,-22 1-15 16,22-1 5-16,-23 4-15 0,23-4 7 0,-23 4-21 15,23-4 15-15,-23 6-16 0,13-3-1 0,-2 2-1 16,1-1-1-16,1 3 1 0,-2 1-3 15,1-1 2-15,1 3 2 0,-3 0 4 0,3 0-10 16,-2 2 27-16,-1 0-3 0,3 2 7 0,-2-2 4 16,-3 3 5-16,3 2-2 0,-3-1-3 15,3 0 1-15,-1 1-3 0,1 0-2 0,0 1-3 16,1 2-4-16,1 0-1 0,0-1 13 0,-1 0-16 16,5 2 20-16,-2-1-27 0,4-1 9 15,0 2-5-15,-1-2 20 0,1 3-24 0,2-1 18 16,2-1-24-16,0 2 22 0,0-2-21 15,0-1 22-15,2 1-16 0,0 0 12 0,2-2 3 0,1-1 1 16,1 1-1-16,0-2 22 0,2-1 6 16,3 0 3-16,-1-1-5 0,2-1 1 0,1-2 3 15,1 0-1-15,1-1 4 0,-1-1 8 0,3-2 7 16,-1-3 5-16,3 2 14 0,-3-2 8 16,3-2 3-16,0-1-12 0,-3-1 16 0,3-1 6 15,-1-1-1-15,-1-1 10 0,1-4-1 0,-1 2 12 16,2-2-45-16,-1-3 12 0,1-2-24 0,-3 0 15 15,1-3-93-15,-1-1 0 0,1-1 0 16,-3-3 0-16,-1-1 0 0,1 0 0 0,-3-3 0 16,-1 1 0-16,0 1 0 0,-1-2 0 15,-1-2 0-15,-2 3 0 0,-2-1 0 0,0 3 0 0,-4-1 0 16,2 1 0-16,-2-1 0 0,-2 0 0 16,0 1 0-16,0 0 0 0,0 0 0 0,-2 2 0 15,-2 1 0-15,2 2 0 0,-1 0 0 0,1 1 0 16,-2 1 0-16,2 1 0 0,0 0 0 15,0 3 0-15,-2 1 0 0,6 9 0 0,-9-16 0 16,9 16 0-16,-10-11 0 0,10 11-454 0,0 0-224 16,-15-3-75-16,15 3-5 0,-10 9 169 15,10-9-35-15,-8 16-56 0,8-16-477 0,-4 20-801 16</inkml:trace>
   <inkml:trace contextRef="#ctx0" brushRef="#br0" timeOffset="112346.98">3396 5107 86 0,'0'0'551'0,"-6"-11"-132"0,6 11-43 0,-6-9-68 15,6 9-14-15,0 0-31 0,-6-12-14 0,6 12-16 16,0 0-18-16,-7-12-33 0,7 12-36 0,0 0-33 16,0 0-24-16,0 0-21 0,0 0-6 15,0 0 73-15,0 0 30 0,15 15 12 0,-5-3 17 16,5 6 19-16,-3 1-13 0,7 7 16 0,-1 0-19 15,5 9 13-15,-2-1-15 0,2 1 2 16,-3 0 15-16,3-3-30 0,-4-2-20 0,-3-3-24 16,3 0-16-16,-1-2-18 0,1-1-22 15,-5-3-35-15,3-2 21 0,-5-1-40 0,3-3 22 16,-3 0-34-16,-2-3 26 0,1 2-37 0,-1-3 28 16,-2-2-33-16,1 1 26 0,-3-2-28 0,-6-8-12 15,12 14-120-15,-12-14-76 0,11 11-122 16,-11-11-152-16,0 0 2 0,8 7 24 0,-8-7-45 15,0 0-58-15,0 0-70 0,0 0-392 0,0 0-673 16</inkml:trace>
   <inkml:trace contextRef="#ctx0" brushRef="#br0" timeOffset="112711.79">3830 5006 175 0,'2'-15'535'0,"1"3"-118"0,-1 1-62 0,-2 11-45 16,4-23-5-16,-4 23-37 0,4-19 8 0,-4 19-37 16,2-14-14-16,-2 14-58 0,0 0-15 15,2-15-49-15,-2 15-5 0,0 0-25 0,0 0 51 16,0 0 21-16,-17 9-5 0,9 0-16 0,-2 5 4 15,-5 5-2-15,-1 6 4 0,-3 4 0 16,-4 6-1-16,1 3 0 0,-3-1-28 16,2 4 8-16,-2-1-33 0,1 0-7 0,1 1-15 0,2-2 5 15,-2-2-26-15,3 2 7 0,1-3-16 16,3-6-7-16,1 2-4 0,1-2-1 0,-1-2-11 16,3 0-48-16,1-4-68 0,1-1-85 0,0-1-49 15,2-2-49-15,-1-2-60 0,3-1-65 0,0 0-118 16,0-5-522-16,2 1-714 0</inkml:trace>
@@ -1955,16 +1956,16 @@
   <inkml:trace contextRef="#ctx0" brushRef="#br0" timeOffset="160647.22">21796 7661 120 0,'0'0'294'0,"12"-3"-98"0,-12 3-4 15,0 0-55-15,0 0 12 0,0 0-50 0,6-9 12 16,-6 9-34-16,0 0 18 0,0 0-51 16,0 0 15-16,0 0-41 0,0 0-4 0,0 0-73 15,0 0-11-15,0 0-65 0,0 0-287 0,0 0 43 16</inkml:trace>
   <inkml:trace contextRef="#ctx0" brushRef="#br0" timeOffset="162673.06">2679 5336 430 0,'0'0'391'0,"2"-14"-69"0,-2 14-54 0,0 0-13 15,4-15-35-15,-4 15 11 0,2-14-49 16,-2 14 5-16,2-12-27 0,-2 12 12 0,2-13-14 16,-2 13 30-16,2-14-24 0,-2 14 18 0,0 0-5 15,-2-18-2-15,2 18-12 0,-4-13-7 0,4 13-10 16,-10-14 0-16,10 14 5 0,-15-11 1 16,15 11-3-16,-14-11-8 0,14 11-6 0,-19-9-10 15,19 9-12-15,-20-9-11 0,9 7-9 0,-1-2 15 16,0 2 16-16,-1 0-11 0,13 2-4 15,-25-2-4-15,25 2-9 0,-27 0-7 0,27 0 3 16,-24 0-7-16,9 3-2 0,3-2-34 0,-3 3 32 16,1 0-19-16,-1 2-6 0,1 1-10 0,2 0-12 15,-5 2 1-15,3 1-8 0,-1 3 3 0,1 2-4 16,-3 2-4-16,3 0 0 0,1 5-3 16,-1-1 2-16,3 3 3 0,-1-1-3 0,4 2 2 15,-1 0-3-15,1-1-6 0,2 0 3 0,2 1-5 16,2-2 3-16,2-1-28 0,0 1 25 0,0-1 10 15,4 2 0-15,0-1-14 0,2 0 2 16,0-1 9-16,3 1-4 0,-1-4 19 0,2 1 13 16,1-2 15-16,1-1 11 0,0-4 2 0,1 0 5 15,-1-1-10-15,3-1-6 0,-1-1 4 0,3-3-4 16,-3 1-8-16,3-2 3 0,-1-2-29 16,1 0-30-16,1-1 0 0,-1-2 0 0,-1-2 0 15,1-2 0-15,0 1 0 0,-1-2 0 0,1-2 0 16,-3-2 0-16,3 0 0 0,-3-2 0 15,-1-1 0-15,1-1 0 0,-2 1 0 0,-1-4 0 0,1-1 0 16,-2-3 0-16,3 0 0 0,-5-2 0 16,2 0 0-16,-3-1 0 0,1 0 0 0,-2-3 0 15,0 2 0-15,1 0 0 0,-3 2 0 16,0 0 0-16,-2 0 0 0,2 2 0 0,-2 0 0 16,0 2 0-16,-2 0 0 0,0 0 0 0,0 0 0 15,-2 2 0-15,-2-1 0 0,2 2 0 16,-2-1 0-16,-2 2 0 0,-1-1 0 0,1 3 0 15,0 0 0-15,-4 0 0 0,1 1 0 0,1 1 0 16,-2 1 0-16,-1 0 0 0,1 1 0 16,0 0 0-16,1 4 0 0,9 3 0 0,-18-9-181 15,18 9-521-15,-17-3-3 0,17 3 5 0,-12 3 145 16,12-3 102-16,-15 6-1 0,15-6 14 0,-12 11-28 16,12-11-43-16,-12 13-431 0,12-13-598 0</inkml:trace>
   <inkml:trace contextRef="#ctx0" brushRef="#br0" timeOffset="163023.1">2361 5204 432 0,'0'0'462'0,"-11"-11"-100"15,11 11-52-15,-10-6-54 0,10 6-3 16,0 0-56-16,-8-9-3 0,8 9-41 0,0 0 3 16,0 0-37-16,-9-6 21 0,9 6-3 0,0 0 39 15,0 0 8-15,5 17 48 0,-1-7-11 16,0 3-22-16,2 3 2 0,2 0-4 0,1 5-4 16,-1 2-32-16,2 0 2 0,1 2-36 0,-1-1 0 15,2 5-34-15,-1-4-19 0,1-1-13 0,-2 0-13 16,3-2-9-16,-3 3 5 0,0-2 0 0,3-2-10 15,-3-1-11-15,0 0-80 0,-1-4-81 16,-1-1-56-16,0-1-61 0,-2-2-48 0,3 0-45 16,-3-1-26-16,0 0-42 0,-6-11-23 0,10 15-83 15,-10-15-344-15,9 6-494 0</inkml:trace>
-  <inkml:trace contextRef="#ctx0" brushRef="#br0" timeOffset="163358.85">2683 5390 163 0,'0'-15'676'0,"0"15"-119"0,0-23-100 15,0 23-26-15,0-23-52 0,0 23 6 0,0-19-16 16,0 19-2-16,-2-14-23 0,2 14-29 0,0 0-37 16,0-18-42-16,0 18-42 0,0 0-27 15,0 0-29-15,-4-12-2 0,4 12 48 0,0 0 74 16,-12 14 33-16,3-3 29 0,-3 2 15 0,-1 6-35 15,-3 2 11-15,-1 5-31 0,-3-1 10 0,-3 8-260 16,0-2-30-16,0 2 0 0,1 1 0 16,-1-2 0-16,0 0 0 0,1 2 0 0,-1-3 0 15,4-2 0-15,1-3 0 0,1 1 0 0,1-2 0 16,-1-2 0-16,3-4 0 0,1 1 0 0,1-2 0 16,1-2 0-16,3-2 0 0,0 0 0 15,0-5 0-15,1 2 0 0,1 1 0 0,0-5 0 16,6-7 0-16,-8 14 0 0,8-14 0 0,-9 11 0 15,9-11-143-15,0 0-734 0,0 0-87 0,0 0 86 16,0 0 74-16,0 0-630 0,0 0-1117 0</inkml:trace>
+  <inkml:trace contextRef="#ctx0" brushRef="#br0" timeOffset="163358.84">2683 5390 163 0,'0'-15'676'0,"0"15"-119"0,0-23-100 15,0 23-26-15,0-23-52 0,0 23 6 0,0-19-16 16,0 19-2-16,-2-14-23 0,2 14-29 0,0 0-37 16,0-18-42-16,0 18-42 0,0 0-27 15,0 0-29-15,-4-12-2 0,4 12 48 0,0 0 74 16,-12 14 33-16,3-3 29 0,-3 2 15 0,-1 6-35 15,-3 2 11-15,-1 5-31 0,-3-1 10 0,-3 8-260 16,0-2-30-16,0 2 0 0,1 1 0 16,-1-2 0-16,0 0 0 0,1 2 0 0,-1-3 0 15,4-2 0-15,1-3 0 0,1 1 0 0,1-2 0 16,-1-2 0-16,3-4 0 0,1 1 0 0,1-2 0 16,1-2 0-16,3-2 0 0,0 0 0 15,0-5 0-15,1 2 0 0,1 1 0 0,0-5 0 16,6-7 0-16,-8 14 0 0,8-14 0 0,-9 11 0 15,9-11-143-15,0 0-734 0,0 0-87 0,0 0 86 16,0 0 74-16,0 0-630 0,0 0-1117 0</inkml:trace>
   <inkml:trace contextRef="#ctx0" brushRef="#br0" timeOffset="168767.29">4233 7703 116 0,'0'0'566'15,"0"0"-140"-15,5-12-81 0,-5 12-47 16,0 0-33-16,0 0-28 0,2-13-12 0,-2 13-2 15,0 0-9-15,-4-13-9 0,4 13-28 0,0 0-2 16,-7-12-20-16,7 12 5 0,-8-14-4 16,8 14 6-16,-12-12 10 0,12 12-1 0,-15-13 2 15,5 7-4-15,0-1-5 0,-3 2-5 0,1-1-20 16,-1 0-11-16,-1 1-13 0,-3 1 1 0,3 0 20 16,-5 0 25-16,3 3-10 0,-1-1 0 15,-1 0-7-15,1 2-19 0,-2 0-2 0,3 0-15 16,-3 2-23-16,-1 1-13 0,1 0 6 0,0 2-32 15,-1 1 16-15,-3 1-31 0,2 2 18 16,-1 1-24-16,1-1 23 0,0 2-28 0,1 1 24 16,3 1-30-16,-2 0 18 0,1 2-20 0,1 0 11 15,1 3-23-15,-1 1 21 0,5 0-26 16,-3 3 24-16,1-2-16 0,4 4 15 0,-3 0-12 16,3 0 20-16,2 1-7 0,-1-1 30 0,1 3-2 15,2-2 1-15,0 1 12 0,1 0 2 16,3-4-8-16,0 1-4 0,2 1 7 0,0-1-19 15,2-1 24-15,5 5 14 0,-3-3 12 0,4 0-46 16,2-2-42-16,1 3 0 0,1-4 0 0,3 0 0 16,-1-2 0-16,3 0 0 0,-1 0 0 0,3-3 0 15,-1 0 0-15,3-2 0 0,0-1 0 16,1-1 0-16,1-1 0 0,2-2 0 0,0-3 0 16,2-1 0-16,-1-2 0 0,3-1 0 15,-4-2 0-15,2-3 0 0,2 0 0 0,0-3 0 16,-2-2 0-16,4-2 0 0,-2 0 0 0,0-4 0 15,-4 0 0-15,1-3 0 0,-3-1 0 0,0-1 0 16,-2-3 0-16,-1 0 0 0,-3-1 0 16,-1-1 0-16,-3-4 0 0,-1 1 0 0,-4 0 0 0,-1-2 0 15,-3-3 0-15,-2-1 0 0,-2 0 0 16,-4-6 0-16,-3 2 0 0,1 2 0 0,-2-1 0 16,-2 4 0-16,-3 0 0 0,3 2 0 15,-7 3 0-15,1 2 0 0,-3 1 0 0,-1 2 0 16,-3 1 0-16,2 4 0 0,0 4 0 0,1 1 0 15,1 2 0-15,3 2 0 0,-1 2 0 0,3 3 0 16,-1 2 0-16,15 1-373 0,-27 1-440 16,15 4 6-16,2 0 84 0,-1 3 161 0,1 2-4 15,2-1-51-15,-1 2-565 0,1 0-826 0</inkml:trace>
   <inkml:trace contextRef="#ctx0" brushRef="#br0" timeOffset="169067.76">3766 7710 751 0,'-8'-17'660'0,"8"17"-108"0,-4-13-119 16,4 13-75-16,0 0-49 0,-4-11-42 0,4 11-34 15,0 0-23-15,0 0 17 0,0 0 55 0,0 0 29 16,6 11 28-16,0 2-25 0,4 2-53 15,3 7 49-15,3 3 29 0,1 2-26 0,0-1-24 16,1 4-26-16,1-1-33 0,-1-1-46 0,3 5-33 16,-2-5-22-16,-1-1-18 0,1 1-48 15,-3-1-18-15,1 0 0 0,-1-2 12 0,-3-2-63 16,-3-4-130-16,3 1-187 0,-5-4-147 0,0-1-181 16,-2-2-95-16,3 1 157 0,-3-5-77 15,-6-9-132-15,8 10-357 0,-8-10-801 0</inkml:trace>
   <inkml:trace contextRef="#ctx0" brushRef="#br0" timeOffset="169351.77">4188 7699 561 0,'2'-21'758'16,"-2"4"-90"-16,2 1-136 0,-2 2-84 0,0 14-44 15,-2-22-22-15,2 22-14 0,-6-8 19 0,6 8-27 16,-15 3 17-16,3 8-36 0,0 1 91 0,-3 7 9 15,-6 8-40-15,-1 6-29 0,-1 4-49 0,-2 1-4 16,0 1-32-16,-2 1-257 0,3-1-30 16,-3 1 0-16,2-1 0 0,0 1 0 0,-2-1 0 15,3 2 0-15,-1-3 0 0,-2 0 0 0,0-1 0 16,2 1 0-16,0-2 0 0,1-1 0 16,-1 1 0-16,2-4 0 0,0 2 0 0,5-6 0 15,1-3 0-15,1 1 0 0,5-5 0 0,1-1 0 16,2-4-762-16,1-1-60 0,5 0-71 15,2-15 235-15,0 18-59 0,0-18-659 0,9 8-1047 16</inkml:trace>
-  <inkml:trace contextRef="#ctx0" brushRef="#br0" timeOffset="196906.85">9077 13343 3 0,'0'0'282'0,"0"0"-67"0,0 0-50 15,-9 4-5-15,9-4-23 0,0 0 22 0,0 0-47 16,0 0 38-16,0 0-59 0,-14 2 38 0,14-2-49 16,0 0 58-16,0 0-77 0,0 0 64 0,0 0-68 15,0 0 65-15,0 0-37 0,0 0 39 0,0 0-16 16,0 0 26-16,-8 5-2 0,8-5 13 0,0 0-4 15,0 0 7-15,0 0-8 0,0 0-3 16,0 0-2-16,0 0 3 0,0 0-2 0,0 0-3 16,0 0-1-16,0 0-1 0,0 0 0 0,0 0 5 15,0 0-13-15,0 0-7 0,0 0 2 16,0 0-12-16,0 0-6 0,0 0-11 0,0 0-16 16,0 0 6-16,0 0-3 0,0 0-12 0,0 0-2 15,0 0-4-15,0 0-15 0,0 0 34 16,0 0 7-16,0 0 4 0,0 0 4 0,0 0-11 0,0 0 2 15,0 0 7-15,0 0 6 0,0 0-9 16,0 0 0-16,0 0 1 0,0 0-6 0,0 0-6 16,0 0-7-16,0 0 0 0,0 0-10 0,0 0-1 15,0 0-4-15,0 0-15 0,0 0-15 0,4-14 0 16,-4 14-5-16,0 0 2 0,14-9 10 16,-14 9-12-16,17-12-13 0,-11 7 11 15,6 1-10-15,-3-4 3 0,1 1-1 0,2 1 4 0,-1-1-7 16,1 0-2-16,-1 0 5 0,5-1-9 0,-1 0-7 15,-3 0 14-15,2-1 2 0,3 1-6 16,2 1 9-16,-5-3-12 0,3 0 8 0,1 1-10 16,5 0 10-16,-4-3-5 0,1 3 11 0,-1-4 8 15,-1 3-8-15,5 1-8 0,-6-3 16 16,5 0-5-16,-3 3 9 0,0-3-14 0,-1 0 13 16,3 1-7-16,-3 2 3 0,5-1-9 0,-6-1 2 15,6 2-28-15,-5-1 29 0,-3 0-3 16,1 2 3-16,-1-2-13 0,1 3 11 0,3-3-17 15,-5 2 13-15,3-1-8 0,-3 1 5 0,1-1-10 16,1 0 11-16,3 0-11 0,-7 1 8 0,7 0 9 16,-1-4-4-16,-1 2-12 0,2-2 11 15,-5 3-10-15,3-1 4 0,1 2-5 0,-3-2 8 16,1 1-4-16,-1-1 7 0,1 2-5 0,-1 1 0 16,-1-3-1-16,-1 4 13 0,1-2-11 0,-2 0 13 15,3 0-6-15,-3 1 16 0,1 0 1 16,-3 0-1-16,2 0 1 0,3 0 2 0,-3-1-4 15,-1 2-5-15,1-1 6 0,3 0-6 0,-3 1-12 16,-2 0 10-16,3 0-9 0,-3-2 2 0,2 1-1 16,3 3-5-16,-7-3 6 0,5 0-2 0,-3-1 0 15,-2 4 0-15,2 0-8 0,-1-1 12 0,-9 5-17 16,18-9 18-16,-18 9-21 0,17-10 15 16,-17 10-14-16,14-6 12 0,-14 6-3 0,13-8 13 15,-13 8-20-15,10-6 8 0,-10 6-8 0,12-6 11 16,-12 6-15-16,15-6 18 0,-15 6-15 15,8-4 20-15,-8 4-21 0,13-8 8 0,-13 8-8 16,10-4 12-16,-10 4-18 0,12-7 22 0,-12 7-13 16,11-5 12-16,-11 5-16 0,0 0 17 0,12-7-14 15,-12 7 11-15,0 0-8 0,15-5 0 16,-15 5 0-16,0 0 0 0,12-7 0 0,-12 7 0 16,0 0-2-16,14-6-17 0,-14 6 19 0,0 0 8 15,9-4-13-15,-9 4 11 0,0 0-17 0,0 0 25 16,10-4-13-16,-10 4 7 0,0 0-15 15,0 0 14-15,0 0-12 0,0 0 8 0,12-4-1 16,-12 4-2-16,0 0 0 0,0 0 0 0,0 0 0 16,0 0 0-16,0 0 0 0,0 0 0 0,0 0 0 15,0 0 0-15,9-5 0 0,-9 5 0 0,0 0 0 16,0 0 0-16,0 0 0 0,0 0 0 0,0 0 0 16,0 0 0-16,0 0 0 0,0 0 0 15,0 0 0-15,-9-9 0 0,9 9 0 0,-8-8 0 16,8 8 0-16,-18-7 0 0,18 7 0 0,-19-8 0 15,11 4 0-15,-7 1 0 0,3 1 0 0,-3-2 0 16,-1 2 0-16,1 0 0 0,-1 0 0 16,1-1 0-16,1 3 0 0,-3-1 0 0,3 1 0 15,14 0 0-15,-27 0 0 0,27 0 0 0,-17 0 0 16,17 0 0-16,0 0 0 0,-18-4 0 0,18 4 0 16,0 0 0-16,0 0 0 0,0 0 0 15,0 0 0-15,0 0 0 0,0 0 0 0,16 8 0 16,-16-8 0-16,23 4 0 0,-8-1 0 0,3 0 0 15,-1 1 0-15,-3-3 0 0,5 3 0 0,-3 1 0 16,3-3 0-16,0 2 0 0,-3-2 0 0,-1 0 0 16,-3 1 0-16,2 2 0 0,-14-5 0 0,23 3 0 15,-23-3 0-15,17 6 0 0,-17-6 0 16,10 5 0-16,-10-5 0 0,4 8 0 0,-4-8 0 16,0 15 0-16,0-15 0 0,-8 19 0 0,6-8 0 15,-2 1 0-15,-5-2 0 0,5 1 0 0,-4 1 0 16,2-1 0-16,-2 1 0 0,3-1 0 0,-3 1 0 15,2-2 0-15,2 0 0 0,-4 2 0 16,3-4 0-16,1 0 0 0,4-8 0 0,-10 15-139 16,10-15-211-16,-8 14-153 0,8-14-136 0,0 0-60 15,-4 12 101-15,4-12 51 0,0 0-22 0,0 0-63 16,0 0-477-16,0 0-757 0</inkml:trace>
+  <inkml:trace contextRef="#ctx0" brushRef="#br0" timeOffset="196906.84">9077 13343 3 0,'0'0'282'0,"0"0"-67"0,0 0-50 15,-9 4-5-15,9-4-23 0,0 0 22 0,0 0-47 16,0 0 38-16,0 0-59 0,-14 2 38 0,14-2-49 16,0 0 58-16,0 0-77 0,0 0 64 0,0 0-68 15,0 0 65-15,0 0-37 0,0 0 39 0,0 0-16 16,0 0 26-16,-8 5-2 0,8-5 13 0,0 0-4 15,0 0 7-15,0 0-8 0,0 0-3 16,0 0-2-16,0 0 3 0,0 0-2 0,0 0-3 16,0 0-1-16,0 0-1 0,0 0 0 0,0 0 5 15,0 0-13-15,0 0-7 0,0 0 2 16,0 0-12-16,0 0-6 0,0 0-11 0,0 0-16 16,0 0 6-16,0 0-3 0,0 0-12 0,0 0-2 15,0 0-4-15,0 0-15 0,0 0 34 16,0 0 7-16,0 0 4 0,0 0 4 0,0 0-11 0,0 0 2 15,0 0 7-15,0 0 6 0,0 0-9 16,0 0 0-16,0 0 1 0,0 0-6 0,0 0-6 16,0 0-7-16,0 0 0 0,0 0-10 0,0 0-1 15,0 0-4-15,0 0-15 0,0 0-15 0,4-14 0 16,-4 14-5-16,0 0 2 0,14-9 10 16,-14 9-12-16,17-12-13 0,-11 7 11 15,6 1-10-15,-3-4 3 0,1 1-1 0,2 1 4 0,-1-1-7 16,1 0-2-16,-1 0 5 0,5-1-9 0,-1 0-7 15,-3 0 14-15,2-1 2 0,3 1-6 16,2 1 9-16,-5-3-12 0,3 0 8 0,1 1-10 16,5 0 10-16,-4-3-5 0,1 3 11 0,-1-4 8 15,-1 3-8-15,5 1-8 0,-6-3 16 16,5 0-5-16,-3 3 9 0,0-3-14 0,-1 0 13 16,3 1-7-16,-3 2 3 0,5-1-9 0,-6-1 2 15,6 2-28-15,-5-1 29 0,-3 0-3 16,1 2 3-16,-1-2-13 0,1 3 11 0,3-3-17 15,-5 2 13-15,3-1-8 0,-3 1 5 0,1-1-10 16,1 0 11-16,3 0-11 0,-7 1 8 0,7 0 9 16,-1-4-4-16,-1 2-12 0,2-2 11 15,-5 3-10-15,3-1 4 0,1 2-5 0,-3-2 8 16,1 1-4-16,-1-1 7 0,1 2-5 0,-1 1 0 16,-1-3-1-16,-1 4 13 0,1-2-11 0,-2 0 13 15,3 0-6-15,-3 1 16 0,1 0 1 16,-3 0-1-16,2 0 1 0,3 0 2 0,-3-1-4 15,-1 2-5-15,1-1 6 0,3 0-6 0,-3 1-12 16,-2 0 10-16,3 0-9 0,-3-2 2 0,2 1-1 16,3 3-5-16,-7-3 6 0,5 0-2 0,-3-1 0 15,-2 4 0-15,2 0-8 0,-1-1 12 0,-9 5-17 16,18-9 18-16,-18 9-21 0,17-10 15 16,-17 10-14-16,14-6 12 0,-14 6-3 0,13-8 13 15,-13 8-20-15,10-6 8 0,-10 6-8 0,12-6 11 16,-12 6-15-16,15-6 18 0,-15 6-15 15,8-4 20-15,-8 4-21 0,13-8 8 0,-13 8-8 16,10-4 12-16,-10 4-18 0,12-7 22 0,-12 7-13 16,11-5 12-16,-11 5-16 0,0 0 17 0,12-7-14 15,-12 7 11-15,0 0-8 0,15-5 0 16,-15 5 0-16,0 0 0 0,12-7 0 0,-12 7 0 16,0 0-2-16,14-6-17 0,-14 6 19 0,0 0 8 15,9-4-13-15,-9 4 11 0,0 0-17 0,0 0 25 16,10-4-13-16,-10 4 7 0,0 0-15 15,0 0 14-15,0 0-12 0,0 0 8 0,12-4-1 16,-12 4-2-16,0 0 0 0,0 0 0 0,0 0 0 16,0 0 0-16,0 0 0 0,0 0 0 0,0 0 0 15,0 0 0-15,9-5 0 0,-9 5 0 0,0 0 0 16,0 0 0-16,0 0 0 0,0 0 0 0,0 0 0 16,0 0 0-16,0 0 0 0,0 0 0 15,0 0 0-15,-9-9 0 0,9 9 0 0,-8-8 0 16,8 8 0-16,-18-7 0 0,18 7 0 0,-19-8 0 15,11 4 0-15,-7 1 0 0,3 1 0 0,-3-2 0 16,-1 2 0-16,1 0 0 0,-1 0 0 16,1-1 0-16,1 3 0 0,-3-1 0 0,3 1 0 15,14 0 0-15,-27 0 0 0,27 0 0 0,-17 0 0 16,17 0 0-16,0 0 0 0,-18-4 0 0,18 4 0 16,0 0 0-16,0 0 0 0,0 0 0 15,0 0 0-15,0 0 0 0,0 0 0 0,16 8 0 16,-16-8 0-16,23 4 0 0,-8-1 0 0,3 0 0 15,-1 1 0-15,-3-3 0 0,5 3 0 0,-3 1 0 16,3-3 0-16,0 2 0 0,-3-2 0 0,-1 0 0 16,-3 1 0-16,2 2 0 0,-14-5 0 0,23 3 0 15,-23-3 0-15,17 6 0 0,-17-6 0 16,10 5 0-16,-10-5 0 0,4 8 0 0,-4-8 0 16,0 15 0-16,0-15 0 0,-8 19 0 0,6-8 0 15,-2 1 0-15,-5-2 0 0,5 1 0 0,-4 1 0 16,2-1 0-16,-2 1 0 0,3-1 0 0,-3 1 0 15,2-2 0-15,2 0 0 0,-4 2 0 16,3-4 0-16,1 0 0 0,4-8 0 0,-10 15-139 16,10-15-211-16,-8 14-153 0,8-14-136 0,0 0-60 15,-4 12 101-15,4-12 51 0,0 0-22 0,0 0-63 16,0 0-477-16,0 0-757 0</inkml:trace>
   <inkml:trace contextRef="#ctx0" brushRef="#br0" timeOffset="197720.79">10830 12375 311 0,'4'-15'321'0,"-4"15"-52"0,0 0-54 15,4-15-6-15,-4 15 1 0,4-11-25 0,-4 11-3 16,4-12-2-16,-4 12-28 0,4-10 23 0,-4 10-23 16,2-12 5-16,-2 12-2 0,5-9 3 15,-5 9 17-15,0 0-25 0,8-13 14 0,-8 13-32 16,0 0 9-16,0 0-34 0,0-10 1 0,0 10-22 16,0 0 4-16,0 0-23 0,0 0-7 15,0 0-18-15,0 0 23 0,0 0 9 0,0 0 29 0,0 0 8 16,-8 16-3-16,3-4-11 0,1 0 7 15,-2 2 2-15,-2 2 1 0,4-1-2 0,-3 4-5 16,-1 0-1-16,4 0-30 0,-4 0 6 16,2-1-8-16,1 1 2 0,-3 2-27 0,4-4 12 15,0 1-31-15,0 0 0 0,4 0-7 0,-2-3 19 16,-2 1-24-16,4-2 24 0,0 0-27 0,0-14 19 16,6 26-19-16,-6-26 22 0,8 18-20 0,-8-18 5 15,12 9-4-15,-12-9 16 0,19 3-19 0,-19-3 13 16,23-8-16-16,-9 1 15 0,-1-2-25 15,1-3 16-15,3 0-21 0,-3-3 4 0,-1 3-4 16,1 0 4-16,-2 1 0 0,-1 2 6 0,-3-1-5 16,0 2-4-16,1 0-6 0,-9 8-10 0,10-12-6 15,-10 12-6-15,0 0 1 0,12-5 14 16,-12 5 22-16,0 0-21 0,-4 13 24 0,4-13-19 0,-4 20 18 16,0-8-22-16,0 2 22 0,0-2-14 15,4 2 18-15,-5-2 1 0,5-12 5 0,0 25 12 16,0-25 30-16,3 20 33 0,-3-20 42 15,6 17 55-15,-6-17 28 0,12 10 51 0,-12-10-45 0,19 0-22 16,-7-3 2-16,-2-4-28 0,5 0-26 0,-3-6-21 16,5 0-17-16,-7-5-15 0,7-1-91 15,-7-4 0-15,5-6 0 0,-3-1 0 0,0 0 0 16,-1-4 0-16,-3 3 0 0,-2 6 0 0,-2-1 0 16,0 6 0-16,1 0 0 0,-1 2-7 15,-4 2-278-15,0 2-107 0,0 14-106 0,0-19-97 16,0 19-26-16,0 0 117 0,-13-7 14 0,13 7-11 15,-10 8-71-15,10-8-608 0,-12 18-826 16</inkml:trace>
   <inkml:trace contextRef="#ctx0" brushRef="#br0" timeOffset="197955.79">11336 12510 697 0,'0'0'647'0,"8"-6"-95"0,-8 6-80 15,0 0-35-15,11-6-13 0,-11 6-25 0,0 0-46 16,0 0-69-16,0 0-44 0,0 0-42 16,0 0-31-16,0 0 26 0,0 0 3 0,8 9-13 15,-8-9-12-15,-4 16 0 0,4-16 2 0,-8 22-43 16,3-11-10-16,1 1-34 0,-2 0-11 0,2-2-17 16,-4 3-9-16,4-3-36 0,-3 2-125 15,-1 0-206-15,4-2-147 0,-4 0 29 0,6 0-60 16,2-10-45-16,-13 14-140 0,13-14-402 0,-8 8-733 15</inkml:trace>
   <inkml:trace contextRef="#ctx0" brushRef="#br0" timeOffset="198087.78">11371 12435 451 0,'2'-18'617'0,"2"0"-113"0,-4 1-87 16,5 0-56-16,-5 2-78 0,4 0-37 15,-4 2-67-15,4 1-22 0,-4 12-75 0,2-21-106 0,-2 21-140 16,4-16-136-16,-4 16-116 0,0 0-339 15,0 0-343-15</inkml:trace>
   <inkml:trace contextRef="#ctx0" brushRef="#br0" timeOffset="198506.37">11539 12419 44 0,'0'0'783'16,"0"0"-228"-16,14 0-99 0,-14 0-97 0,0 0-19 15,0 0 23-15,8 6 4 0,-8-6 34 0,0 0-18 16,5 14-25-16,-5-14-37 0,0 18-40 0,0-18-30 16,-9 20-18-16,9-8-18 0,-4-1 50 15,2 0-28-15,-2 1-38 0,0 1-40 0,0-4-30 16,0 4-18-16,-1-1-21 0,1 0-20 0,4-12-19 16,-4 18-8-16,4-18-12 0,-2 13 2 0,2-13-5 15,0 0 1-15,6 14-3 0,-6-14-1 0,13 1-9 16,-13-1 2-16,22-4-5 0,-9-1 3 15,1-2-3-15,5 0-4 0,-3-2-1 0,3-1 7 16,-5 4-10-16,7-2-9 0,-6 0 5 0,1 2 12 16,-1 0 14-16,-1 2 19 0,-1 0 17 0,-3 0 26 15,-10 4 25-15,21-4 12 0,-21 4 39 0,14 2 7 16,-14-2-142-16,19 2-30 0,-19-2 0 16,12 5 0-16,-12-5 0 0,19 7 0 0,-19-7 0 15,18 6 0-15,-18-6 0 0,21 6 0 0,-11-4 0 16,-10-2 0-16,31 0 0 0,-16-2 0 0,-3 2 0 15,7-4 0-15,-7 2 0 0,3-3 0 0,-1 4-252 16,-2-2-631-16,-3-1-151 0,3 0 121 0,-12 4-701 16,15-11-1341-16</inkml:trace>
-  <inkml:trace contextRef="#ctx0" brushRef="#br0" timeOffset="201595.82">9004 13444 219 0,'0'0'351'0,"0"0"-81"0,0 0-34 15,0 0 33-15,0 0-87 0,-8-4 49 0,8 4-67 16,0 0 32-16,0 0-46 0,0 0-1 0,0 0-36 16,0 0 6-16,0 0-32 0,0 0 2 0,-8-10-19 15,8 10 14-15,0 0-2 0,0 0 13 0,0 0 2 16,0 0 5-16,0 0 8 0,0 0-7 15,0 0 20-15,0 0-16 0,0 0 35 0,0 0-30 16,0 0 42-16,0 0-46 0,0 0-2 0,0 0-7 16,0 0-4-16,0 0 29 0,0 0-50 0,0 0 29 15,-6-7-44-15,6 7 29 0,0 0-32 0,0 0 20 16,0 0-24-16,0 0 17 0,0 0-24 0,0 0 18 16,0 0-17-16,0 0 8 0,0 0-18 15,0 0 12-15,0 0-22 0,0 0 8 0,0 0-13 16,0 0 21-16,0 0-31 0,0 0 17 0,0 0-24 15,0 0 18-15,0 0-26 0,10-4 29 0,-10 4-24 16,0 0 16-16,0 0-8 0,19 0 9 16,-19 0-13-16,12 0 17 0,-12 0-18 0,19 0 19 15,-19 0-18-15,22 0 40 0,-22 0-11 0,27 0 10 16,-14-4-13-16,5 4 7 0,-5-1-25 0,5 1 19 16,-3 0-20-16,1-3 12 0,-1 3-34 0,-3 0 32 15,3-1-16-15,-1 1 9 0,3 0-13 16,-3 0 11-16,-2-2-17 0,3 2 17 0,1 0-13 15,-1-1 9-15,-3-2-27 0,7 3 31 0,-5 0-18 16,3 0 14-16,2-1-8 0,-1 1 14 0,-1 0-18 16,1 0 2-16,5 0 0 0,-4-2-2 0,1 2-14 15,3 0 21-15,-4-3-4 0,3 3 6 16,-3 0-3-16,2 0-6 0,1 0 2 0,-3 0 0 16,4 0 2-16,-5 0-15 0,3 0 2 0,-2 0 18 15,3 0 11-15,-3 0-14 0,-3 0 12 0,7 3-17 16,-4-3 12-16,-1 0-11 0,3 0 14 0,-2 0-28 15,-1 0 28-15,1 0-13 0,2 0 15 16,-3 0-19-16,1 0 10 0,-1 0-12 0,3 0 13 16,-2 0-16-16,-1 2 15 0,-1-2-31 0,-3 0 37 15,5 0-20-15,-3 0 16 0,-1 0-16 0,-1 1 16 16,3-1-15-16,-3 0 18 0,3 3-11 0,-3-2 9 16,-1-1-29-16,5 0 32 0,-3 2-18 15,-3-2 20-15,3 0-18 0,-3 0 4 0,-12 0 1 16,31 0-2-16,-31 0 1 0,23 0-16 0,-23 0 4 15,27 0 17-15,-27 0-6 0,22 0 4 0,-22 0-4 16,19 0 2-16,-19 0-1 0,12 0-1 0,-12 0 1 16,0 0-15-16,19 0 19 0,-19 0 1 0,0 0-3 15,0 0 1-15,19 0-1 0,-19 0 2 16,0 0 2-16,0 0-4 0,18 0 2 0,-18 0-16 16,0 0 17-16,17 0 2 0,-17 0-1 0,0 0-2 15,14-2-3-15,-14 2 2 0,0 0-2 0,21 0 1 16,-21 0-2-16,0 0-18 0,14-1 17 0,-14 1 3 15,0 0-6-15,0 0 8 0,15-3-6 16,-15 3 3-16,0 0 0 0,16 0-2 0,-16 0 2 0,0 0-16 16,0 0 17-16,15 0-2 0,-15 0 1 15,0 0-1-15,0 0-1 0,0 0 2 0,19 0 0 16,-19 0 0-16,0 0 2 0,0 0-15 0,0 0 19 16,0 0 1-16,0 0 8 0,0 0-8 15,0 0-6-15,0 0 1 0,0 0-2 0,0 0 1 16,0 0-19-16,-11-11 2 0,11 11 18 0,-18-9-8 15,9 4-8-15,-3-1-5 0,2 1-14 0,-7-1 21 16,7 1 0-16,-3-1 0 0,-1 2-15 0,1 0 21 16,-1-3-15-16,2 3 18 0,1 3 6 0,11 1-1 15,-16-8-8-15,16 8-5 0,-15-4-6 0,15 4-28 16,0 0 1-16,-12-5 27 0,12 5 1 16,0 0 6-16,0 0 4 0,12 3 0 0,-12-3 2 15,23 6-5-15,-11 0 5 0,3-3-1 0,-1 5-16 16,3-1 15-16,-3 0 1 0,-1 0 11 0,1 0-14 15,3 4 9-15,-7-3-14 0,2 1 18 16,3-1-32-16,-7 2 38 0,0-2-22 0,-1 3 69 16,-3-3 43-16,-4-8 63 0,4 19 10 0,-4-19 15 15,-4 23 16-15,0-12 2 0,-7 0 1 0,3-1-24 16,-4 0-10-16,-3 0-45 0,5 0-19 0,-7 0-25 16,7-3-18-16,-2 4-7 0,-1-5-24 15,3 2-17-15,-3-3-77 0,13-5-113 0,-14 11-132 16,14-11-204-16,-12 9-198 0,12-9-98 0,0 0 121 15,0 0-41-15,-2 10-596 0,2-10-973 0</inkml:trace>
+  <inkml:trace contextRef="#ctx0" brushRef="#br0" timeOffset="201595.81">9004 13444 219 0,'0'0'351'0,"0"0"-81"0,0 0-34 15,0 0 33-15,0 0-87 0,-8-4 49 0,8 4-67 16,0 0 32-16,0 0-46 0,0 0-1 0,0 0-36 16,0 0 6-16,0 0-32 0,0 0 2 0,-8-10-19 15,8 10 14-15,0 0-2 0,0 0 13 0,0 0 2 16,0 0 5-16,0 0 8 0,0 0-7 15,0 0 20-15,0 0-16 0,0 0 35 0,0 0-30 16,0 0 42-16,0 0-46 0,0 0-2 0,0 0-7 16,0 0-4-16,0 0 29 0,0 0-50 0,0 0 29 15,-6-7-44-15,6 7 29 0,0 0-32 0,0 0 20 16,0 0-24-16,0 0 17 0,0 0-24 0,0 0 18 16,0 0-17-16,0 0 8 0,0 0-18 15,0 0 12-15,0 0-22 0,0 0 8 0,0 0-13 16,0 0 21-16,0 0-31 0,0 0 17 0,0 0-24 15,0 0 18-15,0 0-26 0,10-4 29 0,-10 4-24 16,0 0 16-16,0 0-8 0,19 0 9 16,-19 0-13-16,12 0 17 0,-12 0-18 0,19 0 19 15,-19 0-18-15,22 0 40 0,-22 0-11 0,27 0 10 16,-14-4-13-16,5 4 7 0,-5-1-25 0,5 1 19 16,-3 0-20-16,1-3 12 0,-1 3-34 0,-3 0 32 15,3-1-16-15,-1 1 9 0,3 0-13 16,-3 0 11-16,-2-2-17 0,3 2 17 0,1 0-13 15,-1-1 9-15,-3-2-27 0,7 3 31 0,-5 0-18 16,3 0 14-16,2-1-8 0,-1 1 14 0,-1 0-18 16,1 0 2-16,5 0 0 0,-4-2-2 0,1 2-14 15,3 0 21-15,-4-3-4 0,3 3 6 16,-3 0-3-16,2 0-6 0,1 0 2 0,-3 0 0 16,4 0 2-16,-5 0-15 0,3 0 2 0,-2 0 18 15,3 0 11-15,-3 0-14 0,-3 0 12 0,7 3-17 16,-4-3 12-16,-1 0-11 0,3 0 14 0,-2 0-28 15,-1 0 28-15,1 0-13 0,2 0 15 16,-3 0-19-16,1 0 10 0,-1 0-12 0,3 0 13 16,-2 0-16-16,-1 2 15 0,-1-2-31 0,-3 0 37 15,5 0-20-15,-3 0 16 0,-1 0-16 0,-1 1 16 16,3-1-15-16,-3 0 18 0,3 3-11 0,-3-2 9 16,-1-1-29-16,5 0 32 0,-3 2-18 15,-3-2 20-15,3 0-18 0,-3 0 4 0,-12 0 1 16,31 0-2-16,-31 0 1 0,23 0-16 0,-23 0 4 15,27 0 17-15,-27 0-6 0,22 0 4 0,-22 0-4 16,19 0 2-16,-19 0-1 0,12 0-1 0,-12 0 1 16,0 0-15-16,19 0 19 0,-19 0 1 0,0 0-3 15,0 0 1-15,19 0-1 0,-19 0 2 16,0 0 2-16,0 0-4 0,18 0 2 0,-18 0-16 16,0 0 17-16,17 0 2 0,-17 0-1 0,0 0-2 15,14-2-3-15,-14 2 2 0,0 0-2 0,21 0 1 16,-21 0-2-16,0 0-18 0,14-1 17 0,-14 1 3 15,0 0-6-15,0 0 8 0,15-3-6 16,-15 3 3-16,0 0 0 0,16 0-2 0,-16 0 2 0,0 0-16 16,0 0 17-16,15 0-2 0,-15 0 1 15,0 0-1-15,0 0-1 0,0 0 2 0,19 0 0 16,-19 0 0-16,0 0 2 0,0 0-15 0,0 0 19 16,0 0 1-16,0 0 8 0,0 0-8 15,0 0-6-15,0 0 1 0,0 0-2 0,0 0 1 16,0 0-19-16,-11-11 2 0,11 11 18 0,-18-9-8 15,9 4-8-15,-3-1-5 0,2 1-14 0,-7-1 21 16,7 1 0-16,-3-1 0 0,-1 2-15 0,1 0 21 16,-1-3-15-16,2 3 18 0,1 3 6 0,11 1-1 15,-16-8-8-15,16 8-5 0,-15-4-6 0,15 4-28 16,0 0 1-16,-12-5 27 0,12 5 1 16,0 0 6-16,0 0 4 0,12 3 0 0,-12-3 2 15,23 6-5-15,-11 0 5 0,3-3-1 0,-1 5-16 16,3-1 15-16,-3 0 1 0,-1 0 11 0,1 0-14 15,3 4 9-15,-7-3-14 0,2 1 18 16,3-1-32-16,-7 2 38 0,0-2-22 0,-1 3 69 16,-3-3 43-16,-4-8 63 0,4 19 10 0,-4-19 15 15,-4 23 16-15,0-12 2 0,-7 0 1 0,3-1-24 16,-4 0-10-16,-3 0-45 0,5 0-19 0,-7 0-25 16,7-3-18-16,-2 4-7 0,-1-5-24 15,3 2-17-15,-3-3-77 0,13-5-113 0,-14 11-132 16,14-11-204-16,-12 9-198 0,12-9-98 0,0 0 121 15,0 0-41-15,-2 10-596 0,2-10-973 0</inkml:trace>
   <inkml:trace contextRef="#ctx0" brushRef="#br0" timeOffset="205564.55">9023 13460 296 0,'0'0'320'0,"0"0"-57"0,0 0-16 0,0 0 20 0,0 0-87 16,0 0 48-16,0 0-36 0,-4-11 20 16,4 11-28-16,0 0 7 0,0 0-13 0,0 0 3 15,0 0-4-15,0 0-7 0,0 0 6 0,4-8-22 16,-4 8 23-16,0 0-35 0,0 0 25 0,14-1-60 16,-14 1 31-16,0 0-66 0,17 1 36 0,-17-1-40 15,19 7 46-15,-9-6-43 0,2 6 29 0,1-3-35 16,1 4 23-16,5-1-35 15,-3 0 25-15,7 1-34 0,0 5 16 0,0-4-37 0,-1-1 25 16,9 7-24-16,-4-5 23 0,4 3-13 0,0-1 17 16,-2 0-27-16,2 1 15 0,0-1-22 0,-4 0 20 15,0-3-33-15,4 3 33 0,-4 0 1 16,4 0 44-16,-4-5-11 0,2 4 14 0,-3 1-19 16,5-2 13-16,0 1-7 0,0-2 13 0,0 0-14 15,3 1 15-15,-8-4-24 0,1 2 6 16,4-2-26-16,-4 0 11 0,4 0-28 0,-4-1 19 15,0 2-23-15,0-3 2 0,0 0-14 0,-5 2 15 0,5-2-20 16,-4 1 15-16,-4 0-19 0,3-2 15 16,-1 1-20-16,-2-1 24 0,-1 2-19 0,1 0 16 15,4-3-6-15,-7 3 12 0,3 0-28 0,-1-2 25 16,-1-1-10-16,1 1 25 0,-3 1-25 16,1 0 20-16,3-1-24 0,-7-2 15 0,3 4-21 15,2-2 20-15,-7 0-24 0,-10-3 20 0,23 4-23 16,-23-4 23-16,22 4-23 0,-22-4 24 0,17 4-25 15,-17-4 22-15,14 4-17 0,-14-4 16 0,17 3-25 16,-17-3 26-16,10 3-20 0,-10-3 30 0,0 0-30 16,17 3 25-16,-17-3-24 0,0 0 24 0,14 2-29 15,-14-2 21-15,0 0-25 0,15 3 23 16,-15-3-22-16,0 0 22 0,0 0-23 0,16 4 25 16,-16-4-21-16,0 0 24 0,15 2-20 0,-15-2 19 15,0 0-24-15,12 6 22 0,-12-6-23 16,0 0 24-16,15 2-20 0,-15-2 25 0,0 0-25 0,14 4 29 15,-14-4-41-15,0 0 37 0,12 3-29 16,-12-3 31-16,0 0-28 0,15 2 21 0,-15-2-21 16,0 0 21-16,0 0-12 0,12 2 13 0,-12-2-29 15,0 0 17-15,0 0-26 0,0 0 9 0,15 2-33 16,-15-2 13-16,0 0-26 0,0 0 19 0,0 0-15 16,0 0 13-16,0 0-37 0,0 0-2 15,0 0-18-15,0 0 21 0,0 0-19 0,0 0 22 16,-6-11-28-16,6 11 35 0,-9-12-20 0,9 12 47 15,-10-12-9-15,10 12 30 0,-12-14-19 0,12 14 29 16,-13-11-21-16,13 11 32 0,-6-12-31 0,6 12 29 16,-8-9-8-16,8 9 15 0,0 0-16 15,-4-7 13-15,4 7-22 0,0 0 24 0,0 0-21 16,0 0 22-16,0 0-30 0,4-10 31 0,-4 10-19 16,0 0 19-16,18 10-16 0,-18-10 27 0,17 8-13 15,-17-8 27-15,14 15-4 0,-5-8 23 0,-3 0-7 16,-6-7 52-16,12 13-15 0,-12-13 41 15,13 13 19-15,-13-13 57 0,6 14-5 0,-6-14 12 16,0 0-2-16,-4 21-6 0,4-21-8 0,-15 16-35 16,7-9-24-16,2 1-17 0,-7 0-16 0,5-1-33 15,-6 1-5-15,1-2-11 0,3 2-7 0,-3-4-32 16,3 2-56-16,2-4-109 0,8-2-113 0,-19 11-137 16,19-11-168-16,-12 7-182 0,12-7 109 15,0 0 35-15,0 0-76 0,0 0-506 0,0 0-841 16</inkml:trace>
   <inkml:trace contextRef="#ctx0" brushRef="#br0" timeOffset="-203116.88">11040 13430 180 0,'0'0'368'0,"0"0"-81"0,-18 3 31 16,18-3-116-16,0 0 56 0,-13 5-62 16,13-5 38-16,0 0-41 0,-14 3-12 0,14-3 5 15,0 0-10-15,0 0 9 0,-8 8 7 0,8-8 14 16,0 0 55-16,0 0-38 0,0 0 31 0,22 0-75 16,-9-8 13-16,5 3-70 0,5-5-17 15,4-5-25-15,0 0-26 0,4-1 5 0,0-5-17 16,2-3 1-16,-2 1-13 0,-8 0 3 0,4-1-18 15,-5 1 11-15,-1-4-4 0,-2 3-3 16,-3-4-12-16,-1 1 9 0,-5 4-9 0,-2 1 0 0,1 3-2 16,-3 3 0-16,-2 2-5 0,-4-1-5 15,0 15 4-15,-4-19-5 0,4 19-5 0,-19-8 6 16,19 8 4-16,-27 5-2 0,9 2 15 16,-1 3-8-16,0 1 5 0,-5 5 2 0,1 3 9 0,0 2-7 15,0 3 20-15,1-2-18 0,3 4 20 0,3-3-7 16,-3 3-3-16,7-2 19 0,1-2-36 15,7 2 30-15,0-6-27 0,0 3 19 0,8-4-24 16,0 4 20-16,4-5-31 0,3 0 28 0,1-1-28 16,-2-4 10-16,7 2-53 0,-3-5 18 15,5 0-48-15,-2-3 39 0,1-2-37 0,1-2 22 16,-3-1 0-16,-1 0 10 0,-3-1 13 0,3-2 7 16,-3 2 8-16,-12 1 3 0,19-7 11 0,-19 7 17 15,12-3-15-15,-12 3 2 0,0 0 9 16,6-8 9-16,-6 8 3 0,0 0-15 0,0 0-2 15,0 0 0-15,0 0-6 0,0 0-1 0,0 0 2 16,0 0-7-16,0 0 1 0,13-7 7 16,-13 7 1-16,0 0-3 0,14 3 9 0,-14-3 0 15,19 0-15-15,-19 0-12 0,25 0-6 0,-25 0 7 16,22-4 3-16,-22 4 2 0,19-7 7 0,-19 7 4 16,23-5 2-16,-23 5-3 0,12-9 6 15,-12 9 7-15,6-10 7 0,-6 10 8 0,0 0 7 16,-2-17 6-16,2 17-9 0,-12-9 15 0,12 9-16 0,-19-8 19 15,19 8-21-15,-23-4 11 0,23 4-22 16,-24-2 7-16,24 2 1 0,-25 3 1 0,12 2-13 16,1-2-5-16,6 1-1 0,-2 3-10 0,8-7 10 15,-13 14 20-15,13-14-18 0,-4 14 13 16,4-14-23-16,4 13 20 0,0-5-24 0,9-4 22 16,-3 0-34-16,2 0 1 0,3-4-43 0,-3 0 30 15,3-4-44-15,3 0 10 0,-5-1 10 0,3-5 7 16,-5 3 14-16,5-3 7 0,-5 0 1 15,1-1 12-15,-6-1-2 0,2-2 14 0,1-1-10 16,-3 2 14-16,-4 1-6 0,0-2 19 0,2 1 1 16,-4 1 6-16,0 12-8 0,0-24 12 0,0 24-4 15,4-17-8-15,-4 17-6 0,0 0-18 16,0-17 5-16,0 17-11 0,0 0 11 0,0 0-9 16,0 0 15-16,19 4-10 0,-15 4 14 0,8 2-14 15,-5 2 24-15,5 1 27 0,-2 2 19 0,3 2 21 16,-1 1 42-16,-2-2 3 0,-1 1 39 0,3 0 10 15,-6-1 27-15,-1-2-32 0,3 2-19 16,-6-4-20-16,-2 3-20 0,0 0-22 0,-6 0-14 16,2-1-15-16,-5-1-3 0,5 1-15 15,-6-3-20-15,1-3-46 0,1 3-40 0,-2-2-86 16,10-9-47-16,-8 10-116 0,8-10-43 0,0 0-92 16,0 0 94-16,0 0-3 0,0 0 5 0,0 0 11 15,12-8 25-15,2 1 65 0,-1-3-17 0,1 2 97 16,5-1-17-16,-2-3 86 0,1-1-17 0,1 1 106 15,-1-1 21-15,-1-1 77 0,1 0 57 16,-5 3 44-16,-1-1 20 0,-1-1 15 0,-3 0 17 16,-2 1-21-16,-2 2-13 0,0-2-8 0,-4 12-31 15,0-20 6-15,0 20-28 0,-8-14 9 0,8 14-30 16,-19-8 0-16,19 8-18 0,-18-3 2 16,18 3-16-16,-17 10 44 0,7-5-25 0,2 5 20 15,4-1 2-15,-1 4-15 0,3 0-8 0,2 2-22 16,2-1-15-16,3-2-12 0,3 0-7 15,4 1-56-15,-1-1-104 0,3-3-192 0,-2-2-169 16,7 1-34-16,0-4-89 0,-3-1-23 0,3 1-691 16,4-1-959-16</inkml:trace>
   <inkml:trace contextRef="#ctx0" brushRef="#br0" timeOffset="-201380.93">11266 13791 103 0,'0'0'397'16,"8"-15"-100"-16,-8 15-35 0,0-13-34 16,0 13 35-16,4-13 21 0,-4 13 16 0,0 0-7 15,4-12-1-15,-4 12-28 0,0 0-6 0,0 0-46 16,0 0 16-16,0 0-35 0,0 0 70 0,0 0-21 15,-16 11 24-15,10 5-14 0,-3 6-3 0,1 4-29 16,-6 6-8-16,5 1 7 0,-1 1 32 0,2 0-40 16,-5 3-8-16,7-3-64 0,-2-3-5 15,0-1-41-15,3-2-5 0,-1-4-42 0,2 2-51 16,0-5-127-16,0 0-110 0,0-3-131 0,4-2-167 16,-4-1 152-16,4-1-35 0,0-14 27 15,-7 20-24-15,7-20 2 0,0 0 73 0,-4 10 21 16,4-10 100-16,0 0 13 0,-12-14 81 0,8 5 13 15,-2-2 74-15,-3-2 39 0,1 0 96 0,2-2 7 16,-3 1 61-16,5-1 21 0,-4 3 22 16,2-3 19-16,2 7-15 0,-5-2 8 0,9 10-56 15,-4-19 15-15,4 19-39 0,9-16 46 0,1 9-61 16,2 0 35-16,3-1-71 0,1 4 22 16,3 1-59-16,8-2 31 0,-4-2-53 0,3 2-2 15,5-1 39-15,-4 2-61 0,0 0 45 0,0-3-50 16,0 3 45-16,-4-3-48 0,-5 3 43 0,3 0-41 15,-7-3 67-15,1 6 13 0,-3-6 67 16,3 6 11-16,-15 1 18 0,16-6 44 0,-16 6 5 0,11-6-4 16,-11 6 1-16,0 0-30 0,0 0-1 15,0 0-29-15,0 0-1 0,0 0-19 16,0 0 4-16,-15 12-21 0,11-3 2 0,-4 2-20 0,4 2-19 16,-3 2-24-16,-1 0 0 0,4-2-23 0,-2 6-4 15,-2-5-11-15,3 2-52 0,1-1-106 16,4 0-135-16,-4-3-119 0,4-12-232 0,-4 25-93 15,4-25 95-15,0 19 83 0,0-19-10 0,4 12-22 16,-4-12 65-16,0 0-40 0,0 0-282 0,13-3-441 16</inkml:trace>
@@ -2036,7 +2037,7 @@
   <inkml:trace contextRef="#ctx0" brushRef="#br0" timeOffset="32368.29">11220 11129 330 0,'0'0'491'0,"17"-4"-127"0,-17 4-80 16,0 0-60-16,14-5-40 0,-14 5-52 16,11-5-16-16,-11 5-37 0,12-8 0 0,-12 8-34 15,19-7 7-15,-19 7-28 0,20-6-25 0,-9 4-38 16,1 1-71-16,3-2-32 0,-1 1-87 15,-2 0-62-15,5-2-206 0,-3 3-58 0</inkml:trace>
   <inkml:trace contextRef="#ctx0" brushRef="#br0" timeOffset="32526.29">11822 11077 251 0,'0'0'290'15,"23"-2"-39"-15,-9 0-55 0,-2 0 7 0,5-1-66 16,-3 0 4-16,1-2-50 0,-3 1 1 15,7-2-39-15,0 2-12 0,-3 1-111 0,3-1-46 16,-1-1-119-16,1 1-182 0,-3 1 49 16</inkml:trace>
   <inkml:trace contextRef="#ctx0" brushRef="#br0" timeOffset="32660.3">12438 11028 410 0,'0'0'387'0,"21"0"-112"16,-21 0-44-16,22-2-40 0,-22 2-11 0,25-6-26 15,-13 5-24-15,3-2-22 0,1 0-28 0,1-1-24 16,2 0-11-16,-1 0-55 0,1 1-69 16,4 1-48-16,-3-1-101 0,1-1-89 0,0 1-149 15,1 1-14-15</inkml:trace>
-  <inkml:trace contextRef="#ctx0" brushRef="#br0" timeOffset="35512.69">12733 10979 27 0,'0'0'331'0,"0"0"-72"0,0 0-50 16,0 0-54-16,0 0 6 0,0 0-47 15,-4 9 23-15,4-9-32 0,0 0 17 0,0 0-24 16,0 0 13-16,-10 6-16 0,10-6-10 0,0 0-6 16,0 0-19-16,0 0 5 0,0 0-15 0,0 0-7 15,0 0-8-15,0 0-4 0,-12-6-6 0,12 6-5 16,0 0-7-16,6-17-5 0,-6 17-10 15,4-15 13-15,-4 15-1 0,8-19-6 0,-8 19 6 16,8-15-4-16,-8 15 3 0,7-13-5 16,-7 13-7-16,0 0 5 0,6-13-3 0,-6 13 3 15,0 0 6-15,0 0-13 0,0 0 15 0,0 0-8 16,0 0 9-16,2 15-7 0,-2-15 9 0,-4 13-14 16,4-13 7-16,0 13-7 0,0-13 6 15,-2 12-10-15,2-12 14 0,0 0-16 0,-2 18 10 16,2-18-24-16,0 0-20 0,0 0-6 0,0 15-43 15,0-15-6-15,0 0-51 0,0 0-8 16,0 0-34-16,0 0-80 0,4 12-197 0,-4-12-15 16</inkml:trace>
+  <inkml:trace contextRef="#ctx0" brushRef="#br0" timeOffset="35512.68">12733 10979 27 0,'0'0'331'0,"0"0"-72"0,0 0-50 16,0 0-54-16,0 0 6 0,0 0-47 15,-4 9 23-15,4-9-32 0,0 0 17 0,0 0-24 16,0 0 13-16,-10 6-16 0,10-6-10 0,0 0-6 16,0 0-19-16,0 0 5 0,0 0-15 0,0 0-7 15,0 0-8-15,0 0-4 0,-12-6-6 0,12 6-5 16,0 0-7-16,6-17-5 0,-6 17-10 15,4-15 13-15,-4 15-1 0,8-19-6 0,-8 19 6 16,8-15-4-16,-8 15 3 0,7-13-5 16,-7 13-7-16,0 0 5 0,6-13-3 0,-6 13 3 15,0 0 6-15,0 0-13 0,0 0 15 0,0 0-8 16,0 0 9-16,2 15-7 0,-2-15 9 0,-4 13-14 16,4-13 7-16,0 13-7 0,0-13 6 15,-2 12-10-15,2-12 14 0,0 0-16 0,-2 18 10 16,2-18-24-16,0 0-20 0,0 0-6 0,0 15-43 15,0-15-6-15,0 0-51 0,0 0-8 16,0 0-34-16,0 0-80 0,4 12-197 0,-4-12-15 16</inkml:trace>
   <inkml:trace contextRef="#ctx0" brushRef="#br0" timeOffset="40408.61">13066 10554 251 0,'0'0'208'15,"0"0"-15"-15,0 0-65 0,0 0 6 16,0 0-40-16,0 0 16 0,0 0-45 0,0 0 19 16,0 0-35-16,0 0 12 0,0 0-41 0,0 0 18 15,0 0-33-15,0 0 24 0,0 0-26 16,-8 7 30-16,8-7-23 0,-2 11 27 0,2-11-27 15,-6 19 14-15,6-19-19 0,-6 22 21 0,1-12-27 16,5-10 25-16,-4 23-31 0,4-23 8 0,-2 22 5 16,2-22-1-16,-2 17 3 0,2-17 1 0,0 0 3 15,-2 18-3-15,2-18 13 0,0 0 6 16,0 0 9-16,2 12-24 0,-2-12 2 0,0 0 4 16,0 0-7-16,0 0-5 0,19-4 13 15,-19 4-17-15,16-11 21 0,-7 4-17 0,-1 1 26 16,-2-2-24-16,4 0 27 0,1-1-22 0,-5-2 28 15,4 4-17-15,-2-1 14 0,-3 1-9 0,-5 7 8 16,14-12-3-16,-14 12-8 0,10-7-11 16,-10 7 5-16,0 0-13 0,7-11 6 0,-7 11-11 15,0 0 12-15,0 0-13 0,10-6 9 0,-10 6 5 16,0 0-1-16,0 0-4 0,0 0 1 0,0 0 0 16,0 0-4-16,0 0 13 0,0 0-3 15,0 0 4-15,8-6-14 0,-8 6 11 0,0 0-11 16,0 0 7-16,0 0-10 0,0 0 10 0,0 0-9 15,0 0 4-15,0 0-15 0,0 0-12 16,0 0-19-16,0 0-44 0,0 0-5 0,0 0-54 16,8-7-5-16,-8 7-52 0,0 0-8 0,0 0-303 15,0 0-69-15</inkml:trace>
 </inkml:ink>
 </file>
@@ -2109,7 +2110,7 @@
   <inkml:trace contextRef="#ctx0" brushRef="#br0" timeOffset="9112.99">1060 4475 597 0,'-14'5'632'0,"-1"-3"-96"0,1 2-65 0,0-3 6 15,-1 2-23-15,1-1 24 0,1 1 14 16,1-3-22-16,12 0-7 0,-23 2-21 0,23-2 90 16,-21 1 28-16,21-1-82 0,-14 0-61 0,14 0-60 15,0 0-59-15,-10-8-261 0,10 8-37 0,6-15 0 16,2 4 0-16,9-3 0 0,9-6 0 0,10-2 0 16,7-2 0-16,23-12 0 0,4 0 0 15,7 0 0-15,4 2 0 0,1-1 0 0,3-2 0 16,0 4 0-16,-1-1 0 0,-5 2 0 0,-5 2 0 15,-16 5 0-15,-10 8 0 0,-7 0 0 16,-1 1 0-16,-9 4 0 0,-5 3 0 0,-5 0 0 16,-2 0 0-16,-3 3 0 0,-1 0 0 0,-1 1 0 15,-4-1 0-15,3 2 0 0,-3-1 0 16,-10 5 0-16,17-7 0 0,-17 7 0 0,14-4 0 16,-14 4 0-16,0 0 0 0,15-7 0 0,-15 7 0 15,0 0 0-15,0 0 0 0,12-4 0 0,-12 4 0 16,0 0 0-16,0 0 0 0,0 0 0 15,0 0 0-15,0 0 0 0,0 0 0 0,0 0 0 16,0 0 0-16,0 0-261 0,0 0-898 0,0 0-14 16,-12 14 210-16,3-9-505 0,-1 3-1159 0</inkml:trace>
   <inkml:trace contextRef="#ctx0" brushRef="#br0" timeOffset="24205.16">21006 4535 8 0,'0'0'364'16,"0"0"-90"-16,0 0-56 0,0 0-26 0,0 0-24 15,-8-5-35-15,8 5 20 0,0 0-26 16,0 0 4-16,0 0 1 0,0 0-11 0,0 0 3 16,-11-7-22-16,11 7 15 0,0 0-21 0,0 0 18 15,0 0-31-15,0 0 29 0,0 0-22 0,0 0 18 16,0 0-25-16,0 0 17 0,0 0-23 16,0 0 21-16,0 0-21 0,-8-4 20 0,8 4-16 15,0 0 23-15,0 0-16 0,0 0 16 0,0 0-15 16,0 0 18-16,0 0-4 0,0 0-12 15,0 0-4-15,0 0-8 0,0 0-11 0,0 0-2 16,0 0-2-16,0 0-4 0,0 0 5 0,0 0-1 16,0 0 7-16,0 0 4 0,0 0 5 0,0 0 4 15,15 1 3-15,-15-1-5 0,0 0 1 16,18 0 0-16,-18 0 10 0,15 0-25 0,-15 0 2 16,20 0 17-16,-20 0-12 0,21-1-6 15,-21 1-9-15,25 0 1 0,-25 0-9 0,23 0-12 16,-23 0-2-16,27 0-4 0,-27 0-4 0,26 1 2 15,-11 0-8-15,-1-1 4 0,1 1-4 0,1-1 2 16,1 1-2-16,-1-1 8 0,3 2-12 0,-2-2 6 16,1 0-14-16,-1 0 11 0,1 0-11 15,1 0 7-15,-3 0-10 0,3 0 5 0,-2 0-11 16,1 0 11-16,-1 0-12 0,-1 0 10 0,3 0-11 16,-3 0 11-16,1 0-15 0,-1 0 8 15,1 0-7-15,0 0 7 0,-1 2-6 0,1-4 13 16,-1 2-9-16,-1 0 2 0,1 0-4 0,1 0 6 15,-1 0-8-15,-1 0 10 0,1 0-10 16,-3 0-8-16,3 0 5 0,-1 0 9 0,-3 0-5 16,-12 0 9-16,27 0-12 0,-27 0 6 0,27 0-11 15,-27 0 21-15,25 0-17 0,-25 0-5 0,24 0 3 16,-24 0 14-16,25 0-8 0,-25 0 3 0,25 0-1 16,-25 0 0-16,21 0-7 0,-21 0 9 15,20 0-9-15,-20 0 7 0,21 2-8 0,-21-2 10 16,21 0-8-16,-21 0 8 0,18 2-9 0,-18-2 12 15,21 2-9-15,-21-2 2 0,21 1 0 16,-21-1 6-16,20 0-7 0,-20 0 1 0,21 3-1 16,-21-3-10-16,21 2 7 0,-21-2 9 0,18 3-6 15,-18-3 5-15,17 2-2 0,-17-2 9 16,14 0-13-16,-14 0 6 0,13 2-8 0,-13-2-2 16,16 0 6-16,-16 0 4 0,15 2-5 15,-15-2 1-15,16 0-4 0,-16 0 10 0,15 1-8 16,-15-1 5-16,14 0-7 0,-14 0 7 0,15 2-8 15,-15-2 8-15,0 0-8 0,18 1 10 0,-18-1-8 16,0 0 9-16,15 1-6 0,-15-1 8 0,0 0-8 16,0 0 13-16,14 0-9 0,-14 0 11 15,0 0-2-15,0 0 11 0,0 0-3 0,0 0 1 16,15 0-4-16,-15 0-1 0,0 0-1 0,0 0-3 16,0 0-5-16,0 0 3 0,0 0-7 15,0 0 0-15,0 0-1 0,0 0-4 0,12 0-33 16,-12 0-44-16,0 0-100 0,0 0-86 0,0 0-132 15,0 0-47-15,0 0 7 0,0 0-65 0,0 0-56 16,0 0-165-16,0 0-299 0,0 0-675 0</inkml:trace>
   <inkml:trace contextRef="#ctx0" brushRef="#br0" timeOffset="30232.92">992 5794 333 0,'-8'17'691'15,"8"-17"-131"-15,-10 12-57 0,10-12-63 16,-9 10 18-16,9-10 4 0,-10 9-19 0,10-9-16 16,0 0-43-16,-8 8-39 0,8-8-46 0,0 0-49 15,0 0 12-15,0 0-7 0,0 0 1 0,12-11 14 16,3 2 0-16,11-7-8 0,10-5-20 15,5-1-26-15,4-2-22 0,24-11-16 0,3 2 0 0,0 1-165 16,1 2-13-16,1-1 0 0,-4 3 0 16,1 1 0-16,-15 6 0 0,-9 3 0 0,-1 3 0 15,-5 2 0-15,-8 2 0 0,-2 1 0 16,-8 2 0-16,-1 1 0 0,-5 0 0 0,-1 3 0 16,-1-1 0-16,-1 0 0 0,-1 0 0 0,-3 3 0 15,-10 2 0-15,19-6 0 0,-19 6 0 16,14-7 0-16,-14 7 0 0,11-2 0 0,-11 2 0 15,0 0 0-15,12-5 0 0,-12 5 0 0,0 0 0 16,0 0 0-16,10-6 0 0,-10 6-399 16,0 0-554-16,0 0-118 0,0 0 277 0,0 0-72 15,15 1-438-15,-15-1-960 0</inkml:trace>
-  <inkml:trace contextRef="#ctx0" brushRef="#br0" timeOffset="37932.16">1201 7304 61 0,'0'-17'391'0,"0"17"-94"0,0 0-51 16,-2-14 25-16,2 14-92 0,0 0 69 0,-6-14-30 16,6 14 43-16,-4-10 6 0,4 10 29 0,0 0 46 15,-7-9-7-15,7 9 61 0,0 0-34 0,0 0 4 16,-8-9-16-16,8 9-14 0,0 0-12 15,-10-4 77-15,10 4 27 0,0 0-9 0,-15-3-15 16,15 3-29-16,0 0-27 0,0 0-78 16,-14-4-270-16,14 4 0 0,0 0 0 0,0 0 0 15,0 0 0-15,6-11 0 0,6 0 0 0,9-1 0 16,14-9 0-16,7-1 0 0,24-13 0 16,2 0 0-16,6-2 0 0,3 2 0 0,1 1 0 15,1-1 0-15,-3 3 0 0,-3 2 0 0,-3 0 0 16,-14 8 0-16,-13 5 0 0,-1 0 0 15,-9 5 0-15,-4 0 0 0,-5 2 0 0,-3 1 0 16,-2 2 0-16,-5 1 0 0,1 1 0 0,-3-2 0 16,-2 3 0-16,-10 4 0 0,19-5 0 15,-19 5 0-15,17-6 0 0,-17 6 0 0,10-4 0 0,-10 4 0 16,0 0 0-16,10-5 0 0,-10 5 0 0,0 0 0 16,0 0 0-16,0 0 0 0,0 0 0 15,0 0-717-15,11 5-100 0,-11-5-13 0,0 0 195 16,0 18 60-16,0-18-22 0,-2 18-100 0,2-18-347 15,0 25-695-15</inkml:trace>
+  <inkml:trace contextRef="#ctx0" brushRef="#br0" timeOffset="37932.15">1201 7304 61 0,'0'-17'391'0,"0"17"-94"0,0 0-51 16,-2-14 25-16,2 14-92 0,0 0 69 0,-6-14-30 16,6 14 43-16,-4-10 6 0,4 10 29 0,0 0 46 15,-7-9-7-15,7 9 61 0,0 0-34 0,0 0 4 16,-8-9-16-16,8 9-14 0,0 0-12 15,-10-4 77-15,10 4 27 0,0 0-9 0,-15-3-15 16,15 3-29-16,0 0-27 0,0 0-78 16,-14-4-270-16,14 4 0 0,0 0 0 0,0 0 0 15,0 0 0-15,6-11 0 0,6 0 0 0,9-1 0 16,14-9 0-16,7-1 0 0,24-13 0 16,2 0 0-16,6-2 0 0,3 2 0 0,1 1 0 15,1-1 0-15,-3 3 0 0,-3 2 0 0,-3 0 0 16,-14 8 0-16,-13 5 0 0,-1 0 0 15,-9 5 0-15,-4 0 0 0,-5 2 0 0,-3 1 0 16,-2 2 0-16,-5 1 0 0,1 1 0 0,-3-2 0 16,-2 3 0-16,-10 4 0 0,19-5 0 15,-19 5 0-15,17-6 0 0,-17 6 0 0,10-4 0 0,-10 4 0 16,0 0 0-16,10-5 0 0,-10 5 0 0,0 0 0 16,0 0 0-16,0 0 0 0,0 0 0 15,0 0-717-15,11 5-100 0,-11-5-13 0,0 0 195 16,0 18 60-16,0-18-22 0,-2 18-100 0,2-18-347 15,0 25-695-15</inkml:trace>
   <inkml:trace contextRef="#ctx0" brushRef="#br0" timeOffset="42141.83">12227 7229 95 0,'0'0'253'0,"0"0"-71"0,0 0-2 0,0 0-46 16,0 0 21-16,0 0-39 0,0 0 9 0,0 0-24 15,0 0-5-15,0 0 6 0,0 0-9 16,0 0 4-16,0 0-9 0,0 0-1 0,0 0-4 16,0 0-4-16,0 0-10 0,0 0-4 0,0 0-8 15,0 0-1-15,0 0-4 0,0 0-3 0,0 0-3 16,0 0-4-16,0 0-4 0,0 0 0 15,0 0-13-15,0 0 11 0,0 0-3 0,0 0 1 16,0 0 6-16,0 0 1 0,0 0 2 0,0 0-3 16,0 0 4-16,0 0 0 0,0 0-4 15,0 0 15-15,0 0-18 0,0 0 11 0,0 0-16 16,0 0-3-16,0 0 12 0,0 0-19 0,0 0 12 16,0 0-15-16,0 0 9 0,0 0-13 15,8-5 13-15,-8 5-8 0,0 0 2 0,0 0 1 16,0 0 3-16,19-2-5 0,-19 2 0 0,0 0-3 15,12-2 1-15,-12 2-7 0,0 0 6 0,19-1-6 16,-19 1 3-16,0 0-3 0,19-2 4 16,-19 2 0-16,0 0-4 0,16 0 3 0,-16 0-3 15,0 0 5-15,19 0-1 0,-19 0-1 0,0 0 3 16,16 0-2-16,-16 0-1 0,0 0-1 16,21 0-4-16,-21 0 6 0,16 0-3 0,-16 0-6 15,19 0 2-15,-19 0-2 0,23 0 0 0,-23 0-2 16,22-1-1-16,-22 1 1 0,23 1-3 15,-23-1 2-15,25 0-2 0,-25 0-1 0,23 0 1 16,-23 0 2-16,22 0-4 0,-22 0 2 0,23 2 0 16,-23-2-2-16,23 1 3 0,-23-1-5 0,21 0 2 15,-21 0 2-15,18-1-7 0,-18 1 8 0,19 0 0 16,-19 0 3-16,16 0-3 0,-16 0-6 16,15 0 8-16,-15 0 1 0,14 0 0 0,-14 0 3 15,17 0-4-15,-17 0 2 0,14-2 3 0,-14 2 0 16,15 0-6-16,-15 0 1 0,12 0 3 15,-12 0-4-15,17 0 3 0,-17 0-4 0,16-1-4 16,-16 1 6-16,13 0-10 0,-13 0 10 0,14 0-7 16,-14 0 11-16,13-1-15 0,-13 1 11 15,0 0-8-15,20 0 3 0,-20 0 0 0,0 0 0 0,17 0-2 16,-17 0 6-16,0 0-11 0,16 0 13 16,-16 0-9-16,0 0 7 0,19 0-7 0,-19 0 4 15,0 0-3-15,16 0 10 0,-16 0-10 16,0 0 6-16,19 0-11 0,-19 0 13 0,0 0-8 15,21 0 7-15,-21 0-11 0,14 1 12 0,-14-1-10 16,15 0 9-16,-15 0-10 0,12 1 5 16,-12-1-3-16,15 0 6 0,-15 0-6 0,14 0 10 15,-14 0-11-15,12 0 8 0,-12 0-8 0,15 2 12 16,-15-2-12-16,12 1 5 0,-12-1-3 16,15 0 3-16,-15 0-2 0,12 0 2 0,-12 0-6 15,0 0 9-15,23 2-5 0,-23-2 4 0,0 0-4 16,21 0 1-16,-21 0 0 0,10 2 3 0,-10-2 2 15,16 0-1-15,-16 0-5 0,15 1 2 0,-15-1 5 16,14 0-2-16,-14 0-3 0,17 0 1 16,-17 0-3-16,14 0 0 0,-14 0 6 0,15 0-5 15,-15 0 1-15,16 0-3 0,-16 0 0 0,19 0 0 16,-19 0 4-16,17 0-4 0,-17 0 2 16,16 2 2-16,-16-2-3 0,17 0-3 0,-17 0 5 15,18 1-1-15,-18-1 0 0,19 1-1 0,-19-1-1 16,16 0 4-16,-16 0 2 0,21 1-4 15,-21-1 2-15,17 1-5 0,-17-1 3 0,12 0 1 16,-12 0 2-16,16 1-4 0,-16-1-3 0,15 0 6 16,-15 0-2-16,16 0-1 0,-16 0 5 0,11 0-3 15,-11 0 4-15,16 2-3 0,-16-2-2 16,0 0 0-16,19 0 0 0,-19 0 3 0,0 0-4 16,19 0 2-16,-19 0-4 0,0 0-3 0,18 1 6 15,-18-1-6-15,0 0 10 0,19 0-13 16,-19 0 12-16,0 0-8 0,16-1 10 0,-16 1-10 15,0 0 5-15,15 1-2 0,-15-1 6 0,0 0-8 16,0 0 7-16,20 0-10 0,-20 0 9 16,0 0-4-16,0 0 8 0,15 0-10 0,-15 0 4 0,0 0 0 15,0 0 6-15,14 0-9 0,-14 0 8 16,0 0-8-16,0 0 5 0,0 0-5 0,17 1 9 16,-17-1-10-16,0 0 6 0,0 0-4 0,0 0 5 15,0 0-7-15,14 0 10 0,-14 0-6 16,0 0 0-16,0 0-2 0,0 0 4 0,17-1-9 15,-17 1 12-15,0 0-9 0,0 0 10 0,14-1-11 16,-14 1 5-16,0 0-2 0,0 0 4 16,17-2-3-16,-17 2 2 0,0 0-5 0,0 0 7 15,19 0-8-15,-19 0 10 0,0 0-7 0,14 0 4 16,-14 0-3-16,0 0 5 0,21 0-8 16,-21 0 10-16,0 0-10 0,18 2 9 0,-18-2-11 15,0 0 12-15,19 1-10 0,-19-1 8 0,0 0-6 16,19 0 7-16,-19 0-9 0,0 0 9 0,18 0-9 15,-18 0 10-15,0 0-12 0,19 0 11 16,-19 0-10-16,0 0 10 0,20 0-12 0,-20 0 10 16,15 1-6-16,-15-1 5 0,14 0-4 0,-14 0 7 15,15 0-8-15,-15 0 7 0,14 0-9 16,-14 0 6-16,15 1-6 0,-15-1 13 0,16 0-13 16,-16 0 7-16,15 0-5 0,-15 0 11 0,14 0-13 15,-14 0 11-15,17 1-14 0,-17-1 13 0,14 0-7 16,-14 0 10-16,17 0-11 0,-17 0 4 15,18 0-3-15,-18 0 6 0,19-1-7 0,-19 1 6 16,19 0-8-16,-19 0 9 0,18 0-6 0,-18 0 5 16,19 0-6-16,-19 0 6 0,16 0-8 0,-16 0 10 15,15 0-10-15,-15 0 2 0,16 0 8 16,-16 0-10-16,13 0 10 0,-13 0-8 0,0 0 4 16,20 0-5-16,-20 0 7 0,0 0-6 0,17 0 7 15,-17 0-10-15,0 0 12 0,16 1-10 16,-16-1 9-16,0 0-7 0,15 0 2 0,-15 0-3 15,0 0 7-15,14-1-8 0,-14 1 8 0,0 0-10 16,15 0 10-16,-15 0-6 0,0 0 8 16,16 0-9-16,-16 0 6 0,0 0-3 0,15 0 5 15,-15 0-12-15,0 0 13 0,12 0-12 0,-12 0 9 16,0 0-6-16,19 0 7 0,-19 0-8 0,0 0 5 16,14-1-4-16,-14 1 10 0,0 0-11 15,15 0 4-15,-15 0-1 0,0 0 5 0,0 0-6 16,18 0 7-16,-18 0-12 0,0 0 12 0,15 0-8 15,-15 0 6-15,0 0-7 0,14-1 5 16,-14 1-3-16,0 0 5 0,19 0-4 0,-19 0 6 16,0 0-10-16,17-1 11 0,-17 1-8 0,0 0 7 15,18-2-8-15,-18 2 6 0,0 0-6 0,17 0 7 16,-17 0-9-16,0 0 12 0,16-1-10 16,-16 1 6-16,0 0-7 0,15 0 7 0,-15 0-8 15,0 0 11-15,16-2-10 0,-16 2 6 0,0 0-7 16,17 0 6-16,-17 0-4 0,0 0 5 0,16-1-4 15,-16 1 8-15,0 0-15 0,15-1 12 16,-15 1-6-16,0 0 11 0,18-2-13 0,-18 2 8 16,0 0-3-16,15-1 6 0,-15 1-9 0,0 0 8 15,16-2-10-15,-16 2 6 0,0 0 7 16,17-2-4-16,-17 2-11 0,12-3 10 0,-12 3-10 16,15 0 12-16,-15 0-12 0,14-1 11 0,-14 1-8 15,15-1 9-15,-15 1-9 0,18-2 6 16,-18 2-5-16,19-1 6 0,-19 1-5 0,21-2 6 15,-21 2-8-15,18 0 12 0,-18 0-8 0,21-1 0 16,-21 1-4-16,21-4 8 0,-21 4-10 16,20 0 11-16,-20 0-10 0,25-3 11 0,-25 3-10 15,23-1 4-15,-23 1-3 0,22-3 6 0,-22 3 1 16,23-1-8-16,-23 1 2 0,21-2 4 0,-21 2 2 16,23-1-8-16,-23 1 8 0,18-2-6 15,-18 2 4-15,19-2 0 0,-19 2-3 0,14 0 5 16,-14 0-1-16,15-1 0 0,-15 1-3 0,14-2 1 15,-14 2-8-15,0 0 6 0,19 0-7 0,-19 0 13 16,0 0-3-16,18-1 2 0,-18 1-9 16,0 0 6-16,21-1-5 0,-21 1 6 0,0 0-7 15,19-2 18-15,-19 2-4 0,0 0 18 0,18 0-11 16,-18 0 4-16,0 0 3 0,19 0 4 0,-19 0-11 16,0 0 11-16,19 0-9 0,-19 0 10 15,14-1 2-15,-14 1 12 0,14 0-3 0,-14 0 7 16,15 0-10-16,-15 0 6 0,14-2-2 15,-14 2-2-15,15 0-9 0,-15 0-3 0,14 0-10 16,-14 0 5-16,13-1-4 0,-13 1-3 0,0 0-1 16,18-2-3-16,-18 2-2 0,0 0 3 0,0 0-6 15,15 0 4-15,-15 0-11 0,0 0-18 0,0 0-73 16,0 0-65-16,0 0-81 0,0 0-132 16,0 0-192-16,0 0-486 0,0 0-700 0</inkml:trace>
   <inkml:trace contextRef="#ctx0" brushRef="#br0" timeOffset="45979.84">7533 7932 182 0,'0'0'298'16,"0"0"-33"-16,0 0-82 0,0 0 0 16,0 0-58-16,0 0 6 0,0 0-24 0,0 0 9 15,0 0-35-15,0 0 13 0,-11-1-22 0,11 1 12 16,0 0-18-16,0 0 10 0,0 0-6 0,0 0-1 16,0 0 14-16,0 0 0 0,0 0 18 15,0 0-17-15,0 0 23 0,0 0-12 0,0 0 16 16,0 0 0-16,0 0 0 0,0 0-20 15,0 0 17-15,0 0-5 0,0 0-2 0,0 0-10 16,0 0 2-16,0 0-6 0,0 0-3 0,0 0-3 16,0 0-5-16,0 0-3 0,0 0 1 0,0 0-11 15,0 0-2-15,0 0-15 0,0 0-2 0,0 0-8 16,0 0 4-16,0 0-12 0,0 0 0 16,0 0-5-16,0 0 2 0,0 0-3 0,0 0 9 15,0 0 2-15,6-7 9 0,-6 7-4 0,0 0 6 16,0 0-12-16,17-3 5 0,-17 3-5 15,0 0-3-15,12-2-4 0,-12 2-3 0,15-2-2 16,-15 2 4-16,14 0 3 0,-14 0-1 0,19-3-1 16,-19 3 2-16,21-1-3 0,-21 1-1 15,22-4 1-15,-22 4 5 0,27 0-6 0,-27 0-4 16,23-1 0-16,-23 1-3 0,23-2-4 0,-23 2 3 16,27 0-4-16,-27 0-2 0,22 0 4 15,-22 0-2-15,27 0 0 0,-27 0-5 0,23 0 6 16,-23 0-1-16,27 2 1 0,-27-2-5 0,27 0 4 15,-15 0-4-15,3 0 5 0,1 0-7 0,-1 0 1 16,3 0-1-16,-3 0 5 0,1-2-6 16,3 2 9-16,-1 0-9 0,3 0 10 0,-2-2-9 15,-1 2 16-15,3-2-4 0,2 1 8 0,-1-1-8 16,-3 0 11-16,4 0-6 0,-3 0-1 16,3-1-3-16,0 2-3 0,0-1 2 0,-5-1 3 15,5 2 1-15,-4-2-4 0,1 3-7 0,-1-2 1 16,4 0 0-16,-7 2-5 0,3-2-1 0,-1 2-14 15,1-2 17-15,-3 2-1 0,-1 0 4 0,1-1-5 16,-1-1-23-16,4 2 24 0,-7 0-16 16,7 0 17-16,-7 0 0 0,2 0-22 0,5 0 20 15,-7 0-18-15,3 0 18 0,-3 0-17 0,3 0 21 16,-1 2-20-16,3-2 26 0,-17 0-23 16,27 0 20-16,-15 0-20 0,3 0 23 0,-1 0-16 15,3 0 25-15,-3-2-15 0,0 2 31 0,3 0-20 16,2 0 28-16,-7 0-29 0,7-1 19 15,-7 1-28-15,7 0 26 0,-5-1-32 0,3-1 28 16,-3 2-33-16,3 0 33 0,1-2-32 16,-3 2 26-16,-1-1-32 0,3 0 31 0,1 0-33 15,-1 0 35-15,-3-1-37 0,5 2 40 0,-3-1-42 0,-1 0 28 16,1-1-33-16,3 2 34 0,-4-3-32 16,1 3 32-16,-1 0-32 0,-3-2 38 0,2 2-37 15,-14 0 34-15,27-2-36 0,-14 2 31 16,-13 0-32-16,29-2 32 0,-29 2-32 0,27 0 36 15,-27 0-34-15,22-2 34 0,-22 2-31 0,27 0 33 16,-27 0-35-16,25 0 33 0,-25 0-32 16,29 0 33-16,-29 0-34 0,27 0 37 0,-27 0-34 15,27 0 28-15,-15 2-26 0,-12-2 25 0,27 0-23 16,-27 0 26-16,27 1-23 0,-27-1 31 0,27 1-28 16,-17 1 41-16,-10-2-25 0,27 2 37 0,-11-2-28 15,-16 0 34-15,27 0-33 0,-16 3 32 16,5-3-37-16,-1 1 24 0,-15-1-32 0,26 1 31 15,-11-1-40-15,-15 0 41 0,27 1-33 0,-27-1 34 16,27 1-33-16,-15-1 31 0,3 0-30 16,-15 0 31-16,26 2-38 0,-13-1 23 0,-13-1-28 15,23 1 27-15,-23-1-34 0,22 2 30 0,-22-2-30 16,23 2 22-16,-23-2-21 0,19 0 26 16,-19 0-35-16,20 3 34 0,-20-3-26 0,19 1 26 15,-19-1-27-15,19 3 18 0,-19-3-21 0,18 0 28 16,-18 0-29-16,17 2 26 0,-17-2-31 0,14 2 35 15,-14-2-35-15,0 0 29 0,17 0-29 16,-17 0 28-16,0 0-149 0,0 0-163 0,14 2-234 16,-14-2-129-16,0 0 1 0,0 0-876 0,0 0-1247 15</inkml:trace>
   <inkml:trace contextRef="#ctx0" brushRef="#br0" timeOffset="50420.81">1298 8591 434 0,'-33'14'503'0,"-6"2"-130"0,0 0-9 16,-1 1-51-16,3-2-25 0,4 0-26 0,4-2-6 15,0-2 12-15,6 0-16 0,3-3 48 0,3 0-85 16,3-3-33-16,1 0-32 0,3 0 5 15,10-5 44-15,-12 5 72 0,12-5 27 0,0 0 17 16,20-9 31-16,-1 0 135 0,10-8-7 0,10-4-18 16,4-3-27-16,22-7-20 0,1-4-211 15,-2 1-198-15,4 1 0 0,0-1 0 0,-2 1 0 16,0 2 0-16,1-3 0 0,-3 4 0 0,-6 6 0 16,-11 1 0-16,3 1 0 0,-3 0 0 0,1 1 0 15,-3 1 0-15,-3 0 0 0,-3 3 0 16,-6 4 0-16,-4 0 0 0,-6 2 0 0,-3 3 0 15,-3 2 0-15,-1-1 0 0,-3 1 0 0,-1 2 0 16,-1 0 0-16,-11 4 0 0,18-8 0 0,-18 8 0 16,15-6 0-16,-15 6 0 0,12-5 0 15,-12 5 0-15,0 0 0 0,10-4 0 0,-10 4 0 16,0 0 0-16,0 0 0 0,0 0 0 0,0 0 0 16,11-4 0-16,-11 4-652 0,0 0-193 15,0 0 6-15,0 0 179 0,0 0 63 0,0 18-20 16,0-18-649-16,0 17-909 0</inkml:trace>
@@ -2174,7 +2175,7 @@
   <inkml:trace contextRef="#ctx0" brushRef="#br0" timeOffset="9750.49">3772 6193 548 0,'7'-15'742'0,"-7"15"-164"0,0 0-89 0,2-15-71 15,-2 15-33-15,0 0-26 0,0 0-48 16,0 0-42-16,2-13-45 0,-2 13-1 0,0 0 37 16,4 12-13-16,-2 0 6 0,0 3-36 0,0 3 30 15,0 1 14-15,-2 3 1 0,0 0 6 0,2 2 6 16,-2-1-38-16,0 0-1 0,2-1-61 16,-2-1 2-16,0-1-51 0,2-2-3 0,1-3-41 15,-3 0 12-15,4-2-25 0,-4-13-22 0,6 17-46 16,-6-17 0-16,10 5 0 0,-10-5 0 15,19-12 0-15,-9 2 0 0,5-7 0 0,-3-4 0 16,0 1-231-16,3-6-93 0,-1 1-72 0,-3 1-125 16,-1 0-118-16,0 2 30 0,1 1 91 0,-1-1-68 15,-4 5-79-15,2 0-508 0,1 2-816 16</inkml:trace>
   <inkml:trace contextRef="#ctx0" brushRef="#br0" timeOffset="10025.44">4424 6298 508 0,'-17'4'683'0,"17"-4"-157"0,-14 2-90 15,14-2-82-15,0 0-44 0,-17 3-55 0,17-3-21 16,0 0-24-16,0 0 20 0,0 0 10 16,0 0-11-16,0 0-26 0,6 17-34 0,-6-17-30 15,21 8-32-15,-9-4-18 0,3 0-19 0,1 1-41 16,-1-3-98-16,3 1-92 0,-1-3-83 0,2 1-77 16,-1-2-110-16,1-2-132 0,-3-1-450 15,1-3-666-15</inkml:trace>
   <inkml:trace contextRef="#ctx0" brushRef="#br0" timeOffset="10252.43">4692 6199 676 0,'0'0'786'0,"-12"-10"-166"0,12 10-147 0,-17-9-89 15,17 9-66-15,-14-6-65 0,14 6-47 0,0 0-42 16,-12-4-30-16,12 4 12 0,0 0-8 0,0 0-16 16,6 13-26-16,0-5-15 0,4 0-24 15,1 3-3-15,1 0-10 0,0-2-10 0,1 3 5 16,-1-1-19-16,-1 1-5 0,-3-2 4 15,-2 2-3-15,-2-1-2 0,-4-11-2 0,-6 26 0 16,0-14-2-16,-5 2-4 0,-1-2-5 0,-5 3-28 16,-1-1-57-16,-1-2-64 0,3-1-64 15,1-2-69-15,3 0-101 0,-1-3-151 0,5-1-497 16,8-5-683-16</inkml:trace>
-  <inkml:trace contextRef="#ctx0" brushRef="#br0" timeOffset="11739.36">5052 6279 1081 0,'0'0'756'0,"0"0"-172"0,-4-14-133 16,4 14-86-16,0 0-38 0,-8-8-27 0,8 8-25 16,0 0-26-16,0 0-23 0,0 0-11 15,-17 0-35-15,17 0-15 0,0 0-46 0,-8 13-10 16,8-13-36-16,-4 10 3 0,4-10-31 0,-4 17 6 15,4-17-22-15,-3 13 22 0,3-13-36 16,0 0 23-16,-4 15-27 0,4-15 20 0,0 0-28 16,0 0 24-16,0 0-18 0,0 0 16 0,0 0-20 15,0 0 15-15,0 0-26 0,17-10 23 0,-13-3-34 16,4 0 20-16,1-2-18 0,-1-2 17 16,2 0-20-16,-2 0 22 0,3 2-22 0,-1 0 21 15,0 0-17-15,-1 3 17 0,-1 0-22 0,-2 2 23 16,-2 2-24-16,-4 8 23 0,11-12-17 15,-11 12 39-15,0 0-23 0,0 0 55 0,0 0-14 16,0 0 47-16,2 15-36 0,-2-15 34 0,-4 16-44 16,4-16 25-16,-5 22-45 0,5-22 27 15,0 18-41-15,0-18 35 0,5 16-45 0,-5-16 39 16,8 14-38-16,-8-14 33 0,16 8-39 0,-16-8 35 16,23-3-43-16,-10 2 36 0,1-5-41 0,3-2 36 15,-3 1-42-15,3-1 33 0,-3-1-29 16,0-2 5-16,1 1 4 0,1 1 3 0,-5-2-1 15,-1 3 7-15,1-1 4 0,-1 3-2 0,-10 6 3 16,14-13-2-16,-14 13 1 0,11-8-10 0,-11 8-1 16,0 0 2-16,0 0-1 0,0 0 37 15,12 8-39-15,-12-8 39 0,2 17-42 0,-2-17 24 16,4 23-80-16,-4-23-28 0,4 23-97 0,1-11-85 16,-1-2-16-16,2 1 13 0,-2 0-12 15,2-3-7-15,5-1-17 0,-1-1 14 0,2-3-12 16,1 0-11-16,1-3 58 0,3-3 22 0,-1 2 72 15,1-2 58-15,-3 0 51 0,-1 0 91 0,-3-2 50 16,-10 5 32-16,16-7 43 0,-16 7 10 16,0 0 9-16,0 0 16 0,0 0-5 0,0 0 11 15,0 0-9-15,0 0-10 0,0 0-14 0,-16 11-16 16,8-5-21-16,-1 2-27 0,3-1-13 16,6-7-25-16,-12 16-2 0,12-16-12 0,-6 16-4 15,6-16-4-15,0 15-13 0,0-15 4 0,8 13-7 16,-8-13-3-16,16 9 0 0,-16-9-4 15,23 1-1-15,-6-1-7 0,-7-3 3 0,7-2 2 0,-5 1-16 16,2-4 12-16,-1 1-4 0,1-1 5 16,-5-2-6-16,1 0 3 0,-2-1 0 0,-2 0 1 15,-1-1-2-15,-1 1 4 0,-4 11-5 0,0-21 0 16,0 21 1-16,-2-19-2 0,2 19-2 16,-11-12 3-16,11 12 1 0,-12-8-2 0,12 8-2 15,0 0 0-15,-17-2 3 0,17 2-2 0,-10 5-2 16,10-5 0-16,-8 9 5 0,8-9 0 15,0 0-1-15,2 16 1 0,-2-16-3 0,12 11 6 16,-12-11-8-16,19 10-18 0,-7-6-20 0,3-3 5 16,1 0-22-16,3-1 13 0,-7 0 10 0,5-2 7 15,-3-1 5-15,3 1 5 0,-5-1 8 16,3 1 1-16,-3-2 10 0,-12 4 14 0,21-5 17 16,-21 5 19-16,16-3-3 0,-16 3-2 0,0 0-14 15,17-3-6-15,-17 3-3 0,0 0-4 0,0 0-7 16,0 0 3-16,0 0-15 0,-6 17 9 15,6-17-5-15,-9 13 0 0,9-13-7 0,-8 17 7 16,8-17-8-16,-6 17 10 0,6-17-8 16,-2 15 4-16,2-15-1 0,0 14 6 0,0-14-8 15,8 12 8-15,-8-12-6 0,12 11 9 0,-12-11-4 16,17 4-5-16,-17-4 0 0,21-3 6 16,-21 3-1-16,22-5 1 0,-11 2-6 0,-1-2 5 15,0-2-8-15,-1 3 11 0,1-2-7 0,-2 0 9 16,-8 6-5-16,13-11 0 0,-13 11-2 0,10-10 4 15,-10 10 0-15,6-9 11 0,-6 9-14 0,0 0 6 16,8-6-12-16,-8 6 7 0,0 0-7 16,0 0 1-16,0 0-1 0,0 0 0 0,0 0 0 15,7-8 6-15,-7 8-10 0,0 0 6 0,0 0 0 16,0 0 7-16,0 0-2 0,0 0 4 16,0 0-4-16,0 0 5 0,0 0-10 0,6-7 8 15,-6 7-8-15,0 0 3 0,4-15-3 0,-4 15 3 16,6-15-6-16,-6 15 10 0,6-15 4 15,-6 15 12-15,7-15 5 0,-7 15 7 0,4-12 8 16,-4 12 3-16,0 0-14 0,6-10-2 0,-6 10-11 16,0 0 2-16,0 0-9 0,0 0 11 0,0 0-4 15,0 0 21-15,0 0-5 0,0 0 22 0,-2 17-2 16,2-17 36-16,-4 22-32 0,0-9 35 16,2 0-32-16,-1 2 35 0,1 0-52 0,0 0-6 15,2-1-7-15,0 1-4 0,2 0-4 16,3-1-1-16,1-3-3 0,-2-1-2 0,4-2-1 15,2-1-6-15,1-2 3 0,-11-5-19 0,25 0-32 16,-11-3-26-16,3-1-21 0,-1-4 0 0,-1 1 2 16,-1-2 9-16,1-1 7 0,-1-1 17 15,-4 0 12-15,1 3 11 0,-3-3 6 0,-2 2 7 16,2 1 9-16,-8 8 25 0,5-13 18 0,-5 13 18 16,0 0 15-16,0 0 25 0,-5-9 23 0,5 9 20 15,-14 8 43-15,6-1 17 0,4 2-14 16,-5 2 15-16,5-1-46 0,2 3-11 0,2-13-44 15,2 25-9-15,4-13-10 0,5-2-1 0,-1-1-70 16,7-3-117-16,-3-2-171 0,5-2-199 16,-1-2-246-16,3-3-41 0,-7-2-4 0,3 1-697 15,-5-3-1155-15</inkml:trace>
+  <inkml:trace contextRef="#ctx0" brushRef="#br0" timeOffset="11739.35">5052 6279 1081 0,'0'0'756'0,"0"0"-172"0,-4-14-133 16,4 14-86-16,0 0-38 0,-8-8-27 0,8 8-25 16,0 0-26-16,0 0-23 0,0 0-11 15,-17 0-35-15,17 0-15 0,0 0-46 0,-8 13-10 16,8-13-36-16,-4 10 3 0,4-10-31 0,-4 17 6 15,4-17-22-15,-3 13 22 0,3-13-36 16,0 0 23-16,-4 15-27 0,4-15 20 0,0 0-28 16,0 0 24-16,0 0-18 0,0 0 16 0,0 0-20 15,0 0 15-15,0 0-26 0,17-10 23 0,-13-3-34 16,4 0 20-16,1-2-18 0,-1-2 17 16,2 0-20-16,-2 0 22 0,3 2-22 0,-1 0 21 15,0 0-17-15,-1 3 17 0,-1 0-22 0,-2 2 23 16,-2 2-24-16,-4 8 23 0,11-12-17 15,-11 12 39-15,0 0-23 0,0 0 55 0,0 0-14 16,0 0 47-16,2 15-36 0,-2-15 34 0,-4 16-44 16,4-16 25-16,-5 22-45 0,5-22 27 15,0 18-41-15,0-18 35 0,5 16-45 0,-5-16 39 16,8 14-38-16,-8-14 33 0,16 8-39 0,-16-8 35 16,23-3-43-16,-10 2 36 0,1-5-41 0,3-2 36 15,-3 1-42-15,3-1 33 0,-3-1-29 16,0-2 5-16,1 1 4 0,1 1 3 0,-5-2-1 15,-1 3 7-15,1-1 4 0,-1 3-2 0,-10 6 3 16,14-13-2-16,-14 13 1 0,11-8-10 0,-11 8-1 16,0 0 2-16,0 0-1 0,0 0 37 15,12 8-39-15,-12-8 39 0,2 17-42 0,-2-17 24 16,4 23-80-16,-4-23-28 0,4 23-97 0,1-11-85 16,-1-2-16-16,2 1 13 0,-2 0-12 15,2-3-7-15,5-1-17 0,-1-1 14 0,2-3-12 16,1 0-11-16,1-3 58 0,3-3 22 0,-1 2 72 15,1-2 58-15,-3 0 51 0,-1 0 91 0,-3-2 50 16,-10 5 32-16,16-7 43 0,-16 7 10 16,0 0 9-16,0 0 16 0,0 0-5 0,0 0 11 15,0 0-9-15,0 0-10 0,0 0-14 0,-16 11-16 16,8-5-21-16,-1 2-27 0,3-1-13 16,6-7-25-16,-12 16-2 0,12-16-12 0,-6 16-4 15,6-16-4-15,0 15-13 0,0-15 4 0,8 13-7 16,-8-13-3-16,16 9 0 0,-16-9-4 15,23 1-1-15,-6-1-7 0,-7-3 3 0,7-2 2 0,-5 1-16 16,2-4 12-16,-1 1-4 0,1-1 5 16,-5-2-6-16,1 0 3 0,-2-1 0 0,-2 0 1 15,-1-1-2-15,-1 1 4 0,-4 11-5 0,0-21 0 16,0 21 1-16,-2-19-2 0,2 19-2 16,-11-12 3-16,11 12 1 0,-12-8-2 0,12 8-2 15,0 0 0-15,-17-2 3 0,17 2-2 0,-10 5-2 16,10-5 0-16,-8 9 5 0,8-9 0 15,0 0-1-15,2 16 1 0,-2-16-3 0,12 11 6 16,-12-11-8-16,19 10-18 0,-7-6-20 0,3-3 5 16,1 0-22-16,3-1 13 0,-7 0 10 0,5-2 7 15,-3-1 5-15,3 1 5 0,-5-1 8 16,3 1 1-16,-3-2 10 0,-12 4 14 0,21-5 17 16,-21 5 19-16,16-3-3 0,-16 3-2 0,0 0-14 15,17-3-6-15,-17 3-3 0,0 0-4 0,0 0-7 16,0 0 3-16,0 0-15 0,-6 17 9 15,6-17-5-15,-9 13 0 0,9-13-7 0,-8 17 7 16,8-17-8-16,-6 17 10 0,6-17-8 16,-2 15 4-16,2-15-1 0,0 14 6 0,0-14-8 15,8 12 8-15,-8-12-6 0,12 11 9 0,-12-11-4 16,17 4-5-16,-17-4 0 0,21-3 6 16,-21 3-1-16,22-5 1 0,-11 2-6 0,-1-2 5 15,0-2-8-15,-1 3 11 0,1-2-7 0,-2 0 9 16,-8 6-5-16,13-11 0 0,-13 11-2 0,10-10 4 15,-10 10 0-15,6-9 11 0,-6 9-14 0,0 0 6 16,8-6-12-16,-8 6 7 0,0 0-7 16,0 0 1-16,0 0-1 0,0 0 0 0,0 0 0 15,7-8 6-15,-7 8-10 0,0 0 6 0,0 0 0 16,0 0 7-16,0 0-2 0,0 0 4 16,0 0-4-16,0 0 5 0,0 0-10 0,6-7 8 15,-6 7-8-15,0 0 3 0,4-15-3 0,-4 15 3 16,6-15-6-16,-6 15 10 0,6-15 4 15,-6 15 12-15,7-15 5 0,-7 15 7 0,4-12 8 16,-4 12 3-16,0 0-14 0,6-10-2 0,-6 10-11 16,0 0 2-16,0 0-9 0,0 0 11 0,0 0-4 15,0 0 21-15,0 0-5 0,0 0 22 0,-2 17-2 16,2-17 36-16,-4 22-32 0,0-9 35 16,2 0-32-16,-1 2 35 0,1 0-52 0,0 0-6 15,2-1-7-15,0 1-4 0,2 0-4 16,3-1-1-16,1-3-3 0,-2-1-2 0,4-2-1 15,2-1-6-15,1-2 3 0,-11-5-19 0,25 0-32 16,-11-3-26-16,3-1-21 0,-1-4 0 0,-1 1 2 16,-1-2 9-16,1-1 7 0,-1-1 17 15,-4 0 12-15,1 3 11 0,-3-3 6 0,-2 2 7 16,2 1 9-16,-8 8 25 0,5-13 18 0,-5 13 18 16,0 0 15-16,0 0 25 0,-5-9 23 0,5 9 20 15,-14 8 43-15,6-1 17 0,4 2-14 16,-5 2 15-16,5-1-46 0,2 3-11 0,2-13-44 15,2 25-9-15,4-13-10 0,5-2-1 0,-1-1-70 16,7-3-117-16,-3-2-171 0,5-2-199 16,-1-2-246-16,3-3-41 0,-7-2-4 0,3 1-697 15,-5-3-1155-15</inkml:trace>
   <inkml:trace contextRef="#ctx0" brushRef="#br0" timeOffset="23636.06">19509 3738 95 0,'0'0'548'0,"-14"6"-128"0,14-6-64 16,-14 5-37-16,14-5-10 0,-13 4-25 0,13-4-7 15,-12 2-18-15,12-2-6 0,0 0-30 16,-15 4-20-16,15-4-22 0,0 0-8 0,-12 1-27 16,12-1-17-16,0 0 1 0,0 0-9 15,0 0-9-15,-13 6-13 0,13-6-16 0,0 0-19 16,0 0-6-16,0 0-10 0,0 0-9 0,0 0-5 16,0 0 0-16,0 0 10 0,0 0 22 0,0 0 13 15,5-11 0-15,-5 11 6 0,18-14-19 16,-5 7 14-16,3-1-19 0,3-4 14 15,3 0-22-15,7-3 49 0,4-6-41 0,7 2 21 0,1-1-39 16,5-2 26-16,1 0-40 0,1 3 30 0,-1-1-37 16,-1 1-2-16,-1 2 3 0,-3 2 12 15,-3 0-5-15,-6 3 2 0,-2 1 8 0,-6 2 6 16,-1-1 3-16,-3 3 4 0,-2-1 7 0,-1 3-3 16,-3 1 3-16,-1-3 13 0,-1 3-12 15,-1 0 4-15,-12 4-1 0,19-8 6 0,-19 8-12 16,16-6 7-16,-16 6-26 0,13-5 4 0,-13 5-13 15,0 0 1-15,14-6-19 0,-14 6 12 16,0 0-20-16,0 0 11 0,13-4-16 0,-13 4 21 16,0 0-21-16,0 0 11 0,0 0-10 0,12-5 3 15,-12 5-5-15,0 0 7 0,0 0-10 16,0 0 15-16,10-4-11 0,-10 4 21 0,0 0-19 0,9-5 28 16,-9 5 0-16,0 0 28 0,10-6-13 15,-10 6 27-15,0 0-28 0,12-6 19 0,-12 6-31 16,0 0 14-16,13-9-24 0,-13 9 27 15,10-6-31-15,-10 6 12 0,10-7-38 0,-10 7 31 16,15-8-32-16,-15 8 39 0,14-9-43 0,-14 9 23 16,19-8-17-16,-9 3 24 0,1-1 4 15,1 0-11-15,0 2-7 0,1-3 7 0,-1 0-9 16,3 2 6-16,-3 0-10 0,3-1 5 0,-3 1 3 16,0-1 6-16,-1 2-10 0,-1-1-1 0,-10 5-2 15,17-6 7-15,-17 6-3 0,14-5 4 16,-14 5 1-16,10-5-8 0,-10 5 8 0,0 0 2 15,11-3-4-15,-11 3 3 0,0 0-5 0,0 0 4 16,10-4-11-16,-10 4 7 0,0 0 2 0,0 0 0 16,0 0-1-16,0 0-6 0,0 0 5 15,12-6 2-15,-12 6 3 0,0 0-3 0,0 0-5 16,0 0 6-16,0 0-3 0,0 0 0 0,0 0-19 16,0 0 26-16,0 0-8 0,0 0 3 15,0 0-5-15,0 0-2 0,0 0 13 0,-18 3-15 16,18-3 1-16,0 0 6 0,-17 1 1 0,17-1-2 15,-12 1-7-15,12-1 10 0,-21 1-9 16,21-1 10-16,-23 1-4 0,23-1-7 0,-24 1 1 16,24-1-2-16,-27 0 1 0,27 0 1 0,-27-1-8 15,12 0 10-15,3 1-1 0,12 0-3 0,-27-2 13 16,27 2-9-16,-23-4-8 0,23 4 9 0,-18-2-5 16,18 2-5-16,-19-3 17 0,19 3-8 15,-12-2 1-15,12 2 2 0,0 0-12 0,-15 0 2 16,15 0-9-16,0 0-6 0,0 0 4 15,0 0 3-15,0 0-1 0,0 0 13 0,0 0 0 16,11 4 11-16,3-3-1 0,5 0-2 0,3 0 3 16,5 2 0-16,2-2-16 0,2 2 8 0,0 0 1 15,0 1 2-15,-2 1-1 0,2 1-7 0,-4-1 7 16,0 0 2-16,-6 1-4 0,-5-2 11 16,1 4 11-16,-5-2 29 0,-4 5 41 0,-3-1-17 15,-5-10 33-15,-7 25-87 0,-1-11-18 0,-6 1 0 16,-3 0 0-16,-6 2 0 0,-1 0 0 15,-1 2 0-15,-2-3 0 0,0 0 0 0,0-1 0 16,4-1 0-16,5-3 0 0,1-2 0 0,3-2-82 16,1 3-371-16,5-2-133 0,8-8-97 0,-8 9-75 15,8-9 138-15,0 0-87 0,20-2-657 16,-3-2-1034-16</inkml:trace>
   <inkml:trace contextRef="#ctx0" brushRef="#br0" timeOffset="24884.59">21147 3119 39 0,'0'0'268'0,"0"0"-43"16,-7-13-21-16,7 13-7 0,0 0-11 0,-4-14-20 16,4 14-8-16,-2-13 11 0,2 13-21 0,0-16-4 15,0 16 2-15,4-20-29 0,-4 20 21 0,7-21-18 16,-3 10 27-16,-2 0-11 0,2 1 40 15,0-1-15-15,-4 11 29 0,6-19-13 0,-6 19 14 0,4-17 6 16,-4 17 17-16,5-13-4 0,-5 13 4 16,0 0-8-16,4-14-6 0,-4 14-16 0,0 0-14 15,0 0-21-15,2-12-20 0,-2 12-16 16,0 0-27-16,0 0 10 0,0 0-5 0,0 0 8 16,0 0 26-16,-9 20 10 0,5-9 4 15,0 3-8-15,-2 1-20 0,2 1-7 0,-2 1 0 16,2 1-33-16,-1 1 21 0,-1-1-21 0,4 1-1 15,-2-1-21-15,2 1 12 0,-2-1-37 0,2-1 13 16,2 1-20-16,-2-1-6 0,2-1 10 0,0-1-6 16,0-1 3-16,2-1-10 0,0-1 0 15,-2-12-2-15,8 19 9 0,-8-19-22 0,15 14 9 16,-15-14 9-16,16 4-12 0,-16-4-19 0,17 0-8 16,-17 0 4-16,14-5-3 0,-14 5 16 0,17-11-25 15,-17 11 25-15,12-10-21 0,-12 10 23 16,10-9-10-16,-10 9 19 0,0 0-25 0,13-10 25 15,-13 10-37-15,0 0 21 0,0 0-16 0,0 0 29 16,8-7-32-16,-8 7 32 0,0 0-31 16,0 0 38-16,0 0-26 0,0 0 32 0,0 0-27 15,17 2 35-15,-17-2-22 0,0 0 33 16,16-2-11-16,-16 2 47 0,21-4-18 0,-11-2 24 16,2 1-33-16,-1-3 6 0,-1 1-14 0,3-2 37 15,-3-1-51-15,0-2 6 0,-2 0-1 0,-1-2-5 16,1-1-10-16,-4 0-14 0,0 0-33 0,0 0-51 15,-2 2-66-15,1-1-59 0,-1 3-109 16,-2 11-80-16,2-20-83 0,-2 20 73 0,2-13 33 16,-2 13-20-16,0 0 34 0,0 0 9 0,0 0-35 15,0 0 11-15,0 0-6 0,0 0-24 0,2 15-294 16,-2-15-279-16</inkml:trace>
   <inkml:trace contextRef="#ctx0" brushRef="#br0" timeOffset="25006.43">21479 3089 398 0,'0'0'371'0,"11"11"-26"0,-11-11-43 0,6 8 5 16,-6-8-24-16,0 0 14 0,10 7-26 0,-10-7 8 15,0 0-13-15,0 0 22 0,7 8-12 16,-7-8-22-16,0 0-32 0,0 0-35 0,0 0-39 16,0 0-27-16,0 0-30 0,4 10-19 0,-4-10-41 15,0 0-108-15,-4 10-95 0,4-10-126 16,-7 11-95-16,7-11-151 0,-8 10-501 0,8-10-695 16</inkml:trace>
@@ -2195,7 +2196,7 @@
   <inkml:trace contextRef="#ctx0" brushRef="#br0" timeOffset="31894.48">21686 5581 675 0,'0'-17'637'16,"0"2"-88"-16,-2 0-100 0,2 0-66 0,0 0-75 15,2 0-24-15,0 3-37 0,2-1-13 0,5 0-5 0,-3 4-30 16,4-1-17-16,1 1-35 0,3 2-23 16,0 0-30-16,1 0-13 0,1 0-23 0,3-1-5 15,0 3-16-15,-1-2-1 0,1 2-20 16,-1-1 12-16,-1-1-11 0,0 0 39 0,-3 2 43 16,0-2 17-16,1 4 56 0,-5-3 21 0,3 2 143 15,-13 4 46-15,14-7-21 0,-14 7 14 16,13-7-60-16,-13 7-29 0,0 0-61 0,0 0-22 15,0 0-198-15,0 0-5 0,0 0 0 0,8 10 0 16,-8-10 0-16,-4 22 0 0,2-9 0 0,0 2 0 16,-3 1 0-16,3-1 0 0,0 0 0 15,0 0 0-15,2 0-247 0,0 0-427 0,0-15-145 16,2 26-53-16,2-16 154 0,-4-10-45 0,13 16-539 16,-5-11-954-16</inkml:trace>
   <inkml:trace contextRef="#ctx0" brushRef="#br0" timeOffset="32012.35">22174 5357 294 0,'2'-15'710'0,"-2"-1"-179"0,0 1-107 0,-2 0-108 16,0 2-72-16,2 13-64 0,-4-24-37 0,4 24-64 15,-2-16-57-15,2 16-80 0,0 0-79 0,0-14-91 16,0 14-57-16,0 0-423 0,0 0-279 0</inkml:trace>
   <inkml:trace contextRef="#ctx0" brushRef="#br0" timeOffset="32277.42">22323 5306 384 0,'8'9'801'0,"-8"-9"-150"16,0 0-109-16,0 0-90 0,6 11-18 0,-6-11-32 16,0 0-27-16,0 0-35 0,0 0-54 0,0 0-29 15,0 0-48-15,0 0-45 0,11 4-35 0,-11-4-24 16,0 0-20-16,12-4-18 0,-12 4 7 0,0 0-11 16,12-3-6-16,-12 3 1 0,0 0 36 15,0 0 13-15,0 0 31 0,0 0 12 0,0 0 88 16,0 0 58-16,-22 5 31 0,9 2 11 0,-1 0-3 15,-1 3-102-15,-1-2-233 0,-1 7 0 16,5-1 0-16,-3 2 0 0,5 0 0 0,2 1 0 16,2 0 0-16,4 2 0 0,4-1 0 0,0 1 0 15,6-1 0-15,4 1 0 0,5-3 0 16,1-2 0-16,5-2 0 0,2-4 0 0,4-1-798 16,0-3-196-16,2-5-8 0,0-2 95 15,6-4-515-15,0-3-1106 0</inkml:trace>
-  <inkml:trace contextRef="#ctx0" brushRef="#br0" timeOffset="35591.12">23753 5313 306 0,'0'0'431'0,"4"-17"-141"16,-4 17 30-16,7-19-88 0,-7 19 27 0,4-14-54 16,-4 14-1-16,0 0-44 0,2-16-10 0,-2 16-32 15,0 0-8-15,-8-11-33 0,8 11-2 16,-21 0-2-16,6 2-16 0,-1 4 8 0,-5 5-12 16,-4 4-3-16,1 4-8 0,-5 7-1 0,2 3-11 15,2-1 0-15,4 0-10 0,5 0 0 16,1-1-6-16,1-1 1 0,6 0-5 0,-1 0-2 15,5-1-2-15,2-1 1 0,2-2 20 16,4 4-27-16,4-2 23 0,3-3-23 0,3-4 18 16,7-2-19-16,0-2 36 0,6-6-8 0,-1-4 11 15,5-5 11-15,5-4 16 0,-3-4-6 16,-2-3 30-16,0-6-31 0,-2-6 18 0,-5-4-32 0,-5-7 19 16,-5 4-41-16,-7-3 25 0,-3 1-31 15,-6 2 26-15,-4-6-39 0,-3 2 1 0,-5 2-3 16,-7-2 0-16,-2 4 14 0,-1 2-44 0,1 8-32 15,-4 2-66-15,0 4-51 0,0 2-52 16,2 7-29-16,1 2-48 0,1 3-67 0,0 4-103 16,-2 3-237-16,3 2-289 0</inkml:trace>
+  <inkml:trace contextRef="#ctx0" brushRef="#br0" timeOffset="35591.11">23753 5313 306 0,'0'0'431'0,"4"-17"-141"16,-4 17 30-16,7-19-88 0,-7 19 27 0,4-14-54 16,-4 14-1-16,0 0-44 0,2-16-10 0,-2 16-32 15,0 0-8-15,-8-11-33 0,8 11-2 16,-21 0-2-16,6 2-16 0,-1 4 8 0,-5 5-12 16,-4 4-3-16,1 4-8 0,-5 7-1 0,2 3-11 15,2-1 0-15,4 0-10 0,5 0 0 16,1-1-6-16,1-1 1 0,6 0-5 0,-1 0-2 15,5-1-2-15,2-1 1 0,2-2 20 16,4 4-27-16,4-2 23 0,3-3-23 0,3-4 18 16,7-2-19-16,0-2 36 0,6-6-8 0,-1-4 11 15,5-5 11-15,5-4 16 0,-3-4-6 16,-2-3 30-16,0-6-31 0,-2-6 18 0,-5-4-32 0,-5-7 19 16,-5 4-41-16,-7-3 25 0,-3 1-31 15,-6 2 26-15,-4-6-39 0,-3 2 1 0,-5 2-3 16,-7-2 0-16,-2 4 14 0,-1 2-44 0,1 8-32 15,-4 2-66-15,0 4-51 0,0 2-52 16,2 7-29-16,1 2-48 0,1 3-67 0,0 4-103 16,-2 3-237-16,3 2-289 0</inkml:trace>
   <inkml:trace contextRef="#ctx0" brushRef="#br0" timeOffset="36056.1">22957 5368 735 0,'0'0'851'15,"0"0"-158"-15,0 0-123 0,0 0-28 16,0 0-43-16,0 0-68 0,-2-13-67 0,2 13-51 16,0 0-75-16,-2-13-38 0,2 13-49 0,0 0-29 15,0 0-162-15,0-14-177 0,0 14-143 16,0 0-120-16,0 0-70 0,0 0-181 0,0 0-315 15,-2 21-699-15</inkml:trace>
   <inkml:trace contextRef="#ctx0" brushRef="#br0" timeOffset="36220.17">22924 5811 981 0,'0'0'760'0,"-4"15"-126"0,4-15-52 0,0 0-11 15,-4 11-29-15,4-11-108 0,0 0-56 16,0 0-97-16,0 0-35 0,0 0-74 0,0 0-36 15,6-8-175-15,-6 8-152 0,11-7-133 0,-11 7-112 16,14-8-90-16,-14 8-184 0,17-6-391 16,-17 6-749-16</inkml:trace>
   <inkml:trace contextRef="#ctx0" brushRef="#br0" timeOffset="37336.58">22722 3951 268 0,'0'0'731'16,"0"0"314"-16,2-15-685 0,-2 15-22 15,0 0-68-15,0 0-16 0,2-14-50 0,-2 14-15 16,0 0-53-16,0 0-18 0,0 0-48 15,0 0-52-15,2-12-117 0,-2 12-90 0,0 0-56 16,0 0-74-16,0 0-113 0,0 0-420 0,4 11-473 16</inkml:trace>
@@ -2206,18 +2207,18 @@
   <inkml:trace contextRef="#ctx0" brushRef="#br0" timeOffset="84719.3">2741 7012 380 0,'0'0'351'0,"0"0"-80"0,-14-3-50 0,14 3-25 15,0 0-18-15,0 0-1 0,-15-3-7 0,15 3 1 16,0 0-14-16,0 0-6 0,-12-4-16 16,12 4-11-16,0 0-21 0,0 0-17 0,0 0-15 15,0 0-8-15,0 0-11 0,-15 0-4 0,15 0-1 16,0 0 1-16,0 0-1 0,0 0 3 15,0 0 0-15,0 0-1 0,0 0 2 0,0 0 0 16,0 0-5-16,0 0-6 0,0 0-6 0,0 0-5 16,0 0-4-16,0 0-3 0,0 0-2 0,0 0-4 15,0 0 9-15,0 0 15 0,0 0 26 16,0 0-28-16,0 0 17 0,13-3-22 0,-13 3 11 16,14 2-26-16,-14-2 22 0,21 0-22 0,-21 0 23 15,25 0-9-15,-25 0 24 0,24-2-18 0,-9 2 9 16,1 0 1-16,1-1 9 0,-1 0-4 15,-1 1-2-15,1-3-2 0,1 2-2 0,-3-1-1 16,1 2 1-16,1-1 2 0,-1-2-2 16,-1 3-8-16,-1-1-3 0,-1-1-2 0,-12 2-8 15,27-2-2-15,-27 2-9 0,25-2 5 0,-25 2-4 16,25-2-4-16,-25 2 2 0,27-2-3 0,-15 2-2 16,2 0 5-16,1 0-1 0,-1-1 2 15,3 1 2-15,-3-1 0 0,1-1 4 0,1 2 3 16,1 0-3-16,-3-1-3 0,3 1-4 15,-3 0 2-15,1-2-3 0,1 2 1 0,-1 0-4 16,-1 0 1-16,1 0-3 0,-3 0 1 0,3 0 1 16,-1 0 0-16,1 0-2 0,-15 0 1 0,26-1-1 15,-26 1-2-15,27 0-2 0,-27 0 4 0,25-1 0 16,-25 1 1-16,25 0 0 0,-25 0-1 16,23 0-2-16,-23 0 2 0,22 0-4 0,-22 0 2 15,21 0-2-15,-21 0 1 0,19 0 2 0,-19 0-1 16,14 0 0-16,-14 0-5 0,15 0 4 15,-15 0 1-15,14 1 0 0,-14-1 0 0,15 0-2 16,-15 0 2-16,14 1-2 0,-14-1 6 0,17 0-2 16,-17 0 7-16,20 0 2 0,-20 0 14 0,23 2-3 15,-23-2-3-15,23 0 0 0,-23 0 10 0,25 0 2 16,-25 0-5-16,24 0 0 0,-24 0-1 16,27 0-4-16,-27 0-2 0,27 0-10 0,-14 0-22 15,-13 0 24-15,26 1 2 0,-26-1-14 0,27 0 6 16,-27 0-5-16,25 0 1 0,-25 0 6 15,27 0-11-15,-27 0 4 0,23 2-2 0,-23-2 1 16,22 1 2-16,-22-1-2 0,17 1 1 0,-17-1 9 16,14 0 7-16,-14 0 20 0,0 0 7 15,19 2 9-15,-19-2 8 0,0 0 7 0,0 0 8 16,17 2-29-16,-17-2 36 0,0 0-31 0,0 0 26 16,0 0-38-16,12 0 34 0,-12 0-24 0,0 0 35 15,0 0-34-15,0 0 22 0,0 0-35 16,0 0 12-16,0 0-27 0,14 2 15 0,-14-2-21 15,0 0 0-15,0 0-69 0,0 0-123 0,0 0-174 16,0 0-203-16,0 0-109 0,0 0 39 16,0 0-114-16,0 0-603 0,0 0-994 0</inkml:trace>
   <inkml:trace contextRef="#ctx0" brushRef="#br0" timeOffset="87503.14">5071 6882 187 0,'-17'-7'503'16,"1"-1"-114"-16,-1 1-62 0,3 0-38 0,1 2-27 16,-1 0-38-16,-1 0-33 0,3 0-21 0,1 3-13 15,11 2-16-15,-18-7-17 0,18 7-13 16,0 0 6-16,0 0 16 0,0 0 20 0,10-6-8 0,11 6 1 16,10-2-12-16,14 0-11 0,15-3-20 15,31-1-4-15,8 2 4 0,9-4-6 0,4-3 1 16,3 3-6-16,1-4-7 0,-2-2-8 0,2-1-3 15,-5 0-10-15,-3 0-7 0,-7 3-13 16,-2 2-5-16,-8-2-11 0,-21 5-10 0,-12 1 0 16,-6 3-8-16,-11 0-50 0,-10 0-83 15,0 3-68-15,-8 0-45 0,-6 4-57 0,-5 1-100 16,-12-5-155-16,0 17-490 0,-8-3-692 0</inkml:trace>
   <inkml:trace contextRef="#ctx0" brushRef="#br0" timeOffset="109579.46">1215 4653 178 0,'0'0'241'0,"0"0"-38"0,0 0-62 0,-2-14-13 15,2 14-28-15,0 0 3 0,-2-16-22 16,2 16 26-16,0 0-41 0,-2-19 55 0,2 19-45 16,0 0 74-16,-4-17-14 0,4 17-7 0,-4-15 0 15,4 15-20-15,-6-14 2 0,6 14-3 16,-4-12 4-16,4 12 4 0,-7-11 5 0,7 11-1 16,-6-10 0-16,6 10-6 0,0 0 1 0,-6-13-4 15,6 13-9-15,0 0-4 0,-6-11-11 0,6 11-2 16,0 0-1-16,0 0-4 0,-4-9-2 15,4 9-6-15,0 0 0 0,0 0-10 0,0 0-3 16,0 0 4-16,-6-9-1 0,6 9 2 0,0 0 12 16,0 0-4-16,0 0 0 0,0 0 16 0,0 0 1 15,0 0-1-15,0 0 3 0,0 0 13 16,0 0 4-16,-5 14 2 0,5-14-10 0,5 18-5 16,-3-6-14-16,2-1-5 0,0 2 24 0,-2 2 11 15,4 2-3-15,-2-1 17 0,0 4-8 0,1 0 3 16,-1 0-14-16,0 2-1 0,0-2 2 0,0 6-10 15,-2 0-9-15,2-2-2 0,0 2-9 0,-2 1-17 16,3-2-4-16,-1 2 9 0,-2 0-1 16,0 1-1-16,2-2-12 0,-2 2 5 0,2-1-18 15,-2 2 0-15,2-1 4 0,-2 2 16 16,1-2-36-16,-1 2 1 0,0 0-2 0,0 0 16 0,0-2-1 16,0 2-5-16,2 0-4 0,-2-1 20 15,0-1-21-15,0 2 31 0,2-3-34 0,-2-1 18 16,0 2-23-16,1 0 19 0,-1-2-17 0,0 1 14 15,2-1-30-15,-2-1 17 0,-2 2 3 0,2-4-4 16,0 4-5-16,0-5-10 0,0 3-14 0,0-2 18 16,2 1-9-16,-2 2 0 0,0-3 0 15,1 4 0-15,1-1 0 0,-2-1 0 0,2 1 0 16,-2-2 0-16,0-1 0 0,2 3 0 0,-2-4 0 16,2 1 0-16,-2 0 0 0,0-1 0 0,3 1 0 15,-3 0 0-15,0-2 0 0,0-1 0 0,2 3 0 16,-2-2 0-16,0-1 0 0,0-1 0 0,-2 0 0 15,4-2 0-15,-4 0 0 0,2 0 0 0,0 0 0 16,1-2 0-16,-1 0 0 0,-2-1 0 16,2 1 0-16,-2-3 0 0,0-12 0 0,2 26 0 15,-2-26 0-15,2 22 0 0,-2-22 0 0,2 20 0 16,-2-20 0-16,2 18 0 0,-2-18 0 0,0 14 0 16,0-14 0-16,0 0 0 0,0 17 0 0,0-17 0 15,0 0 0-15,0 0 0 0,2 15 0 16,-2-15 0-16,0 0 0 0,0 0 0 0,0 0 0 15,2 12 0-15,-2-12 0 0,0 0 0 16,0 0 0-16,0 0 0 0,0 0 0 0,0 0 0 0,0 0 0 16,0 14 0-16,0-14 0 0,0 0 0 0,0 0 0 15,0 0 0-15,0 0 0 0,0 0 0 16,0 0 0-16,0 0 0 0,0 0 0 0,0 0 0 16,0 0 0-16,0 0 0 0,0 0 0 0,15-7 0 15,-15 7 0-15,14-8 0 0,-6 1 0 0,3 1 0 16,-1-1 0-16,2 1 0 0,3-2 0 0,-1 1 0 15,3-1 0-15,-1 3 0 0,1-1 0 16,1-2 0-16,1 3 0 0,0-2 0 0,-1 3 0 16,1 0 0-16,-1-2 0 0,-1 2 0 0,0 1 0 15,-3 1 0-15,3 0 0 0,-3-2 0 0,-2 3 0 16,1-2 0-16,-13 3 0 0,23-2 0 0,-23 2 0 16,18-3 0-16,-18 3 0 0,13-2 0 15,-13 2-44-15,0 0-131 0,16-3-62 0,-16 3 11 16,0 0-52-16,10-6 21 0,-10 6-11 0,0 0 4 15,0 0 20-15,3-14 29 0,-3 14 27 0,0 0 43 16,-3-15 58-16,3 15 14 0,-4-9 19 0,4 9 11 16,-4-10 6-16,4 10 10 0,-6-11 9 15,6 11 11-15,-6-7 21 0,6 7 18 0,0 0 11 16,-6-10-2-16,6 10-2 0,0 0-4 0,0 0-6 16,-7-9 5-16,7 9-2 0,0 0 15 0,0 0 20 15,13-12 17-15,-3 7-4 0,3-1-10 0,3 3-9 16,3-2-4-16,-1 0 3 0,5 2 36 15,2 0 6-15,0 0 72 0,-3 3 9 0,1 0 37 16,-4 2 42-16,-1 1 24 0,-1 1 24 0,-5 4 4 16,1 1-199-16,-7 5-115 0,-2 1 0 0,-4 5 0 15,-2-1 0-15,-6 6 0 0,-5 5 0 16,-3 1 0-16,-5 5 0 0,0-2 0 0,1-6 0 0,3-1 0 16,-1-5 0-16,5-3 0 0,1 0 0 15,1-8 0-15,3 3 0 0,0-3 0 0,0-1 0 16,8-10-94-16,-9 15-826 0,9-15-89 0,0 0 70 15,0 0-22-15,0 0-393 0,0 0-1020 0</inkml:trace>
-  <inkml:trace contextRef="#ctx0" brushRef="#br0" timeOffset="150154.39">1815 9804 47 0,'0'0'510'0,"0"0"-127"0,0 0-71 16,0 0-65-16,0 0-32 0,0 0-41 0,0 0-18 0,0 0-37 16,0 0-3-16,0 0-7 0,0 0 39 15,-6 9-6-15,6-9 32 0,4 25-15 0,-2-8 16 16,0 3-1-16,2 2-32 0,0 5 16 15,0 1-25-15,1 2 4 0,-1 7-16 0,0 0 10 16,0 0-12-16,0-2 0 0,-2-1-8 0,0-4-6 16,0 0-11-16,0-1-21 0,0-5-5 15,0-2-18-15,1-3 3 0,-3-2-16 0,2-2 16 16,0 0 10-16,-2-15 52 0,2 21 3 0,-2-21-5 16,0 0-40-16,0 0 3 0,-4-15-34 0,2-6 26 15,-5-7-34-15,1-10-7 0,-2-8-2 0,0-5-20 16,-1-3 16-16,-1 0-4 0,2-2 15 15,-1 0-27-15,3 0 16 0,2 0-25 0,0 2 16 16,2 2-23-16,2 7 9 0,0 3-7 0,2 4 21 16,0 6-27-16,0 4 15 0,0 2-24 15,0 6-3-15,0 2 24 0,2 0-31 0,1 5 2 16,1 2 13-16,0 4 20 0,-6 7-18 0,19-4 25 16,-19 4-20-16,22 11 27 0,-11 0-20 15,1 5 23-15,3 3-7 0,-3 3 52 0,2 6 12 16,-1 1 12-16,-1 2-12 0,-1 3-5 0,1 0-5 15,-4 2-34-15,3-1 37 0,-3 3-41 0,0-1 29 16,-2 0-15-16,3-2-6 0,-3-1-3 16,0-5-7-16,-2-2-5 0,0-4-5 0,2 3-28 15,-1-7-90-15,-1 2-104 0,-2-4-107 0,2-2-59 16,0 0 8-16,-2 0-29 0,0-1-41 16,0-2-51-16,-2-12-68 0,0 22-490 0,0-22-695 15</inkml:trace>
-  <inkml:trace contextRef="#ctx0" brushRef="#br0" timeOffset="150317.35">1871 10143 238 0,'0'0'577'0,"-11"-12"-158"0,11 12-77 0,-4-12-81 16,4 12-41-16,-2-21-74 0,4 9-10 0,2-3-39 15,5-1-3-15,1-3-40 0,2 0 9 0,3 0-35 16,3-3-48-16,5 1-75 0,0-2-124 15,0 0-81-15,2 0-348 0,-3 0-205 0</inkml:trace>
+  <inkml:trace contextRef="#ctx0" brushRef="#br0" timeOffset="150154.38">1815 9804 47 0,'0'0'510'0,"0"0"-127"0,0 0-71 16,0 0-65-16,0 0-32 0,0 0-41 0,0 0-18 0,0 0-37 16,0 0-3-16,0 0-7 0,0 0 39 15,-6 9-6-15,6-9 32 0,4 25-15 0,-2-8 16 16,0 3-1-16,2 2-32 0,0 5 16 15,0 1-25-15,1 2 4 0,-1 7-16 0,0 0 10 16,0 0-12-16,0-2 0 0,-2-1-8 0,0-4-6 16,0 0-11-16,0-1-21 0,0-5-5 15,0-2-18-15,1-3 3 0,-3-2-16 0,2-2 16 16,0 0 10-16,-2-15 52 0,2 21 3 0,-2-21-5 16,0 0-40-16,0 0 3 0,-4-15-34 0,2-6 26 15,-5-7-34-15,1-10-7 0,-2-8-2 0,0-5-20 16,-1-3 16-16,-1 0-4 0,2-2 15 15,-1 0-27-15,3 0 16 0,2 0-25 0,0 2 16 16,2 2-23-16,2 7 9 0,0 3-7 0,2 4 21 16,0 6-27-16,0 4 15 0,0 2-24 15,0 6-3-15,0 2 24 0,2 0-31 0,1 5 2 16,1 2 13-16,0 4 20 0,-6 7-18 0,19-4 25 16,-19 4-20-16,22 11 27 0,-11 0-20 15,1 5 23-15,3 3-7 0,-3 3 52 0,2 6 12 16,-1 1 12-16,-1 2-12 0,-1 3-5 0,1 0-5 15,-4 2-34-15,3-1 37 0,-3 3-41 0,0-1 29 16,-2 0-15-16,3-2-6 0,-3-1-3 16,0-5-7-16,-2-2-5 0,0-4-5 0,2 3-28 15,-1-7-90-15,-1 2-104 0,-2-4-107 0,2-2-59 16,0 0 8-16,-2 0-29 0,0-1-41 16,0-2-51-16,-2-12-68 0,0 22-490 0,0-22-695 15</inkml:trace>
+  <inkml:trace contextRef="#ctx0" brushRef="#br0" timeOffset="150317.34">1871 10143 238 0,'0'0'577'0,"-11"-12"-158"0,11 12-77 0,-4-12-81 16,4 12-41-16,-2-21-74 0,4 9-10 0,2-3-39 15,5-1-3-15,1-3-40 0,2 0 9 0,3 0-35 16,3-3-48-16,5 1-75 0,0-2-124 15,0 0-81-15,2 0-348 0,-3 0-205 0</inkml:trace>
   <inkml:trace contextRef="#ctx0" brushRef="#br0" timeOffset="150683.53">2290 9608 161 0,'0'0'542'0,"-16"6"-129"0,8 0-64 15,-5 1-51-15,1 3-2 0,1-2-59 16,-3 4-16-16,4 0-46 0,-3 1-18 0,1 0-42 15,1 2-12-15,3-4-38 0,0 4 0 0,2-2-31 16,0 0 12-16,1-2-28 0,5-11 10 0,0 18-4 16,0-18-6-16,7 7-3 0,-7-7-19 15,12-2 18-15,-12 2-19 0,19-12 20 16,-9 4-17-16,-2-3 16 0,-2 0-17 0,1 0 22 0,-1-1-16 16,0-2 26-16,-4 2 14 0,2 0 55 15,-4 12 8-15,4-21 35 0,-4 21-12 0,4-15-34 16,-4 15-23-16,0 0-18 0,5-12-14 0,-5 12-6 15,0 0-6-15,6 16 15 0,-4-1 13 16,2 6 3-16,-2 3 9 0,2 6 4 0,0 8 21 16,-2 3-1-16,3 2-1 0,-3 1-3 0,-2 1-13 15,0 0-11-15,0 2-10 0,-2-3-10 16,-1-3-5-16,1 0-9 0,0-4-6 0,0-6-12 16,-2-4-74-16,4-5-62 0,-2-4-56 0,0-3-86 15,2-15-114-15,-4 12-48 0,4-12-21 0,0-13-34 16,0-4-13-16,0-5-271 0,2-8-362 15</inkml:trace>
-  <inkml:trace contextRef="#ctx0" brushRef="#br0" timeOffset="151136.32">2394 9714 239 0,'6'-17'476'16,"-6"17"-100"-16,0 0-61 0,2-13-55 0,-2 13-16 15,0 0-56-15,0 0-29 0,0 0-47 0,0 0-7 16,0 0-42-16,0 0 6 0,0 0-33 0,0 0 13 15,0 0-24-15,0 0 8 0,0 0-20 16,0 0 10-16,0 0-28 0,0 0 29 0,0 0-24 16,0 0 16-16,8 5-22 0,-8-5 21 15,0 0-14-15,0 0 15 0,0 0-20 0,0 0 10 16,6 9-14-16,-6-9 17 0,0 0-12 0,0 0 11 16,0 0-22-16,7 7 22 0,-7-7-25 15,0 0 25-15,0 0-19 0,12 5 16 0,-12-5-18 16,0 0 19-16,17 2-14 0,-17-2 17 0,0 0-20 15,18 0 20-15,-18 0-21 0,13-2 21 16,-13 2-15-16,12-4 12 0,-12 4-10 0,14-7 20 16,-14 7-6-16,15-13 37 0,-9 4 7 0,0-1 46 15,3-3 16-15,-5-1 48 0,0-3 20 0,-2-1 60 16,0-2 44-16,-2 1 2 0,-2-4 11 0,-2-3-18 16,-2-1 22-16,-5 1 3 0,3 1 115 15,-2 2 52-15,-1 3-8 0,3 3-64 0,0 2-52 16,2 1-81-16,-1 1-53 0,1 3-160 0,0 1-57 15,6 9 0-15,0 0 0 0,0 0 0 16,0 21 0-16,6 0 0 0,0 4 0 0,5 8 0 16,-1 3 0-16,5 4 0 0,-5-3 0 15,2 5-465-15,-1-8-235 0,-1 0-117 0,2-4 37 16,-3-4 70-16,-1-4-110 0,0-5-420 0,-2-3-879 16</inkml:trace>
-  <inkml:trace contextRef="#ctx0" brushRef="#br0" timeOffset="151285.32">2528 9714 377 0,'-8'-9'641'16,"8"9"-117"-16,-11-15-103 0,11 15-77 0,-6-15-71 16,6 15-25-16,0-18-50 0,0 18-23 15,11-20-49-15,-5 10-6 0,6-2-39 0,-1 4 1 16,3-3-30-16,0 0-5 0,3 3-86 0,0-1-104 16,3-1-123-16,-5 0-173 0,1 2-443 15,1 0-518-15</inkml:trace>
+  <inkml:trace contextRef="#ctx0" brushRef="#br0" timeOffset="151136.31">2394 9714 239 0,'6'-17'476'16,"-6"17"-100"-16,0 0-61 0,2-13-55 0,-2 13-16 15,0 0-56-15,0 0-29 0,0 0-47 0,0 0-7 16,0 0-42-16,0 0 6 0,0 0-33 0,0 0 13 15,0 0-24-15,0 0 8 0,0 0-20 16,0 0 10-16,0 0-28 0,0 0 29 0,0 0-24 16,0 0 16-16,8 5-22 0,-8-5 21 15,0 0-14-15,0 0 15 0,0 0-20 0,0 0 10 16,6 9-14-16,-6-9 17 0,0 0-12 0,0 0 11 16,0 0-22-16,7 7 22 0,-7-7-25 15,0 0 25-15,0 0-19 0,12 5 16 0,-12-5-18 16,0 0 19-16,17 2-14 0,-17-2 17 0,0 0-20 15,18 0 20-15,-18 0-21 0,13-2 21 16,-13 2-15-16,12-4 12 0,-12 4-10 0,14-7 20 16,-14 7-6-16,15-13 37 0,-9 4 7 0,0-1 46 15,3-3 16-15,-5-1 48 0,0-3 20 0,-2-1 60 16,0-2 44-16,-2 1 2 0,-2-4 11 0,-2-3-18 16,-2-1 22-16,-5 1 3 0,3 1 115 15,-2 2 52-15,-1 3-8 0,3 3-64 0,0 2-52 16,2 1-81-16,-1 1-53 0,1 3-160 0,0 1-57 15,6 9 0-15,0 0 0 0,0 0 0 16,0 21 0-16,6 0 0 0,0 4 0 0,5 8 0 16,-1 3 0-16,5 4 0 0,-5-3 0 15,2 5-465-15,-1-8-235 0,-1 0-117 0,2-4 37 16,-3-4 70-16,-1-4-110 0,0-5-420 0,-2-3-879 16</inkml:trace>
+  <inkml:trace contextRef="#ctx0" brushRef="#br0" timeOffset="151285.31">2528 9714 377 0,'-8'-9'641'16,"8"9"-117"-16,-11-15-103 0,11 15-77 0,-6-15-71 16,6 15-25-16,0-18-50 0,0 18-23 15,11-20-49-15,-5 10-6 0,6-2-39 0,-1 4 1 16,3-3-30-16,0 0-5 0,3 3-86 0,0-1-104 16,3-1-123-16,-5 0-173 0,1 2-443 15,1 0-518-15</inkml:trace>
   <inkml:trace contextRef="#ctx0" brushRef="#br0" timeOffset="151655.22">2966 9446 411 0,'0'0'793'0,"0"0"-203"0,0 0-118 0,0 0-93 16,-14 0-55-16,14 0-42 0,0 0-20 0,0 0-17 15,0 0-9-15,0 0-2 0,0 0 7 0,0 0 16 16,2-13-25-16,6 6 15 0,3-3-29 16,1-1 26-16,7-4 56 0,3-5 3 0,9-3-29 15,2-3-8-15,2-1-70 0,1-2-13 0,5 3-49 16,0 0-6-16,3-1-45 0,-1 4 5 15,-2-1-42-15,1 3 8 0,-3 1-23 0,-4 2 8 16,-4 4-28-16,-2 0 28 0,-6 5-33 0,0-2 6 16,-7 4-50-16,1-1-49 0,-3 1-48 0,-1 1-68 15,-1 0-18-15,-2 3-75 0,-10 3-28 16,19-8-38-16,-19 8-57 0,12-7 51 0,-12 7 12 16,0 0-21-16,11-5-42 0,-11 5-49 0,0 0-72 15,0 0-478-15,0 0-671 0</inkml:trace>
   <inkml:trace contextRef="#ctx0" brushRef="#br0" timeOffset="152002.06">3574 8765 679 0,'0'0'636'0,"-12"-4"-94"0,12 4-47 0,0 0-27 16,-15-2-2-16,15 2-22 0,0 0-50 16,0 0-50-16,-18 1-73 0,18-1-43 0,0 0-64 15,0 0-28-15,0 0-32 0,0 0-17 0,0 0-31 16,0 0 3-16,12 5-24 0,5-2 19 16,3-1-29-16,9-2 19 0,4 2-29 0,4-2 21 15,5 2-28-15,-3 0 18 0,-8 2-30 0,-2-1 25 16,0 1-6-16,-6 0 164 0,-5 4 137 0,-3 2 83 15,-5 5-23-15,-6 3-32 0,-4 3-73 16,-6 4-32-16,-4 6-65 0,-5 1-129 0,-3 4-45 16,-3 1 0-16,-2-2 0 0,3-3-10 0,1-5-466 15,2-4-180-15,3-2-168 0,1-4-31 16,3-2 12-16,2-5-591 0,2-1-1119 0</inkml:trace>
-  <inkml:trace contextRef="#ctx0" brushRef="#br0" timeOffset="153170.32">4740 8422 341 0,'-10'11'470'16,"-1"0"-79"-16,3-1-61 0,0-1-46 0,1-1-25 16,7-8-64-16,-12 13-27 0,12-13-40 0,-6 10-12 15,6-10-30-15,0 0 5 0,0 0-18 0,0 0 0 16,16 2-24-16,-5-8 3 0,1-2-8 16,3-1-6-16,-3-1-10 0,3-1-4 0,-3-1-1 15,0-1 20-15,-1 0 16 0,-3-1 13 0,-4-1 0 16,0 1 8-16,-2-1 14 0,-4 0 11 15,-2 2 5-15,-2 0 8 0,-4 2-12 0,-1 3-9 16,-1 1-20-16,-1 4-5 0,-3 0-6 0,1 5-15 16,1 2-9-16,-3 5-4 0,1 2-8 15,-1 6-7-15,1 0 1 0,3 5-6 0,-1 5 1 16,4 3-12-16,1-3 3 0,3 2-4 0,2 1-2 16,2-1 3-16,4-2-4 0,0 0 1 0,4 0-6 15,0-6 5-15,5 1-7 0,-3-8-1 16,4 0-8-16,3-4-1 0,-1-4 1 0,3-1-5 15,-3-5 2-15,3-2-2 0,-3-4 10 0,-1-1-7 16,1-3 11-16,-1-1-4 0,-1-1-2 0,-4-2 12 16,3-1-1-16,-3 2-9 0,0-2 7 15,0 0-1-15,-1 0 6 0,1-1-8 0,-2 0 6 16,0 0-8-16,3 1 0 0,-3 0 1 0,0 0 6 16,2 2-5-16,1 0 5 0,-1 1 3 15,-2 0 6-15,2 2-13 0,1 2 6 0,-9 8 6 16,12-12 13-16,-12 12 30 0,14-3 14 15,-14 3 16-15,13 4 6 0,-13-4-4 0,12 15-12 16,-6-4-4-16,-1 0-8 0,-1 1-6 0,0 3-9 16,0-1-9-16,-2 1-6 0,2 0-2 0,-2-2-7 15,0 2-4-15,0-3-3 0,-2-12 1 0,4 22 2 16,-4-22-3-16,5 15 3 0,-5-15 2 0,0 0-7 16,0 0 1-16,0 0-4 0,8-9-3 15,-8 9-1-15,6-25-1 0,-4 9-1 0,2-4 4 16,0-1-5-16,3-5 1 0,-3 0 16 15,4 1 11-15,-4 0 8 0,2 3 10 0,1 3 11 16,-1 0-8-16,-2 7-2 0,0-2-17 0,2 3 5 16,-6 11 6-16,13-13 32 0,-13 13 10 15,14-2-4-15,-14 2-17 0,17 14-1 0,-9-6-19 16,2 6-1-16,-1 1-12 0,-1 1-62 0,0 2-139 16,0 2-152-16,1-3-85 0,-1 0 13 15,0 2-70-15,-2-3-65 0,3-2-68 0,-1-1-520 0,-2-3-762 16</inkml:trace>
+  <inkml:trace contextRef="#ctx0" brushRef="#br0" timeOffset="153170.31">4740 8422 341 0,'-10'11'470'16,"-1"0"-79"-16,3-1-61 0,0-1-46 0,1-1-25 16,7-8-64-16,-12 13-27 0,12-13-40 0,-6 10-12 15,6-10-30-15,0 0 5 0,0 0-18 0,0 0 0 16,16 2-24-16,-5-8 3 0,1-2-8 16,3-1-6-16,-3-1-10 0,3-1-4 0,-3-1-1 15,0-1 20-15,-1 0 16 0,-3-1 13 0,-4-1 0 16,0 1 8-16,-2-1 14 0,-4 0 11 15,-2 2 5-15,-2 0 8 0,-4 2-12 0,-1 3-9 16,-1 1-20-16,-1 4-5 0,-3 0-6 0,1 5-15 16,1 2-9-16,-3 5-4 0,1 2-8 15,-1 6-7-15,1 0 1 0,3 5-6 0,-1 5 1 16,4 3-12-16,1-3 3 0,3 2-4 0,2 1-2 16,2-1 3-16,4-2-4 0,0 0 1 0,4 0-6 15,0-6 5-15,5 1-7 0,-3-8-1 16,4 0-8-16,3-4-1 0,-1-4 1 0,3-1-5 15,-3-5 2-15,3-2-2 0,-3-4 10 0,-1-1-7 16,1-3 11-16,-1-1-4 0,-1-1-2 0,-4-2 12 16,3-1-1-16,-3 2-9 0,0-2 7 15,0 0-1-15,-1 0 6 0,1-1-8 0,-2 0 6 16,0 0-8-16,3 1 0 0,-3 0 1 0,0 0 6 16,2 2-5-16,1 0 5 0,-1 1 3 15,-2 0 6-15,2 2-13 0,1 2 6 0,-9 8 6 16,12-12 13-16,-12 12 30 0,14-3 14 15,-14 3 16-15,13 4 6 0,-13-4-4 0,12 15-12 16,-6-4-4-16,-1 0-8 0,-1 1-6 0,0 3-9 16,0-1-9-16,-2 1-6 0,2 0-2 0,-2-2-7 15,0 2-4-15,0-3-3 0,-2-12 1 0,4 22 2 16,-4-22-3-16,5 15 3 0,-5-15 2 0,0 0-7 16,0 0 1-16,0 0-4 0,8-9-3 15,-8 9-1-15,6-25-1 0,-4 9-1 0,2-4 4 16,0-1-5-16,3-5 1 0,-3 0 16 15,4 1 11-15,-4 0 8 0,2 3 10 0,1 3 11 16,-1 0-8-16,-2 7-2 0,0-2-17 0,2 3 5 16,-6 11 6-16,13-13 32 0,-13 13 10 15,14-2-4-15,-14 2-17 0,17 14-1 0,-9-6-19 16,2 6-1-16,-1 1-12 0,-1 1-62 0,0 2-139 16,0 2-152-16,1-3-85 0,-1 0 13 15,0 2-70-15,-2-3-65 0,3-2-68 0,-1-1-520 0,-2-3-762 16</inkml:trace>
   <inkml:trace contextRef="#ctx0" brushRef="#br0" timeOffset="153460.57">5331 8266 497 0,'0'-23'515'0,"-2"4"-99"0,2-1-10 16,-2 1-47-16,2 0-42 0,-2 0-17 0,2 4-23 16,0 0-26-16,0 15-31 0,-2-22-37 0,2 22-19 15,2-13 50-15,-2 13 26 0,0 0-1 0,0 0-4 16,14 8-6-16,-7 4-1 0,-1-1-7 15,0 4 23-15,2 1 61 0,1 0-11 0,-1 1-17 16,0-2-46-16,2 0 18 0,1 0-43 0,-1-4 0 16,0-1-47-16,3-4 7 0,1-2-54 15,-1-6 29-15,1-3-54 0,5-7-84 0,-3-4-3 16,5-6 0-16,-2-2 0 0,-3-4 0 16,-1-1 0-16,-3 0 0 0,-2 3 0 0,-1 3 0 15,-5 4-15-15,2 0-354 0,-4 3-93 0,0 2-120 16,-2 14-79-16,-2-18 48 0,2 18 104 0,0 0-23 15,0 0-73-15,-10 8-615 0,8 2-863 0</inkml:trace>
   <inkml:trace contextRef="#ctx0" brushRef="#br0" timeOffset="154406.29">3431 10207 120 0,'-4'-19'568'0,"0"1"-145"0,0-3-93 0,2 0-47 16,2-2-43-16,2 0-20 0,0-3-32 0,4 2-9 15,-2 3-37-15,3 2-13 0,1 4-31 0,0 2 11 16,5 4 22-16,-1 4 23 0,2 5 35 15,3 7 16-15,2 3 26 0,-1 8 20 0,3 3 7 16,0 5-3-16,1 6-1 0,1 2-41 0,0 3 16 16,-1 1-53-16,1-1 22 0,0 0-35 15,0-3-28-15,1 0-23 0,1-3-20 0,0-2-16 16,0-6-12-16,0-3-11 0,2-2-8 0,2-3-22 16,-1-4-80-16,-1-5-95 0,2-4-115 0,0-4-116 15,4-8 70-15,7-9 0 0,-5-4 18 16,-2-6 6-16,-4-2 46 0,-7-3 12 0,-1-3 45 15,-8 7 23-15,-5 2 45 0,-4 1 7 0,0 5 52 16,-4 1 28-16,-2 2 53 0,0 1 34 16,0 2 35-16,-2 2 9 0,0 5 1 0,4 9 8 15,-7-12-4-15,7 12 5 0,0 0 2 16,0 0 9-16,0 0 21 0,7 20 17 0,1-8 19 16,2 3 1-16,7 3 19 0,1 5-8 0,5 3 40 15,6 3 59-15,-2 1 124 0,2 3-2 0,-2-1 28 16,0 0-40-16,-5 0-2 0,-3-4-82 0,-3 2-315 15,-3 1 0-15,-3-1 0 0,-4 0 0 16,-4 0 0-16,-2 0 0 0,-4 2 0 0,-6 0 0 16,-2 1 0-16,-5-3 0 0,-6 1 0 0,-4-1 0 15,-1-4 0-15,3-5 0 0,-2-4 0 16,0 0 0-16,6-4 0 0,1-2-56 0,-1-2-821 16,6 0-100-16,-1-8 28 0,4 1 107 0,12-2-580 15,-17-3-1106-15</inkml:trace>
-  <inkml:trace contextRef="#ctx0" brushRef="#br0" timeOffset="155695.35">5116 10278 568 0,'0'0'648'0,"-12"9"-126"16,12-9-63-16,-15 5-67 0,15-5-24 0,-14 1-63 15,14-1-48-15,0 0-61 0,0 0-32 0,-15-3-43 16,15 3-19-16,4-11-29 0,3 2-13 0,1-1-12 16,4-2-12-16,1 0-6 0,1-3-5 0,3 1-2 15,-5 2-4-15,3 1-4 0,-3 0-5 16,-2 1 4-16,1 3 2 0,-5-1 15 0,-6 8 11 15,8-9-6-15,-8 9 23 0,0 0 11 16,-16 4 19-16,5 3 16 0,-5 6 8 0,-1 2 0 16,-6 6 22-16,3 1-20 0,-7 7 11 0,2 2-37 15,0 3-13-15,3 3 20 0,1-1-22 16,4 5-15-16,1-1-4 0,5-4-17 0,3 1 2 16,4-1-16-16,4-6 0 0,0-2-5 0,4 0-9 15,2-3-2-15,5-4-6 0,-1-3-2 0,7-5-7 16,-3-2-14-16,5-5-5 0,1-4 6 0,1-2 1 15,0-4-8-15,1-4 6 0,1-3 4 16,2-4 3-16,-2-3 1 0,-3-1 3 0,3 0 3 16,-4-3 4-16,-3 2 23 0,-1 1-28 0,-1-1 27 15,1-2-30-15,-1 3 26 0,-1-2-26 16,-1 2 4-16,0-1 0 0,1 3 0 0,-3 3-5 16,0 4 2-16,1 0 3 0,-1 1 1 0,0 3 3 15,-10 6 3-15,19-1 3 0,-19 1 1 16,15 11-1-16,-9-3 3 0,-2 3 1 0,0 2-4 15,0 2 0-15,-2 0 5 0,-2 0-5 0,2 2 0 16,-2 1 9-16,-2-3-10 0,2 2 0 0,-2-2 3 16,2-1 3-16,0-14-2 0,-2 22 7 15,2-22-8-15,0 0 0 0,0 0-7 0,0 0-3 16,4-9 0-16,2-7-11 0,-1-6 5 0,3-4-3 16,0-7-5-16,2-1 4 0,-1-1 3 0,1 1 3 15,-2 3 3-15,1 4 10 0,-5 2-9 16,2 6 5-16,0 1-4 0,-6 3 8 0,4 1-8 15,-2 1 4-15,-2 13-7 0,4-15 18 16,-4 15-19-16,0 0 3 0,0 0 1 0,0 0-1 16,5 11-3-16,-5-11 3 0,6 22 2 0,0-10-2 15,-4 0 3-15,4 2-1 0,0-4 3 0,5 1 0 16,-3-2 1-16,4-2 4 0,1-3 4 0,-1 1-5 16,3-5 1-16,-1-2 2 0,1-4 5 15,-1-1-6-15,1-5 1 0,-1 1 1 0,-2-6 0 16,1-1 6-16,-5-1 7 0,0-4 27 0,1 2 23 15,-7 1 1-15,0-5 18 0,-4 2 2 16,0-4 5-16,-2-2-7 0,-3 2 5 0,-1 0 27 16,2 2 4-16,-2 2 19 0,3 3 3 0,-1 3 33 15,0 2-30-15,2 0-19 0,0 3-6 16,0 1-45-16,4 11-1 0,-7-12-42 0,7 12 0 16,0 0-3-16,0 0 3 0,0 25-22 0,3-9 38 15,1 3 7-15,-2 3-21 0,4 6-40 0,-2 1 0 16,2 8 0-16,0 0 0 0,5 3 0 0,-5-3 0 15,0 4 0-15,5-5 0 0,-3 0 0 16,0-5 0-16,-2-3 0 0,3-5 0 0,-3-4 0 16,-2-3 0-16,0-1 0 0,-4-15 0 0,4 15 0 15,-4-15 0-15,0 0 0 0,4-15 0 16,-8 3 0-16,2-6 0 0,0-1 0 0,-2-3 0 16,2-5 0-16,-2 0 0 0,2-1 0 15,0-2 0-15,2 2 0 0,2-1 0 0,0-1 0 16,4 2 0-16,0 2 0 0,2 3 0 0,1 1 0 15,-1 6 0-15,2 2 0 0,1 3 0 0,-1 3 0 16,2 7 0-16,-12 1 0 0,23 4 0 16,-13 3 0-16,3 4 0 0,-7 2 0 0,0 4 0 15,0 3 0-15,-1 0 0 0,-5 5 0 0,0-2 0 16,-5 6 0-16,3-1 0 0,-4-1 0 0,-2 2 0 16,2-3 0-16,-7 3 0 0,-1-2 0 15,1-5-386-15,3-1-281 0,-9-2-104 0,5-1-7 16,-3-3 189-16,1 1-44 0,-3-2-73 0,1 1-452 15,-3-1-805-15</inkml:trace>
-  <inkml:trace contextRef="#ctx0" brushRef="#br0" timeOffset="155909.35">5085 11098 731 0,'-33'27'875'0,"-2"2"-112"16,2-3-107-16,2-1-44 0,8-6-71 15,4-4-34-15,1-2-91 0,5-2-52 0,5-5 87 16,8-6 75-16,0 0-13 0,15-3-36 0,9-11-55 15,16-14-85-15,26-17-337 0,10-9 0 16,50-32 0-16,3-4 0 0,-1 1 0 16,2-1 0-16,0 1 0 0,-31 21 0 0,-14 10 0 15,-2 0 0-15,4 1 0 0,-7 7 0 16,-7 4 0-16,-5 5 0 0,-16 13-507 0,-15 8-315 0,-6 5-55 16,-8 7 143-16,-7 3 35 0,-16 5-123 15,15 5-360-15,-15-5-826 0</inkml:trace>
+  <inkml:trace contextRef="#ctx0" brushRef="#br0" timeOffset="155695.34">5116 10278 568 0,'0'0'648'0,"-12"9"-126"16,12-9-63-16,-15 5-67 0,15-5-24 0,-14 1-63 15,14-1-48-15,0 0-61 0,0 0-32 0,-15-3-43 16,15 3-19-16,4-11-29 0,3 2-13 0,1-1-12 16,4-2-12-16,1 0-6 0,1-3-5 0,3 1-2 15,-5 2-4-15,3 1-4 0,-3 0-5 16,-2 1 4-16,1 3 2 0,-5-1 15 0,-6 8 11 15,8-9-6-15,-8 9 23 0,0 0 11 16,-16 4 19-16,5 3 16 0,-5 6 8 0,-1 2 0 16,-6 6 22-16,3 1-20 0,-7 7 11 0,2 2-37 15,0 3-13-15,3 3 20 0,1-1-22 16,4 5-15-16,1-1-4 0,5-4-17 0,3 1 2 16,4-1-16-16,4-6 0 0,0-2-5 0,4 0-9 15,2-3-2-15,5-4-6 0,-1-3-2 0,7-5-7 16,-3-2-14-16,5-5-5 0,1-4 6 0,1-2 1 15,0-4-8-15,1-4 6 0,1-3 4 16,2-4 3-16,-2-3 1 0,-3-1 3 0,3 0 3 16,-4-3 4-16,-3 2 23 0,-1 1-28 0,-1-1 27 15,1-2-30-15,-1 3 26 0,-1-2-26 16,-1 2 4-16,0-1 0 0,1 3 0 0,-3 3-5 16,0 4 2-16,1 0 3 0,-1 1 1 0,0 3 3 15,-10 6 3-15,19-1 3 0,-19 1 1 16,15 11-1-16,-9-3 3 0,-2 3 1 0,0 2-4 15,0 2 0-15,-2 0 5 0,-2 0-5 0,2 2 0 16,-2 1 9-16,-2-3-10 0,2 2 0 0,-2-2 3 16,2-1 3-16,0-14-2 0,-2 22 7 15,2-22-8-15,0 0 0 0,0 0-7 0,0 0-3 16,4-9 0-16,2-7-11 0,-1-6 5 0,3-4-3 16,0-7-5-16,2-1 4 0,-1-1 3 0,1 1 3 15,-2 3 3-15,1 4 10 0,-5 2-9 16,2 6 5-16,0 1-4 0,-6 3 8 0,4 1-8 15,-2 1 4-15,-2 13-7 0,4-15 18 16,-4 15-19-16,0 0 3 0,0 0 1 0,0 0-1 16,5 11-3-16,-5-11 3 0,6 22 2 0,0-10-2 15,-4 0 3-15,4 2-1 0,0-4 3 0,5 1 0 16,-3-2 1-16,4-2 4 0,1-3 4 0,-1 1-5 16,3-5 1-16,-1-2 2 0,1-4 5 15,-1-1-6-15,1-5 1 0,-1 1 1 0,-2-6 0 16,1-1 6-16,-5-1 7 0,0-4 27 0,1 2 23 15,-7 1 1-15,0-5 18 0,-4 2 2 16,0-4 5-16,-2-2-7 0,-3 2 5 0,-1 0 27 16,2 2 4-16,-2 2 19 0,3 3 3 0,-1 3 33 15,0 2-30-15,2 0-19 0,0 3-6 16,0 1-45-16,4 11-1 0,-7-12-42 0,7 12 0 16,0 0-3-16,0 0 3 0,0 25-22 0,3-9 38 15,1 3 7-15,-2 3-21 0,4 6-40 0,-2 1 0 16,2 8 0-16,0 0 0 0,5 3 0 0,-5-3 0 15,0 4 0-15,5-5 0 0,-3 0 0 16,0-5 0-16,-2-3 0 0,3-5 0 0,-3-4 0 16,-2-3 0-16,0-1 0 0,-4-15 0 0,4 15 0 15,-4-15 0-15,0 0 0 0,4-15 0 16,-8 3 0-16,2-6 0 0,0-1 0 0,-2-3 0 16,2-5 0-16,-2 0 0 0,2-1 0 15,0-2 0-15,2 2 0 0,2-1 0 0,0-1 0 16,4 2 0-16,0 2 0 0,2 3 0 0,1 1 0 15,-1 6 0-15,2 2 0 0,1 3 0 0,-1 3 0 16,2 7 0-16,-12 1 0 0,23 4 0 16,-13 3 0-16,3 4 0 0,-7 2 0 0,0 4 0 15,0 3 0-15,-1 0 0 0,-5 5 0 0,0-2 0 16,-5 6 0-16,3-1 0 0,-4-1 0 0,-2 2 0 16,2-3 0-16,-7 3 0 0,-1-2 0 15,1-5-386-15,3-1-281 0,-9-2-104 0,5-1-7 16,-3-3 189-16,1 1-44 0,-3-2-73 0,1 1-452 15,-3-1-805-15</inkml:trace>
+  <inkml:trace contextRef="#ctx0" brushRef="#br0" timeOffset="155909.34">5085 11098 731 0,'-33'27'875'0,"-2"2"-112"16,2-3-107-16,2-1-44 0,8-6-71 15,4-4-34-15,1-2-91 0,5-2-52 0,5-5 87 16,8-6 75-16,0 0-13 0,15-3-36 0,9-11-55 15,16-14-85-15,26-17-337 0,10-9 0 16,50-32 0-16,3-4 0 0,-1 1 0 16,2-1 0-16,0 1 0 0,-31 21 0 0,-14 10 0 15,-2 0 0-15,4 1 0 0,-7 7 0 16,-7 4 0-16,-5 5 0 0,-16 13-507 0,-15 8-315 0,-6 5-55 16,-8 7 143-16,-7 3 35 0,-16 5-123 15,15 5-360-15,-15-5-826 0</inkml:trace>
   <inkml:trace contextRef="#ctx0" brushRef="#br0" timeOffset="157044.26">5811 10388 243 0,'0'0'343'0,"0"0"-92"0,0 0 10 15,-9-4-38-15,9 4 4 0,0 0-3 0,0 0-4 16,0 0 0-16,-12-5-1 0,12 5 10 16,0 0 2-16,0 0-3 0,0 0-17 0,0 0 1 15,0 0-9-15,-8-7 0 0,8 7-21 0,0 0-16 16,0 0-1-16,0 0 61 0,0 0 20 0,0 16 37 15,2-2-23-15,0 0 53 0,2 3 54 0,-2 2-19 16,2 2-60-16,-2-1 8 0,2 2-67 16,1 3-19-16,-5 0-60 0,4-1 4 0,-2-1-53 15,2-3-18-15,-2 1-23 0,2-3 9 16,2 0-63-16,-4-3-103 0,2-1-175 0,3-2-121 16,-1-1-119-16,2-3-150 0,-4 0-20 0,-4-8 118 15,15 11-76-15,-15-11-152 0,12 5-325 0,-12-5-762 16</inkml:trace>
   <inkml:trace contextRef="#ctx0" brushRef="#br0" timeOffset="158430.4">1780 10839 148 0,'-8'10'555'0,"1"-2"-141"0,7-8-86 16,-8 13-58-16,8-13-46 0,0 0-34 15,-4 10-5-15,4-10 30 0,10-5 7 0,5-4-4 16,5-7 15-16,13-9-30 0,7-5-2 0,24-20-25 15,8-3 0-15,5-7-21 0,45-35-7 0,-31 21-4 16,-15 14-22-16,3 1-15 0,-3 0-20 16,-4 4-9-16,-3 2-17 0,-5 7-12 0,-6 5-8 15,-15 12-11-15,-8 5-7 0,-10 8-11 0,-2 2-2 16,-5 3-10-16,-3 4-4 0,-3 0 1 16,1 4-23-16,-13 3-61 0,18 2-62 0,-18-2-62 15,13 14-68-15,-9-2-61 0,-2 3-88 0,0 2-153 16,2 3-330-16,-2 2-555 0</inkml:trace>
   <inkml:trace contextRef="#ctx0" brushRef="#br0" timeOffset="160490.4">6024 12130 332 0,'0'0'488'16,"-2"-18"-96"-16,2 18-56 0,-3-15-32 0,3 15-12 0,-2-13-13 15,2 13-7-15,-4-9-4 0,4 9-3 16,-8-10 12-16,8 10-21 0,-10-5-11 0,10 5-10 15,-19 3-24-15,5 1 15 0,-1 6-29 16,1 3-5-16,-7 5-14 0,0 1-4 0,-1 8-24 16,-5 3 4-16,2 7 39 0,2 1-35 0,0 1 30 15,5 3 2-15,-1 2-1 0,5-1-17 0,3 3-18 16,3 0-7-16,6-1 3 0,2-4-32 16,0 1-29-16,6-2-8 0,5 6-16 0,1-5-14 15,2 0 2-15,5-2-16 0,2-6 5 0,4-2-16 16,-1-2-2-16,5-4-8 0,-2-5 4 0,2-2-10 15,2-4-66-15,0-3-86 0,0-1-114 0,0-1-173 16,-4-6-157-16,-2 3-86 0,2-5 123 16,-3 3 10-16,-5-3-15 0,2 1-45 0,-5-4-509 15,-1 2-758-15</inkml:trace>
@@ -2225,7 +2226,7 @@
   <inkml:trace contextRef="#ctx0" brushRef="#br0" timeOffset="161652.4">6745 12921 161 0,'0'0'710'0,"19"8"-168"0,-19-8-75 16,16 4-35-16,-16-4-26 0,15 2 17 0,-15-2 16 15,0 0-12-15,10 5-36 0,-10-5-33 16,0 0-24-16,0 0-32 0,12 5-38 0,-12-5 58 15,0 0-19-15,0 0-52 0,0 0-34 0,-4 18-45 16,4-18-33-16,-14 19-4 0,5-9-46 0,-1 0-17 16,-2 0-14-16,3 0-24 0,-5-1-69 15,6-1-104-15,-9 2-137 0,7-3-118 16,-7 0-175-16,3-2-31 0,-1-1 52 0,3 0-17 0,0-4-80 16,12 0-519-16,-25 0-809 0</inkml:trace>
   <inkml:trace contextRef="#ctx0" brushRef="#br0" timeOffset="166131.15">7394 12305 166 0,'0'0'298'0,"0"0"-45"0,0 0-25 0,6-12-11 0,-6 12-48 16,0 0 7-16,0 0-33 0,6-9 5 15,-6 9-2-15,0 0-21 0,0 0 9 0,0-14-16 16,0 14 4-16,0 0-20 0,0 0 20 15,-4-19-24-15,4 19 7 0,0 0-13 0,-4-12 4 0,4 12-26 16,0 0 14-16,-6-15-23 0,6 15 10 16,-4-7-21-16,4 7 10 0,-10-11-21 0,10 11 8 15,-11-9-19-15,11 9 18 0,-10-8-17 0,10 8 16 16,-15-7-24-16,15 7 16 0,-12-7-22 16,12 7 15-16,-14-4-22 0,14 4 15 0,-13-2-21 15,13 2 16-15,0 0-18 0,-18 0 17 0,18 0-21 16,-15 2 13-16,15-2-14 0,-16 4 27 15,16-4-13-15,-17 4 24 0,17-4-18 0,-17 5 8 16,17-5 0-16,-12 7 26 0,12-7-22 0,-21 7 17 16,21-7-17-16,-14 8 17 0,14-8-12 0,-19 11 16 15,11-5-18-15,0 0 16 0,2 0-19 16,-3 2 10-16,-1-1-6 0,2 4-4 0,-1-4-8 16,3 3-6-16,0 1-3 0,0 0 0 0,2 1-5 15,-3 2 1-15,3 0 4 0,2-1-6 0,0 4-1 16,0-2 0-16,2 0-1 0,0 2-12 15,0-3 14-15,2 2-13 0,0-2 13 0,2 2-5 16,1-4 0-16,-1 2-7 0,0-2 18 0,2 1-11 16,0-1 10-16,5 0-14 0,-7-4 14 0,4 2-11 15,2 0 7-15,-1-4-9 0,1 2 11 0,2-2-8 16,-1-1 11-16,1 0-11 0,3-3 15 16,-3-1-10-16,2-1 9 0,-14 0-15 0,29 0 6 15,-14-1-1-15,-3-1 6 0,3 0 3 0,-1-3-6 16,-4 2 5-16,1-3-5 0,-1-1 5 0,0 2-5 15,3-4 3-15,-5 2-3 0,0-3 4 0,-1 2-7 16,1-2 0-16,-2-2 7 0,-2 0-5 0,4-2 5 16,-3 1-2-16,-1 0 4 0,0 0-3 15,-4-1 10-15,2-1 6 0,-2 2 13 0,2-1 11 16,-2 14 1-16,0-25 0 0,0 25-4 16,0-24 2-16,0 24 4 0,-2-24 13 0,2 24 10 15,-2-18-12-15,2 18 2 0,0-14 6 0,0 14 12 16,0 0-16-16,-4-16-4 0,4 16 16 15,0 0 1-15,0 0-6 0,0-16-14 0,0 16-6 0,0 0-11 16,0 0-7-16,0 0-3 0,-4-13-7 16,4 13-7-16,0 0-4 0,0 0-6 0,0 0 3 15,0 0 11-15,0 0 19 0,-9 11 3 0,9-11 12 16,-2 18 10-16,2-18-5 0,2 26 42 16,-2-10-20-16,0 0 20 0,4-1-28 0,-4 3 29 15,5 0-23-15,-1 1 12 0,0-2-12 0,0 1-1 16,2 0-16-16,2-3-8 0,-1 1 2 0,1-1-9 15,0-3-6-15,3 3-11 0,1-5 6 0,0 0-8 16,3-2 3-16,-3-2-5 0,3-3-7 16,1 0 0-16,3-3-13 0,-1 0-86 0,-1-4-97 15,2 2-133-15,-1 0-162 0,-3-2-146 0,1 2-56 16,-3-2 105-16,1 2-75 0,-14 2-719 0,19-2-1026 16</inkml:trace>
   <inkml:trace contextRef="#ctx0" brushRef="#br0" timeOffset="167236.37">7497 13135 56 0,'0'0'485'15,"0"0"-122"-15,-6-10-54 0,6 10-40 0,0 0-21 16,0 0-26-16,-4-11-9 0,4 11-29 0,0 0-3 15,0 0-10-15,-6-13-8 0,6 13-7 0,0 0 1 16,0 0-3-16,-2-12 3 0,2 12 4 16,0 0-6-16,0 0-3 0,0 0-16 0,0 0-13 0,-6-10-15 15,6 10-8-15,0 0-5 0,0 0 19 16,-4 17 21-16,4-17-23 0,-5 22 3 0,5-5-21 16,-4 2 12-16,4 0-19 0,4 1 11 0,-4 2-2 15,0 3-8-15,5-1-10 0,-5 1 22 0,2 3-18 16,0-2 12-16,2-3-43 0,-2 4 26 15,0-6-26-15,0 3 0 0,2-4-15 0,-4 2 0 16,4-2-20-16,-4-1 14 0,4-3-17 0,-4-1 10 16,0 2-21-16,2-3 19 0,-2-14-18 0,3 22 8 15,-3-22-26-15,0 18-5 0,0-18-29 0,0 0-9 16,2 12-78-16,-2-12 6 0,0 0-40 16,0 0 68-16,0 0 7 0,2-14 51 0,-2 14-28 15,0-23 46-15,0 23-28 0,2-26 17 0,-2 13 5 16,0-1 2-16,0-4 10 0,0 5 8 0,0-3 1 15,-2 0 4-15,2 2-11 0,-2 0 21 0,0 0-12 16,-1 2 10-16,3 12-6 0,-2-18 14 16,2 18-4-16,-8-15 17 0,8 15-21 0,-6-12 14 15,6 12-13-15,-10-2 12 0,10 2-8 0,0 0 0 16,-17 2 5-16,17-2-6 0,-12 8 3 0,12-8 1 16,-17 9-4-16,17-9 3 0,-10 12-3 0,10-12-3 15,-15 11 1-15,15-11 3 0,-8 5-6 16,8-5 7-16,0 0-1 0,-8 8 3 0,8-8 4 15,0 0-8-15,0 0 3 0,0 0-1 0,8-15-3 16,0 6 0-16,3 0-9 0,-3-3 8 0,0 0-9 16,7 0 14-16,-5-2-16 0,2 3 14 0,1 0-18 15,-3 1 17-15,3 1-14 0,-3 1 5 16,2 1-3-16,-1 1 16 0,1 3 2 0,-2-1 31 16,-10 4-3-16,21 2 25 0,-21-2-20 0,23 5 11 15,-23-5-21-15,18 9 18 0,-18-9-19 0,15 12 9 16,-7-8-11-16,0 3-20 0,-8-7 13 0,15 11-45 15,-15-11-99-15,12 15-62 0,-12-15-73 0,8 12-62 16,-8-12-63-16,7 14-101 0,-7-14-23 16,4 14-116-16,-4-14-309 0,4 16-579 0</inkml:trace>
-  <inkml:trace contextRef="#ctx0" brushRef="#br0" timeOffset="167582.39">7865 13852 357 0,'0'0'589'0,"-6"-12"-108"0,6 12-55 16,-8-5-39-16,8 5-20 0,-19-5 2 16,19 5-42-16,-22 5 35 0,9-3-76 0,1 3-8 15,-3 1-70-15,3 1-5 0,2 4-52 0,-3-2 1 16,3 2-43-16,2 0 2 0,-3 4-38 0,7-1 19 16,0-1-34-16,0 4 3 0,4-2-21 15,4-2 1-15,-4 2-17 0,6-2 12 0,2-2-24 16,5-1-27-16,-5-3-154 0,7 0-117 0,-1-1-86 15,3-4-71-15,1-2-92 0,-5-1-116 0,5-2-327 16,-3-1-633-16</inkml:trace>
+  <inkml:trace contextRef="#ctx0" brushRef="#br0" timeOffset="167582.38">7865 13852 357 0,'0'0'589'0,"-6"-12"-108"0,6 12-55 16,-8-5-39-16,8 5-20 0,-19-5 2 16,19 5-42-16,-22 5 35 0,9-3-76 0,1 3-8 15,-3 1-70-15,3 1-5 0,2 4-52 0,-3-2 1 16,3 2-43-16,2 0 2 0,-3 4-38 0,7-1 19 16,0-1-34-16,0 4 3 0,4-2-21 15,4-2 1-15,-4 2-17 0,6-2 12 0,2-2-24 16,5-1-27-16,-5-3-154 0,7 0-117 0,-1-1-86 15,3-4-71-15,1-2-92 0,-5-1-116 0,5-2-327 16,-3-1-633-16</inkml:trace>
   <inkml:trace contextRef="#ctx0" brushRef="#br0" timeOffset="167783.39">7867 13930 568 0,'0'0'645'0,"-16"-6"-101"0,16 6-60 16,-10-2-44-16,10 2-64 0,0 0 10 15,-13-6-90-15,13 6-10 0,0 0-98 0,0 0 1 0,-12-6-77 16,12 6 19-16,0 0-66 0,0 0 25 0,0 0-57 16,0 0 32-16,8-13-50 0,-8 13 20 15,0 0-129-15,15-3-50 0,-15 3-70 0,0 0-64 16,16 0-72-16,-16 0-38 0,10 2-4 0,-10-2-74 16,13 1-358-16,-13-1-434 0</inkml:trace>
   <inkml:trace contextRef="#ctx0" brushRef="#br0" timeOffset="168851.18">8070 13870 51 0,'0'0'346'0,"6"-8"-100"0,-6 8-70 0,9-8-32 16,-9 8-21-16,4-7-49 0,-4 7 6 0,10-10-20 15,-10 10-10-15,12-8-9 0,-12 8-11 0,11-11-1 16,-11 11-57-16,12-5 49 0,-12 5 0 15,8-6-38-15,-8 6 74 0,0 0 15 0,9-8 13 0,-9 8 3 16,0 0 19-16,6-11 63 0,-6 11-45 16,0 0 20-16,0 0 16 0,4-15 13 0,-4 15 0 15,0 0 4-15,-8-10-14 0,8 10 1 0,-6-7-18 16,6 7 15-16,-9-7-31 0,9 7 33 0,-14-6-54 16,14 6 30-16,0 0-54 0,-17-4 26 15,17 4-56-15,0 0 30 0,0 0-66 0,-12-4 42 16,12 4-58-16,0 0 44 0,0 0-56 0,0 0 38 15,0 0-48-15,-10-4 39 0,10 4-37 0,0 0 42 16,0 0-45-16,0 0 77 0,0 0-77 0,0 0 42 16,0 0-48-16,16 2 46 0,-16-2-45 0,15 9 47 15,-15-9-48-15,12 12 53 0,-6-3-27 16,2 1 60-16,-3 2-27 0,-3-2 47 0,2 4-28 16,0 1 29-16,-4 1-34 0,0-2 18 0,0 4-40 15,-4 0 24-15,0 0-41 0,2 0 6 0,-3-2-2 16,1-1-2-16,0 0 0 0,0-1 10 15,0-2-11-15,0-4 0 0,2 5 1 0,2-13-4 16,-9 14-4-16,9-14-6 0,0 0-1 0,-8 11-10 16,8-11 1-16,0 0-7 0,0 0-4 0,0 0 1 15,8-19 26-15,-3 11-61 0,1-4 24 0,6 0-49 16,-4-2 32-16,1 3-46 0,5-3 43 0,-6 2-31 16,3 0 47-16,1-1-24 0,-4 1 42 15,3 1-31-15,-3 1 45 0,0 1-35 0,3 0 48 16,-11 9-32-16,10-14 40 0,-10 14-37 0,12-12 41 15,-12 12-38-15,4-7 38 0,-4 7-35 0,0 0 37 16,0 0-48-16,5-12 41 0,-5 12-37 16,0 0 37-16,0 0-38 0,0 0 38 0,0 0-34 15,-9-8 33-15,9 8-35 0,0 0 39 0,0 0-35 16,0 0 30-16,0 0-37 0,0 0 33 0,0 0-35 16,-8-6 32-16,8 6-31 0,0 0 38 0,0 0-32 15,0 0 37-15,12-4-35 0,-12 4 27 16,15-4-34-16,-15 4 21 0,19-4-28 0,-19 4 21 15,20-2-13-15,-20 2 25 0,23-5-27 0,-23 5 29 16,19-1-25-16,-19 1 27 0,12-2-23 0,-12 2 29 16,0 0-26-16,10 0 27 0,-10 0-26 0,0 0 22 15,0 0-24-15,0 0 23 0,17 0-20 16,-17 0 19-16,0 0-20 0,0 0 22 0,0 0-25 16,0 0 36-16,8 3-34 0,-8-3 21 0,0 0-25 15,0 0 27-15,0 0-22 0,15 7 21 0,-15-7-22 16,0 0 29-16,14-2-25 0,-14 2 25 0,19-5-24 15,-19 5 22-15,16-4-23 0,-16 4 26 0,15-9-19 16,-15 9 23-16,12-7-26 0,-12 7 32 16,10-5-18-16,-10 5 44 0,0 0-34 0,0 0 43 15,13-5-49-15,-13 5 33 0,0 0-49 0,0 0 34 16,0 0-41-16,0 0 36 0,0 0-39 0,0 0 33 16,0 0-39-16,0 0 35 0,0 0-37 0,10 3 32 15,-10-3-45-15,0 0 22 0,0 0-28 16,0 0 26-16,0 0-19 0,0 0 25 0,0 0-18 15,0 0 35-15,17 0-21 0,-17 0 27 0,8-11-25 16,-8 11 28-16,10-12-30 0,-6 2 32 0,1-2-27 16,3 2 51-16,-6-2-12 0,6-4 71 0,-8 1-30 15,4-1 64-15,0-3-16 0,-4 3 32 16,5 0 4-16,-5 2 18 0,4 2 31 0,-4 12 18 16,0-23 50-16,0 23-31 0,0-15-53 0,0 15-38 15,0 0-42-15,0-17-22 0,0 17-20 0,0 0-4 16,0 0-22-16,0 0-3 0,0 0-14 0,0 16-23 15,0-16-77-15,0 24-104 0,0-9-175 0,0 2-154 16,0-1 3-16,2 5-19 0,-2 0-40 16,2-2 6-16,-2 1-65 0,2 0-339 0,2 0-620 15</inkml:trace>
   <inkml:trace contextRef="#ctx0" brushRef="#br0" timeOffset="169067.18">8655 13851 28 0,'0'0'455'0,"0"0"-115"15,0 0-55-15,8-9-52 0,-8 9-46 0,2-12 16 16,-2 12-22-16,5-15-16 0,-5 15-28 0,8-17-24 15,-8 17-23-15,12-19-15 0,-8 9-16 0,3 2 3 16,1-3 24-16,0 4 22 0,-4-3 23 0,2 5 27 16,-6 5 13-16,13-13-3 0,-13 13 60 15,8-9-22-15,-8 9 56 0,0 0 10 0,0 0 32 16,10 6-25-16,-10-6-14 0,0 19-35 0,0-5-10 16,0 2 15-16,-4-1-24 0,0 4-62 0,2 1-26 15,0-2-22-15,0 3-28 0,-2 0-94 0,4-2-156 16,-4 1-186-16,4-1-179 0,0 2-66 0,-4-4-61 15,4-1-668-15,-5 0-999 0</inkml:trace>
@@ -2233,12 +2234,12 @@
   <inkml:trace contextRef="#ctx0" brushRef="#br0" timeOffset="174359.4">8475 11987 274 0,'0'0'294'0,"0"0"-79"0,0 0-40 0,0 0-25 0,0 0-25 16,0 0-7-16,0 0-15 0,0 0-8 0,0 0 5 15,0 0-15-15,0 0 16 0,8-7 7 16,-8 7 12-16,0 0-7 0,0 0 15 0,7-9-11 15,-7 9 10-15,0 0-9 0,4-13 9 0,-4 13-18 16,0 0 9-16,4-15-17 0,-4 15 6 0,0 0-17 16,4-17 18-16,-4 17-20 0,0-14 11 0,0 14-29 15,-4-20 13-15,4 20-19 16,-4-21 12-16,4 21-6 0,-11-17 0 0,7 7 3 0,0 0-3 16,-4 4-2-16,2-3-14 0,-3 5-10 15,1-4 3-15,-6 7-6 0,1-1 4 0,13 2 1 16,-27 3-1-16,9 1 4 0,1 4-3 0,-3 1 4 15,3 0 0-15,-6 5 1 0,5-1 0 16,1 2-4-16,-1 2 4 0,1 0-6 0,3 0-5 16,1-1-4-16,3 1-6 0,2-1-1 0,3-2-3 15,1 0 3-15,4 1 7 0,4-1 16 16,5-2 15-16,-1 0 20 0,4-2-8 0,7-3 10 16,0 0-9-16,3-1 33 0,1-2-23 0,0-1-6 15,4 2-7-15,0 1 7 0,-5-2-10 0,1-1 8 16,-2 2-2-16,-3 1 4 0,5-2 8 0,-6 4 18 15,1-4 19-15,-3 6 13 0,1-3 10 16,-1 3 12-16,-3-3 1 0,-2 4 22 0,3-1-1 16,-3-1 21-16,-6 3-17 0,5-1-190 0,-5 0 0 15,-2 0 0-15,-2-11 0 0,-2 27 0 16,-2-14 0-16,-1-1 0 0,-3-1 0 0,-6 1 0 16,1-3 0-16,3 0 0 0,-9-1 0 0,7-3 0 15,-7 2 0-15,-1-6 0 0,1 2 0 16,0-6 0-16,-1 2 0 0,1-3 0 0,1 0 0 15,-1-2 0-15,2-2 0 0,3 1 0 0,-5-1 0 16,7 1-406-16,2-1-293 0,1 0-98 0,1 0-1 16,0 1 163 15,6-5-42 31,2 12-649-30,-9-22-987-1</inkml:trace>
   <inkml:trace contextRef="#ctx0" brushRef="#br0" timeOffset="177130.39">8471 11452 650 0,'4'-18'1211'0,"0"6"-708"15,0 0 120-15,-4 12 28 0,0 0-226 16,11 5-19-16,-3 10-219 15,-4 7 118-15,0 2-84 16,-4 5-69-16,4 1-55 16,3-1-75-1,-3-1-373 48,4-2-382-48</inkml:trace>
   <inkml:trace contextRef="#ctx0" brushRef="#br0" timeOffset="178033.41">8930 12322 502 0,'0'0'503'0,"0"0"-136"0,0 0-35 0,0 0-59 15,0 0 4-15,0 0 11 0,0 0 7 0,0 0-9 16,0 0-16-16,-6 18-9 0,2-6-16 0,-1 0-24 15,1-1-19-15,-4 3-25 0,6-1-25 16,-6 4-24-16,-1-4-22 0,1 4-23 0,-2-1-14 16,2 0-18-16,-7 3-7 0,3 0-2 15,1-2-29-15,-1-4-43 0,0 2-76 0,1-5-77 0,1 2-31 16,2-2-65-16,-1-5-34 0,-3 2-66 0,12-7-96 16,0 0-28-16,-14 0-344 0,14 0-471 15</inkml:trace>
-  <inkml:trace contextRef="#ctx0" brushRef="#br0" timeOffset="178321.35">9211 11874 623 0,'2'-16'580'0,"2"2"-108"15,0 0-60-15,-4 3-75 0,0 11-41 16,5-19-38-16,-5 19-34 0,4-13-26 0,-4 13-7 16,0 0-7-16,0 0 20 0,0 0-11 0,0 0-19 15,-4 19-16-15,4-6-21 0,0 2-15 16,0 3-21-16,-5 0-16 0,5 3-6 0,0 0-25 16,0 0 8-16,0 0-34 0,-4 0-2 0,4-2-4 15,-4 4-52-15,4-4-92 0,-2 0-95 16,2-2-102-16,0 1-69 0,-4-3-93 0,4-2-136 15,0-13-332-15,0 24-608 0</inkml:trace>
+  <inkml:trace contextRef="#ctx0" brushRef="#br0" timeOffset="178321.34">9211 11874 623 0,'2'-16'580'0,"2"2"-108"15,0 0-60-15,-4 3-75 0,0 11-41 16,5-19-38-16,-5 19-34 0,4-13-26 0,-4 13-7 16,0 0-7-16,0 0 20 0,0 0-11 0,0 0-19 15,-4 19-16-15,4-6-21 0,0 2-15 16,0 3-21-16,-5 0-16 0,5 3-6 0,0 0-25 16,0 0 8-16,0 0-34 0,-4 0-2 0,4-2-4 15,-4 4-52-15,4-4-92 0,-2 0-95 16,2-2-102-16,0 1-69 0,-4-3-93 0,4-2-136 15,0-13-332-15,0 24-608 0</inkml:trace>
   <inkml:trace contextRef="#ctx0" brushRef="#br0" timeOffset="178777.8">9027 12040 169 0,'-12'-18'574'15,"1"-1"-114"-15,3-5-105 0,0-1-37 0,0-3-34 16,6-2-36-16,2-2-10 0,2-6-12 16,6-1-13-16,4-8-14 0,3 5-23 0,3 0-20 15,7 0-21-15,2 2-22 0,6 1-19 0,17-9-8 16,-7 13-11-16,-6 6-4 0,3 3-1 0,1 5-9 16,-2 4-4-16,-6 5-2 0,-6 4-5 15,0 4 6-15,-8 4 11 0,1 4 30 0,-5 4 5 16,-3 4-4-16,-6 4-18 0,-2 1-11 0,-8 5-14 15,-2 4-4-15,-2 4-12 0,-7 2-10 16,-5 5-2-16,-3 1-5 0,-4-4-5 0,0 0 0 16,5-1-8-16,-5-9 3 0,8-1-2 0,0-5 3 15,3-3 0-15,1-3-2 0,3-2-5 16,2-1-5-16,1-6 1 0,9-3-5 0,0 0 0 16,0 0 0-16,0 0-2 0,-12-3 1 0,12 3-1 15,12-10 1-15,-12 10 3 0,19-9-6 0,-11 5 1 16,5 0 0-16,-13 4 8 0,29 0 11 15,-17 3 10-15,7 2 8 0,-3 0 6 0,-1 0-1 16,-1 4-2-16,3-3-4 0,-3 3-6 0,3-2-4 16,-3 3-3-16,1-1-2 0,1-2 0 15,-1 3-37-15,-3-3-99 0,2-2-108 0,-5 2-97 16,5-2-100-16,-6 2-69 0,-8-7-119 0,15 6-457 16,-15-6-721-16</inkml:trace>
   <inkml:trace contextRef="#ctx0" brushRef="#br0" timeOffset="178987.23">9697 11170 569 0,'4'-18'682'0,"0"3"-166"0,2 5-103 0,3 1-43 0,-1 6 8 16,6 0 24-16,-1 5 15 0,5 2 0 15,1 3 3-15,0 5-10 0,5 3-27 0,-1 6-29 16,0 3 104-16,0 3-54 0,-5 5-61 0,-1 1-51 15,-7 2-49-15,-6 6-41 0,0 2-37 16,-8 9-37-16,-4 2-37 0,-7 3-64 0,-7 17-199 16,-1 0-223-16,-8-2-238 0,-4-5-195 0,-2-1 17 15,-3-3-37-15,-9-5-546 0,-1-3-1069 0</inkml:trace>
   <inkml:trace contextRef="#ctx0" brushRef="#br0" timeOffset="201791.43">9908 12021 31 0,'0'0'398'16,"0"0"-55"-16,-4-16-29 0,4 16-41 15,0 0-26-15,-5-14 3 0,5 14-9 0,0 0-13 16,-4-14-6-16,4 14-16 0,0 0-15 0,0 0-18 0,-4-12-22 16,4 12-19-16,0 0 1 0,0 0 26 15,0 0 12-15,13-7 14 0,-13 7-2 0,18 7-6 16,-10-3-12-16,7 2-17 0,-3 2-19 16,3 0-14-16,-3 0-19 0,7 0-11 0,-7 3-9 15,3 0-10-15,-1-3-14 0,3 2-5 0,-3 2-12 16,3-5-10-16,-3 2-4 0,-1 0-4 15,-3-3-1-15,2 1-7 0,3 1-3 0,-7-4-53 16,0 2-53-16,-8-6-33 0,19 9-17 0,-19-9 16 16,14 2 14-16,-14-2 18 0,0 0 15 0,17-6 17 15,-17 6 15-15,4-11 13 0,-4 11 9 16,0 0 13-16,2-13 13 0,-2 13 20 0,0 0 17 16,0 0 21-16,0-14 10 0,0 14-1 0,0 0 0 15,0 0-19-15,0 0-1 0,0 0-15 0,0 0 8 16,0 0 14-16,0 0 23 0,0 0 4 15,0 0 1-15,8 18 1 0,-8-18-3 0,5 22 0 16,-1-13 11-16,0 5-10 0,-4-14 17 0,4 24-20 16,-4-11 35-16,0-13-28 0,0 27 15 15,0-13-51-15,-4-1 23 0,0 1-44 0,0-1 32 16,-1 1-78-16,1 0-105 0,-2-2-142 0,2-1 5 16,-4-2-65-16,8-9-53 0,-9 17-57 15,9-17-49-15,-4 12-32 0,4-12-32 0,0 0-283 16,0 0-458-16</inkml:trace>
   <inkml:trace contextRef="#ctx0" brushRef="#br0" timeOffset="202746.39">10313 12251 177 0,'0'0'619'0,"0"0"-118"0,4-15-95 0,-4 15-54 0,0 0-45 16,0 0-30-16,0-13-26 0,0 13-35 16,0 0-52-16,0 0-17 0,4-18-33 0,-4 18-21 15,8-21-19-15,-1 10-19 0,1 1-7 0,4-4-10 16,-1 3-5-16,1-1-9 0,-2 0-9 15,3-2-1-15,-3 4-4 0,2-2 1 0,-3 1 0 0,1-1-5 16,-2 4 4-16,-4-2 1 0,-4 10-3 16,11-16 49-16,-11 16 15 0,0-14 26 15,0 14 1-15,0 0 8 0,-6-12 2 0,6 12 0 0,-13-1-8 16,13 1 0-16,-23 7-8 0,15-1-7 16,-6 2-10-16,5-1-10 0,-5 4-10 0,2 1-9 15,3 2-8-15,-1-1-9 0,-2 3-6 16,5-2-9-16,-1 2-4 0,0 1-6 0,4 0 4 15,0-1-13-15,2-2 9 0,2-14-6 0,2 27 2 16,-2-15-1-16,4-2-7 0,4-2 4 0,-8-8-4 16,14 11-2-16,-14-11 1 0,21 4-15 15,-21-4 2-15,27 0 4 0,-17-4 3 0,7 1 9 16,-7-1-9-16,3-3 8 0,1 2 0 0,-2-1 5 16,-1 2-3-16,1 0 2 0,-1-3 0 0,-11 7 5 15,16-7-1-15,-16 7 8 0,10-5 3 16,-10 5 7-16,0 0 16 0,13-5 1 0,-13 5 2 15,0 0-13-15,0 0 3 0,0 0-14 0,0 0 5 16,0 0-14-16,0 0 5 0,0 0-9 0,0 0 7 16,0 0-9-16,0 13-12 0,0-13-36 15,0 0-35-15,0 0-14 0,0 0-20 0,0 0-10 16,0 0 0-16,0 0-1 0,0 0 21 0,0-13 15 16,4 2 24-16,0 0 3 0,2-3 24 15,-2-1-2-15,1 3 17 0,-1-2-2 0,4 3 16 16,-6 0-4-16,-2 11 10 0,8-19-9 0,-8 19 17 15,4-16-14-15,-4 16 11 0,5-12-12 0,-5 12 12 16,0 0-10-16,0 0 13 0,10-10-9 16,-10 10 14-16,0 0-3 0,0 0 1 0,8 5-8 15,-8-5 6-15,0 0-2 0,15 6 2 16,-15-6-5-16,0 0 6 0,16 6 1 0,-16-6-9 16,0 0 11-16,11 1 2 0,-11-1 13 0,0 0 9 15,12-4 2-15,-12 4 15 0,8-11 5 0,-8 11 9 16,6-19-2-16,-6 19 2 0,0-28-4 15,5 14-4-15,-5-2 0 0,0-4-8 0,0 3 3 16,0-1-2-16,-5 2 17 0,5 1 19 0,0 15 8 16,0-26 11-16,0 26-23 0,0-18 6 0,0 18-23 15,0 0 27-15,0 0 6 0,0 0 64 16,0 16-33-16,0 1 24 0,0 3-55 0,0 3 20 16,0 6-42-16,5-2 24 0,-5 3-44 0,4 4 19 15,-4-1-41-15,4 2 27 0,0 3-41 16,0-5 0-16,0 0-2 0,-2-5-12 0,2-2 6 15,1 1 27-15,-5-5-33 0,4-4 31 0,-4 0-32 16,4-5 31-16,-4-13-27 0,0 24-3 0,0-24-2 16,0 0-3-16,0 0-1 0,0 0-1 0,0 0 3 15,0 0-1-15,0-17 30 0,4 4-29 16,-2 1 25-16,2-3-32 0,0 0 25 0,0 1-32 16,1 0 34-16,5 0-35 0,-6-1 28 15,4 2-32-15,1 1 34 0,1 3-30 0,-2 0 29 16,0 2-29-16,3 2 31 0,-11 5-23 0,18-6 43 0,-18 6-25 15,13 2 31-15,-13-2-29 0,12 7 26 16,-12-7-44-16,6 14 32 0,-6-14-76 0,-2 25-117 16,0-10-167-16,-4 3-167 0,-6 3-30 15,3 2 58-15,-9 5-35 0,-1 0-58 0,-4 5-34 16,-3 1-458-16,-1-1-709 0</inkml:trace>
-  <inkml:trace contextRef="#ctx0" brushRef="#br0" timeOffset="202966.38">10462 12726 788 0,'-33'26'531'0,"-3"0"-1"16,5-4-49-16,9-3 11 0,-5-3 11 15,8-2 19-15,1-2-44 0,1 0-32 0,7-5-44 16,2 1-22-16,8-8 121 0,0 0 24 0,0 0-82 16,18 7-35-16,5-14-60 0,12-4-33 0,10-5-217 15,32-7-98-15,4-3 0 0,7 0 0 0,3-1 0 16,2 2 0-16,-2-2 0 0,-6 5 0 0,-4-2 0 16,-17 8 0-16,-15 2 0 0,-9 2 0 15,-5 3 0-15,-10 2 0 0,-9 4 0 0,-1-1-50 16,-15 4-523-16,0 0-125 0,0 0-36 0,-4 16 72 15,-11-3 128-15,-8 7 46 0,-8 2 27 0,-6 6-34 16,-2 1 10-16,-19 13-454 0,4-3-593 0</inkml:trace>
+  <inkml:trace contextRef="#ctx0" brushRef="#br0" timeOffset="202966.37">10462 12726 788 0,'-33'26'531'0,"-3"0"-1"16,5-4-49-16,9-3 11 0,-5-3 11 15,8-2 19-15,1-2-44 0,1 0-32 0,7-5-44 16,2 1-22-16,8-8 121 0,0 0 24 0,0 0-82 16,18 7-35-16,5-14-60 0,12-4-33 0,10-5-217 15,32-7-98-15,4-3 0 0,7 0 0 0,3-1 0 16,2 2 0-16,-2-2 0 0,-6 5 0 0,-4-2 0 16,-17 8 0-16,-15 2 0 0,-9 2 0 15,-5 3 0-15,-10 2 0 0,-9 4 0 0,-1-1-50 16,-15 4-523-16,0 0-125 0,0 0-36 0,-4 16 72 15,-11-3 128-15,-8 7 46 0,-8 2 27 0,-6 6-34 16,-2 1 10-16,-19 13-454 0,4-3-593 0</inkml:trace>
   <inkml:trace contextRef="#ctx0" brushRef="#br0" timeOffset="208858.42">7442 11896 198 0,'0'0'755'15,"10"4"-158"-15,-10-4-94 0,0 0-102 0,0 0-63 16,0 0-25-16,0 0-14 0,0 0-3 0,0 0-14 16,0 0-41-16,0 0-31 0,-4-18-41 0,4 18-27 15,-4-20-30-15,2 7-18 0,-3-3-19 0,5 0-32 16,-8-6 8-16,4 0-7 0,-2-6-1 15,2-1-4-15,-5-5-10 0,-3-3 2 0,2 2-2 16,-3-6 11-16,-1 1 22 0,-1 6 0 16,3 3 21-16,-5 1-11 0,1 1 76 0,-1 4-39 15,-1 0 26-15,-3 5-36 0,3 3 22 16,3 2-51-16,-8 1 19 0,5 1-45 0,-3 3 20 16,-2 1-43-16,1 4 24 0,3-1-37 0,-4 4 27 15,3 0-40-15,-3 2 32 0,0 2-37 0,0 0 35 16,1 1-34-16,-1 2 36 0,-2 4-23 15,2 0 29-15,3 3-31 0,-3 3 27 0,2 3-26 16,-2 0 31-16,1 2-30 0,1 3 5 0,5 3 1 16,-1-1 1-16,3 2 10 0,1-1-1 0,1-2 7 15,1-1 2-15,3 2 3 0,0-1 3 0,2 1 2 16,2-7-15-16,-1 1 23 0,-1 0-30 16,4-3 19-16,0-1-26 0,0 0 25 0,0-1-31 15,0-3 25-15,2-11-22 0,-4 20 20 0,4-20-25 16,-2 17 24-16,2-17-16 0,0 0 10 15,-4 15-12-15,4-15 39 0,0 0-47 0,0 0 22 16,-5 14-18-16,5-14-6 0,0 0 4 0,0 0 3 16,0 0-6-16,0 0 1 0,0 0-28 15,0 0-33-15,0 0-27 0,0 0 13 0,-14-4-53 16,14 4 13-16,-4-15-35 0,-4 5 16 0,3 1-9 16,-1-4 16-16,2 0 19 0,0 0 19 0,-4-1 17 15,1-2 16-15,1 1 10 0,4 1 9 0,-6 3 11 16,4-2 5-16,0 0 2 0,-1 4 6 15,-1-1 1-15,6 10 7 0,-4-17 1 0,4 17 6 16,-6-14 4-16,6 14-12 0,0 0 3 16,-8-12 0-16,8 12 3 0,0 0 23 0,0 0 16 15,0 26 19-15,0-10 2 0,0 0 34 0,2 5-33 16,0-1 42-16,2 2-45 0,-2-2 53 0,2 2-41 16,0-3 32-16,-2-1-36 0,2 0 22 15,1-3-40-15,1-2 24 0,0 1-25 0,2-5 26 16,1-2-31-16,1 0 19 0,4-4-32 15,1-6 21-15,1-1-33 0,3-2 17 0,2-6-90 0,1 1-63 16,1 0-121-16,0-6-102 0,-5 4-136 16,3-3 29-16,0 2-1 0,-1 2-60 0,-3 1-80 15,0 4-632-15,-1-1-868 0</inkml:trace>
   <inkml:trace contextRef="#ctx0" brushRef="#br0" timeOffset="210978.55">8242 12808 322 0,'0'0'555'0,"-9"-10"-121"0,9 10-18 16,0 0-50-16,0 0-11 0,-6-10 6 15,6 10 14-15,0 0 34 0,0 0-12 0,-4-10-32 16,4 10-36-16,0 0-40 0,0 0-25 0,0-19-46 16,0 19 16-16,8-18 31 0,3 11 13 15,-1-3-57-15,2-3-18 0,5 2-49 0,1 0-14 16,5-1-32-16,0-3-21 0,0 3-13 0,-5 2-9 16,5-2-20-16,0 1-13 0,-3 2 0 15,-1 1-9-15,-4-2-8 0,1 3-3 0,-1 2-5 16,-3-1-14-16,-2 2-59 0,-10 4-97 0,21-10-78 15,-21 10-139-15,10-5-142 0,-10 5-28 16,0 0 74-16,0 0-38 0,0 0-65 0,17 0-73 16,-17 0-384-16,0 0-688 0</inkml:trace>
   <inkml:trace contextRef="#ctx0" brushRef="#br0" timeOffset="211278.55">9164 12439 980 0,'0'0'836'0,"-11"-8"-175"0,11 8-132 0,-12-8-96 16,12 8-58-16,0 0-20 0,-6-10 19 0,6 10 46 16,6-11 20-16,2 4 38 0,7-4 92 0,5-2-92 15,7-2-53-15,0 1-64 0,10-6-56 0,-2 3-134 16,7-3-171-16,-3 3 0 0,-2 0 0 15,2 1 0-15,-1 2 0 0,-3-1 0 0,-4 5 0 16,0-2 0-16,2 1 0 0,-6 2 0 0,-5 2 0 16,-1 2 0-16,-2-1 0 0,-1 2 0 15,1 0 0-15,-7-1 0 0,3 2 0 0,-15 3 0 16,20-4-324-16,-20 4-432 0,0 0-129 0,15 4 25 16,-15-4 40-16,0 0-620 0,8 15-1126 15</inkml:trace>
@@ -2281,12 +2282,12 @@
     </inkml:brush>
   </inkml:definitions>
   <inkml:trace contextRef="#ctx0" brushRef="#br0">6683 6452 455 0,'0'0'485'16,"-23"-3"-116"-16,23 3-77 0,-22-2-62 0,22 2-33 15,-25 2-25-15,25-2-4 0,-23 4-15 16,23-4 19-16,-19 3-18 0,19-3-8 0,-14 3-32 16,14-3 26-16,0 0 46 0,0 0 13 0,0 0 15 15,14 4 3-15,3-7 4 0,14 1-1 16,10-2-12-16,13-3-21 0,8-1 10 0,33-5-42 15,0 1-13-15,9 0-13 0,7-1 6 0,-3 1-11 16,-1 1 22-16,1 3-46 0,1-3-15 0,-5 2-13 16,-5 2-10-16,-2 1-11 0,-21 1-8 0,-11 2-5 15,-3-1-6-15,-7 4-11 0,-7-3-2 16,-7 3-1-16,-10 0 4 0,-4 0 11 0,-8 0 23 16,-3 2 6-16,-16-2-7 0,19 7-13 0,-19-7-2 15,-4 11-11-15,-7-5-9 0,-1 1 1 16,-5 0-9-16,3 2-2 0,-9-2-16 0,5 1-57 15,-5-1-77-15,4 1-108 0,3-1-130 0,-1-1-79 16,3-1 45-16,-1 2-63 0,3 1-79 16,2-1-73-16,1 0-481 0,9-7-754 0</inkml:trace>
-  <inkml:trace contextRef="#ctx0" brushRef="#br0" timeOffset="1223.14">1860 7238 646 0,'7'-11'578'0,"-7"11"-148"0,0 0-56 0,6-10-99 16,-6 10-32-16,0 0-62 0,0 0-12 0,0 0-41 16,0 0 52-16,0 0-19 0,14 12 38 0,-10-1-12 15,1 4-11-15,1 4-16 0,0 3-1 16,0 4-1-16,0 3-21 0,3-1 0 0,-3 2-19 16,0-1-5-16,0 1 3 0,0-3-9 0,-1 2-7 15,1-1-16-15,-2-2-10 0,0-1-16 16,-2-4-9-16,2-1-9 0,-2-3-6 0,0 0 0 15,0-2-6-15,1-2 13 0,-3-13 66 0,2 22 1 16,-2-22-24-16,0 0-22 0,0 0-15 16,0 0-12-16,-13-7-7 0,9-6-9 0,-2-4-1 15,2-3-33-15,-3-6 36 0,1-1-35 0,2-1 36 16,-4 0-6-16,2-5 2 0,-5-1 5 0,5 2-1 16,-2 0 0-16,-2-1 19 0,3 6 3 0,-1 2 28 15,0-2 22-15,2 3-7 0,-1 2 0 16,1 2-14-16,2 3-17 0,2 1-9 0,-2 1-18 15,0 0-11-15,4 2-6 0,0 13-2 0,0-26-8 16,4 13 8-16,2-2-4 0,0 3-6 16,5-1 4-16,-1-1-3 0,2 0 4 0,5 3-2 15,-1-4-3-15,1 4 0 0,2-1 0 0,-5 3 0 16,3-1-3-16,-1 2-23 0,-1 1 31 16,-1 0-36-16,1 2 30 0,-3-1-61 0,0 2-28 15,1 0-96-15,-1 2-93 0,-12 2-97 0,19-3-29 16,-19 3 53-16,18 4-34 0,-18-4-47 0,13 15-19 15,-11-3-80-15,0 3-535 0,-2 0-715 16</inkml:trace>
+  <inkml:trace contextRef="#ctx0" brushRef="#br0" timeOffset="1223.13">1860 7238 646 0,'7'-11'578'0,"-7"11"-148"0,0 0-56 0,6-10-99 16,-6 10-32-16,0 0-62 0,0 0-12 0,0 0-41 16,0 0 52-16,0 0-19 0,14 12 38 0,-10-1-12 15,1 4-11-15,1 4-16 0,0 3-1 16,0 4-1-16,0 3-21 0,3-1 0 0,-3 2-19 16,0-1-5-16,0 1 3 0,0-3-9 0,-1 2-7 15,1-1-16-15,-2-2-10 0,0-1-16 16,-2-4-9-16,2-1-9 0,-2-3-6 0,0 0 0 15,0-2-6-15,1-2 13 0,-3-13 66 0,2 22 1 16,-2-22-24-16,0 0-22 0,0 0-15 16,0 0-12-16,-13-7-7 0,9-6-9 0,-2-4-1 15,2-3-33-15,-3-6 36 0,1-1-35 0,2-1 36 16,-4 0-6-16,2-5 2 0,-5-1 5 0,5 2-1 16,-2 0 0-16,-2-1 19 0,3 6 3 0,-1 2 28 15,0-2 22-15,2 3-7 0,-1 2 0 16,1 2-14-16,2 3-17 0,2 1-9 0,-2 1-18 15,0 0-11-15,4 2-6 0,0 13-2 0,0-26-8 16,4 13 8-16,2-2-4 0,0 3-6 16,5-1 4-16,-1-1-3 0,2 0 4 0,5 3-2 15,-1-4-3-15,1 4 0 0,2-1 0 0,-5 3 0 16,3-1-3-16,-1 2-23 0,-1 1 31 16,-1 0-36-16,1 2 30 0,-3-1-61 0,0 2-28 15,1 0-96-15,-1 2-93 0,-12 2-97 0,19-3-29 16,-19 3 53-16,18 4-34 0,-18-4-47 0,13 15-19 15,-11-3-80-15,0 3-535 0,-2 0-715 16</inkml:trace>
   <inkml:trace contextRef="#ctx0" brushRef="#br0" timeOffset="1371.14">2007 7393 124 0,'-8'12'620'0,"2"2"-127"0,0-3-123 0,1-1-50 0,5-10-55 15,-6 15-27-15,6-15-19 0,0 0-20 0,0 0-30 16,17-5-31-16,-5-3-23 0,3-3-26 15,1-2-17-15,3 0-22 0,-1 2-42 0,3-1-64 16,-4 1-68-16,-3 4-57 0,0-1-75 0,-1 4-12 16,-13 4-88-16,16 0-356 0,-16 0-284 0</inkml:trace>
-  <inkml:trace contextRef="#ctx0" brushRef="#br0" timeOffset="1521.67">2042 7688 61 0,'-8'20'589'0,"0"-4"-95"16,0 0-93-16,-1-3-15 0,3 0-69 0,0-1-27 15,2-1-60-15,4-11-6 0,-4 13-16 0,4-13 27 16,0 0-38-16,0 0-19 0,16-2-34 0,-3-5-32 16,-1-4-24-16,7-1-23 0,-1 0-69 15,1-6-77-15,6-1-102 0,-1 0-136 0,5-10-154 16,0 2-515-16,0-3-643 0</inkml:trace>
-  <inkml:trace contextRef="#ctx0" brushRef="#br0" timeOffset="1785.67">2516 7032 173 0,'-7'-11'653'0,"7"11"-136"0,-10-15-115 0,10 15-39 16,-6-19-53-16,6 19-2 0,4-26 3 15,0 12-8-15,4-3 4 0,5-2-15 0,-1 0-50 16,5-1-33-16,3-1-38 0,1-1-34 15,2 1-20-15,0 1-30 0,-1 3-17 0,-1 2-14 16,-2 1-11-16,-1 2-9 0,1-2-8 0,-5 7-8 16,1-2-9-16,-3 2-30 0,-1-1-56 15,-1 2-61-15,0 2-44 0,-10 4-46 0,15-9-46 16,-15 9-53-16,0 0-71 0,0 0-62 0,0 0-31 16,0 0-325-16,0 0-424 0</inkml:trace>
+  <inkml:trace contextRef="#ctx0" brushRef="#br0" timeOffset="1521.66">2042 7688 61 0,'-8'20'589'0,"0"-4"-95"16,0 0-93-16,-1-3-15 0,3 0-69 0,0-1-27 15,2-1-60-15,4-11-6 0,-4 13-16 0,4-13 27 16,0 0-38-16,0 0-19 0,16-2-34 0,-3-5-32 16,-1-4-24-16,7-1-23 0,-1 0-69 15,1-6-77-15,6-1-102 0,-1 0-136 0,5-10-154 16,0 2-515-16,0-3-643 0</inkml:trace>
+  <inkml:trace contextRef="#ctx0" brushRef="#br0" timeOffset="1785.66">2516 7032 173 0,'-7'-11'653'0,"7"11"-136"0,-10-15-115 0,10 15-39 16,-6-19-53-16,6 19-2 0,4-26 3 15,0 12-8-15,4-3 4 0,5-2-15 0,-1 0-50 16,5-1-33-16,3-1-38 0,1-1-34 15,2 1-20-15,0 1-30 0,-1 3-17 0,-1 2-14 16,-2 1-11-16,-1 2-9 0,1-2-8 0,-5 7-8 16,1-2-9-16,-3 2-30 0,-1-1-56 15,-1 2-61-15,0 2-44 0,-10 4-46 0,15-9-46 16,-15 9-53-16,0 0-71 0,0 0-62 0,0 0-31 16,0 0-325-16,0 0-424 0</inkml:trace>
   <inkml:trace contextRef="#ctx0" brushRef="#br0" timeOffset="2055.3">2652 6806 375 0,'0'0'492'0,"-14"11"-96"16,14-11-29-16,-11 6-47 0,11-6-4 15,0 0-27-15,-10 8-20 0,10-8-14 0,0 0-28 16,0 0-29-16,-8 7-32 0,8-7-26 0,0 0 40 16,-6 15 66-16,6-15 26 0,-3 24 10 0,1-8-2 15,0 3-10-15,0 6 7 0,-2 3 67 16,2 0 17-16,-2 3-28 0,0 0-33 0,2 2-35 15,0-2-45-15,0 2-35 0,2-2-52 16,0 3 2-16,2-2-46 0,2-1 3 0,2-2-34 16,2-1 1-16,5 1-59 0,1-5 0 0,3-1 0 15,1-5 0-15,1-3 0 0,4-3 0 0,-3-2 0 16,5-5-48-16,-4-3-304 0,1-4-127 16,-1-1-180-16,2-4-102 0,0-2 103 0,-5-3-15 15,1-3-67-15,-1-1-473 0,-3-1-855 0</inkml:trace>
-  <inkml:trace contextRef="#ctx0" brushRef="#br0" timeOffset="2256.28">3022 6941 408 0,'0'0'816'0,"-2"-18"-131"0,2 18-91 16,0-15-68-16,0 15-40 0,0 0-50 0,2-21-82 15,2 9-11-15,2-1-45 0,5-2-34 0,1-7-44 16,7 0-37-16,4-1-5 0,-3 1-7 15,3 1-45-15,0 0-29 0,1 2-54 0,-1 1-103 16,-4 5-121-16,-3-1-156 0,-1 4-5 16,-3 2-55-16,-1 1-16 0,-11 7-60 0,12-7-89 15,-12 7-529-15,0 0-741 0</inkml:trace>
+  <inkml:trace contextRef="#ctx0" brushRef="#br0" timeOffset="2256.27">3022 6941 408 0,'0'0'816'0,"-2"-18"-131"0,2 18-91 16,0-15-68-16,0 15-40 0,0 0-50 0,2-21-82 15,2 9-11-15,2-1-45 0,5-2-34 0,1-7-44 16,7 0-37-16,4-1-5 0,-3 1-7 15,3 1-45-15,0 0-29 0,1 2-54 0,-1 1-103 16,-4 5-121-16,-3-1-156 0,-1 4-5 16,-3 2-55-16,-1 1-16 0,-11 7-60 0,12-7-89 15,-12 7-529-15,0 0-741 0</inkml:trace>
   <inkml:trace contextRef="#ctx0" brushRef="#br0" timeOffset="2458.27">3169 6745 72 0,'-8'12'748'0,"8"-12"-171"15,0 0-96-15,-9 12-68 0,9-12-32 0,0 0-31 16,0 0-16-16,-6 10-18 0,6-10-12 16,0 0 12-16,-6 20 26 0,6-6-26 0,0 3-21 15,-2 1-71-15,2 6-6 0,-2 0 26 0,2 6-1 16,-2-1-61-16,0 2-37 0,0 0-24 0,0 0-28 16,-1-1-16-16,1 0-13 0,0-1-33 15,0-2-107-15,2-4-155 0,0 0-205 0,0-2-119 16,2-2 64-16,-2-3-102 0,4-1-134 0,1-4-471 15,1-1-842-15</inkml:trace>
   <inkml:trace contextRef="#ctx0" brushRef="#br0" timeOffset="2977.23">3454 6915 767 0,'4'-15'801'0,"-2"4"-107"0,-2 11-73 0,4-22-44 15,-4 22-56-15,5-16-84 0,-5 16-70 0,2-12-68 16,-2 12-62-16,0 0-51 0,0 0-35 0,6-10 25 16,-6 10 32-16,6 8-3 0,-6-8-26 0,10 18-33 15,-3-6-28-15,-1 3-21 0,0 2-11 16,0 1-23-16,-2 2-6 0,3 0-11 0,-1 3-10 16,-2-1 2-16,-2 0-9 0,0-2-4 15,0 1 2-15,0-2 0 0,-2-3 57 0,0 2 67 16,0-6 4-16,0-12 47 0,0 25-19 0,0-25 0 15,-2 15-171-15,2-15-12 0,0 0 0 0,0 0 0 16,-8-7 0-16,4-6 0 0,2-4 0 16,0-5 0-16,2-1 0 0,0-10 0 0,2-1 0 15,2-3 0-15,0-3 0 0,6-7 0 0,-1 5 0 16,3 5 0-16,-2 3 0 0,3 4 0 0,-1 3 0 16,-2 4 0-16,1 4 0 0,-3 4 0 0,2 1 0 15,-1 3 0-15,-1 2 0 0,-8 9 0 16,12-10 0-16,-12 10 0 0,0 0 0 0,11 6 0 15,-11-6 0-15,0 20 0 0,-5-6 0 16,1 1 0-16,-2 1 0 0,-2 2 0 0,0-2 0 16,-1 5 0-16,-1-4 0 0,2-2 0 0,-1 0 0 15,3-1 0-15,-2-2 0 0,4-1 0 0,-2 0 0 16,6-11 0-16,-4 19 0 0,4-19 0 0,4 15 0 16,4-9 0-16,-8-6 0 0,23 6 0 0,-9-6 0 15,5 0 0-15,-1-3 0 0,1-2 0 16,0 2-188-16,1-2-430 0,-1-2-142 0,-1 3-43 15,-1-2 153-15,-3-1-21 0,1-1-58 16,-1-2-467-16,-3-1-840 0</inkml:trace>
   <inkml:trace contextRef="#ctx0" brushRef="#br0" timeOffset="3278.12">3872 6505 731 0,'-6'-15'562'0,"-1"0"-70"0,1 0-50 15,0 4-27-15,0-2-32 0,2 1-18 16,-1-1-37-16,3 4-68 0,2 9-54 0,2-26-40 15,3 12-29-15,5 1-30 0,4-2-20 0,7 2-17 16,2 2-12-16,2 2-19 0,4 3 1 16,-1 3-15-16,3 5 2 0,-2 2 33 0,4 3 41 0,-4 7 57 15,-2 4 43-15,-6 6 59 0,-4 3 183 16,-9 4-4-16,-4 5 13 0,-6 5-38 0,-6 6-27 16,-7 5-60-16,-3 0-318 0,-9 17-9 15,-2 1 0-15,4-16 0 0,2-7 0 0,5-2 0 16,-1-3 0-16,2-2 0 0,7-6 0 0,0-4 0 15,4-4 0-15,1-3 0 0,3-2 0 0,0-4 0 16,4 0-2-16,-2-4-524 0,0-13-78 16,2 18-71-16,-2-18-44 0,0 0 192 0,0 0-20 15,-8 12-3-15,8-12-32 0,-16 0-25 0,1 2-284 16,1 0-530-16</inkml:trace>
@@ -2297,7 +2298,7 @@
   <inkml:trace contextRef="#ctx0" brushRef="#br0" timeOffset="5329.14">3328 7943 343 0,'0'0'501'15,"0"0"-102"-15,0 0-70 0,0 0-23 0,0 0-22 16,-4-11-19-16,4 11-15 0,0 0-31 0,0 0-30 15,0 0-18-15,4-13-21 0,-4 13-20 16,12-17-16-16,-3 6-26 0,1 0 4 0,0-1-12 16,3-1-7-16,1-1-30 0,1 2 3 0,-3 0-21 15,3 0 6-15,-1 3-16 0,-2-2 6 16,1 3-32-16,-1 0-17 0,-1 1-36 0,-3 0-34 16,0 2-14-16,-8 5-41 0,13-10-38 0,-13 10-48 15,0 0-52-15,0 0-41 0,0 0 11 16,0 0-56-16,0 0-239 0,0 0-175 0</inkml:trace>
   <inkml:trace contextRef="#ctx0" brushRef="#br0" timeOffset="5478.14">3502 7739 725 0,'0'0'176'0,"0"0"66"0,0 0-3 0,-13 6-2 16,13-6-4-16,0 0 7 0,0 0-10 15,-8 6 17-15,8-6 17 0,0 0 9 0,-8 15 13 16,8-15 4-16,-6 24-18 0,3-9-23 0,-1 3-20 16,2 1-28-16,0 4-8 0,0-1-39 15,-2 5-24-15,2 0-32 0,-2 0-12 0,4 1-23 16,-2-1-12-16,0 2-20 0,2-6-61 0,0 2-115 15,2-5-104-15,-2 3-69 0,4-4-89 0,0-2-108 16,0-4-93-16,0-1-383 0,5-5-645 16</inkml:trace>
   <inkml:trace contextRef="#ctx0" brushRef="#br0" timeOffset="5982.32">3715 7927 1015 0,'6'-18'661'16,"0"8"-94"-16,-2 0-67 0,-4 10-43 15,6-18-43-15,-6 18-33 0,4-14-39 0,-4 14-35 0,0 0 15 16,0 0-43-16,0 0-1 0,7 15-32 16,-9-1 13-16,0 2-46 0,2 1-35 0,0 2-39 15,0 1-28-15,0 0-22 0,0-2-19 0,-3 1-18 16,6 1-1-16,-3-4-13 0,2-2-5 0,0 0-8 16,-2-14 14-16,2 22-7 0,-2-22 20 15,0 0-2-15,2 12 14 0,-2-12-23 0,0 0 10 16,0-16 1-16,0 16 15 0,0-30 15 15,0 11 0-15,2-4-13 0,-2-2-3 0,0-6-17 16,4-6-38-16,0-2 24 0,2-2-29 0,1-7 15 16,3-1-23-16,2 7 16 0,1-2 57 0,-1 11-32 15,1 1 19-15,-3 10-42 0,0 0 25 16,-2 7-28-16,3 2 32 0,-3 3-45 0,-8 10 0 16,17 2 0-16,-9 7 0 0,-4 5 0 0,0 3 0 15,-4 7 0-15,0 4 0 0,0 5 0 16,-4 5 0-16,2 0 0 0,-4 0 0 0,0-1 0 15,1-2 0-15,-1-5 0 0,2-4 0 0,-2 0 0 16,4-7 0-16,-2-2 0 0,2-2 0 0,2-15 0 16,-5 17 0-16,5-17 0 0,0 0 0 15,13-4 0-15,-5-3 0 0,2-5 0 0,3 0 0 16,1-2 0-16,3-1 0 0,-5 3 0 0,1 1 0 16,1-1 0-16,-1 1 0 0,-1 1 0 15,0 1 0-15,-1 0 0 0,1 2 0 0,-2 2-424 16,1-3-456-16,-11 8-45 0,18-7 149 0,-18 7 33 15,17-9-665-15,-9 3-1087 0</inkml:trace>
-  <inkml:trace contextRef="#ctx0" brushRef="#br0" timeOffset="6213.93">4186 7492 728 0,'-2'-19'626'0,"0"3"-104"0,2 0-41 0,0-1-45 15,2 2 4-15,2 2-22 0,2-1-17 0,2 0-29 16,5 2 14-16,3 4-37 0,3 0-8 15,2 2 45-15,-1 6 25 0,7 3 9 0,-2 3-40 16,4 7-8-16,-4 4-39 0,-2 4-22 0,-5 5-233 16,-1 4-78-16,-7 5 0 0,-4 2 0 0,-6 5 0 15,-2 9 0-15,-8 2 0 0,-3-1 0 16,-5 2 0-16,-11 16 0 0,-2-5 0 0,-2-1 0 16,2-14 0-16,4-8 0 0,-6-2 0 0,-11 10 0 15,7-9-492-15,4-9-314 0,0-2-77 0,-2 0 89 16,2-6 7-16,2-1-617 0,4-4-1081 15</inkml:trace>
+  <inkml:trace contextRef="#ctx0" brushRef="#br0" timeOffset="6213.92">4186 7492 728 0,'-2'-19'626'0,"0"3"-104"0,2 0-41 0,0-1-45 15,2 2 4-15,2 2-22 0,2-1-17 0,2 0-29 16,5 2 14-16,3 4-37 0,3 0-8 15,2 2 45-15,-1 6 25 0,7 3 9 0,-2 3-40 16,4 7-8-16,-4 4-39 0,-2 4-22 0,-5 5-233 16,-1 4-78-16,-7 5 0 0,-4 2 0 0,-6 5 0 15,-2 9 0-15,-8 2 0 0,-3-1 0 16,-5 2 0-16,-11 16 0 0,-2-5 0 0,-2-1 0 16,2-14 0-16,4-8 0 0,-6-2 0 0,-11 10 0 15,7-9-492-15,4-9-314 0,0-2-77 0,-2 0 89 16,2-6 7-16,2-1-617 0,4-4-1081 15</inkml:trace>
   <inkml:trace contextRef="#ctx0" brushRef="#br0" timeOffset="6546.01">1784 9493 1476 0,'-29'10'995'0,"4"-3"-201"0,7 1-160 0,1-5-162 16,17-3-86-16,0 0-81 0,0 0-51 0,29-30-36 16,31-8 65-16,14-10 109 0,69-42 41 15,16-2 4-15,19-5-10 0,12-1-51 0,13-1-67 16,14-2-309-16,8 2 0 0,4 3 0 15,5 5 0-15,-7 4 0 0,-7 8 0 0,-14 7 0 0,-18 9 0 16,-16 11 0-16,-52 16 0 0,-29 11 0 16,-11 6 0-16,-22 4 0 0,-12 4 0 0,-11 6 0 15,-14 1 0-15,-5 4-297 0,-16 0-199 0,8 6-192 16,-16 3-123-16,-6 4 81 0,-13 5-78 16,-12 9-576-16,-26 9-1053 0</inkml:trace>
   <inkml:trace contextRef="#ctx0" brushRef="#br0" timeOffset="32754.97">19737 5534 239 0,'0'0'355'0,"0"0"-81"0,0 0-41 0,0 0 1 15,0 0-36-15,0-13-1 0,0 13-18 0,0 0-6 16,0 0-19-16,0 0-22 0,0 0 7 15,0 0-22-15,2-14 7 0,-2 14-21 0,0 0 13 16,0 0-11-16,0 0 7 0,0 0-8 0,0 0-2 16,0 0-3-16,0 0-17 0,0 0 0 0,0 0-14 15,0 0-2-15,4-11-16 0,-4 11 3 0,0 0-23 16,0 0 11-16,0 0-15 0,0 0 11 16,0 0-10-16,0 0 11 0,0 0 27 0,0 0 30 15,0 0 31-15,6 8 7 0,-6-8 7 0,0 0 7 16,2 17 5-16,-2-17 1 0,2 17-1 15,-2-17-4-15,-2 22-7 0,2-9 1 0,-2 2 52 16,0 0-22-16,-2 2-18 0,2 4-23 0,0 0-18 16,0 2-7-16,-2 2-8 0,0 2-13 15,2 3-3-15,2-1 8 0,-3 1-5 0,3 0 8 16,-2 0-14-16,2 0 26 0,0 0-16 0,0-1 23 16,0 1-39-16,0 0 28 0,0 0-20 15,0-2 33-15,0 2-19 0,-2-2-9 0,2 1 4 16,-2-1-10-16,0-6-80 0,0 3 0 0,0-1 0 15,0-1 0-15,0 0 0 0,0 3 0 0,-2-4 0 16,2-3 0-16,0 2 0 0,0-2 0 0,-1-2 0 16,1-2 0-16,0 0 0 0,0 0 0 15,2-4 0-15,0-11 0 0,-2 25 0 0,2-25 0 16,-2 17 0-16,2-17 0 0,0 0 0 0,-2 18 0 16,2-18 0-16,0 0 0 0,-2 14 0 15,2-14 0-15,0 0 0 0,0 0 0 0,-2 12 0 16,2-12 0-16,0 0 0 0,0 0 0 0,0 0 0 15,-15-11-515-15,11 1-321 0,0-2-43 0,0-1 132 16,4-4 36-16,0 0-90 0,0-1-372 16,4-4-816-16</inkml:trace>
   <inkml:trace contextRef="#ctx0" brushRef="#br0" timeOffset="33838.04">19824 5513 123 0,'0'0'417'0,"0"0"-86"15,0 0-69-15,0 0 0 0,-15-2-19 0,15 2-10 16,0 0-4-16,0 0-47 0,0 0 5 0,-14-2-26 16,14 2 2-16,0 0-20 0,0 0 0 0,0 0-11 15,-13-2-7-15,13 2 3 0,0 0-12 16,0 0 15-16,0 0-12 0,0 0 8 0,0 0-16 15,-14-3-2-15,14 3-12 0,0 0-3 0,0 0-23 16,0 0-14-16,0 0-7 0,0 0-15 16,0 0-10-16,0 0-5 0,0 0-7 0,0 0 4 15,0 0-2-15,0 0 11 0,0 0 24 16,18 7 13-16,1-5-5 0,2-1 3 0,8 2 0 16,4-2 0-16,8 0 0 0,5-1 3 0,11 0-4 15,8 0-4-15,3 0 3 0,31 0-19 16,4-1 3-16,3 1-16 0,1-1 1 0,3 0-11 15,6 1 5-15,1-3-7 0,3 3-4 0,4 1 4 16,-2 1-6-16,-2 0-3 0,2-1 1 0,-4 2-12 16,0 0 10-16,-9-2-3 0,-1 4 3 0,-9-3 13 15,-20-1-18-15,-15-1 25 0,-4 0-30 16,-5 0 30-16,-11-1 53 0,-3 0 70 0,-10 0 25 16,-2 1 40-16,-6 0 18 0,-2-2 19 0,-1 1 1 15,-3 1-20-15,-3 0-12 0,-14 0-45 16,27 0-6-16,-27 0-60 0,21 0 3 0,-21 0-40 15,16 0-2-15,-16 0-36 0,0 0-31 0,17 0-2 16,-17 0 0-16,0 0 0 0,0 0 0 16,16 1 0-16,-16-1 0 0,0 0 0 0,0 0 0 15,0 0 0-15,15 2 0 0,-15-2 0 0,0 0 0 16,0 0 0-16,0 0 0 0,0 0 0 0,0 0 0 16,14 1 0-16,-14-1 0 0,0 0 0 15,0 0 0-15,0 0 0 0,0 0 0 0,0 0 0 16,0 0 0-16,0 0 0 0,0 0 0 0,0 0 0 15,15 1 0-15,-15-1 0 0,0 0 0 16,0 0 0-16,0 0 0 0,0 0 0 0,0 0 0 16,0 0 0-16,0 0 0 0,0 0 0 0,4 12 0 15,-4-12 0-15,-2 18 0 0,2-18 0 0,-2 25 0 16,0-9 0-16,2 3 0 0,-2 1 0 16,2 1 0-16,0 3 0 0,-2 5 0 0,2-1 0 15,0 2 0-15,0 3 0 0,0-2 0 0,2 3 0 16,-2-1 0-16,2 1 0 0,-2 1 0 0,2 0 0 15,-2-1 0-15,0 0 0 0,0 1 0 16,0 0 0-16,0-2 0 0,0 0 0 0,0 1 0 16,0-2 0-16,0-2 0 0,0 0 0 0,0 0 0 15,0-6 0-15,0 0 0 0,0-2 0 16,0-2 0-16,0 1 0 0,0-4 0 0,2 0 0 16,-2-1 0-16,0-16 0 0,0 26 0 0,0-26-201 15,-2 22-230-15,2-22-175 0,0 16-169 0,0-16-13 16,0 0 25-16,-2 15-702 0,2-15-1157 15</inkml:trace>
@@ -2321,7 +2322,7 @@
   <inkml:trace contextRef="#ctx0" brushRef="#br2" timeOffset="109577.63">7266 6637 78 0,'0'-16'501'0,"0"16"-100"15,0 0-56-15,0 0-37 0,0-18-3 0,0 18-49 16,0 0-2-16,0 0-26 0,-2-15-8 0,2 15-19 15,0 0-19-15,0 0-17 0,0 0-20 16,0-13-9-16,0 13-8 0,0 0 3 0,0 0-33 16,0 0 2-16,0 0 6 0,0 0 27 0,-6 10 24 15,6 5 10-15,-4 2 1 0,-3 2-5 16,3 8-8-16,-4 6-6 0,0 4-16 0,-3 8-18 16,-1 2 16-16,2 3-3 0,-3-2-15 0,3 0-14 15,0 0-18-15,-1-1-8 0,3-2-18 0,2-6-6 16,2-2-11-16,-5-2 2 0,5-4-12 15,2-3 0-15,-2 0-12 0,4-6 0 0,-2-2-10 16,0-3 10-16,2-2-7 0,0-15 1 0,0 25-2 16,0-25 5-16,0 0 6 0,0 0-14 15,14-5 3-15,-10-5-5 0,1-4 2 0,-1-5-4 16,2-3 2-16,2-5-7 0,-4-1 3 0,5-6-1 16,-3-2 0-16,2-2-1 0,-2 3 3 15,3-2 1-15,-1-1-5 0,-4 2 7 0,2-2-11 16,0 1 9-16,1 0-1 0,-3 1 3 0,0 3-3 15,0 3 2-15,-2 2-3 0,0-1 7 0,0 7-4 16,0 2 6-16,0 2 0 0,0 1 7 16,-2 2 11-16,2 1 3 0,-2 14-15 0,0-22 0 15,0 22-4-15,0 0-3 0,0-15-1 0,0 15 2 16,0 0 6-16,-8 16 12 0,4-5 5 0,2 0-2 16,-2 4 0-16,0 0-5 0,-3 3 1 15,5-1-1-15,0 0-4 0,0-1-5 0,2 1 7 16,2-2-11-16,0 0 10 0,3-2-10 15,3 1 5-15,-2-4 0 0,4-1 3 0,5-3-8 16,-3-1 12-16,5-4-11 0,-1-2 1 0,1-3-4 16,1-2 6-16,1 1-10 0,-5-5 11 0,3-1-12 15,-3-1 8-15,-1-3-8 0,1-1 14 0,-5 1-12 16,-1 0 10-16,-2 0 10 0,2 0 57 0,-3 3 4 16,-1-2 41-16,0 2-7 0,-2 1 38 15,-2 11-15-15,4-19 10 0,-4 19-149 0,4-12-5 16,-4 12 0-16,0 0 0 0,0 0 0 15,0 0 0-15,0 0 0 0,-12 8 0 0,6 3 0 16,1 2 0-16,1 2 0 0,-2 6 0 0,-2 2 0 16,4 1 0-16,-1 1 0 0,-3 2 0 15,4 0 0-15,0 0 0 0,2-2 0 0,-2 2 0 16,0-4 0-16,4-3 0 0,0 0 0 0,0-1 0 16,0-1 0-16,0-2-61 0,0-1-591 0,4-1-139 15,-4-2-88-15,0-12 167 0,4 20-29 0,-4-20-639 16,10 19-1055-16</inkml:trace>
   <inkml:trace contextRef="#ctx0" brushRef="#br2" timeOffset="110269.06">8440 7093 366 0,'-10'-4'526'0,"10"4"-94"0,0 0-39 0,0 0-22 16,0 0-39-16,-9-8-24 0,9 8-39 0,0 0-59 15,0 0-26-15,0-11-35 0,0 11-6 0,17-11-30 16,-7 3-10-16,3 1-33 0,1-1-4 16,1 4-24-16,1-1-6 0,-1-1-89 0,-1 2-111 15,3 3-105-15,-3-1-105 0,-14 2-143 0,25 3-340 16,-15 1-482-16</inkml:trace>
   <inkml:trace contextRef="#ctx0" brushRef="#br2" timeOffset="110440.06">8417 7341 618 0,'0'0'673'0,"-10"11"-143"0,10-11-104 0,0 0-66 16,0 0-35-16,0 0-19 0,0 0-45 0,0 0-35 15,0 0-35-15,14-11-34 0,-1 6-32 16,1-3-26-16,1 1-15 0,1-3-23 0,7 3-10 16,-4-2-95-16,1-1-111 0,3 2-95 0,0-3-140 15,4 4-143-15,-5-1-442 0,5 1-631 16</inkml:trace>
-  <inkml:trace contextRef="#ctx0" brushRef="#br2" timeOffset="111828.91">9674 6701 372 0,'6'-12'448'0,"-6"12"-54"0,9-19-51 16,-9 19 4-16,4-18-45 0,-4 18-39 15,8-10-46-15,-8 10-30 0,0 0-43 0,0 0-14 16,0 0 7-16,0 0 19 0,0 0 26 0,-4 18-14 16,0-3 1-16,-5 4-3 0,3 6 6 0,-2 6 8 15,-4 5-9-15,1 6-13 0,-7 2-10 0,5 3-23 16,-5-1 0-16,1 1-19 0,3-1-6 15,-5-1-4-15,2 0-9 0,7-3-8 0,-6-1 13 16,5-7-6-16,3-3-26 0,0-5 0 16,2 0-18-16,1-7-5 0,1-3-12 0,0-1 3 15,0-1-6-15,4-14 5 0,4 15-9 0,-4-15 2 16,0 0-5-16,13-4 4 0,-7-6-9 16,2 0-2-16,4-3-1 0,-5-3-2 0,1-4 1 15,2-2-3-15,-2-4 30 0,1-3-37 0,-1-2 31 16,-2-3-40-16,2-3 31 0,-3 3-33 0,3 4 3 15,-6 0-2-15,6 2 8 0,-4 2 3 0,1 0-2 16,-1 3 0-16,0 2 1 0,-4 1 4 16,6-2-5-16,-2 3 4 0,0 1-6 0,0 0 5 15,1 3-5-15,-5 1 7 0,4 1-5 0,-2 1-1 16,-2 12-9-16,4-18 7 0,-4 18-2 16,0 0 6-16,0 0 10 0,0 0 19 0,0 0-1 15,0 0 3-15,0 0-3 0,0 14-7 0,0-14 1 16,-4 22-3-16,4-22-6 0,4 24 1 15,0-12 1-15,0-2 3 0,0 2 0 0,7-1-6 16,-3-4 6-16,4 1 2 0,-1-1-1 0,5 0-5 16,-1-4-1-16,-3-2 5 0,7-2-3 0,-1-2-4 15,-3-4-1-15,1 2 2 0,3-5 4 0,-3 2-3 16,-5-3 2-16,1-3-3 0,3-2-4 16,-7-2 7-16,0 1-6 0,-2 0 7 0,3-2 33 15,-5 4 23-15,0 3 21 0,-2-2 2 0,2 3 7 16,-4 11-28-16,8-19-1 0,-8 19-31 15,4-15-4-15,-4 15-18 0,0 0 13 0,0 0 31 16,0 0 47-16,0 0 20 0,0 17 32 0,-4-4-17 16,0 5 19-16,0 0-32 0,-2 2-63 15,2 5-66-15,-5 1 0 0,5 2 0 0,-2-2 0 16,-2 1 0-16,0-1 0 0,-1 1 0 0,3-3 0 16,2 1 0-16,-4-1 0 0,-1 0 0 0,7-5-188 15,-6 3-403-15,4-3-161 0,0 0-75 0,4-1 152 16,-4-2-16-16,4 4-101 0,-4-5-371 15,4 2-809-15</inkml:trace>
+  <inkml:trace contextRef="#ctx0" brushRef="#br2" timeOffset="111828.9">9674 6701 372 0,'6'-12'448'0,"-6"12"-54"0,9-19-51 16,-9 19 4-16,4-18-45 0,-4 18-39 15,8-10-46-15,-8 10-30 0,0 0-43 0,0 0-14 16,0 0 7-16,0 0 19 0,0 0 26 0,-4 18-14 16,0-3 1-16,-5 4-3 0,3 6 6 0,-2 6 8 15,-4 5-9-15,1 6-13 0,-7 2-10 0,5 3-23 16,-5-1 0-16,1 1-19 0,3-1-6 15,-5-1-4-15,2 0-9 0,7-3-8 0,-6-1 13 16,5-7-6-16,3-3-26 0,0-5 0 16,2 0-18-16,1-7-5 0,1-3-12 0,0-1 3 15,0-1-6-15,4-14 5 0,4 15-9 0,-4-15 2 16,0 0-5-16,13-4 4 0,-7-6-9 16,2 0-2-16,4-3-1 0,-5-3-2 0,1-4 1 15,2-2-3-15,-2-4 30 0,1-3-37 0,-1-2 31 16,-2-3-40-16,2-3 31 0,-3 3-33 0,3 4 3 15,-6 0-2-15,6 2 8 0,-4 2 3 0,1 0-2 16,-1 3 0-16,0 2 1 0,-4 1 4 16,6-2-5-16,-2 3 4 0,0 1-6 0,0 0 5 15,1 3-5-15,-5 1 7 0,4 1-5 0,-2 1-1 16,-2 12-9-16,4-18 7 0,-4 18-2 16,0 0 6-16,0 0 10 0,0 0 19 0,0 0-1 15,0 0 3-15,0 0-3 0,0 14-7 0,0-14 1 16,-4 22-3-16,4-22-6 0,4 24 1 15,0-12 1-15,0-2 3 0,0 2 0 0,7-1-6 16,-3-4 6-16,4 1 2 0,-1-1-1 0,5 0-5 16,-1-4-1-16,-3-2 5 0,7-2-3 0,-1-2-4 15,-3-4-1-15,1 2 2 0,3-5 4 0,-3 2-3 16,-5-3 2-16,1-3-3 0,3-2-4 16,-7-2 7-16,0 1-6 0,-2 0 7 0,3-2 33 15,-5 4 23-15,0 3 21 0,-2-2 2 0,2 3 7 16,-4 11-28-16,8-19-1 0,-8 19-31 15,4-15-4-15,-4 15-18 0,0 0 13 0,0 0 31 16,0 0 47-16,0 0 20 0,0 17 32 0,-4-4-17 16,0 5 19-16,0 0-32 0,-2 2-63 15,2 5-66-15,-5 1 0 0,5 2 0 0,-2-2 0 16,-2 1 0-16,0-1 0 0,-1 1 0 0,3-3 0 16,2 1 0-16,-4-1 0 0,-1 0 0 0,7-5-188 15,-6 3-403-15,4-3-161 0,0 0-75 0,4-1 152 16,-4-2-16-16,4 4-101 0,-4-5-371 15,4 2-809-15</inkml:trace>
   <inkml:trace contextRef="#ctx0" brushRef="#br2" timeOffset="112077.95">10075 7416 372 0,'0'0'710'0,"0"0"-146"16,-6-8-69-16,6 8-28 0,-17-5 25 0,17 5-8 15,-22-2-32-15,22 2-47 0,-27 0-25 0,12 3-27 16,-1 1-33-16,1 0 45 0,-3 2 22 16,5 0-20-16,-1 3-37 0,-3 0-33 0,7-1-43 15,-2 5-27-15,7-3-25 0,-1 4-24 0,2-1-88 16,4-13-90-16,4 22 0 0,2-10 0 16,7-3 0-16,1-1 0 0,3-4 0 0,6-2 0 15,3-2-94-15,1-2-580 0,6-1-213 0,-6 0-154 16,4-4 85-16,-4 2-482 0,-8 4-1123 15</inkml:trace>
   <inkml:trace contextRef="#ctx0" brushRef="#br2" timeOffset="113014.05">10685 7232 223 0,'0'0'453'0,"-17"-3"-51"16,17 3-42-16,0 0-34 0,0 0-14 16,0 0-50-16,0 0 1 0,0 0-7 0,0 0-11 0,17-10-1 15,-3 7-27-15,-1 0 7 0,5-1-3 16,5 0-15-16,0-1-30 0,8 0-30 0,-4 0-31 15,0 1-19-15,4 0-21 0,-4-1-10 0,-1 0-19 16,-3 4-11-16,0-2-30 0,-5 2-113 16,3-1-86-16,-2 0-59 0,-5-1-58 0,-1 3-59 15,1-2-66-15,-14 2-48 0,19-6-397 0,-19 6-515 16</inkml:trace>
   <inkml:trace contextRef="#ctx0" brushRef="#br2" timeOffset="113249.03">11094 7006 404 0,'0'0'476'0,"-8"-16"-63"16,8 16-21-16,-6-18-13 0,6 18-27 0,-9-13-8 16,9 13-36-16,-4-11-24 0,4 11-46 0,0 0-32 15,-8-9-41-15,8 9-15 0,0 0 5 16,0 0 31-16,-10 8 6 0,10-8 6 0,-9 22-14 16,5-5 6-16,0-1-31 0,2 3 6 0,-2 6-43 15,-4-1 55-15,4 2-55 0,-5 1 8 0,3 2-54 16,-2-1-15-16,4-1-9 0,-5-2-7 15,3 3-6-15,2-3-9 0,0-1-42 0,0-4-153 16,0 0-153-16,2-3-77 0,0-2-19 16,2-2-65-16,0-13-60 0,2 19-82 0,-2-19-466 15,6 10-737-15</inkml:trace>
@@ -2339,7 +2340,7 @@
   <inkml:trace contextRef="#ctx0" brushRef="#br2" timeOffset="143959.41">20057 11717 33 0,'-6'-15'701'0,"6"15"-202"0,0 0-86 16,2-15-69-16,-2 15-66 0,6-14-49 16,-6 14-31-16,13-15-41 0,-3 5-27 0,2 2-32 15,3-2-15-15,-1 3-23 0,5-1-54 0,0 1-93 16,-1 3-43-16,1 0-73 0,-1 2-130 0,-1 2-447 15,0 0-376-15</inkml:trace>
   <inkml:trace contextRef="#ctx0" brushRef="#br2" timeOffset="144120.46">20072 11804 724 0,'-15'5'575'15,"3"-3"-134"-15,12-2-57 0,-21 8-99 0,21-8-28 0,-16 2-58 16,16-2-17-16,0 0-51 0,0 0 2 0,8-6-46 15,2 0 2-15,7 3-37 0,-1 0 2 16,3 0-79-16,4 0-78 0,-1 1-89 0,7-1-103 16,2 2-87-16,0-1-434 0,2 0-424 15</inkml:trace>
   <inkml:trace contextRef="#ctx0" brushRef="#br0" timeOffset="152387.65">20456 9342 230 0,'0'0'339'0,"0"0"-88"0,0 0 4 0,-12 3-64 15,12-3-10-15,0 0-19 0,0 0-17 0,0 0-2 16,0 0-15-16,-11-5 3 0,11 5-17 0,0 0 14 16,0 0-18-16,0 0 14 0,0 0-20 15,0 0 11-15,-8-7-23 0,8 7 18 0,0 0-18 16,0 0 13-16,0 0-5 0,0 0-5 0,0 0 5 15,0 0-1-15,0 0-5 0,0 0-11 0,0 0 3 16,0 0-12-16,4-11-6 0,-4 11 0 0,17-7-4 16,-5 2 6-16,3 1 0 0,-1-2-11 15,3 1 0-15,-1 0-8 0,1 0 0 0,-1 0-14 16,3 1-4-16,-5 0-24 0,3 1 16 0,-3-2-7 16,-3 2 1-16,-11 3-5 0,23-5 1 15,-23 5-13-15,16-6 8 0,-16 6-6 0,15-2 4 16,-15 2-2-16,0 0 2 0,14-5-2 0,-14 5-2 15,0 0-7-15,0 0-16 0,12-4-39 16,-12 4-37-16,0 0-51 0,0 0-43 0,0 0-33 16,0 0-42-16,0 0-6 0,0 0-12 0,-10-5-31 15,10 5-16-15,0 0-26 0,-19 7-347 0,19-7-270 16</inkml:trace>
-  <inkml:trace contextRef="#ctx0" brushRef="#br0" timeOffset="152887.35">20508 9303 15 0,'0'0'384'0,"-17"-8"-68"0,17 8-67 0,-14-7-10 16,14 7-45-16,-13-8-21 0,13 8-23 16,-10-3-18-16,10 3-16 0,0 0-19 0,-12-5-14 15,12 5-21-15,0 0 11 0,-13 3-8 0,13-3 17 16,-10 10-12-16,4-1 21 0,2 0-22 15,-3 3 16-15,1 2-19 0,0-1 16 0,0 3-15 16,-2 1 19-16,-1 0-20 0,1 0 14 0,0 1-18 16,-3 1 7-16,1 2-19 0,0-2 0 15,-1-4-24-15,3 1 14 0,0-2-26 0,2-1 19 16,0-2-24-16,-1-1 18 0,3 0-19 0,4-10 17 16,-8 15-17-16,8-15 13 0,0 0-18 15,-2 15 14-15,2-15-20 0,12 5 15 0,-12-5-18 16,23 4 18-16,-11-3-18 0,3 1 15 0,-3 1-18 15,3 0 18-15,-1 0-21 0,-1 1 12 16,-1 1-7-16,2-2 17 0,-1 1-19 0,1 4 23 16,-1-2-16-16,-1 0 19 0,3 3-11 0,-3-2 29 15,0 2-12-15,-1-1 17 0,-3-1-14 0,0 3 41 16,-1-2 22-16,-7-8 22 0,4 19 26 16,-4-19-1-16,-9 19 4 0,-1-11-21 0,-4 0-16 15,-5-1-12-15,-4 3-18 0,-4-2-11 0,-8 0-11 16,-2-2-9-16,0 0-7 0,-5-2-6 0,3-1 0 15,2 0-11-15,4-2 0 0,2 3-1 16,4-4-18-16,4 2-66 0,3-1-71 0,1-1-88 16,2 1-47-16,17-1-38 0,-18 3-29 0,18-3-68 15,0 0-33-15,0 0-487 0,10 9-579 0</inkml:trace>
+  <inkml:trace contextRef="#ctx0" brushRef="#br0" timeOffset="152887.34">20508 9303 15 0,'0'0'384'0,"-17"-8"-68"0,17 8-67 0,-14-7-10 16,14 7-45-16,-13-8-21 0,13 8-23 16,-10-3-18-16,10 3-16 0,0 0-19 0,-12-5-14 15,12 5-21-15,0 0 11 0,-13 3-8 0,13-3 17 16,-10 10-12-16,4-1 21 0,2 0-22 15,-3 3 16-15,1 2-19 0,0-1 16 0,0 3-15 16,-2 1 19-16,-1 0-20 0,1 0 14 0,0 1-18 16,-3 1 7-16,1 2-19 0,0-2 0 15,-1-4-24-15,3 1 14 0,0-2-26 0,2-1 19 16,0-2-24-16,-1-1 18 0,3 0-19 0,4-10 17 16,-8 15-17-16,8-15 13 0,0 0-18 15,-2 15 14-15,2-15-20 0,12 5 15 0,-12-5-18 16,23 4 18-16,-11-3-18 0,3 1 15 0,-3 1-18 15,3 0 18-15,-1 0-21 0,-1 1 12 16,-1 1-7-16,2-2 17 0,-1 1-19 0,1 4 23 16,-1-2-16-16,-1 0 19 0,3 3-11 0,-3-2 29 15,0 2-12-15,-1-1 17 0,-3-1-14 0,0 3 41 16,-1-2 22-16,-7-8 22 0,4 19 26 16,-4-19-1-16,-9 19 4 0,-1-11-21 0,-4 0-16 15,-5-1-12-15,-4 3-18 0,-4-2-11 0,-8 0-11 16,-2-2-9-16,0 0-7 0,-5-2-6 0,3-1 0 15,2 0-11-15,4-2 0 0,2 3-1 16,4-4-18-16,4 2-66 0,3-1-71 0,1-1-88 16,2 1-47-16,17-1-38 0,-18 3-29 0,18-3-68 15,0 0-33-15,0 0-487 0,10 9-579 0</inkml:trace>
   <inkml:trace contextRef="#ctx0" brushRef="#br0" timeOffset="154859.76">6596 10958 271 0,'-4'-14'536'0,"0"-1"-85"0,2 3-78 15,0-2-41-15,2 14-86 0,0-21-45 0,0 21-42 16,0 0 12-16,0 0 6 0,16 12 0 0,-9 5-5 15,3 16-7-15,-2 17-7 0,5 6 17 0,-5 31-14 16,2 3-16-16,-2 7 14 0,-3-1-3 16,1 3 3-16,-2-3 13 0,0 2-18 0,0-4 17 15,-4-15-27-15,-4 15-16 0,4 1-4 0,-4-16-18 16,0 14-2-16,2-14-4 0,-5 12 4 0,5-17-40 16,-2-9 7-16,0-2-34 0,4-3 6 15,-4-2-24-15,4 1-5 0,4-6-4 0,-4-9-43 16,4 0-170-16,0-6-105 0,-4-8-12 0,7-2-73 15,-3 0-62-15,0-7-59 0,0-4-64 0,0-2-459 16,-4-15-691-16</inkml:trace>
   <inkml:trace contextRef="#ctx0" brushRef="#br0" timeOffset="155230.76">5761 12747 189 0,'-21'-23'593'0,"3"-1"-117"15,3 3-114-15,3 0-40 0,4 6-82 0,1 0-33 16,5 0-52-16,7 2-3 0,3-1-24 16,4 3 8-16,11 0-23 0,10 0 23 0,15-1-15 15,7 5 20-15,34-5-10 0,10 1 10 0,17 0 7 16,79-10-13-16,5-4 9 0,9 0 2 0,18-6 11 15,11-2 2-15,8-6-15 0,16 2-8 16,7-5-11-16,6-2-41 0,0 2-8 0,-2 3 0 16,-13 11-27-16,-7 4-7 0,-16 9 8 0,-22 5-27 15,-54 1 11-15,-34 3-18 0,-5 1-4 0,-7 1 11 16,-5 1-19-16,-7 0 15 0,-22 1-18 16,-19-1 14-16,0 3-18 0,-17 0 15 0,-3 0-19 15,-7 0 8-15,-4 0-13 0,-8 3-56 0,-1-1-54 16,-7 0-68-16,-15-2-92 0,12 7-41 15,-12-7-61-15,-12 13-61 0,-7-2-73 0,-12 3-491 16,-10 1-662-16</inkml:trace>
   <inkml:trace contextRef="#ctx0" brushRef="#br0" timeOffset="197635.74">6797 12352 60 0,'0'0'263'0,"0"0"-117"0,0 0-72 15,0 0-93-15,0 0-147 0,4-14 47 0</inkml:trace>
@@ -2352,7 +2353,7 @@
   <inkml:trace contextRef="#ctx0" brushRef="#br0" timeOffset="-201483">21597 10561 103 0,'-6'-12'631'0,"6"12"-171"0,-6-11-63 0,6 11-57 16,0 0-21-16,-4-15-53 0,4 15-5 16,0 0-42-16,0 0-2 0,-4-11-31 0,4 11 4 15,0 0-19-15,0 0 0 0,0 0 30 0,0 0 34 16,0 0 12-16,-2 15-5 0,2-15-17 0,0 29-42 16,0-13 4-16,0 1-36 0,0 0 43 15,2 4-18-15,0-1 9 0,0-1-61 0,-2 0 3 16,4 0-50-16,-2 2 17 0,2-3-50 15,-2 2 22-15,4-3-40 0,-4 1 22 0,3-3-46 16,-1 0-111-16,0-3-140 0,-2 2-163 0,2-4-57 16,-4-10 23-16,6 19-68 0,-6-19-75 0,4 13-676 15,-4-13-907-15</inkml:trace>
   <inkml:trace contextRef="#ctx0" brushRef="#br0" timeOffset="-200330.94">22071 10517 523 0,'0'0'410'0,"0"0"-67"0,0 0-30 0,-2-12-34 15,2 12 5-15,0 0-45 0,0 0-6 0,-7-12-38 16,7 12-5-16,-10-3-36 0,10 3 0 15,0 0-40-15,-19-2 15 0,19 2-21 0,-20 4 22 16,9-1-20-16,1 2 6 0,0 0-12 0,-1 1-1 16,3 0-14-16,-2 3-15 0,2 0-8 15,1 0-2-15,1 1-11 0,0 1-1 0,4-1-4 0,2-10 3 16,-4 23-7-16,4-23-1 0,2 19 0 16,-2-19-4-16,10 19 8 0,-4-11 7 0,3-2 4 15,1 0 1-15,0-1-6 0,-10-5 6 0,21 4-6 16,-21-4 16-16,19 1-2 0,-19-1 20 15,16-4-2-15,-16 4-9 0,13-11 18 0,-13 11-22 16,8-13-10-16,-8 13-18 0,0-15-2 0,0 15-13 16,-2-13-8-16,2 13-9 0,-6-12-12 15,6 12-66-15,-7-9-96 0,7 9-63 0,-12-5-25 16,12 5-73-16,0 0-76 0,-15 2-24 0,15-2-43 16,-10 7-93-16,10-7-432 0,-4 13-645 15</inkml:trace>
   <inkml:trace contextRef="#ctx0" brushRef="#br0" timeOffset="-200178.75">22184 10651 334 0,'-4'-12'661'0,"4"12"-138"0,-8-7-99 16,8 7-64-16,-8-9-88 0,8 9-35 0,0 0-70 16,-11-9-14-16,11 9-76 0,0 0-91 15,0 0-127-15,-6-8-107 0,6 8-92 0,0 0-436 16,0 0-373-16</inkml:trace>
-  <inkml:trace contextRef="#ctx0" brushRef="#br0" timeOffset="-199913.74">22294 10455 59 0,'0'0'762'0,"-6"-16"-138"0,6 16-122 0,-4-11-76 0,4 11-86 16,0 0-17-16,-5-12-63 0,5 12-20 15,0 0-43-15,0 0-9 0,0 0 20 0,0 0-4 16,0 0-5-16,0 0-35 0,13 4-10 16,-5 5-36-16,-2 0-2 0,0 1-32 0,1 2-7 0,-1 1-18 15,0-2 5-15,0 2-28 0,1 0 7 0,-3 0-21 16,0 4-4-16,0-3-12 0,2 0-65 16,-4 0-77-16,0-1-69 0,0 0-56 0,2 0-58 15,-1 1-62-15,-3-14-61 0,4 21-37 16,-4-21-83-16,4 17-269 0,-4-17-447 0</inkml:trace>
+  <inkml:trace contextRef="#ctx0" brushRef="#br0" timeOffset="-199913.75">22294 10455 59 0,'0'0'762'0,"-6"-16"-138"0,6 16-122 0,-4-11-76 0,4 11-86 16,0 0-17-16,-5-12-63 0,5 12-20 15,0 0-43-15,0 0-9 0,0 0 20 0,0 0-4 16,0 0-5-16,0 0-35 0,13 4-10 16,-5 5-36-16,-2 0-2 0,0 1-32 0,1 2-7 0,-1 1-18 15,0-2 5-15,0 2-28 0,1 0 7 0,-3 0-21 16,0 4-4-16,0-3-12 0,2 0-65 16,-4 0-77-16,0-1-69 0,0 0-56 0,2 0-58 15,-1 1-62-15,-3-14-61 0,4 21-37 16,-4-21-83-16,4 17-269 0,-4-17-447 0</inkml:trace>
   <inkml:trace contextRef="#ctx0" brushRef="#br0" timeOffset="-199665.76">22672 10252 688 0,'0'-16'625'0,"-2"2"-121"0,0 2-60 16,-2 2-86-16,-4 1 2 0,-1 2-34 0,-1 1 5 15,-4 1-7-15,-1 5-29 0,1 0-6 16,-3 5-46-16,1 2-16 0,-1 0-50 0,0 7-10 16,1 2-31-16,4 4-8 0,1 2-1 0,3 0 17 15,4 4-33-15,4-4-13 0,4 5-6 0,4 5-5 16,7-1-19-16,3 5-6 0,5-3-17 16,2-1-6-16,4-2-8 0,2-1-8 0,4-3-38 15,0-1-63-15,2-2-189 0,-2-4-176 0,-2-4 31 16,-2-1-72-16,-2-2-46 0,-4-2-70 15,-2-4-579-15,-7 1-822 0</inkml:trace>
   <inkml:trace contextRef="#ctx0" brushRef="#br0" timeOffset="-197126.79">23028 10176 391 0,'0'0'420'0,"0"0"-63"0,-9-11-65 0,9 11-8 0,0 0-43 16,-8-10 1-16,8 10-39 0,0 0-1 0,0 0-38 15,-6-10-5-15,6 10-47 0,0 0-4 16,0 0-40-16,0 0 7 0,0 0-21 0,0 0 28 16,0 0-9-16,0 0 14 0,0 0 1 0,0 0-8 15,-2 19-5-15,2-19-7 0,2 23-9 16,-2-23-1-16,4 23-10 0,-4-11 0 0,4 2-3 15,-2-2-11-15,0 2-5 0,0-1-3 0,-2-13-6 16,7 22 2-16,-7-22-9 0,6 21-2 16,-6-21 7-16,6 16-5 0,-6-16-4 0,10 15 9 15,-10-15-4-15,9 9 3 0,-9-9-1 0,0 0-4 16,18-1-5-16,-18 1 4 0,15-11-7 16,-7 4 5-16,0-2 4 0,-2-1-10 0,1-1-2 15,1-1 6-15,-4 0-4 0,2 2 13 0,-2-1 35 16,1-1 20-16,-5 12 11 0,6-15 13 0,-6 15-4 15,4-13 11-15,-4 13-16 0,0 0 18 0,4-14-25 16,-4 14 4-16,0 0-22 0,0 0 4 16,4-11-30-16,-4 11 11 0,0 0-23 0,0 0 15 15,0 0 9-15,0 0 45 0,0 16 1 0,0-16-15 16,-2 22 19-16,2-7-9 0,0 2 18 0,2 0-5 16,-2 0-6-16,2 0-18 0,-2 2-7 0,2-2-15 15,0-1-7-15,2 0-14 0,-1-1-2 16,1 0-11-16,0 0-1 0,0-1-8 0,0-3-33 15,0-1-131-15,2 0-122 0,-1 0-164 0,-5-10 6 16,12 16 13-16,-12-16-36 0,12 13-10 16,-12-13-69-16,15 9-78 0,-15-9-324 0,14 4-593 15</inkml:trace>
   <inkml:trace contextRef="#ctx0" brushRef="#br0" timeOffset="-196743.79">23365 10202 98 0,'-4'-15'699'0,"1"3"-155"0,3 12-93 0,-4-20-84 0,4 20-72 16,-2-16-18-16,2 16 3 0,0 0 11 15,0 0 29-15,9-8-8 0,-9 8-43 0,12 10-36 16,-2-1-35-16,1 4-29 0,1 3-37 0,-2 5-20 16,3-1-4-16,-3 0-40 0,0 4 7 15,-1-2-35-15,-3-1-7 0,-4-1-10 0,0-1-20 16,-2 2-19-16,-2-4-12 0,-2 1-5 0,-2-2-1 15,-1-1 10-15,1-1 4 0,-2-6 3 16,2 2 6-16,6-10 0 0,-15 10-1 0,15-10 1 16,0 0-1-16,-12-5 4 0,12 5 3 0,-4-10-3 15,4 10 4-15,6-27-8 0,0 12 6 0,0-1-3 16,5-3 10-16,-1-1 1 0,2-1-9 16,1 2 5-16,-3-1 1 0,3 1-5 0,-3 2 6 15,-2 2 3-15,-2 0 2 0,1 0-1 0,-5 0-4 16,0 3-10-16,-4-3-26 0,-3 5-52 0,-1-2-34 15,-2 4-55-15,-2 1-33 0,-3 3-32 0,1 3-34 16,12 1-30-16,-23 1-26 0,13 3-48 16,-1 1-35-16,1 3-378 0,4 0-395 0</inkml:trace>
@@ -2399,7 +2400,7 @@
   <inkml:trace contextRef="#ctx0" brushRef="#br2" timeOffset="-42453.95">19799 6220 129 0,'0'0'194'16,"0"0"-31"-16,0 0-58 0,0 0 0 0,0 0-41 16,0 0 29-16,0 0-32 0,0 0 36 0,0 0-23 15,0 0 31-15,0 0-28 0,0 0 24 16,0 0-39-16,0 0 25 0,0 0-27 0,0 0 17 16,0 0-8-16,0 0-5 0,0 0 5 0,0 0 6 15,0 0 17-15,0 0 6 0,0 0 6 16,0 0 8-16,0 0 15 0,0 0 13 0,0 0 6 15,0 0-12-15,0 0-7 0,0 0-6 0,-4-10-13 16,4 10-16-16,0 0 8 0,-13-7-11 16,13 7-9-16,-16-8 9 0,5 5-16 0,-1 0 0 15,-4 2-16-15,-1-2 3 0,-2 3-9 0,-3 0 2 16,-1 4-3-16,-4 0 9 0,-4 1-4 16,-4 3 9-16,0 1-1 0,-11 5 8 0,3 1 1 15,-3 4 6-15,3 0 12 0,-2 1-5 0,-1 3 3 16,3 4-3-16,-15 10-5 0,2 5-3 15,4 2 6-15,1 6 9 0,3 4-7 0,0 3-5 16,3 4-5-16,2 6 1 0,-1 2-7 0,5 0 8 16,0 0 13-16,3-2-8 0,5-1 0 0,9-11-14 15,3-7-10-15,5 0 6 0,5 0-12 0,5-5 6 16,4-3-10-16,6 2-4 0,7 5-4 16,3-4-2-16,7 1-7 0,6-5 3 0,19 11 6 15,-5-13-16-15,-2-8 0 0,21 4-6 0,-6-8-2 16,-8-7-8-16,1-3 8 0,-1-3-4 15,-3-2-3-15,-5-3-3 0,-3-3-1 0,-6-1 5 16,-4-2-4-16,-2 0 0 0,-5-2-16 16,1-2-56-16,-2 1-51 0,-5-3-56 0,0-1-32 15,-1 0-42-15,-1-2-17 0,-3-2 39 0,-1 1-17 16,-2-2 10-16,0 1 0 0,0 0-4 0,-1 0 8 16,-5 10-11-16,8-19-4 0,-8 19-6 0,4-19-14 15,-4 19 45-15,4-15 4 0,-4 15 50 16,0-14 10-16,0 14 51 0,0 0 4 0,-2-19 46 15,2 19 17-15,-2-13 57 0,2 13 23 0,-4-15 21 16,4 15 15-16,-2-12 17 0,2 12 21 0,0 0-12 16,-2-17 15-16,2 17-13 0,0 0-2 15,2-12-1-15,-2 12 9 0,8-7-7 0,-8 7-7 16,17-5-10-16,-17 5-18 0,22 0 2 0,-9 4-11 16,-1 0-3-16,3 1 2 0,-1 2 4 15,0-1 11-15,-1 2 7 0,-1-1 15 0,1 3 31 16,-3-3 36-16,-2 4 31 0,-2-3 27 0,-1 3 12 15,-5-11 12-15,0 22-5 0,-5-12 63 16,-1 0-10-16,-2 2-57 0,-4-2-25 0,-1 2-54 16,-1-1-17-16,-1 1-49 0,-1-2-4 0,-1 2-60 15,5-1-127-15,-3 1-135 0,5-1-128 0,0 2-155 16,1 0-22-16,3 2 49 0,4 0-100 16,0 0-86-16,4 0-515 0,4 0-834 0</inkml:trace>
   <inkml:trace contextRef="#ctx0" brushRef="#br2" timeOffset="-41916.32">20037 7878 679 0,'0'-17'696'0,"-5"2"-148"16,3 1-94-16,-2 1-74 0,-2-1-17 0,0 2-4 15,0 0-2-15,-3 0-24 0,1 3-29 0,0-1-31 16,0 3-42-16,-3 0-42 0,3 2-37 15,8 5-31-15,-19-2-22 0,19 2-14 0,-20 7 11 16,9 0 24-16,1 2 0 0,0 2-2 0,1 3-6 16,-1-1-5-16,4 4-14 0,0-2-10 15,-1 2-11-15,5 0-8 0,2-1-11 16,0 1 0-16,5 0-9 0,3-2-4 0,2 0-4 0,5 0-10 16,3-2-4-16,1-3 4 0,4-1-4 0,-1-3-5 15,-1-2-3-15,2-2 2 0,-3-4-3 16,1 0 2-16,2-6 0 0,-3-2-2 0,1-4-7 15,0-6 8-15,-5 1-8 0,1-8-6 0,-5-3-1 16,1 1 2-16,-3-3-4 0,-4 5 5 0,-4 0-5 16,2 4 8-16,-1 1-4 0,-3 3 12 15,-3 0-6-15,1 3 9 0,-2 1-15 0,-2 4 9 16,-2 2-5-16,-3 4 7 0,-1 0-9 0,-2 4-1 16,-1 2-1-16,1 2 9 0,1 1-11 15,-1 1 3-15,3-2-10 0,1 5 4 0,0-2 2 16,1 0 1-16,9-6-3 0,-10 13-1 0,10-13 5 15,-8 7 5-15,8-7 5 0,0 0 8 16,0 0-11-16,-10-5 6 0,3-5-13 0,1-1 12 16,-4-4-13-16,-5-6 11 0,-5-1-14 0,-5-8 15 15,-4 2-15-15,2 2 6 0,2 4-7 16,0 1 6-16,1 3-6 0,1 1 2 0,2 5-11 16,1 1-82-16,1 6-111 0,2 2-117 0,3 3-144 15,2 4-60-15,-1 4 78 0,5 3-74 0,4 3-84 16,0 2-653-16,4 4-904 0</inkml:trace>
   <inkml:trace contextRef="#ctx0" brushRef="#br2" timeOffset="-40629.07">20221 6539 78 0,'0'0'405'0,"0"0"-90"0,0 0-41 16,0 0-34-16,0 0-46 0,0 0-10 15,0 0-23-15,0 0-7 0,0 0-11 0,-9-9-7 0,9 9 13 16,0 0-19-16,-12 2 23 0,12-2-18 15,-15 3 8-15,15-3-10 0,-16 6-6 0,16-6-6 16,-21 7-12-16,9-2 7 0,-3 0-11 0,1 1 0 16,-3 2-3-16,-3 0-1 0,-3 4-1 15,-4 2-7-15,0 1-3 0,-2 1-6 0,0 2 1 16,-6 5 2-16,2 0-27 0,-4 5 16 0,0 1-12 16,4 3-7-16,-3 2-12 0,-13 14-12 15,12-5-1-15,-9 9-7 0,9-10 0 0,-6 12 1 16,5-9-12-16,-3 10 1 0,0-1-8 0,-1 3 8 15,3 0-7-15,8-9 2 0,4-7 1 16,-10 19-4-16,8-10 1 0,6-5 3 0,-2-2-13 16,3 3 6-16,-1-1 0 0,2-1 1 15,1-1 2-15,1 0-7 0,0-2-3 0,3 0 4 0,-1-1 0 16,7-6 7-16,0-1-6 0,-1-1 5 0,5 3-3 16,2-6 2-16,2-2-3 0,2-1 6 15,2 1-3-15,2 2 5 0,4-1-3 0,1 1 4 16,5 1-4-16,1 0 1 0,1-1 2 15,7 2-6-15,2 0 1 0,4-3 3 0,-2 0-3 16,4-3 0-16,-7-6 1 0,5-1-2 0,-2-2-8 16,0-1 9-16,-2-4 0 0,0-2 0 15,-3-1 2-15,3-1-2 0,-4 0-3 0,4-3 3 16,-5-2 4-16,3-1-11 0,-2 0 10 0,-3-2 0 16,3-1-1-16,-2 0 2 0,-1-2-8 0,-1-2 4 15,-1 2-4-15,-3-1 4 0,-1-2 1 0,-2 0-7 16,-1-1 3-16,-1 0-4 0,-2-2-16 15,-6 10-25-15,4-17-29 0,-4 17-27 0,0-20-8 16,0 20 10-16,-8-21 5 0,2 11 11 0,0 1 3 16,-1-2 15-16,-1 2 2 0,0 1 20 15,0 2-4-15,1-2 14 0,-1 2 0 0,8 6 6 16,-12-12 4-16,12 12 4 0,-9-9-9 0,9 9 11 16,0 0-7-16,0 0 13 0,0 0-9 0,0 0 15 15,7-8-10-15,-7 8 13 0,24 0-10 0,-9 0 12 16,2 0-11-16,-1 2 4 0,1-1 0 15,-3-1 3-15,3 0-2 0,-3 4 1 0,1-4 0 16,-15 0 5-16,22 1 7 0,-22-1 32 16,17 3 36-16,-17-3 29 0,12 0 1 0,-12 0-1 15,0 0-13-15,13 4-13 0,-13-4-13 0,0 0-2 16,0 0-15-16,0 0-1 0,-2 20-11 16,2-20-3-16,-9 16-8 0,9-16-11 0,-10 17-2 15,4-7-1-15,6-10-3 0,-9 18 1 0,9-18-10 16,-8 19-2-16,8-19-9 0,-6 17-47 15,6-17-56-15,-6 19-53 0,6-19-24 0,-2 13-23 16,2-13-31-16,0 0-51 0,-2 16-75 0,2-16-27 16,0 0-48-16,0 0-429 0,2 12-506 0</inkml:trace>
-  <inkml:trace contextRef="#ctx0" brushRef="#br2" timeOffset="-33466.48">20328 8356 140 0,'0'0'376'0,"0"0"-49"15,-8-15-66-15,8 15-5 0,-8-13-37 0,8 13 9 16,-11-16-29-16,3 8-29 0,2 1-10 0,-3-1-26 16,-1 1 9-16,0 0-31 0,-1 2-12 15,1-1-6-15,-2 4 0 0,12 2-26 0,-23-4 4 16,8 5-16-16,3 3-3 0,-2 2-7 0,-3 3 8 16,-2 2-8-16,1 3 2 0,-1 2-9 15,-1 5 1-15,-1 0-1 0,2 1-8 0,5-2-5 16,1 1-1-16,1 0-8 0,4 1-5 0,2 1 6 15,4-2-4-15,-1-1-4 0,8 3 2 16,1-1-2-16,2 1 1 0,4-2-3 0,5-2 3 16,0-3 4-16,3-2 13 0,3-2 10 0,2-3 7 15,0-2 11-15,-1-5 2 0,1-2 6 0,2-2-10 16,-2-3 12-16,2-3-6 0,-2-2 4 0,-1-5-7 16,-1-4 4-16,-4 4-4 0,-5-4-6 15,-1 0 7-15,-5-3 1 0,-4 1-2 0,-2 0-5 16,-4-2-10-16,-4-2-1 0,-3-1 18 0,-1 1 0 15,-2 3-8-15,-1-1-7 0,-1 2-4 16,-1 3-10-16,1 1-1 0,-1-1-12 0,1 3-4 16,0 4-4-16,1 1-17 0,-1 2-57 0,-1-1-60 15,1 4-78-15,-1-1-44 0,1 5-55 16,-1 2-39-16,1 2-69 0,-1 2-67 0,1 4-469 16,1 2-603-16</inkml:trace>
+  <inkml:trace contextRef="#ctx0" brushRef="#br2" timeOffset="-33466.49">20328 8356 140 0,'0'0'376'0,"0"0"-49"15,-8-15-66-15,8 15-5 0,-8-13-37 0,8 13 9 16,-11-16-29-16,3 8-29 0,2 1-10 0,-3-1-26 16,-1 1 9-16,0 0-31 0,-1 2-12 15,1-1-6-15,-2 4 0 0,12 2-26 0,-23-4 4 16,8 5-16-16,3 3-3 0,-2 2-7 0,-3 3 8 16,-2 2-8-16,1 3 2 0,-1 2-9 15,-1 5 1-15,-1 0-1 0,2 1-8 0,5-2-5 16,1 1-1-16,1 0-8 0,4 1-5 0,2 1 6 15,4-2-4-15,-1-1-4 0,8 3 2 16,1-1-2-16,2 1 1 0,4-2-3 0,5-2 3 16,0-3 4-16,3-2 13 0,3-2 10 0,2-3 7 15,0-2 11-15,-1-5 2 0,1-2 6 0,2-2-10 16,-2-3 12-16,2-3-6 0,-2-2 4 0,-1-5-7 16,-1-4 4-16,-4 4-4 0,-5-4-6 15,-1 0 7-15,-5-3 1 0,-4 1-2 0,-2 0-5 16,-4-2-10-16,-4-2-1 0,-3-1 18 0,-1 1 0 15,-2 3-8-15,-1-1-7 0,-1 2-4 16,-1 3-10-16,1 1-1 0,-1-1-12 0,1 3-4 16,0 4-4-16,1 1-17 0,-1 2-57 0,-1-1-60 15,1 4-78-15,-1-1-44 0,1 5-55 16,-1 2-39-16,1 2-69 0,-1 2-67 0,1 4-469 16,1 2-603-16</inkml:trace>
   <inkml:trace contextRef="#ctx0" brushRef="#br2" timeOffset="-31099.57">15811 10778 100 0,'0'0'336'0,"0"-22"-52"16,0 22-77-16,-2-15-8 0,2 15-51 0,0-13-10 15,0 13-8-15,0 0 4 0,0-20 7 0,0 20 5 16,0 0-1-16,2-15-7 0,-2 15-3 15,0 0-3-15,0 0-3 0,0-14 1 0,0 14-6 16,0 0-1-16,0 0-1 0,0 0-9 0,0 0-10 16,0-14-11-16,0 14-9 0,0 0-9 15,0 0-12-15,0 0-14 0,0 0-7 0,0 0-18 16,0 0 5-16,0 0-7 0,0 0 15 0,0 0 12 16,0 0 17-16,5 20-1 0,-3-5 6 15,0 0 8-15,0 7-1 0,-2 1-2 0,0 6 23 16,0 2-2-16,0 11 7 0,-2 3 12 0,-2 11 5 15,-3 1 7-15,1 6 4 0,-4 26-17 0,-3 5 15 16,-1 1-24-16,2 1 16 0,-3 4 10 16,1 1 16-16,1-1-11 0,-1 5-17 0,-1 0-16 15,3-1-33-15,2-1 22 0,-1-1-16 0,1-4-12 16,-1-7-15-16,1 1 8 0,2-19-8 0,2-12 8 16,-3-1-12-16,-1 0 0 0,2-3-6 0,-3-2-31 15,1-4 25-15,0-2-2 0,2-5-6 16,-1-7-33-16,1-6 32 0,2-2 3 0,0-3-16 15,1-7 0-15,1-2-26 0,0 1-46 0,2-3-59 16,-2-3-49-16,4-12-143 0,-2 19-122 0,2-19 1 16,0 0 15-16,0 0-26 0,0 0-27 0,0 0-99 15,12-9-60-15,-3-3-295 0,-1 1-575 0</inkml:trace>
   <inkml:trace contextRef="#ctx0" brushRef="#br2" timeOffset="-29946.82">15708 10843 258 0,'0'0'200'0,"2"-18"-44"0,-2 18-16 0,0-12-53 15,0 12 16-15,0 0-27 0,2-15 15 16,-2 15 0-16,0 0 12 0,0 0 15 0,2-16 7 16,-2 16-28-16,0 0 22 0,0 0-17 0,-2-14 14 15,2 14-13-15,0 0-12 0,0 0-18 0,2-16-12 16,-2 16-14-16,0 0-4 0,6-15-16 0,-6 15 7 16,9-14-3-16,-9 14 4 0,12-12 1 15,-12 12 2-15,17-8 2 0,-17 8 2 0,16-11 3 16,-16 11-3-16,15-8 8 0,-15 8 0 0,16-6 7 15,-16 6 0-15,17-4-1 0,-17 4-3 16,20-1 9-16,-20 1 4 0,27-1 0 0,-12 2 2 16,1-1-17-16,3 1 2 0,4-1-12 0,-1 3-7 15,7-1-4-15,2 0 3 0,9 2-2 16,1 0 3-16,11 0-4 0,3 3-5 0,3 1-6 16,29 2-3-16,0 1 1 0,4 1-9 15,0 0 5-15,4 0-7 0,0-4 8 0,4 2-8 0,0-4-1 16,1 0-1-16,-1-3 1 0,-4 0-4 15,2-2 6-15,-16-2 4 0,14-2 19 0,0 0-3 16,-4-2 12-16,-15 2-14 0,-7-1 5 0,-1 1-12 16,-4 1-1-16,0-1-7 0,-4 1 3 15,-2 0-4-15,-4-1 0 0,-11 3-7 0,-2-2 10 16,-1 0-14-16,-7 1 10 0,-2-2-8 0,-2 2 12 16,-7 0-1-16,1-1 6 0,0 2-3 0,-3-3 8 15,1 3-6-15,-2-1 10 0,-1 0-18 16,-1-1 9-16,-1 2-7 0,1 0 7 0,0-1-12 15,-3 1 7-15,3 0-11 0,-3 0 7 0,-2 0-10 16,3 1 6-16,-15-1-8 0,23 0 10 16,-23 0-10-16,20 2 10 0,-20-2-13 0,15 1 14 15,-15-1-13-15,0 0 10 0,16 1-10 16,-16-1 10-16,0 0-10 0,0 0 8 0,15 3-10 0,-15-3 11 16,0 0-15-16,0 0 12 0,10 4-5 15,-10-4 15-15,0 0-15 0,4 11 9 0,-4-11 2 16,0 0 13-16,2 19-4 0,-2-19 11 0,0 20-6 15,-2-6 9-15,0 1-6 0,0 1 14 16,-2 2-1-16,2 1-4 0,-4 8 3 0,2 2 5 16,-3 7-1-16,1 0-8 0,0 5 7 0,-2 5-6 15,1 6 7-15,-1-2-3 0,2 4 10 0,0 4 7 16,0 1 1-16,-1 3-14 0,3 1 0 16,-2 1 9-16,-2 25-2 0,2-19 14 0,-1-6-12 15,1 0 6-15,0-1 1 0,0 2 0 0,-5 21-6 16,3-17 6-16,2-7-3 0,-2-2 17 0,2-1-22 15,-1 1 22-15,1-2-32 0,0 0 12 16,2-1-28-16,0-2-2 0,2-2-3 0,2-7 16 16,2 1-27-16,0-3 22 0,0 0-31 0,2-1 24 15,0-4-30-15,0 0-36 0,0-8-48 0,-2-1-40 16,3-5-28-16,-5-5-44 0,2 2-43 16,-2-4-73-16,-2-2-40 0,-1-3-47 0,-1 0-112 0,-2-3-581 15,-4-3-749-15</inkml:trace>
   <inkml:trace contextRef="#ctx0" brushRef="#br2" timeOffset="-28876.64">15460 13349 62 0,'0'0'381'0,"-19"-5"-121"0,19 5 0 0,-18-4-25 16,18 4-19-16,-19-4-25 0,19 4-4 0,-16-4-5 16,16 4-1-16,-15-3-17 0,15 3-8 0,0 0-12 15,-14-2-18-15,14 2-15 0,0 0-21 16,0 0-15-16,0 0 10 0,0 0 7 0,0 0-4 15,0 0-1-15,0 0-2 0,14 8-12 0,1-3-6 16,1-2 8-16,3 1 3 0,6 0-4 0,4-1 7 16,-1 2-4-16,12-2 0 0,1 1 0 0,2-2-3 15,9 3 0-15,2-1-15 0,2 0-7 16,0-1-11-16,-1 4 1 0,3-4-15 0,2 4-1 16,0-4-7-16,0 4 2 0,2-3-1 0,0 3-9 15,27 1-5-15,-17-2-1 0,-8-1 1 0,0-1-2 16,3 3 0-16,24-1-1 0,-17 0 0 0,-10-2-5 15,2 2 9-15,-2-2 44 0,-2 1-56 0,2 1 46 16,-2 1-60-16,0-3 56 0,-4 1-54 16,2 0 53-16,-4-2-55 0,0 1 48 0,-2-1-50 15,-1 2 45-15,-1-2-48 0,-2 0 7 0,-5-2 53 16,-1 2-63-16,-3-1 56 0,0 1-53 0,1-3 46 16,-3 0-43-16,-4 0 53 0,4-3-44 15,-4 3 47-15,-2-2-39 0,3 2 60 0,-3-3-44 16,0 3 47-16,0-1-37 0,-2-2 42 0,0 3-43 15,-2-3 37-15,0 3-30 0,0-1 29 0,-2-3-34 16,2 4 28-16,-3-1-24 0,3-1 20 0,0 0-28 16,2 2 17-16,-2-2-32 0,4 1 27 15,-2-1-26-15,0 2 20 0,0-2-26 0,-2 2 21 16,0-3-25-16,-4 3 23 0,-2-2-27 0,-5 2 27 16,1 0-30-16,-3-2 33 0,-1 2 11 0,-1-1 31 15,-14 1-18-15,21-4 3 0,-21 4-12 0,12-2 12 16,-12 2-30-16,0 0 15 0,0 0-23 0,5-12 6 15,-5 12-49-15,0 0-51 0,-11-14-52 0,11 14-66 16,-16-15-70-16,5 10-63 0,-1-3-109 16,-5 2 18-16,1-2-106 0,-5 1-532 0,-1-1-713 15</inkml:trace>
@@ -2411,7 +2412,7 @@
   <inkml:trace contextRef="#ctx0" brushRef="#br2" timeOffset="-18424.85">16173 12118 281 0,'6'-13'460'15,"1"0"-75"-15,1 0-77 0,0 0-15 0,2 1-48 16,-1 0-17-16,1 3-55 0,-2-2-8 0,1 6-37 15,-9 5 1-15,14-12-18 0,-14 12 24 16,0 0-13-16,15 10 29 0,-15-10-23 0,2 22 16 16,-2-4-25-16,-2 2 16 0,-5 7-13 0,1 1-8 15,-2 6-12-15,-3 3-9 0,-3 6-1 16,2-2-2-16,-1 0-8 0,1-7-10 0,1 1-15 16,1-1 2-16,0-4-20 0,2-5-8 0,-1-2-2 15,3-2-12-15,2-5-1 0,-2 0-1 0,2-2 7 16,-1-1-2-16,5-13 9 0,-4 21-8 0,4-21 3 15,0 0-10-15,0 0 3 0,0 0-12 16,0 0-1-16,11-18-1 0,-7 6 4 0,2-6-3 16,-2-2 2-16,2-5-1 0,1-1-1 0,-1-6-4 15,2-4 1-15,0-1 3 0,1-3-2 0,1-6-2 16,-2 9-3-16,0 0 4 0,1 4 2 16,-3 5-3-16,-2 4 1 0,0 3-6 0,0 3 3 15,0 4-7-15,-2 0-2 0,-2 14 2 0,3-18 4 16,-3 18 3-16,0 0-3 0,0 0 4 0,0 0-1 15,0 0-2-15,-9 8 9 0,9-8-8 16,-4 15 0-16,4-15 3 0,-2 17-4 0,2-17 2 16,0 15 5-16,0-15-3 0,4 17-4 0,-4-17 12 15,11 13-8-15,-11-13 6 0,16 10 2 16,-16-10-3-16,19 7 0 0,-19-7 6 0,22 1-1 16,-22-1-2-16,19-3-3 0,-19 3 2 0,21-9 9 15,-11 2-13-15,-2-2 14 0,1 0-17 16,-3 1 16-16,0-2 21 0,0 2 44 0,-6 8 9 15,8-12 22-15,-8 12-23 0,7-10-2 0,-7 10-26 16,0 0 20-16,0 0-37 0,0 0 9 0,0 0-28 16,0 0 16-16,-11 18-22 0,5-3-2 15,0 2-2-15,0 0-3 0,-3 5-3 0,5 3 0 16,-2-1-30-16,2 4 39 0,2 0-82 0,2 2-80 16,0-3-76-16,2 2-39 0,0 1-82 0,4 0-89 15,3 1-45-15,1 0-85 0,0-1-548 0,5-1-756 16</inkml:trace>
   <inkml:trace contextRef="#ctx0" brushRef="#br2" timeOffset="-18140.97">16688 12612 243 0,'-13'-7'748'0,"-1"2"-134"0,-5 1-109 15,-1 2-58-15,-3-2-24 0,0 3-14 0,0 1-25 16,1 0-34-16,-1 1-36 0,2 3-50 0,3-2-32 15,1 0-58-15,1 0-19 0,3 1-29 0,3 2 19 16,10-5-5-16,-6 11 76 0,6-11-14 16,10 9-24-16,2-5-20 0,5 1-14 0,4-2-9 15,3-3-28-15,1-3-18 0,2 1 0 0,0-1-26 16,-6-1-8-16,-1 1-3 0,-1-3 3 0,-5-1-14 16,-1-4-6-16,-5-1-26 0,-4-2 8 0,-4-1-19 15,-6 0 19-15,-2 0-33 0,-7 0 4 16,-3 0-77-16,-3 4-19 0,-2-1-114 0,-2 1-92 15,3 4-157-15,-3-1-71 0,2 6 55 0,5 2-60 16,-1 2-83-16,0 1-608 0,7 4-879 16</inkml:trace>
   <inkml:trace contextRef="#ctx0" brushRef="#br2" timeOffset="-11052.1">17496 11361 386 0,'0'0'709'0,"0"0"-153"15,-16 0-100-15,16 0-110 0,0 0-50 0,-19-2-43 16,19 2-12-16,0 0-23 0,-15 0 6 0,15 0 16 16,0 0-13-16,0 0-23 0,0 0-22 0,-14 0-33 15,14 0-19-15,0 0 5 0,0 0 29 16,0 0 21-16,0 0 7 0,0 0 10 0,14 7 104 16,-14-7-2-16,19 9 20 0,-9-6-34 0,1 3 17 15,1-1-37-15,3-1 12 0,-1 0-18 16,3-1-115-16,3-3-149 0,3-3 0 0,12-4 0 15,9-7 0-15,5-8 0 0,26-14 0 0,5-7 0 16,1-2 0-16,2 1 0 0,-5-2 0 16,-1 4 0-16,-3-2 0 0,-6 3 0 0,-4 4 0 15,-4 0 0-15,-12 9 0 0,-11 6 0 0,-2 1 0 16,-8 5 0-16,-4 4 0 0,-3 4-77 0,-5 1-842 16,-1 6-30-16,-14 1 101 0,17 6 133 15,-17-6-10-15,4 19-533 0,-6-6-902 0</inkml:trace>
-  <inkml:trace contextRef="#ctx0" brushRef="#br2" timeOffset="-5183.11">17858 12583 450 0,'0'0'439'0,"-15"3"-61"0,15-3-100 15,-10 3-7-15,10-3-49 0,-10 5-4 0,10-5-20 16,-11 7 26-16,11-7-24 0,-12 9 27 0,12-9-18 16,-8 10 22-16,8-10 2 0,-9 12-10 15,9-12-4-15,0 0 7 0,-6 15-16 0,6-15-10 16,0 0-13-16,0 15-5 0,0-15-5 0,6 13-4 16,-6-13 29-16,15 7 49 0,-15-7-11 0,19 3-39 15,-5-6-7-15,3 0-47 0,3-6-12 16,7-6-30-16,0 0-15 0,8-8-25 0,2-4-11 15,3 3-8-15,-3-2-14 0,2 0 1 0,-2-1-11 16,-2 2 5-16,1-1-20 0,-3 3-5 0,-2-1-73 16,-7 5-17-16,-1 1-88 0,0-2-26 15,-5 5-58-15,-1 2-78 0,-2 1-62 0,-3 2 14 16,0 1 62-16,-1-1-16 0,-1 2-22 16,0 3 24-16,-1 2-4 0,-9 3-11 0,18-8 4 15,-18 8-49-15,15 0-33 0,-15 0-288 0,12 5-292 16</inkml:trace>
+  <inkml:trace contextRef="#ctx0" brushRef="#br2" timeOffset="-5183.12">17858 12583 450 0,'0'0'439'0,"-15"3"-61"0,15-3-100 15,-10 3-7-15,10-3-49 0,-10 5-4 0,10-5-20 16,-11 7 26-16,11-7-24 0,-12 9 27 0,12-9-18 16,-8 10 22-16,8-10 2 0,-9 12-10 15,9-12-4-15,0 0 7 0,-6 15-16 0,6-15-10 16,0 0-13-16,0 15-5 0,0-15-5 0,6 13-4 16,-6-13 29-16,15 7 49 0,-15-7-11 0,19 3-39 15,-5-6-7-15,3 0-47 0,3-6-12 16,7-6-30-16,0 0-15 0,8-8-25 0,2-4-11 15,3 3-8-15,-3-2-14 0,2 0 1 0,-2-1-11 16,-2 2 5-16,1-1-20 0,-3 3-5 0,-2-1-73 16,-7 5-17-16,-1 1-88 0,0-2-26 15,-5 5-58-15,-1 2-78 0,-2 1-62 0,-3 2 14 16,0 1 62-16,-1-1-16 0,-1 2-22 16,0 3 24-16,-1 2-4 0,-9 3-11 0,18-8 4 15,-18 8-49-15,15 0-33 0,-15 0-288 0,12 5-292 16</inkml:trace>
   <inkml:trace contextRef="#ctx0" brushRef="#br2" timeOffset="67792.85">3547 9826 39 0,'-10'8'171'0,"-3"2"-244"16,3 2 25-16</inkml:trace>
   <inkml:trace contextRef="#ctx0" brushRef="#br2" timeOffset="71046.83">1722 10517 475 0,'-12'0'448'0,"-3"0"-102"0,1-2-114 16,-1-2 35-16,1-2-60 0,-1-3 8 0,3-2-47 15,-1 0-10-15,-1-8-11 0,6-1-5 0,1-5-5 16,1-1 0-16,6-4-10 0,2 2-7 0,4-2-20 16,3-2-16-16,5 3-1 0,3 1-37 15,3 6 14-15,3 2-32 0,4 4 15 0,4 6-24 16,-4 4 17-16,4 4-28 0,-2 4-1 0,0 3 1 15,4 0-3-15,-2 6 6 0,0-1 13 16,0 2 14-16,-2 0 8 0,-2 2 19 0,2 1 9 16,-5-5-16-16,5 0 8 0,0 3-26 15,0-3 8-15,2 0-22 0,0 0 11 0,0-2-48 16,0-2-49-16,-2-3-112 0,2-1-97 0,0-4-58 16,-2-2-101-16,2-7-143 0,-2-4-230 0,-4-4-406 15</inkml:trace>
   <inkml:trace contextRef="#ctx0" brushRef="#br2" timeOffset="71259.83">2532 9928 343 0,'0'0'766'0,"-6"-16"-190"0,6 16-99 15,-4-15-139-15,4 15-48 0,6-14-74 0,2 11-27 16,7 1-56-16,3-1-9 0,3 6-44 0,6 1 7 16,0 0-14-16,0 3 0 0,0 0 11 0,-1 3-11 15,-3-3 18-15,0 6 9 0,-4 0 27 0,-5 1 24 16,-4 2-16-16,-3 0-13 0,-3 4-20 15,-6 0-21-15,-5 7-3 0,-5 3-30 0,-2 0-36 16,-5-1-72-16,-2-2-83 0,1-4-27 16,1 0-58-16,5-4-35 0,3-5-65 0,3-2-68 15,2-3-77-15,6-9-435 0,0 0-552 0</inkml:trace>
@@ -2466,8 +2467,8 @@
   <inkml:trace contextRef="#ctx0" brushRef="#br0" timeOffset="4968.92">8969 3743 182 0,'0'0'813'15,"0"0"-203"-15,0 0-124 0,-8-7-112 0,8 7-55 16,0 0-49-16,0 0-31 0,-15 2-30 0,15-2-24 16,-12 11-21-16,6-2-27 0,2 3-34 0,0 1-10 15,-5 1-23-15,5 2-15 0,0-1-13 16,2 3-21-16,2 0-94 0,0 0-80 0,0 2-62 16,0-1-101-16,6-1-96 0,-2 1-102 0,0 1-329 15,5-2-463-15</inkml:trace>
   <inkml:trace contextRef="#ctx0" brushRef="#br0" timeOffset="5317.91">9341 3921 391 0,'0'0'711'0,"-4"-14"-198"0,4 14-88 0,-4-10-114 16,4 10-24-16,-12-6-48 0,12 6 2 0,-11-3-20 15,11 3-20-15,-18 0-17 0,18 0-29 0,-21 9-33 16,15-2-23-16,-7 1-21 0,5 2-21 0,2 2-6 16,-2-1-14-16,-1 0-5 0,5 4-12 15,-2-1 8-15,6-1-12 0,-4 1-3 0,4-14-5 16,0 27-14-16,4-16-14 0,-2 0-8 16,6-1 3-16,-8-10 1 0,9 17 18 0,-9-17-9 15,8 13 16-15,-8-13-3 0,2 8 20 0,-2-8 22 16,0 0 40-16,0 0 25 0,0 0 36 15,12 7 25-15,-12-7-9 0,0 0-2 0,0 0-40 16,0 0-10-16,0 0-37 0,0 0-5 0,0 0-33 16,0 0-2-16,0 0-51 0,9 6-98 0,-9-6-109 15,0 0-80-15,10 7-82 0,-10-7-120 0,17 6-180 16,-17-6-346-16,22 2-690 0</inkml:trace>
   <inkml:trace contextRef="#ctx0" brushRef="#br0" timeOffset="6374.03">9474 3947 238 0,'0'0'552'16,"0"0"-136"-16,-7-10-66 0,7 10-65 0,0 0 7 15,-12-7-50-15,12 7 3 0,0 0-24 0,-14-5 14 16,14 5-18-16,-13-1 3 0,13 1-15 16,-18 2-17-16,5 2-26 0,3 0-6 0,-3 2-3 15,3 3 4-15,-6 0 2 0,1 3 0 0,3 0-14 16,-3 5-2-16,-3 0-30 0,5 1-9 0,-1 1-13 15,1 1-13-15,3-2-13 0,2 1-10 16,4-1 19-16,-1-1-29 0,5 0 19 0,0-2-30 16,5 0 24-16,3-2-33 0,6-1 28 0,-1-3-34 15,5 0 33-15,5-5-40 0,-4-1 39 16,1 0-16-16,3-3 34 0,-4-3 24 0,-1 0 34 16,-1-1 23-16,-3-4 33 0,-1 1-16 0,1-4 7 15,-6-1-16-15,-1 0 15 0,1-3-26 0,-8 2-16 16,4 0-1-16,0 0 12 0,-4 13-11 15,0-22-83-15,0 22-48 0,0-18 0 0,0 18 0 16,0 0 0-16,0-16 0 0,0 16 0 16,0 0 0-16,0 0 0 0,0 0 0 0,0 0 0 15,0 0 0-15,-4 15 0 0,4-15 0 0,0 24 0 16,0-9 0-16,0 0 0 0,0 0 0 0,0-2 0 16,4 2 0-16,-4 0 0 0,4-2 0 0,0-1 0 15,-2 0-252-15,3-1-273 0,-1-1-172 16,-4-10-94-16,12 16 132 0,-12-16 18 0,10 8-98 15,-10-8-497-15,17-2-875 0</inkml:trace>
-  <inkml:trace contextRef="#ctx0" brushRef="#br0" timeOffset="7061.47">10241 3880 93 0,'12'4'878'0,"-12"-4"-184"16,0 0-117-16,0 0-83 0,10 3-41 0,-10-3-39 16,0 0-39-16,0 0-51 0,0 0-46 0,0 0-55 15,0 0-43-15,0 0-45 0,0 0-109 0,15 1-192 16,-15-1-157-16,0 0-142 0,0 0-174 16,0 0-482-16,0 0-769 0</inkml:trace>
-  <inkml:trace contextRef="#ctx0" brushRef="#br0" timeOffset="7198.47">10344 4246 1033 0,'-8'15'924'16,"3"-1"-154"-16,-5-3-134 0,2 0-71 0,0-3-109 0,1 1-40 15,-1-3-82-15,8-6-49 0,-8 11-76 16,8-11 33-16,-10 5-144 0,10-5-238 0,0 0-237 16,0 0-159-16,0 0-209 0,4-9-579 15,2 0-982-15</inkml:trace>
+  <inkml:trace contextRef="#ctx0" brushRef="#br0" timeOffset="7061.46">10241 3880 93 0,'12'4'878'0,"-12"-4"-184"16,0 0-117-16,0 0-83 0,10 3-41 0,-10-3-39 16,0 0-39-16,0 0-51 0,0 0-46 0,0 0-55 15,0 0-43-15,0 0-45 0,0 0-109 0,15 1-192 16,-15-1-157-16,0 0-142 0,0 0-174 16,0 0-482-16,0 0-769 0</inkml:trace>
+  <inkml:trace contextRef="#ctx0" brushRef="#br0" timeOffset="7198.46">10344 4246 1033 0,'-8'15'924'16,"3"-1"-154"-16,-5-3-134 0,2 0-71 0,0-3-109 0,1 1-40 15,-1-3-82-15,8-6-49 0,-8 11-76 16,8-11 33-16,-10 5-144 0,10-5-238 0,0 0-237 16,0 0-159-16,0 0-209 0,4-9-579 15,2 0-982-15</inkml:trace>
   <inkml:trace contextRef="#ctx0" brushRef="#br0" timeOffset="17483.59">6449 4366 704 0,'0'0'618'15,"0"0"-78"-15,0 0-62 0,0 0-44 0,0 0-42 16,0 0-40-16,0 0-27 0,0 0-43 0,0 0-18 16,-18 4 6-16,18-4 1 0,-8 15 2 15,1-4-20-15,3 1 0 0,-4 2 56 0,4 1-48 0,-2 1-51 16,-3-1-32-16,3 3-54 0,0-2 5 16,0 3-48-16,0 0 10 0,-1-2-47 15,3 0-100-15,-4 1-211 0,2-1-286 0,2 0-157 0,-3-2 52 16,5 3-189-16,-4-2-438 0,2-1-935 15</inkml:trace>
   <inkml:trace contextRef="#ctx0" brushRef="#br0" timeOffset="18278.91">9873 4348 287 0,'0'0'620'0,"0"0"-155"15,8 7-59-15,-8-7-43 0,0 0-14 0,-8 15-26 16,8-15 2-16,-9 19-9 0,3-8-10 0,-2 2-25 16,0-1-17-16,-3 1-41 0,3 1-31 15,-4 1-32-15,5-2-31 0,-5 2-23 0,4-3-18 16,1 3-17-16,-1-2-14 0,0-1-8 0,2 2-10 15,2-1-65-15,-1-3-126 0,1 2-106 16,0-1-104-16,4-11-56 0,-6 19-76 0,6-19-153 16,0 18-308-16,0-18-612 0</inkml:trace>
   <inkml:trace contextRef="#ctx0" brushRef="#br0" timeOffset="25884.09">9918 3474 57 0,'0'0'634'15,"0"0"-178"-15,0-15-96 0,0 15-58 0,0 0-58 16,0 0-55-16,-4-11-43 0,4 11-28 16,0 0-37-16,0 0-2 0,0 0-21 0,-10 7 20 15,10-7-5-15,-9 19 20 0,5-9-7 0,-2 2 12 16,2 0-15-16,-4 3 12 0,3 0-10 0,-1 0 11 16,-2 2-23-16,4 0 15 0,-4 0-29 0,1 1 8 15,-1 3-24-15,0-5 10 0,-7 2-28 16,7 1 10-16,0-4-23 0,-3 0 17 0,-1 0-19 15,6-3 1-15,-2 1-79 0,-1-4-58 0,-1 1-94 16,6-1-82-16,4-9-132 0,-13 11-462 16,13-11-534-16</inkml:trace>
@@ -2488,11 +2489,11 @@
   <inkml:trace contextRef="#ctx0" brushRef="#br0" timeOffset="50697.02">22757 5380 67 0,'-21'0'594'0,"21"0"-146"0,-12-1-50 0,12 1-57 0,0 0-12 15,-13-7-52-15,13 7 8 0,0 0-19 0,0 0 42 16,0 0 2-16,-4-10-6 0,4 10-18 16,0 0-45-16,0 0-4 0,0 0-39 0,0 0-11 15,0 0-30-15,0 0 32 0,0 0 14 0,0 0 91 16,-8 18 24-16,4-1-19 0,0 1-23 16,-4 4-2-16,-1 3-10 0,1 2 3 0,-2 5-17 15,-1 2 6-15,1 1-188 0,0 1-68 0,-1 0 0 16,1 2 0-16,2-2 0 0,1-1 0 0,3 2 0 15,0-6 0-15,4-1 0 0,2 0 0 16,4-1 0-16,5 1 0 0,3-3 0 0,5 0 0 16,6-4 0-16,6-1 0 0,6-5 0 0,0-2 0 15,0-5 0-15,3-3 0 0,-1 0 0 0,2-6 0 16,1-1 0-16,1 0-300 0,0-5-586 16,3-2-82-16,1-2 173 0,-1-4 72 0,-3-2-708 15,3 0-1117-15</inkml:trace>
   <inkml:trace contextRef="#ctx0" brushRef="#br0" timeOffset="51250.84">24562 5060 512 0,'-17'-1'634'0,"3"-3"-123"0,1 3-70 0,13 1-85 16,-25-3-57-16,25 3-40 0,-16-4-58 0,16 4-25 15,0 0-48-15,0 0 2 0,0 0-30 0,8-9 17 16,-8 9-43-16,25-2 6 0,-11 4-38 16,3 0 15-16,1 2-31 0,1 0 19 0,2 3-39 15,-1 1 24-15,1 4-4 0,0-2-5 0,-3 4 22 16,-1 1 22-16,-3 2 41 0,-1 4 29 0,-3-1 24 16,-6 6 18-16,0 0 11 0,-4 0 9 15,-2 4 2-15,-2 5 52 0,-2 0 32 0,-2 2 37 16,-1 1-45-16,-1 1 8 0,2 0-18 0,0 6-10 15,-1-7 2-15,1 3-42 0,4-3-18 0,-4 0-147 16,3 0-50-16,1-4 0 0,0-5 0 0,0 0 0 16,0-2 0-16,0-3 0 0,0-2 0 15,0-3 0-15,-5 0 0 0,3-3 0 0,-2-1 0 16,0-1 0-16,-5-3 0 0,1-1 0 0,-5-4 0 16,1 0 0-16,-5-3 0 0,0-2 0 0,-1-2 0 15,-5-1 0-15,0-2 0 0,0-1 0 0,0 1-360 16,-2-1-375-16,2 0-83 0,0 1 26 15,3-2 190-15,-3 1-18 0,4 4-143 0,0-2-341 16,1 0-753-16</inkml:trace>
   <inkml:trace contextRef="#ctx0" brushRef="#br0" timeOffset="53433.95">20894 6550 258 0,'7'-18'656'0,"-3"2"-175"0,2 1-89 16,0 0-99-16,-2 3-60 0,3 2-64 16,-3-1-17-16,-4 11-49 0,8-17-6 0,-8 17-33 15,6-11 5-15,-6 11-36 0,0 0 30 16,6-8-11-16,-6 8 24 0,0 0-14 0,0 0 8 16,9 7-22-16,-9-7 10 0,8 14-10 0,-8-14-7 15,10 18-9-15,-4-7-8 0,3 1-2 0,-1-2-2 16,0 1-4-16,0 0-4 0,1-2-3 15,-3 1 1-15,2-1-1 0,-2-2 2 0,-6-7-1 16,11 12-2-16,-11-12 0 0,8 12-4 0,-8-12-3 16,6 7-2-16,-6-7 1 0,0 0-2 0,4 15-4 15,-4-15 4-15,-6 20 1 0,0-6 1 16,0 3 6-16,-5 4 12 0,-1 1 7 0,0 8 31 16,-3 2 20-16,-3 4 12 0,-1 2 11 0,0 0 18 15,1-1 17-15,-3-2 6 0,5-6 2 16,-1 1-4-16,0-4-11 0,1 0-7 0,1-6-27 15,1-2-6-15,2 1-16 0,1-6-6 0,1 0-15 16,2-2 0-16,-1 0-14 0,3-3 4 0,-2 1-14 16,8-9 1-16,-10 10-57 0,10-10-120 15,0 0-93-15,-17 0-57 0,17 0-58 0,-14-10-58 16,5 1-137-16,3-2-546 0,-4-1-745 16</inkml:trace>
-  <inkml:trace contextRef="#ctx0" brushRef="#br0" timeOffset="63349.79">1621 4596 25 0,'0'0'249'0,"0"0"-73"0,0 0-79 0,0 0-83 0,6-15-13 0,-6 15-180 0,12-11 54 0</inkml:trace>
-  <inkml:trace contextRef="#ctx0" brushRef="#br0" timeOffset="68661.96">22914 5612 278 0,'0'0'355'0,"0"0"-106"0,0 0 24 0,0 0-46 16,0-15-17-16,0 15-21 0,0 0-24 0,4-12-9 15,-4 12-22-15,0 0-13 0,4-12 3 16,-4 12 4-16,0 0-1 0,0 0-6 0,4-10 3 15,-4 10-5-15,0 0-5 0,0 0-12 0,0 0-13 16,0 0-10-16,0 0-7 0,0 0 0 0,0 0 11 16,0 0 19-16,0 0 8 0,-12 12 6 15,8-1-14-15,0 3 13 0,-2-1-7 16,-1 4 1-16,3 0 3 0,-2 1-2 0,0 2-2 16,0 2-3-16,-1 3-4 0,1-2-2 0,0 0-4 15,0 0-2-15,0 0 5 0,-1-3-17 0,1-3 1 16,0 2-26-16,2-1-5 0,-2-3-1 0,2 0 13 15,-1-3-39-15,1 0 23 0,0-1-24 0,4-11-49 16,-4 19-180-16,4-19-67 0,-4 15-77 16,4-15-92-16,0 0-80 0,-2 13-140 0,2-13-404 15,0 0-718-15</inkml:trace>
-  <inkml:trace contextRef="#ctx0" brushRef="#br0" timeOffset="69006.94">23063 5739 583 0,'-4'-12'557'0,"4"12"-92"15,-6-18-58-15,6 18-50 0,-7-17-40 16,7 17-33-16,-8-13-26 0,8 13-37 0,-8-6-28 16,8 6-12-16,0 0-38 0,-19 0-8 0,19 0-24 15,-18 12-5-15,11-3-14 0,-1 3-13 0,0 1-3 16,4 2-6-16,0 0-2 0,-1 3-5 15,5-1 5-15,3 2 5 0,1-1 21 0,4-1 0 16,0-1 28-16,3-1 3 0,1-4 32 0,-2 0 12 16,3-3 94-16,-3-2 0 0,-10-6-32 15,19-2-37-15,-9-3-34 0,-4-5-26 0,-2-3-26 16,-2-4-21-16,0 0-13 0,-2-2-26 0,-2-2-2 16,-2 2-19-16,0-1-6 0,0-1-8 0,-2 2-2 15,0 2-54-15,1 0-123 0,-1 1-125 16,0 2-196-16,0 1-151 0,0 2 78 0,-3 5-26 15,9 6-58-15,-18-5-607 0,5 8-891 0</inkml:trace>
-  <inkml:trace contextRef="#ctx0" brushRef="#br0" timeOffset="75725.96">23241 5950 412 0,'0'0'393'0,"0"0"-55"0,0 0-48 0,0 0-15 16,0 0-27-16,0 0-28 0,14 1-30 0,-14-1-14 15,0 0-15-15,0 0-16 0,0 0-8 0,0 0 3 16,0 0 6-16,8 9-1 0,-8-9 4 0,0 0-5 16,2 14-7-16,-2-14-5 0,0 0-13 0,3 21-3 15,-3-21-9-15,-3 16-14 0,3-16-17 16,-6 20-10-16,2-9-12 0,0 1-6 16,0-1-12-16,-2 0-7 0,1 0-4 0,-1 1-77 15,2-2-90-15,0 0-91 0,4-10-76 0,-8 17-113 16,8-17-23-16,-6 15-538 0,6-15-638 0</inkml:trace>
-  <inkml:trace contextRef="#ctx0" brushRef="#br0" timeOffset="76498.94">23441 5821 323 0,'0'0'283'0,"-8"-7"-13"0,8 7-73 0,0 0 30 15,-6-10-24-15,6 10-13 0,0 0-16 0,-9-15 1 16,9 15-50-16,-6-14 16 0,6 14-10 0,-6-15 19 16,6 15-20-16,-6-18 3 0,6 18-12 15,-6-18-4-15,6 18-10 0,-2-17-12 0,2 17 4 16,-3-16-16-16,3 16-5 0,3-19-15 0,-3 19 0 16,6-18-20-16,-6 18-1 0,10-19-15 0,-10 19 4 15,12-12-12-15,-12 12 5 0,15-10-14 16,-15 10 7-16,0 0-9 0,14-1 11 0,-14 1-12 15,9 12 7-15,-9-12-5 0,0 21 6 0,-2-6-11 16,-3 2 1-16,1 3 4 0,-4 4-1 16,0 0-2-16,0 2 0 0,-3-3-3 0,3 2 12 15,0-1-13-15,1-3 9 0,1-2-11 0,2-3 16 16,0 1-10-16,2-4 25 0,0 1-10 16,2-14 20-16,0 23-21 0,0-23 18 0,8 18-27 15,-2-9 22-15,3-3-33 0,1 0-20 0,0-1-77 16,3-1-66-16,-1-1-57 0,5 0-103 15,-3-3 21-15,3 0-72 0,1-1-100 0,-1-2-247 16,1-1-294-16</inkml:trace>
+  <inkml:trace contextRef="#ctx0" brushRef="#br0" timeOffset="63349.78">1621 4596 25 0,'0'0'249'0,"0"0"-73"0,0 0-79 0,0 0-83 0,6-15-13 0,-6 15-180 0,12-11 54 0</inkml:trace>
+  <inkml:trace contextRef="#ctx0" brushRef="#br0" timeOffset="68661.95">22914 5612 278 0,'0'0'355'0,"0"0"-106"0,0 0 24 0,0 0-46 16,0-15-17-16,0 15-21 0,0 0-24 0,4-12-9 15,-4 12-22-15,0 0-13 0,4-12 3 16,-4 12 4-16,0 0-1 0,0 0-6 0,4-10 3 15,-4 10-5-15,0 0-5 0,0 0-12 0,0 0-13 16,0 0-10-16,0 0-7 0,0 0 0 0,0 0 11 16,0 0 19-16,0 0 8 0,-12 12 6 15,8-1-14-15,0 3 13 0,-2-1-7 16,-1 4 1-16,3 0 3 0,-2 1-2 0,0 2-2 16,0 2-3-16,-1 3-4 0,1-2-2 0,0 0-4 15,0 0-2-15,0 0 5 0,-1-3-17 0,1-3 1 16,0 2-26-16,2-1-5 0,-2-3-1 0,2 0 13 15,-1-3-39-15,1 0 23 0,0-1-24 0,4-11-49 16,-4 19-180-16,4-19-67 0,-4 15-77 16,4-15-92-16,0 0-80 0,-2 13-140 0,2-13-404 15,0 0-718-15</inkml:trace>
+  <inkml:trace contextRef="#ctx0" brushRef="#br0" timeOffset="69006.93">23063 5739 583 0,'-4'-12'557'0,"4"12"-92"15,-6-18-58-15,6 18-50 0,-7-17-40 16,7 17-33-16,-8-13-26 0,8 13-37 0,-8-6-28 16,8 6-12-16,0 0-38 0,-19 0-8 0,19 0-24 15,-18 12-5-15,11-3-14 0,-1 3-13 0,0 1-3 16,4 2-6-16,0 0-2 0,-1 3-5 15,5-1 5-15,3 2 5 0,1-1 21 0,4-1 0 16,0-1 28-16,3-1 3 0,1-4 32 0,-2 0 12 16,3-3 94-16,-3-2 0 0,-10-6-32 15,19-2-37-15,-9-3-34 0,-4-5-26 0,-2-3-26 16,-2-4-21-16,0 0-13 0,-2-2-26 0,-2-2-2 16,-2 2-19-16,0-1-6 0,0-1-8 0,-2 2-2 15,0 2-54-15,1 0-123 0,-1 1-125 16,0 2-196-16,0 1-151 0,0 2 78 0,-3 5-26 15,9 6-58-15,-18-5-607 0,5 8-891 0</inkml:trace>
+  <inkml:trace contextRef="#ctx0" brushRef="#br0" timeOffset="75725.95">23241 5950 412 0,'0'0'393'0,"0"0"-55"0,0 0-48 0,0 0-15 16,0 0-27-16,0 0-28 0,14 1-30 0,-14-1-14 15,0 0-15-15,0 0-16 0,0 0-8 0,0 0 3 16,0 0 6-16,8 9-1 0,-8-9 4 0,0 0-5 16,2 14-7-16,-2-14-5 0,0 0-13 0,3 21-3 15,-3-21-9-15,-3 16-14 0,3-16-17 16,-6 20-10-16,2-9-12 0,0 1-6 16,0-1-12-16,-2 0-7 0,1 0-4 0,-1 1-77 15,2-2-90-15,0 0-91 0,4-10-76 0,-8 17-113 16,8-17-23-16,-6 15-538 0,6-15-638 0</inkml:trace>
+  <inkml:trace contextRef="#ctx0" brushRef="#br0" timeOffset="76498.93">23441 5821 323 0,'0'0'283'0,"-8"-7"-13"0,8 7-73 0,0 0 30 15,-6-10-24-15,6 10-13 0,0 0-16 0,-9-15 1 16,9 15-50-16,-6-14 16 0,6 14-10 0,-6-15 19 16,6 15-20-16,-6-18 3 0,6 18-12 15,-6-18-4-15,6 18-10 0,-2-17-12 0,2 17 4 16,-3-16-16-16,3 16-5 0,3-19-15 0,-3 19 0 16,6-18-20-16,-6 18-1 0,10-19-15 0,-10 19 4 15,12-12-12-15,-12 12 5 0,15-10-14 16,-15 10 7-16,0 0-9 0,14-1 11 0,-14 1-12 15,9 12 7-15,-9-12-5 0,0 21 6 0,-2-6-11 16,-3 2 1-16,1 3 4 0,-4 4-1 16,0 0-2-16,0 2 0 0,-3-3-3 0,3 2 12 15,0-1-13-15,1-3 9 0,1-2-11 0,2-3 16 16,0 1-10-16,2-4 25 0,0 1-10 16,2-14 20-16,0 23-21 0,0-23 18 0,8 18-27 15,-2-9 22-15,3-3-33 0,1 0-20 0,0-1-77 16,3-1-66-16,-1-1-57 0,5 0-103 15,-3-3 21-15,3 0-72 0,1-1-100 0,-1-2-247 16,1-1-294-16</inkml:trace>
   <inkml:trace contextRef="#ctx0" brushRef="#br0" timeOffset="76793.95">23737 5804 40 0,'-4'-11'588'16,"2"-1"-159"-16,-3 0-19 0,1 1-46 0,0 1-19 15,-2 1-44-15,2 0-39 0,4 9-29 0,-13-15-47 16,13 15-18-16,-12-9-35 0,12 9-12 0,-12-4-33 16,12 4 8-16,0 0-35 0,-19 4 10 0,19-4-18 15,-12 9-1-15,12-9 11 0,-7 15 6 16,7-15 21-16,0 15 33 0,0-15 13 0,11 18-10 16,-5-12-2-16,0 2-19 0,-6-8 2 0,15 9-14 15,-15-9 39-15,10 8 4 0,-10-8 21 16,0 0-27-16,0 0-5 0,0 0-7 0,12-5-15 15,-12 5-33-15,-2-16-6 0,-2 6-29 0,-2-2-24 16,0 0-66-16,0 0-68 0,-3 2-159 16,1 0-1-16,0 2-42 0,-1 0-52 0,9 8-70 15,-18-6 29-15,18 6-70 0,-23 3-37 0,13 1-349 16,-1 4-507-16</inkml:trace>
   <inkml:trace contextRef="#ctx0" brushRef="#br0" timeOffset="83312.98">24003 5841 253 0,'0'0'349'15,"0"0"-121"-15,-8-10 12 0,8 10-98 0,0 0 23 16,0 0-73-16,0 0 52 0,0 0-68 0,-8-7 62 16,8 7-59-16,0 0 49 0,0 0-54 0,0 0 36 15,0 0-49-15,0 0 27 0,0 0-37 0,0 0 49 16,0 0-8-16,-10 7 11 0,10-7-11 15,-7 19-6-15,3-8-4 0,0 3-11 0,0-1-7 16,-2 0 7-16,0 1-15 0,-1 0-4 0,-1-3-9 16,0 4-7-16,0-3-8 0,-1 2-1 15,-1-2-6-15,2 0-4 0,-3-1-10 0,3-2-45 16,0 1-90-16,0-3-37 0,8-7-100 0,-17 11-81 16,17-11-448-16,-12 1-396 0</inkml:trace>
   <inkml:trace contextRef="#ctx0" brushRef="#br0" timeOffset="83668.69">24177 5560 55 0,'-2'-11'384'0,"2"11"-31"15,-4-21-14-15,4 21-50 0,-2-21-3 16,2 21-40-16,0-18-10 0,0 18-50 0,4-19 5 0,-4 19-40 16,6-15 6-16,-6 15-43 0,8-10 8 15,-8 10-42-15,0 0 12 0,7-8-33 0,-7 8 26 16,0 0-13-16,0 0 54 0,-7 22-32 0,-3-8 8 16,0 1 9-16,-3 4-26 0,-3 0 48 15,-3 3-32-15,5-3 47 0,-3 0-51 0,3-1-6 16,1 1-14-16,3-7-8 0,2 3-11 0,-1 0-4 15,5 0-8-15,2 0-3 0,2-1 2 16,4 1-12-16,3-2-1 0,5 1-11 0,2 1-5 16,3-2-66-16,2 1-131 0,-1-3-83 15,3 1-69-15,0-2-105 0,-5-3-35 0,3-2-61 16,-1-2-344-16,-1-3-510 0</inkml:trace>
@@ -2506,11 +2507,11 @@
   <inkml:trace contextRef="#ctx0" brushRef="#br0" timeOffset="154928.04">1366 7532 718 0,'-12'-2'563'0,"12"2"-135"15,-23 0-89-15,23 0-78 0,-16 7-63 0,16-7-32 16,-13 18-37-16,9-7-17 0,4 2-34 16,0 2-9-16,2 3-15 0,2 1-4 0,5 4-15 0,5 3-11 15,3 2-92-15,7 3-50 0,5 0-116 16,7-4-68-16,3-2-485 0,4-5-388 0</inkml:trace>
   <inkml:trace contextRef="#ctx0" brushRef="#br0" timeOffset="155157.67">3987 6872 744 0,'19'-6'754'0,"-2"2"-170"0,-3 1-149 15,-14 3-79-15,23 1-71 0,-23-1-55 0,16 10-50 16,-16-10-35-16,9 15-27 0,-9-15-17 0,2 22-23 15,-6-10-19-15,-1 1-6 0,-3 2-10 0,-2 3-13 16,-3 0-59-16,-1 1-100 0,-3 0-128 16,-3 4-120-16,-3-1-171 0,-2 0-344 0,-2-3-531 15</inkml:trace>
   <inkml:trace contextRef="#ctx0" brushRef="#br0" timeOffset="155502.24">1575 8878 832 0,'-21'10'902'0,"5"-2"-178"0,1-1-171 0,5-2-118 15,10-5-79-15,0 0-75 0,10-4-59 0,15-7-42 16,21-9-5-16,30-14 47 0,13-6-9 0,10 0-4 16,71-26-4-16,-1 6-21 0,5 3 26 15,-2 4-33-15,-1 1-64 0,-1 3 17 0,-34 14-54 16,38-9 19-16,-42 13-51 0,-27 5 26 0,3 3-47 16,-5-1 31-16,-6 3-51 0,-6 1-3 0,-12 3-92 15,-19 4-36-15,-17 5-88 0,-10 0-75 16,-10 3-93-16,-8 0-26 0,-15 5-92 0,10-6-74 15,-10 6-723-15,-23 3-951 0</inkml:trace>
-  <inkml:trace contextRef="#ctx0" brushRef="#br0" timeOffset="155760.32">1672 9149 796 0,'-49'19'868'16,"9"-4"-193"-16,9-4-166 0,7-2-95 0,5-1-96 15,5-4-53-15,14-4-48 0,0 0 31 16,0 0 37-16,37-15 38 0,8-4 14 0,38-13-8 16,12-6 72-16,68-24-10 0,7 2-48 0,3 0-67 15,5 1-49-15,-2 1-37 0,0-2-29 16,-5 4-37-16,-1 4-15 0,-44 14-27 0,-21 8-6 16,-1 0-14-16,-5 3-12 0,-4 5-29 0,-6 2 16 15,-7 1-79-15,-20 6-122 0,-14 5-146 16,-11 1-100-16,-4 2-153 0,-8 4-48 0,-4 1 46 15,-5 1 62-15,-7 6-85 0,-9-7-113 0,-3 18-463 16,-7-5-809-16</inkml:trace>
+  <inkml:trace contextRef="#ctx0" brushRef="#br0" timeOffset="155760.31">1672 9149 796 0,'-49'19'868'16,"9"-4"-193"-16,9-4-166 0,7-2-95 0,5-1-96 15,5-4-53-15,14-4-48 0,0 0 31 16,0 0 37-16,37-15 38 0,8-4 14 0,38-13-8 16,12-6 72-16,68-24-10 0,7 2-48 0,3 0-67 15,5 1-49-15,-2 1-37 0,0-2-29 16,-5 4-37-16,-1 4-15 0,-44 14-27 0,-21 8-6 16,-1 0-14-16,-5 3-12 0,-4 5-29 0,-6 2 16 15,-7 1-79-15,-20 6-122 0,-14 5-146 16,-11 1-100-16,-4 2-153 0,-8 4-48 0,-4 1 46 15,-5 1 62-15,-7 6-85 0,-9-7-113 0,-3 18-463 16,-7-5-809-16</inkml:trace>
   <inkml:trace contextRef="#ctx0" brushRef="#br1" timeOffset="-201284.83">5877 8038 385 0,'0'0'412'15,"2"-20"-88"-15,-2 20-83 0,4-23-34 0,-4 23-41 16,4-22-24-16,0 10-14 0,0 0 6 0,1 1-19 16,1 1 17-16,-2-1-21 0,2 0 16 15,-2 3 0-15,-4 8-7 0,13-16-4 0,-13 16-9 16,8-14-8-16,-8 14-6 0,8-11-6 0,-8 11-6 16,0 0-8-16,6-11-3 0,-6 11 2 15,0 0-2-15,0 0-2 0,0 0 13 0,0 0 29 16,0 0 12-16,9 15 18 0,-7 0 3 15,-2 7-8-15,0 1 6 0,0 12-5 0,2 8-3 16,0 14 2-16,0 6-2 0,0 6 9 0,0 31-25 16,0 2 17-16,-2 1-6 0,0 2 54 0,0 1-52 15,0-1 8-15,-2 0-7 0,0 0 32 16,-4-2-42-16,4-2 29 0,-2-6-22 0,-3-4-10 16,3-16 2-16,0-8-19 0,2-1 18 0,-2-1-31 15,0-3 18-15,4-2-46 0,-4-1 11 0,4-5-18 16,0-6 0-16,0-6-11 0,0 0-9 15,0-7-8-15,0-3-7 0,0-5-6 0,0-2-28 16,0-6-79-16,0 0-68 0,0-4-73 0,0-15-165 16,0 16-144-16,0-16-70 0,0 0 157 15,0 0 57-15,-15-8 33 0,15 8 31 0,-4-22 33 16,2 7 12-16,2-1 2 0,-2-2 21 0,2-1-15 16,0 0 31-16,0-3-9 0,2 0 9 15,0-2-15-15,0-6-295 0,0 2-123 0</inkml:trace>
   <inkml:trace contextRef="#ctx0" brushRef="#br1" timeOffset="-200695.02">6611 7826 322 0,'0'-29'427'0,"0"7"-104"16,0-3-57-16,0 0-55 0,0 1-21 0,0-1-5 15,2 3 1-15,2-5 9 0,0 3 2 16,0 0 19-16,4 5-6 0,-3-1-13 0,-1 2-16 16,0 3-36-16,2 2-21 0,-2 1-37 0,4 3 1 15,-8 9-21-15,9-9 26 0,-9 9-5 0,14 8 27 16,-12 5 18-16,4 4 14 0,1 6 7 15,-3 12 3-15,4 6 7 0,-4 12-15 0,0 7 11 16,2 3-27-16,3 29 16 0,-1 5-3 0,0 3 30 16,-2 2 49-16,3 3-47 0,-5 2 20 15,2 3-27-15,2-1 7 0,-4 0-7 0,-4-1 12 16,5-3-35-16,-5-4 31 0,2-1-7 0,-2-3-26 16,2-21-20-16,-2-7-24 0,2-4-35 0,2-1 9 15,0 1-34-15,0-3 2 0,2 0-40 0,1-5-4 16,-1 0 0-16,2-4 0 0,-4-4 0 15,2-7 0-15,-1-5 0 0,3-3 0 0,-4-4 0 16,0-2 0-16,-4-7-25 0,4 0-282 16,-2-4-57-16,0 1-94 0,0-3-95 0,-2-15-91 15,0 22 120-15,0-22 8 0,0 0-66 0,-4 12-76 16,4-12-467-16,-14-3-770 0</inkml:trace>
   <inkml:trace contextRef="#ctx0" brushRef="#br1" timeOffset="-200157.95">4587 9375 538 0,'-15'-9'586'16,"-1"3"-161"-16,1-2-65 0,3 5-90 0,-2-2-25 15,3-2-43-15,11 7 6 0,-20-5 11 0,20 5 12 16,-15-7 17-16,15 7 11 0,-12-4 2 0,12 4-13 15,0 0-1-15,0 0-18 0,6-14 4 16,8 7-25-16,9-3 15 0,18-7-37 0,11-1 49 16,31-13 16-16,14-4-20 0,68-20-10 15,3-2-16-15,7 4-12 0,7-4-32 0,7 1 19 16,5-1-32-16,4 1-15 0,5 2-28 0,4 5 3 16,-5 6-18-16,-10 4-17 0,-1 5-29 0,-47 12 16 15,-24 7-12-15,-2 0-30 0,-2 4 19 16,-1 2-31-16,-11 1 12 0,-1 3-18 0,-12 1 0 15,-19 4 0-15,-14 0 0 0,-4 0 0 0,-10 3 0 16,-3-2 0-16,-10-1 0 0,-4 3 0 0,-5 0 0 16,-3 0 0-16,-4 2 0 0,-3 1 0 15,-12-6 0-15,4 13 0 0,-4-13-179 0,-14 19-134 16,1-9-78-16,-10 3-122 0,-3-2-110 0,-16 7 2 16,-1-2 109-16,-3 1-42 0,-7-2-69 15,-20 7-604-15,-5-1-868 0</inkml:trace>
-  <inkml:trace contextRef="#ctx0" brushRef="#br1" timeOffset="-199698.21">4763 9932 508 0,'-19'15'712'0,"0"-2"-171"0,5-3-118 0,2-1-104 15,-1 0-68-15,3-2-46 0,4 2-41 16,6-9-31-16,-2 13-24 0,2-13 0 0,12 5 14 16,-12-5 27-16,31 0 2 0,-6-3 9 0,12-5-5 15,13-5 0-15,28-9-1 0,11-4 4 16,6-4-11-16,11-4 0 0,65-22-12 0,1 4 7 15,-1-2-7-15,-1 5-5 0,3-1-26 0,1 2 60 16,8 2-18-16,-2 5 31 0,0 2-32 0,-44 11 3 16,-12 5-27-16,60-6-13 0,-45 10-21 15,-26 6-18-15,-1 1-5 0,-3 2-18 0,-5 0-5 16,-3 3-4-16,-6-1-9 0,-18 4-1 0,-15-1-7 16,-7-1-3-16,-3 2 0 0,-6 0-12 15,-9-1 16-15,-6 3-12 0,-4 0 23 0,-5-1 7 16,-3 2 20-16,2-1-11 0,-7-2 7 0,-1 3-30 15,-13 1 9-15,14-4-22 0,-14 4 18 16,0 0-32-16,0 0 2 0,0 0-53 0,-8-6-98 16,8 6-88-16,-19-4-106 0,19 4-116 0,-27-1-113 15,13 1 129-15,-3 0-45 0,3 0-65 0,-5 0-108 16,1 0-451-16,1 1-762 0</inkml:trace>
+  <inkml:trace contextRef="#ctx0" brushRef="#br1" timeOffset="-199698.22">4763 9932 508 0,'-19'15'712'0,"0"-2"-171"0,5-3-118 0,2-1-104 15,-1 0-68-15,3-2-46 0,4 2-41 16,6-9-31-16,-2 13-24 0,2-13 0 0,12 5 14 16,-12-5 27-16,31 0 2 0,-6-3 9 0,12-5-5 15,13-5 0-15,28-9-1 0,11-4 4 16,6-4-11-16,11-4 0 0,65-22-12 0,1 4 7 15,-1-2-7-15,-1 5-5 0,3-1-26 0,1 2 60 16,8 2-18-16,-2 5 31 0,0 2-32 0,-44 11 3 16,-12 5-27-16,60-6-13 0,-45 10-21 15,-26 6-18-15,-1 1-5 0,-3 2-18 0,-5 0-5 16,-3 3-4-16,-6-1-9 0,-18 4-1 0,-15-1-7 16,-7-1-3-16,-3 2 0 0,-6 0-12 15,-9-1 16-15,-6 3-12 0,-4 0 23 0,-5-1 7 16,-3 2 20-16,2-1-11 0,-7-2 7 0,-1 3-30 15,-13 1 9-15,14-4-22 0,-14 4 18 16,0 0-32-16,0 0 2 0,0 0-53 0,-8-6-98 16,8 6-88-16,-19-4-106 0,19 4-116 0,-27-1-113 15,13 1 129-15,-3 0-45 0,3 0-65 0,-5 0-108 16,1 0-451-16,1 1-762 0</inkml:trace>
   <inkml:trace contextRef="#ctx0" brushRef="#br1" timeOffset="-189744.37">12109 7322 448 0,'0'0'563'0,"-4"-8"-138"16,4 8-77-16,0 0-88 0,-8-10-51 0,8 10-59 16,0 0-29-16,0 0-13 0,0 0-36 15,0 0 1-15,-15 14-24 0,11 0 23 0,4 7-9 16,-4 7 25-16,-2 10-2 0,-2 13 16 0,3 6-9 15,-3 6 6-15,0 27-3 0,-2 0 4 0,1 5-3 16,-1 4 9-16,-2 0-7 0,1 2 2 16,-5 3-16-16,5 0-2 0,-5-1-8 0,1-2-8 15,1 0-9-15,-3-3-1 0,3-1-3 0,-3-5-10 16,3-3-5-16,-3-2-2 0,3-3-9 0,4-17-3 16,-3-9-6-16,5-2-8 0,0-3 4 15,-3-2-5-15,3-2 1 0,2-2-3 0,-2-10-7 16,3-2-69-16,5-6-72 0,-4-3-43 15,0-2-45-15,4-6-58 0,0-1-74 0,4-4-44 16,-4-13-65-16,0 0-352 0,0 0-435 0</inkml:trace>
   <inkml:trace contextRef="#ctx0" brushRef="#br1" timeOffset="-189243.08">12891 7329 463 0,'0'0'508'0,"-5"-22"-95"16,5 22-72-16,-4-16-65 0,4 16-58 0,-4-14-49 15,4 14-34-15,0 0-32 0,0-15-19 0,0 15-16 16,0 0-16-16,0 0-9 0,0 0-11 0,0 0 18 16,0 0 25-16,0 0 18 0,0 0 1 15,0 26 9-15,0-7-5 0,0 13-1 0,0 2-4 16,-2 9 5-16,-2 14-14 0,0 6 7 0,0 4-12 15,-5 24 5-15,-1 0-9 0,-2 2 16 16,1-1 7-16,-1 2 0 0,-3-3 3 0,-1 2 4 16,4-2-11-16,-3-5-3 0,1-2-9 0,1-17-10 15,5-6-4-15,-2-3-22 0,-1 0-6 16,1-2-1-16,0 1-9 0,-1-2-1 0,-1-4-10 16,4-3 1-16,-1 2-8 0,-1-6 3 0,2-5-2 15,-1-3-6-15,-1-1-15 0,6-6-63 0,-2-3-61 16,0-2-48-16,-1-5-39 0,3-1-31 0,0-1-26 15,0-3-69-15,-2-4-108 0,-3-3-117 16,9-7-302-16,-16 4-501 0</inkml:trace>
   <inkml:trace contextRef="#ctx0" brushRef="#br1" timeOffset="-188827.06">11090 8616 168 0,'-31'-11'673'0,"2"0"-161"16,4 3-100-16,-2-2-94 0,5 3-64 15,-1-1-66-15,4 4-22 0,1 0-44 0,5-3-6 16,-1 4-12-16,2-1 12 0,12 4 8 0,-9-6 9 15,9 6 15-15,9-9 2 0,9 4 11 16,13-5-9-16,17 0 9 0,28-10-9 0,15-1-13 16,8-2-13-16,17-2-27 0,70-14-13 0,-2 2-19 15,-2 1-6-15,2 5-12 0,-2 0-6 0,-35 8-10 16,41-5-8-16,-39 7 2 0,43-3-5 0,-47 4-3 16,-28 9-5-16,9-3-2 0,-4 2 2 15,-2-1-6-15,-2 1 4 0,-6 3-4 0,-9-2-3 16,-2 6 1-16,-14-5-2 0,-16 6 5 0,-16 0-5 15,-5 0-7-15,-9 1 3 0,-8 3-4 16,-4-1-19-16,-4-2-23 0,-4 3-24 0,-5 0-12 16,-1 3-8-16,-15-3-46 0,8 6-39 15,-8-6-46-15,-19 13-81 0,-5-4-103 0,-12-1-87 16,-13 4-501-16,-7-1-647 0</inkml:trace>
@@ -2614,7 +2615,7 @@
           <a:p>
             <a:fld id="{9F3C1A20-E642-F347-A89C-E093F8996D44}" type="datetimeFigureOut">
               <a:rPr lang="en-US" smtClean="0"/>
-              <a:t>3/20/2022</a:t>
+              <a:t>7/2/26</a:t>
             </a:fld>
             <a:endParaRPr lang="en-US"/>
           </a:p>
@@ -3223,7 +3224,7 @@
           <a:p>
             <a:fld id="{C65558FE-7BAE-4F41-B1DE-C9E081343886}" type="datetime1">
               <a:rPr lang="en-IN" smtClean="0"/>
-              <a:t>20-03-2022</a:t>
+              <a:t>02/07/26</a:t>
             </a:fld>
             <a:endParaRPr lang="en-IN" dirty="0"/>
           </a:p>
@@ -4013,7 +4014,7 @@
           <a:p>
             <a:fld id="{EB6B529C-358E-464A-80D3-B4DD91120955}" type="datetime1">
               <a:rPr lang="en-IN" smtClean="0"/>
-              <a:t>20-03-2022</a:t>
+              <a:t>02/07/26</a:t>
             </a:fld>
             <a:endParaRPr lang="en-IN" dirty="0"/>
           </a:p>
@@ -4773,7 +4774,7 @@
           <a:p>
             <a:fld id="{C546BFA6-7020-A842-AFE3-43A763B8DE0A}" type="datetime1">
               <a:rPr lang="en-IN" smtClean="0"/>
-              <a:t>20-03-2022</a:t>
+              <a:t>02/07/26</a:t>
             </a:fld>
             <a:endParaRPr lang="en-IN"/>
           </a:p>
@@ -6017,7 +6018,7 @@
           <a:p>
             <a:fld id="{24A60580-2B70-6940-B3F0-E4F8AB7AA3B6}" type="datetime1">
               <a:rPr lang="en-IN" smtClean="0"/>
-              <a:t>20-03-2022</a:t>
+              <a:t>02/07/26</a:t>
             </a:fld>
             <a:endParaRPr lang="en-IN"/>
           </a:p>
@@ -6249,7 +6250,7 @@
           <a:p>
             <a:fld id="{2FB0970A-5D49-E646-889A-E8EA6023EA9A}" type="datetime1">
               <a:rPr lang="en-IN" smtClean="0"/>
-              <a:t>20-03-2022</a:t>
+              <a:t>02/07/26</a:t>
             </a:fld>
             <a:endParaRPr lang="en-IN"/>
           </a:p>
@@ -7094,7 +7095,7 @@
           <a:p>
             <a:fld id="{60F6970B-5F9F-1C49-823B-784ECC0F8F74}" type="datetime1">
               <a:rPr lang="en-IN" smtClean="0"/>
-              <a:t>20-03-2022</a:t>
+              <a:t>02/07/26</a:t>
             </a:fld>
             <a:endParaRPr lang="en-IN"/>
           </a:p>
@@ -7682,7 +7683,7 @@
           <a:p>
             <a:fld id="{04CF2939-C6E8-734E-A964-0558AE677560}" type="datetime1">
               <a:rPr lang="en-IN" smtClean="0"/>
-              <a:t>20-03-2022</a:t>
+              <a:t>02/07/26</a:t>
             </a:fld>
             <a:endParaRPr lang="en-IN"/>
           </a:p>
@@ -8942,7 +8943,7 @@
           <a:p>
             <a:fld id="{55E1E18D-3351-C242-BAA6-DD72A5C1D791}" type="datetime1">
               <a:rPr lang="en-IN" smtClean="0"/>
-              <a:t>20-03-2022</a:t>
+              <a:t>02/07/26</a:t>
             </a:fld>
             <a:endParaRPr lang="en-IN"/>
           </a:p>
@@ -9015,7 +9016,7 @@
           <a:noFill/>
           <a:extLst>
             <a:ext uri="{909E8E84-426E-40dd-AFC4-6F175D3DCCD1}">
-              <a14:hiddenFill xmlns:a14="http://schemas.microsoft.com/office/drawing/2010/main" xmlns="">
+              <a14:hiddenFill xmlns="" xmlns:a14="http://schemas.microsoft.com/office/drawing/2010/main">
                 <a:solidFill>
                   <a:srgbClr val="FFFFFF"/>
                 </a:solidFill>
@@ -9695,7 +9696,7 @@
           <a:p>
             <a:fld id="{6F3FE410-33A2-CB47-8127-299FF22D1A22}" type="datetime1">
               <a:rPr lang="en-IN" smtClean="0"/>
-              <a:t>20-03-2022</a:t>
+              <a:t>02/07/26</a:t>
             </a:fld>
             <a:endParaRPr lang="en-IN"/>
           </a:p>
@@ -13266,7 +13267,7 @@
           <a:p>
             <a:fld id="{500D484D-755B-CC43-99C4-2BB0EB76FEF6}" type="datetime1">
               <a:rPr lang="en-IN" smtClean="0"/>
-              <a:t>20-03-2022</a:t>
+              <a:t>02/07/26</a:t>
             </a:fld>
             <a:endParaRPr lang="en-IN"/>
           </a:p>
@@ -13969,7 +13970,7 @@
           <a:p>
             <a:fld id="{3825AC8A-E3E4-AB4D-AABE-2AF883CEDDEB}" type="datetime1">
               <a:rPr lang="en-IN" smtClean="0"/>
-              <a:t>20-03-2022</a:t>
+              <a:t>02/07/26</a:t>
             </a:fld>
             <a:endParaRPr/>
           </a:p>
@@ -14438,7 +14439,7 @@
           <a:p>
             <a:fld id="{7DD0C667-8BB3-D74C-86FC-7D0CD1167351}" type="datetime1">
               <a:rPr lang="en-IN" smtClean="0"/>
-              <a:t>20-03-2022</a:t>
+              <a:t>02/07/26</a:t>
             </a:fld>
             <a:endParaRPr lang="en-IN" dirty="0"/>
           </a:p>
@@ -14740,7 +14741,7 @@
           <a:p>
             <a:fld id="{54E004E4-6425-1046-B03F-6799B0FFAEB1}" type="datetime1">
               <a:rPr lang="en-IN" smtClean="0"/>
-              <a:t>20-03-2022</a:t>
+              <a:t>02/07/26</a:t>
             </a:fld>
             <a:endParaRPr lang="en-IN"/>
           </a:p>
@@ -16178,7 +16179,7 @@
           <a:p>
             <a:fld id="{94A31C2B-8F11-8248-906D-0BD56E359BFE}" type="datetime1">
               <a:rPr lang="en-IN" smtClean="0"/>
-              <a:t>20-03-2022</a:t>
+              <a:t>02/07/26</a:t>
             </a:fld>
             <a:endParaRPr lang="en-IN" dirty="0"/>
           </a:p>
@@ -17317,7 +17318,7 @@
           <a:p>
             <a:fld id="{A3A67E1C-BAD1-994B-B7B0-0862E7408890}" type="datetime1">
               <a:rPr lang="en-IN" smtClean="0"/>
-              <a:t>20-03-2022</a:t>
+              <a:t>02/07/26</a:t>
             </a:fld>
             <a:endParaRPr lang="en-IN" dirty="0"/>
           </a:p>
@@ -18277,7 +18278,7 @@
           <a:p>
             <a:fld id="{AAC8EB75-20B8-FA41-8A25-CB9D4F4E068B}" type="datetime1">
               <a:rPr lang="en-IN" smtClean="0"/>
-              <a:t>20-03-2022</a:t>
+              <a:t>02/07/26</a:t>
             </a:fld>
             <a:endParaRPr lang="en-IN" dirty="0"/>
           </a:p>
@@ -18786,7 +18787,7 @@
           <a:p>
             <a:fld id="{4EB8ED25-022A-B848-9E47-2A9D6C0BE6AE}" type="datetime1">
               <a:rPr lang="en-IN" smtClean="0"/>
-              <a:t>20-03-2022</a:t>
+              <a:t>02/07/26</a:t>
             </a:fld>
             <a:endParaRPr lang="en-IN" dirty="0"/>
           </a:p>
@@ -19079,7 +19080,7 @@
           <a:p>
             <a:fld id="{9E6D2E29-3933-614D-82C7-D215195ADAE0}" type="datetime1">
               <a:rPr lang="en-IN" smtClean="0"/>
-              <a:t>20-03-2022</a:t>
+              <a:t>02/07/26</a:t>
             </a:fld>
             <a:endParaRPr lang="en-IN"/>
           </a:p>
@@ -20001,7 +20002,7 @@
           <a:p>
             <a:fld id="{371B733E-A046-7440-A009-9222C7A6AB80}" type="datetime1">
               <a:rPr lang="en-IN" smtClean="0"/>
-              <a:t>20-03-2022</a:t>
+              <a:t>02/07/26</a:t>
             </a:fld>
             <a:endParaRPr lang="en-IN" dirty="0"/>
           </a:p>
@@ -20693,7 +20694,7 @@
           <a:p>
             <a:fld id="{6E6F5B52-1A05-484E-BE74-C10EC951FF81}" type="datetime1">
               <a:rPr lang="en-IN" smtClean="0"/>
-              <a:t>20-03-2022</a:t>
+              <a:t>02/07/26</a:t>
             </a:fld>
             <a:endParaRPr lang="en-IN" dirty="0"/>
           </a:p>
@@ -21453,7 +21454,7 @@
           <a:p>
             <a:fld id="{330D92EB-81BB-3B43-94C7-8FE4C43F772A}" type="datetime1">
               <a:rPr lang="en-IN" smtClean="0"/>
-              <a:t>20-03-2022</a:t>
+              <a:t>02/07/26</a:t>
             </a:fld>
             <a:endParaRPr lang="en-IN" dirty="0"/>
           </a:p>
@@ -21497,6 +21498,208 @@
 </file>
 
 <file path=ppt/slides/slide10.xml><?xml version="1.0" encoding="utf-8"?>
+<p:sld xmlns:a="http://schemas.openxmlformats.org/drawingml/2006/main" xmlns:r="http://schemas.openxmlformats.org/officeDocument/2006/relationships" xmlns:p="http://schemas.openxmlformats.org/presentationml/2006/main" show="0">
+  <p:cSld>
+    <p:spTree>
+      <p:nvGrpSpPr>
+        <p:cNvPr id="1" name=""/>
+        <p:cNvGrpSpPr/>
+        <p:nvPr/>
+      </p:nvGrpSpPr>
+      <p:grpSpPr>
+        <a:xfrm>
+          <a:off x="0" y="0"/>
+          <a:ext cx="0" cy="0"/>
+          <a:chOff x="0" y="0"/>
+          <a:chExt cx="0" cy="0"/>
+        </a:xfrm>
+      </p:grpSpPr>
+      <p:sp>
+        <p:nvSpPr>
+          <p:cNvPr id="2" name="Date Placeholder 1"/>
+          <p:cNvSpPr>
+            <a:spLocks noGrp="1"/>
+          </p:cNvSpPr>
+          <p:nvPr>
+            <p:ph type="dt" sz="half" idx="10"/>
+          </p:nvPr>
+        </p:nvSpPr>
+        <p:spPr/>
+        <p:txBody>
+          <a:bodyPr/>
+          <a:lstStyle/>
+          <a:p>
+            <a:fld id="{9E6D2E29-3933-614D-82C7-D215195ADAE0}" type="datetime1">
+              <a:rPr lang="en-IN" smtClean="0"/>
+              <a:t>02/07/26</a:t>
+            </a:fld>
+            <a:endParaRPr lang="en-IN"/>
+          </a:p>
+        </p:txBody>
+      </p:sp>
+      <p:sp>
+        <p:nvSpPr>
+          <p:cNvPr id="3" name="Slide Number Placeholder 2"/>
+          <p:cNvSpPr>
+            <a:spLocks noGrp="1"/>
+          </p:cNvSpPr>
+          <p:nvPr>
+            <p:ph type="sldNum" sz="quarter" idx="12"/>
+          </p:nvPr>
+        </p:nvSpPr>
+        <p:spPr/>
+        <p:txBody>
+          <a:bodyPr/>
+          <a:lstStyle/>
+          <a:p>
+            <a:fld id="{273EEA2F-D825-49D3-9C25-497F06EFD3F7}" type="slidenum">
+              <a:rPr lang="en-IN" smtClean="0"/>
+              <a:t>10</a:t>
+            </a:fld>
+            <a:endParaRPr lang="en-IN"/>
+          </a:p>
+        </p:txBody>
+      </p:sp>
+      <p:sp>
+        <p:nvSpPr>
+          <p:cNvPr id="5" name="Title 4"/>
+          <p:cNvSpPr>
+            <a:spLocks noGrp="1"/>
+          </p:cNvSpPr>
+          <p:nvPr>
+            <p:ph type="title"/>
+          </p:nvPr>
+        </p:nvSpPr>
+        <p:spPr>
+          <a:xfrm>
+            <a:off x="316679" y="121966"/>
+            <a:ext cx="5488220" cy="382564"/>
+          </a:xfrm>
+        </p:spPr>
+        <p:txBody>
+          <a:bodyPr/>
+          <a:lstStyle/>
+          <a:p>
+            <a:r>
+              <a:rPr lang="en-US" dirty="0"/>
+              <a:t>Model-Free Method</a:t>
+            </a:r>
+          </a:p>
+        </p:txBody>
+      </p:sp>
+      <p:sp>
+        <p:nvSpPr>
+          <p:cNvPr id="6" name="Rectangle 5"/>
+          <p:cNvSpPr/>
+          <p:nvPr/>
+        </p:nvSpPr>
+        <p:spPr>
+          <a:xfrm>
+            <a:off x="536183" y="868123"/>
+            <a:ext cx="8114657" cy="954107"/>
+          </a:xfrm>
+          <a:prstGeom prst="rect">
+            <a:avLst/>
+          </a:prstGeom>
+        </p:spPr>
+        <p:txBody>
+          <a:bodyPr wrap="square">
+            <a:spAutoFit/>
+          </a:bodyPr>
+          <a:lstStyle/>
+          <a:p>
+            <a:r>
+              <a:rPr lang="en-US" sz="1400" dirty="0">
+                <a:solidFill>
+                  <a:srgbClr val="000000"/>
+                </a:solidFill>
+                <a:latin typeface="Arial" panose="020B0604020202020204" pitchFamily="34" charset="0"/>
+                <a:ea typeface="Times New Roman" panose="02020603050405020304" pitchFamily="18" charset="0"/>
+              </a:rPr>
+              <a:t>The equations can be solved if the model of the environment p(s</a:t>
+            </a:r>
+            <a:r>
+              <a:rPr lang="en-US" sz="1000" dirty="0">
+                <a:solidFill>
+                  <a:srgbClr val="000000"/>
+                </a:solidFill>
+                <a:latin typeface="Arial" panose="020B0604020202020204" pitchFamily="34" charset="0"/>
+                <a:ea typeface="Times New Roman" panose="02020603050405020304" pitchFamily="18" charset="0"/>
+              </a:rPr>
+              <a:t>′</a:t>
+            </a:r>
+            <a:r>
+              <a:rPr lang="en-US" sz="1400" dirty="0">
+                <a:solidFill>
+                  <a:srgbClr val="000000"/>
+                </a:solidFill>
+                <a:latin typeface="Arial" panose="020B0604020202020204" pitchFamily="34" charset="0"/>
+                <a:ea typeface="Times New Roman" panose="02020603050405020304" pitchFamily="18" charset="0"/>
+              </a:rPr>
+              <a:t>,</a:t>
+            </a:r>
+            <a:r>
+              <a:rPr lang="en-US" sz="1400" dirty="0" err="1">
+                <a:solidFill>
+                  <a:srgbClr val="000000"/>
+                </a:solidFill>
+                <a:latin typeface="Arial" panose="020B0604020202020204" pitchFamily="34" charset="0"/>
+                <a:ea typeface="Times New Roman" panose="02020603050405020304" pitchFamily="18" charset="0"/>
+              </a:rPr>
+              <a:t>r|s,a</a:t>
+            </a:r>
+            <a:r>
+              <a:rPr lang="en-US" sz="1400" dirty="0">
+                <a:solidFill>
+                  <a:srgbClr val="000000"/>
+                </a:solidFill>
+                <a:latin typeface="Arial" panose="020B0604020202020204" pitchFamily="34" charset="0"/>
+                <a:ea typeface="Times New Roman" panose="02020603050405020304" pitchFamily="18" charset="0"/>
+              </a:rPr>
+              <a:t>) is available. In most real-life scenarios with large state and action spaces, the model of the environment is not available (i.e. model-free methods). In such cases, you can compute the q-function using the fact that it is the expected value of the total reward</a:t>
+            </a:r>
+            <a:endParaRPr lang="en-US" sz="1400" dirty="0"/>
+          </a:p>
+        </p:txBody>
+      </p:sp>
+      <p:pic>
+        <p:nvPicPr>
+          <p:cNvPr id="7" name="Picture 6"/>
+          <p:cNvPicPr>
+            <a:picLocks noChangeAspect="1"/>
+          </p:cNvPicPr>
+          <p:nvPr/>
+        </p:nvPicPr>
+        <p:blipFill>
+          <a:blip r:embed="rId2"/>
+          <a:stretch>
+            <a:fillRect/>
+          </a:stretch>
+        </p:blipFill>
+        <p:spPr>
+          <a:xfrm>
+            <a:off x="1774338" y="1822230"/>
+            <a:ext cx="5851935" cy="2707857"/>
+          </a:xfrm>
+          <a:prstGeom prst="rect">
+            <a:avLst/>
+          </a:prstGeom>
+        </p:spPr>
+      </p:pic>
+    </p:spTree>
+    <p:extLst>
+      <p:ext uri="{BB962C8B-B14F-4D97-AF65-F5344CB8AC3E}">
+        <p14:creationId xmlns:p14="http://schemas.microsoft.com/office/powerpoint/2010/main" val="1726451625"/>
+      </p:ext>
+    </p:extLst>
+  </p:cSld>
+  <p:clrMapOvr>
+    <a:masterClrMapping/>
+  </p:clrMapOvr>
+</p:sld>
+</file>
+
+<file path=ppt/slides/slide11.xml><?xml version="1.0" encoding="utf-8"?>
 <p:sld xmlns:a="http://schemas.openxmlformats.org/drawingml/2006/main" xmlns:r="http://schemas.openxmlformats.org/officeDocument/2006/relationships" xmlns:p="http://schemas.openxmlformats.org/presentationml/2006/main">
   <p:cSld>
     <p:spTree>
@@ -21530,7 +21733,7 @@
           <a:p>
             <a:fld id="{9E6D2E29-3933-614D-82C7-D215195ADAE0}" type="datetime1">
               <a:rPr lang="en-IN" smtClean="0"/>
-              <a:t>20-03-2022</a:t>
+              <a:t>02/07/26</a:t>
             </a:fld>
             <a:endParaRPr lang="en-IN"/>
           </a:p>
@@ -21553,7 +21756,7 @@
           <a:p>
             <a:fld id="{273EEA2F-D825-49D3-9C25-497F06EFD3F7}" type="slidenum">
               <a:rPr lang="en-IN" smtClean="0"/>
-              <a:t>10</a:t>
+              <a:t>11</a:t>
             </a:fld>
             <a:endParaRPr lang="en-IN"/>
           </a:p>
@@ -21777,8 +21980,8 @@
           </a:prstGeom>
         </p:spPr>
       </p:pic>
-      <mc:AlternateContent xmlns:mc="http://schemas.openxmlformats.org/markup-compatibility/2006">
-        <mc:Choice xmlns:p14="http://schemas.microsoft.com/office/powerpoint/2010/main" Requires="p14">
+      <mc:AlternateContent xmlns:mc="http://schemas.openxmlformats.org/markup-compatibility/2006" xmlns:p14="http://schemas.microsoft.com/office/powerpoint/2010/main">
+        <mc:Choice Requires="p14">
           <p:contentPart p14:bwMode="auto" r:id="rId4">
             <p14:nvContentPartPr>
               <p14:cNvPr id="4" name="Ink 3">
@@ -21797,7 +22000,7 @@
             </p14:xfrm>
           </p:contentPart>
         </mc:Choice>
-        <mc:Fallback>
+        <mc:Fallback xmlns="">
           <p:pic>
             <p:nvPicPr>
               <p:cNvPr id="4" name="Ink 3">
@@ -21841,7 +22044,7 @@
 </p:sld>
 </file>
 
-<file path=ppt/slides/slide11.xml><?xml version="1.0" encoding="utf-8"?>
+<file path=ppt/slides/slide12.xml><?xml version="1.0" encoding="utf-8"?>
 <p:sld xmlns:a="http://schemas.openxmlformats.org/drawingml/2006/main" xmlns:r="http://schemas.openxmlformats.org/officeDocument/2006/relationships" xmlns:p="http://schemas.openxmlformats.org/presentationml/2006/main">
   <p:cSld>
     <p:spTree>
@@ -21881,7 +22084,7 @@
           <a:p>
             <a:fld id="{9E6D2E29-3933-614D-82C7-D215195ADAE0}" type="datetime1">
               <a:rPr lang="en-IN" smtClean="0"/>
-              <a:t>20-03-2022</a:t>
+              <a:t>02/07/26</a:t>
             </a:fld>
             <a:endParaRPr lang="en-IN"/>
           </a:p>
@@ -21910,7 +22113,7 @@
           <a:p>
             <a:fld id="{273EEA2F-D825-49D3-9C25-497F06EFD3F7}" type="slidenum">
               <a:rPr lang="en-IN" smtClean="0"/>
-              <a:t>11</a:t>
+              <a:t>12</a:t>
             </a:fld>
             <a:endParaRPr lang="en-IN"/>
           </a:p>
@@ -21966,8 +22169,8 @@
           </a:p>
         </p:txBody>
       </p:sp>
-      <mc:AlternateContent xmlns:mc="http://schemas.openxmlformats.org/markup-compatibility/2006">
-        <mc:Choice xmlns:p14="http://schemas.microsoft.com/office/powerpoint/2010/main" Requires="p14">
+      <mc:AlternateContent xmlns:mc="http://schemas.openxmlformats.org/markup-compatibility/2006" xmlns:p14="http://schemas.microsoft.com/office/powerpoint/2010/main">
+        <mc:Choice Requires="p14">
           <p:contentPart p14:bwMode="auto" r:id="rId2">
             <p14:nvContentPartPr>
               <p14:cNvPr id="6" name="Ink 5">
@@ -21986,7 +22189,7 @@
             </p14:xfrm>
           </p:contentPart>
         </mc:Choice>
-        <mc:Fallback>
+        <mc:Fallback xmlns="">
           <p:pic>
             <p:nvPicPr>
               <p:cNvPr id="6" name="Ink 5">
@@ -22030,174 +22233,6 @@
 </p:sld>
 </file>
 
-<file path=ppt/slides/slide12.xml><?xml version="1.0" encoding="utf-8"?>
-<p:sld xmlns:a="http://schemas.openxmlformats.org/drawingml/2006/main" xmlns:r="http://schemas.openxmlformats.org/officeDocument/2006/relationships" xmlns:p="http://schemas.openxmlformats.org/presentationml/2006/main">
-  <p:cSld>
-    <p:spTree>
-      <p:nvGrpSpPr>
-        <p:cNvPr id="1" name=""/>
-        <p:cNvGrpSpPr/>
-        <p:nvPr/>
-      </p:nvGrpSpPr>
-      <p:grpSpPr>
-        <a:xfrm>
-          <a:off x="0" y="0"/>
-          <a:ext cx="0" cy="0"/>
-          <a:chOff x="0" y="0"/>
-          <a:chExt cx="0" cy="0"/>
-        </a:xfrm>
-      </p:grpSpPr>
-      <p:sp>
-        <p:nvSpPr>
-          <p:cNvPr id="2" name="Date Placeholder 1">
-            <a:extLst>
-              <a:ext uri="{FF2B5EF4-FFF2-40B4-BE49-F238E27FC236}">
-                <a16:creationId xmlns:a16="http://schemas.microsoft.com/office/drawing/2014/main" id="{6EFF7E0B-3C0C-4B3B-ABA8-C1E47081A91A}"/>
-              </a:ext>
-            </a:extLst>
-          </p:cNvPr>
-          <p:cNvSpPr>
-            <a:spLocks noGrp="1"/>
-          </p:cNvSpPr>
-          <p:nvPr>
-            <p:ph type="dt" sz="half" idx="10"/>
-          </p:nvPr>
-        </p:nvSpPr>
-        <p:spPr/>
-        <p:txBody>
-          <a:bodyPr/>
-          <a:lstStyle/>
-          <a:p>
-            <a:fld id="{9E6D2E29-3933-614D-82C7-D215195ADAE0}" type="datetime1">
-              <a:rPr lang="en-IN" smtClean="0"/>
-              <a:t>20-03-2022</a:t>
-            </a:fld>
-            <a:endParaRPr lang="en-IN"/>
-          </a:p>
-        </p:txBody>
-      </p:sp>
-      <p:sp>
-        <p:nvSpPr>
-          <p:cNvPr id="3" name="Slide Number Placeholder 2">
-            <a:extLst>
-              <a:ext uri="{FF2B5EF4-FFF2-40B4-BE49-F238E27FC236}">
-                <a16:creationId xmlns:a16="http://schemas.microsoft.com/office/drawing/2014/main" id="{1E20C16A-270E-4200-999D-87716E6DCB9B}"/>
-              </a:ext>
-            </a:extLst>
-          </p:cNvPr>
-          <p:cNvSpPr>
-            <a:spLocks noGrp="1"/>
-          </p:cNvSpPr>
-          <p:nvPr>
-            <p:ph type="sldNum" sz="quarter" idx="12"/>
-          </p:nvPr>
-        </p:nvSpPr>
-        <p:spPr/>
-        <p:txBody>
-          <a:bodyPr/>
-          <a:lstStyle/>
-          <a:p>
-            <a:fld id="{273EEA2F-D825-49D3-9C25-497F06EFD3F7}" type="slidenum">
-              <a:rPr lang="en-IN" smtClean="0"/>
-              <a:t>12</a:t>
-            </a:fld>
-            <a:endParaRPr lang="en-IN"/>
-          </a:p>
-        </p:txBody>
-      </p:sp>
-      <p:sp>
-        <p:nvSpPr>
-          <p:cNvPr id="4" name="Content Placeholder 3">
-            <a:extLst>
-              <a:ext uri="{FF2B5EF4-FFF2-40B4-BE49-F238E27FC236}">
-                <a16:creationId xmlns:a16="http://schemas.microsoft.com/office/drawing/2014/main" id="{96C3A13B-998C-4F61-B479-41FA0A9AC6B7}"/>
-              </a:ext>
-            </a:extLst>
-          </p:cNvPr>
-          <p:cNvSpPr>
-            <a:spLocks noGrp="1"/>
-          </p:cNvSpPr>
-          <p:nvPr>
-            <p:ph idx="15"/>
-          </p:nvPr>
-        </p:nvSpPr>
-        <p:spPr/>
-        <p:txBody>
-          <a:bodyPr/>
-          <a:lstStyle/>
-          <a:p>
-            <a:endParaRPr lang="en-IN"/>
-          </a:p>
-        </p:txBody>
-      </p:sp>
-      <p:sp>
-        <p:nvSpPr>
-          <p:cNvPr id="5" name="Title 4">
-            <a:extLst>
-              <a:ext uri="{FF2B5EF4-FFF2-40B4-BE49-F238E27FC236}">
-                <a16:creationId xmlns:a16="http://schemas.microsoft.com/office/drawing/2014/main" id="{1ABCD759-F7F7-47D5-A3FD-CEDC92C945CA}"/>
-              </a:ext>
-            </a:extLst>
-          </p:cNvPr>
-          <p:cNvSpPr>
-            <a:spLocks noGrp="1"/>
-          </p:cNvSpPr>
-          <p:nvPr>
-            <p:ph type="title"/>
-          </p:nvPr>
-        </p:nvSpPr>
-        <p:spPr/>
-        <p:txBody>
-          <a:bodyPr/>
-          <a:lstStyle/>
-          <a:p>
-            <a:endParaRPr lang="en-IN"/>
-          </a:p>
-        </p:txBody>
-      </p:sp>
-      <p:pic>
-        <p:nvPicPr>
-          <p:cNvPr id="6" name="Picture 5">
-            <a:extLst>
-              <a:ext uri="{FF2B5EF4-FFF2-40B4-BE49-F238E27FC236}">
-                <a16:creationId xmlns:a16="http://schemas.microsoft.com/office/drawing/2014/main" id="{566C701A-B24A-4D59-B449-A7CBFF11E98A}"/>
-              </a:ext>
-            </a:extLst>
-          </p:cNvPr>
-          <p:cNvPicPr>
-            <a:picLocks noChangeAspect="1"/>
-          </p:cNvPicPr>
-          <p:nvPr/>
-        </p:nvPicPr>
-        <p:blipFill>
-          <a:blip r:embed="rId2"/>
-          <a:stretch>
-            <a:fillRect/>
-          </a:stretch>
-        </p:blipFill>
-        <p:spPr>
-          <a:xfrm>
-            <a:off x="4733521" y="880143"/>
-            <a:ext cx="4210050" cy="371475"/>
-          </a:xfrm>
-          <a:prstGeom prst="rect">
-            <a:avLst/>
-          </a:prstGeom>
-        </p:spPr>
-      </p:pic>
-    </p:spTree>
-    <p:extLst>
-      <p:ext uri="{BB962C8B-B14F-4D97-AF65-F5344CB8AC3E}">
-        <p14:creationId xmlns:p14="http://schemas.microsoft.com/office/powerpoint/2010/main" val="3702032477"/>
-      </p:ext>
-    </p:extLst>
-  </p:cSld>
-  <p:clrMapOvr>
-    <a:masterClrMapping/>
-  </p:clrMapOvr>
-</p:sld>
-</file>
-
 <file path=ppt/slides/slide13.xml><?xml version="1.0" encoding="utf-8"?>
 <p:sld xmlns:a="http://schemas.openxmlformats.org/drawingml/2006/main" xmlns:r="http://schemas.openxmlformats.org/officeDocument/2006/relationships" xmlns:p="http://schemas.openxmlformats.org/presentationml/2006/main">
   <p:cSld>
@@ -22220,7 +22255,7 @@
           <p:cNvPr id="2" name="Date Placeholder 1">
             <a:extLst>
               <a:ext uri="{FF2B5EF4-FFF2-40B4-BE49-F238E27FC236}">
-                <a16:creationId xmlns:a16="http://schemas.microsoft.com/office/drawing/2014/main" id="{F10A1531-6181-4159-B1EC-8B3242DE3E29}"/>
+                <a16:creationId xmlns:a16="http://schemas.microsoft.com/office/drawing/2014/main" id="{6EFF7E0B-3C0C-4B3B-ABA8-C1E47081A91A}"/>
               </a:ext>
             </a:extLst>
           </p:cNvPr>
@@ -22238,7 +22273,7 @@
           <a:p>
             <a:fld id="{9E6D2E29-3933-614D-82C7-D215195ADAE0}" type="datetime1">
               <a:rPr lang="en-IN" smtClean="0"/>
-              <a:t>20-03-2022</a:t>
+              <a:t>02/07/26</a:t>
             </a:fld>
             <a:endParaRPr lang="en-IN"/>
           </a:p>
@@ -22249,7 +22284,7 @@
           <p:cNvPr id="3" name="Slide Number Placeholder 2">
             <a:extLst>
               <a:ext uri="{FF2B5EF4-FFF2-40B4-BE49-F238E27FC236}">
-                <a16:creationId xmlns:a16="http://schemas.microsoft.com/office/drawing/2014/main" id="{16734FC6-CEE4-4356-BE82-CC80947CF685}"/>
+                <a16:creationId xmlns:a16="http://schemas.microsoft.com/office/drawing/2014/main" id="{1E20C16A-270E-4200-999D-87716E6DCB9B}"/>
               </a:ext>
             </a:extLst>
           </p:cNvPr>
@@ -22278,7 +22313,7 @@
           <p:cNvPr id="4" name="Content Placeholder 3">
             <a:extLst>
               <a:ext uri="{FF2B5EF4-FFF2-40B4-BE49-F238E27FC236}">
-                <a16:creationId xmlns:a16="http://schemas.microsoft.com/office/drawing/2014/main" id="{1EFAD5F7-FD0E-4C1C-BCA0-1B04ACCFD076}"/>
+                <a16:creationId xmlns:a16="http://schemas.microsoft.com/office/drawing/2014/main" id="{96C3A13B-998C-4F61-B479-41FA0A9AC6B7}"/>
               </a:ext>
             </a:extLst>
           </p:cNvPr>
@@ -22294,7 +22329,7 @@
           <a:bodyPr/>
           <a:lstStyle/>
           <a:p>
-            <a:endParaRPr lang="en-IN"/>
+            <a:endParaRPr lang="en-IN" dirty="0"/>
           </a:p>
         </p:txBody>
       </p:sp>
@@ -22303,7 +22338,7 @@
           <p:cNvPr id="5" name="Title 4">
             <a:extLst>
               <a:ext uri="{FF2B5EF4-FFF2-40B4-BE49-F238E27FC236}">
-                <a16:creationId xmlns:a16="http://schemas.microsoft.com/office/drawing/2014/main" id="{54B77A25-A9DD-4907-AF4F-DEDF154A6913}"/>
+                <a16:creationId xmlns:a16="http://schemas.microsoft.com/office/drawing/2014/main" id="{1ABCD759-F7F7-47D5-A3FD-CEDC92C945CA}"/>
               </a:ext>
             </a:extLst>
           </p:cNvPr>
@@ -22323,10 +22358,40 @@
           </a:p>
         </p:txBody>
       </p:sp>
+      <p:pic>
+        <p:nvPicPr>
+          <p:cNvPr id="6" name="Picture 5">
+            <a:extLst>
+              <a:ext uri="{FF2B5EF4-FFF2-40B4-BE49-F238E27FC236}">
+                <a16:creationId xmlns:a16="http://schemas.microsoft.com/office/drawing/2014/main" id="{566C701A-B24A-4D59-B449-A7CBFF11E98A}"/>
+              </a:ext>
+            </a:extLst>
+          </p:cNvPr>
+          <p:cNvPicPr>
+            <a:picLocks noChangeAspect="1"/>
+          </p:cNvPicPr>
+          <p:nvPr/>
+        </p:nvPicPr>
+        <p:blipFill>
+          <a:blip r:embed="rId2"/>
+          <a:stretch>
+            <a:fillRect/>
+          </a:stretch>
+        </p:blipFill>
+        <p:spPr>
+          <a:xfrm>
+            <a:off x="4733521" y="880143"/>
+            <a:ext cx="4210050" cy="371475"/>
+          </a:xfrm>
+          <a:prstGeom prst="rect">
+            <a:avLst/>
+          </a:prstGeom>
+        </p:spPr>
+      </p:pic>
     </p:spTree>
     <p:extLst>
       <p:ext uri="{BB962C8B-B14F-4D97-AF65-F5344CB8AC3E}">
-        <p14:creationId xmlns:p14="http://schemas.microsoft.com/office/powerpoint/2010/main" val="2605528146"/>
+        <p14:creationId xmlns:p14="http://schemas.microsoft.com/office/powerpoint/2010/main" val="3702032477"/>
       </p:ext>
     </p:extLst>
   </p:cSld>
@@ -22355,6 +22420,144 @@
       </p:grpSpPr>
       <p:sp>
         <p:nvSpPr>
+          <p:cNvPr id="2" name="Date Placeholder 1">
+            <a:extLst>
+              <a:ext uri="{FF2B5EF4-FFF2-40B4-BE49-F238E27FC236}">
+                <a16:creationId xmlns:a16="http://schemas.microsoft.com/office/drawing/2014/main" id="{F10A1531-6181-4159-B1EC-8B3242DE3E29}"/>
+              </a:ext>
+            </a:extLst>
+          </p:cNvPr>
+          <p:cNvSpPr>
+            <a:spLocks noGrp="1"/>
+          </p:cNvSpPr>
+          <p:nvPr>
+            <p:ph type="dt" sz="half" idx="10"/>
+          </p:nvPr>
+        </p:nvSpPr>
+        <p:spPr/>
+        <p:txBody>
+          <a:bodyPr/>
+          <a:lstStyle/>
+          <a:p>
+            <a:fld id="{9E6D2E29-3933-614D-82C7-D215195ADAE0}" type="datetime1">
+              <a:rPr lang="en-IN" smtClean="0"/>
+              <a:t>02/07/26</a:t>
+            </a:fld>
+            <a:endParaRPr lang="en-IN"/>
+          </a:p>
+        </p:txBody>
+      </p:sp>
+      <p:sp>
+        <p:nvSpPr>
+          <p:cNvPr id="3" name="Slide Number Placeholder 2">
+            <a:extLst>
+              <a:ext uri="{FF2B5EF4-FFF2-40B4-BE49-F238E27FC236}">
+                <a16:creationId xmlns:a16="http://schemas.microsoft.com/office/drawing/2014/main" id="{16734FC6-CEE4-4356-BE82-CC80947CF685}"/>
+              </a:ext>
+            </a:extLst>
+          </p:cNvPr>
+          <p:cNvSpPr>
+            <a:spLocks noGrp="1"/>
+          </p:cNvSpPr>
+          <p:nvPr>
+            <p:ph type="sldNum" sz="quarter" idx="12"/>
+          </p:nvPr>
+        </p:nvSpPr>
+        <p:spPr/>
+        <p:txBody>
+          <a:bodyPr/>
+          <a:lstStyle/>
+          <a:p>
+            <a:fld id="{273EEA2F-D825-49D3-9C25-497F06EFD3F7}" type="slidenum">
+              <a:rPr lang="en-IN" smtClean="0"/>
+              <a:t>14</a:t>
+            </a:fld>
+            <a:endParaRPr lang="en-IN"/>
+          </a:p>
+        </p:txBody>
+      </p:sp>
+      <p:sp>
+        <p:nvSpPr>
+          <p:cNvPr id="4" name="Content Placeholder 3">
+            <a:extLst>
+              <a:ext uri="{FF2B5EF4-FFF2-40B4-BE49-F238E27FC236}">
+                <a16:creationId xmlns:a16="http://schemas.microsoft.com/office/drawing/2014/main" id="{1EFAD5F7-FD0E-4C1C-BCA0-1B04ACCFD076}"/>
+              </a:ext>
+            </a:extLst>
+          </p:cNvPr>
+          <p:cNvSpPr>
+            <a:spLocks noGrp="1"/>
+          </p:cNvSpPr>
+          <p:nvPr>
+            <p:ph idx="15"/>
+          </p:nvPr>
+        </p:nvSpPr>
+        <p:spPr/>
+        <p:txBody>
+          <a:bodyPr/>
+          <a:lstStyle/>
+          <a:p>
+            <a:endParaRPr lang="en-IN"/>
+          </a:p>
+        </p:txBody>
+      </p:sp>
+      <p:sp>
+        <p:nvSpPr>
+          <p:cNvPr id="5" name="Title 4">
+            <a:extLst>
+              <a:ext uri="{FF2B5EF4-FFF2-40B4-BE49-F238E27FC236}">
+                <a16:creationId xmlns:a16="http://schemas.microsoft.com/office/drawing/2014/main" id="{54B77A25-A9DD-4907-AF4F-DEDF154A6913}"/>
+              </a:ext>
+            </a:extLst>
+          </p:cNvPr>
+          <p:cNvSpPr>
+            <a:spLocks noGrp="1"/>
+          </p:cNvSpPr>
+          <p:nvPr>
+            <p:ph type="title"/>
+          </p:nvPr>
+        </p:nvSpPr>
+        <p:spPr/>
+        <p:txBody>
+          <a:bodyPr/>
+          <a:lstStyle/>
+          <a:p>
+            <a:endParaRPr lang="en-IN"/>
+          </a:p>
+        </p:txBody>
+      </p:sp>
+    </p:spTree>
+    <p:extLst>
+      <p:ext uri="{BB962C8B-B14F-4D97-AF65-F5344CB8AC3E}">
+        <p14:creationId xmlns:p14="http://schemas.microsoft.com/office/powerpoint/2010/main" val="2605528146"/>
+      </p:ext>
+    </p:extLst>
+  </p:cSld>
+  <p:clrMapOvr>
+    <a:masterClrMapping/>
+  </p:clrMapOvr>
+</p:sld>
+</file>
+
+<file path=ppt/slides/slide15.xml><?xml version="1.0" encoding="utf-8"?>
+<p:sld xmlns:a="http://schemas.openxmlformats.org/drawingml/2006/main" xmlns:r="http://schemas.openxmlformats.org/officeDocument/2006/relationships" xmlns:p="http://schemas.openxmlformats.org/presentationml/2006/main">
+  <p:cSld>
+    <p:spTree>
+      <p:nvGrpSpPr>
+        <p:cNvPr id="1" name=""/>
+        <p:cNvGrpSpPr/>
+        <p:nvPr/>
+      </p:nvGrpSpPr>
+      <p:grpSpPr>
+        <a:xfrm>
+          <a:off x="0" y="0"/>
+          <a:ext cx="0" cy="0"/>
+          <a:chOff x="0" y="0"/>
+          <a:chExt cx="0" cy="0"/>
+        </a:xfrm>
+      </p:grpSpPr>
+      <p:sp>
+        <p:nvSpPr>
           <p:cNvPr id="4" name="Date Placeholder 3"/>
           <p:cNvSpPr>
             <a:spLocks noGrp="1"/>
@@ -22370,7 +22573,7 @@
           <a:p>
             <a:fld id="{AAC8EB75-20B8-FA41-8A25-CB9D4F4E068B}" type="datetime1">
               <a:rPr lang="en-IN" smtClean="0"/>
-              <a:t>20-03-2022</a:t>
+              <a:t>02/07/26</a:t>
             </a:fld>
             <a:endParaRPr lang="en-IN" dirty="0"/>
           </a:p>
@@ -22393,7 +22596,7 @@
           <a:p>
             <a:fld id="{273EEA2F-D825-49D3-9C25-497F06EFD3F7}" type="slidenum">
               <a:rPr lang="en-IN" smtClean="0"/>
-              <a:t>14</a:t>
+              <a:t>15</a:t>
             </a:fld>
             <a:endParaRPr lang="en-IN" dirty="0"/>
           </a:p>
@@ -22480,7 +22683,7 @@
 </p:sld>
 </file>
 
-<file path=ppt/slides/slide15.xml><?xml version="1.0" encoding="utf-8"?>
+<file path=ppt/slides/slide16.xml><?xml version="1.0" encoding="utf-8"?>
 <p:sld xmlns:a="http://schemas.openxmlformats.org/drawingml/2006/main" xmlns:r="http://schemas.openxmlformats.org/officeDocument/2006/relationships" xmlns:p="http://schemas.openxmlformats.org/presentationml/2006/main">
   <p:cSld>
     <p:spTree>
@@ -22813,7 +23016,7 @@
           <a:p>
             <a:fld id="{05F9FE4C-6887-C742-8AA6-90375168B633}" type="datetime1">
               <a:rPr lang="en-IN" smtClean="0"/>
-              <a:t>20-03-2022</a:t>
+              <a:t>02/07/26</a:t>
             </a:fld>
             <a:endParaRPr lang="en-IN" dirty="0"/>
           </a:p>
@@ -23010,7 +23213,7 @@
                 <a:cs typeface="Proxima Nova"/>
                 <a:sym typeface="Proxima Nova"/>
               </a:rPr>
-              <a:t>20-03-2022</a:t>
+              <a:t>02/07/26</a:t>
             </a:fld>
             <a:endParaRPr sz="900">
               <a:solidFill>
@@ -23408,7 +23611,7 @@
           <a:p>
             <a:fld id="{7DD0C667-8BB3-D74C-86FC-7D0CD1167351}" type="datetime1">
               <a:rPr lang="en-IN" smtClean="0"/>
-              <a:t>20-03-2022</a:t>
+              <a:t>02/07/26</a:t>
             </a:fld>
             <a:endParaRPr lang="en-IN" dirty="0"/>
           </a:p>
@@ -23586,8 +23789,8 @@
           </a:p>
         </p:txBody>
       </p:sp>
-      <mc:AlternateContent xmlns:mc="http://schemas.openxmlformats.org/markup-compatibility/2006">
-        <mc:Choice xmlns:p14="http://schemas.microsoft.com/office/powerpoint/2010/main" Requires="p14">
+      <mc:AlternateContent xmlns:mc="http://schemas.openxmlformats.org/markup-compatibility/2006" xmlns:p14="http://schemas.microsoft.com/office/powerpoint/2010/main">
+        <mc:Choice Requires="p14">
           <p:contentPart p14:bwMode="auto" r:id="rId2">
             <p14:nvContentPartPr>
               <p14:cNvPr id="7" name="Ink 6">
@@ -23606,7 +23809,7 @@
             </p14:xfrm>
           </p:contentPart>
         </mc:Choice>
-        <mc:Fallback>
+        <mc:Fallback xmlns="">
           <p:pic>
             <p:nvPicPr>
               <p:cNvPr id="7" name="Ink 6">
@@ -23684,7 +23887,7 @@
           <a:p>
             <a:fld id="{9E6D2E29-3933-614D-82C7-D215195ADAE0}" type="datetime1">
               <a:rPr lang="en-IN" smtClean="0"/>
-              <a:t>20-03-2022</a:t>
+              <a:t>02/07/26</a:t>
             </a:fld>
             <a:endParaRPr lang="en-IN"/>
           </a:p>
@@ -23895,8 +24098,8 @@
           </a:p>
         </p:txBody>
       </p:sp>
-      <mc:AlternateContent xmlns:mc="http://schemas.openxmlformats.org/markup-compatibility/2006">
-        <mc:Choice xmlns:p14="http://schemas.microsoft.com/office/powerpoint/2010/main" Requires="p14">
+      <mc:AlternateContent xmlns:mc="http://schemas.openxmlformats.org/markup-compatibility/2006" xmlns:p14="http://schemas.microsoft.com/office/powerpoint/2010/main">
+        <mc:Choice Requires="p14">
           <p:contentPart p14:bwMode="auto" r:id="rId3">
             <p14:nvContentPartPr>
               <p14:cNvPr id="4" name="Ink 3">
@@ -23915,7 +24118,7 @@
             </p14:xfrm>
           </p:contentPart>
         </mc:Choice>
-        <mc:Fallback>
+        <mc:Fallback xmlns="">
           <p:pic>
             <p:nvPicPr>
               <p:cNvPr id="4" name="Ink 3">
@@ -23993,7 +24196,7 @@
           <a:p>
             <a:fld id="{9E6D2E29-3933-614D-82C7-D215195ADAE0}" type="datetime1">
               <a:rPr lang="en-IN" smtClean="0"/>
-              <a:t>20-03-2022</a:t>
+              <a:t>02/07/26</a:t>
             </a:fld>
             <a:endParaRPr lang="en-IN"/>
           </a:p>
@@ -24208,8 +24411,8 @@
           </a:p>
         </p:txBody>
       </p:sp>
-      <mc:AlternateContent xmlns:mc="http://schemas.openxmlformats.org/markup-compatibility/2006">
-        <mc:Choice xmlns:p14="http://schemas.microsoft.com/office/powerpoint/2010/main" Requires="p14">
+      <mc:AlternateContent xmlns:mc="http://schemas.openxmlformats.org/markup-compatibility/2006" xmlns:p14="http://schemas.microsoft.com/office/powerpoint/2010/main">
+        <mc:Choice Requires="p14">
           <p:contentPart p14:bwMode="auto" r:id="rId2">
             <p14:nvContentPartPr>
               <p14:cNvPr id="4" name="Ink 3">
@@ -24228,7 +24431,7 @@
             </p14:xfrm>
           </p:contentPart>
         </mc:Choice>
-        <mc:Fallback>
+        <mc:Fallback xmlns="">
           <p:pic>
             <p:nvPicPr>
               <p:cNvPr id="4" name="Ink 3">
@@ -24259,8 +24462,8 @@
           </p:pic>
         </mc:Fallback>
       </mc:AlternateContent>
-      <mc:AlternateContent xmlns:mc="http://schemas.openxmlformats.org/markup-compatibility/2006">
-        <mc:Choice xmlns:p14="http://schemas.microsoft.com/office/powerpoint/2010/main" Requires="p14">
+      <mc:AlternateContent xmlns:mc="http://schemas.openxmlformats.org/markup-compatibility/2006" xmlns:p14="http://schemas.microsoft.com/office/powerpoint/2010/main">
+        <mc:Choice Requires="p14">
           <p:contentPart p14:bwMode="auto" r:id="rId4">
             <p14:nvContentPartPr>
               <p14:cNvPr id="9" name="Ink 8">
@@ -24279,7 +24482,7 @@
             </p14:xfrm>
           </p:contentPart>
         </mc:Choice>
-        <mc:Fallback>
+        <mc:Fallback xmlns="">
           <p:pic>
             <p:nvPicPr>
               <p:cNvPr id="9" name="Ink 8">
@@ -24357,7 +24560,7 @@
           <a:p>
             <a:fld id="{9E6D2E29-3933-614D-82C7-D215195ADAE0}" type="datetime1">
               <a:rPr lang="en-IN" smtClean="0"/>
-              <a:t>20-03-2022</a:t>
+              <a:t>02/07/26</a:t>
             </a:fld>
             <a:endParaRPr lang="en-IN"/>
           </a:p>
@@ -24567,8 +24770,8 @@
           </a:p>
         </p:txBody>
       </p:sp>
-      <mc:AlternateContent xmlns:mc="http://schemas.openxmlformats.org/markup-compatibility/2006">
-        <mc:Choice xmlns:p14="http://schemas.microsoft.com/office/powerpoint/2010/main" Requires="p14">
+      <mc:AlternateContent xmlns:mc="http://schemas.openxmlformats.org/markup-compatibility/2006" xmlns:p14="http://schemas.microsoft.com/office/powerpoint/2010/main">
+        <mc:Choice Requires="p14">
           <p:contentPart p14:bwMode="auto" r:id="rId2">
             <p14:nvContentPartPr>
               <p14:cNvPr id="4" name="Ink 3">
@@ -24587,7 +24790,7 @@
             </p14:xfrm>
           </p:contentPart>
         </mc:Choice>
-        <mc:Fallback>
+        <mc:Fallback xmlns="">
           <p:pic>
             <p:nvPicPr>
               <p:cNvPr id="4" name="Ink 3">
@@ -24671,7 +24874,7 @@
           <a:p>
             <a:fld id="{9E6D2E29-3933-614D-82C7-D215195ADAE0}" type="datetime1">
               <a:rPr lang="en-IN" smtClean="0"/>
-              <a:t>20-03-2022</a:t>
+              <a:t>02/07/26</a:t>
             </a:fld>
             <a:endParaRPr lang="en-IN"/>
           </a:p>
@@ -24787,8 +24990,8 @@
           </a:extLst>
         </p:spPr>
       </p:pic>
-      <mc:AlternateContent xmlns:mc="http://schemas.openxmlformats.org/markup-compatibility/2006">
-        <mc:Choice xmlns:p14="http://schemas.microsoft.com/office/powerpoint/2010/main" Requires="p14">
+      <mc:AlternateContent xmlns:mc="http://schemas.openxmlformats.org/markup-compatibility/2006" xmlns:p14="http://schemas.microsoft.com/office/powerpoint/2010/main">
+        <mc:Choice Requires="p14">
           <p:contentPart p14:bwMode="auto" r:id="rId3">
             <p14:nvContentPartPr>
               <p14:cNvPr id="7" name="Ink 6">
@@ -24807,7 +25010,7 @@
             </p14:xfrm>
           </p:contentPart>
         </mc:Choice>
-        <mc:Fallback>
+        <mc:Fallback xmlns="">
           <p:pic>
             <p:nvPicPr>
               <p:cNvPr id="7" name="Ink 6">
@@ -24885,7 +25088,7 @@
           <a:p>
             <a:fld id="{9E6D2E29-3933-614D-82C7-D215195ADAE0}" type="datetime1">
               <a:rPr lang="en-IN" smtClean="0"/>
-              <a:t>20-03-2022</a:t>
+              <a:t>02/07/26</a:t>
             </a:fld>
             <a:endParaRPr lang="en-IN"/>
           </a:p>
@@ -24938,7 +25141,203 @@
       </p:sp>
       <p:sp>
         <p:nvSpPr>
-          <p:cNvPr id="6" name="Rectangle 5"/>
+          <p:cNvPr id="4" name="TextBox 3">
+            <a:extLst>
+              <a:ext uri="{FF2B5EF4-FFF2-40B4-BE49-F238E27FC236}">
+                <a16:creationId xmlns:a16="http://schemas.microsoft.com/office/drawing/2014/main" id="{2681A629-A894-B345-940E-A17A77AB0AE9}"/>
+              </a:ext>
+            </a:extLst>
+          </p:cNvPr>
+          <p:cNvSpPr txBox="1"/>
+          <p:nvPr/>
+        </p:nvSpPr>
+        <p:spPr>
+          <a:xfrm>
+            <a:off x="4311941" y="4412609"/>
+            <a:ext cx="184731" cy="369332"/>
+          </a:xfrm>
+          <a:prstGeom prst="rect">
+            <a:avLst/>
+          </a:prstGeom>
+          <a:noFill/>
+        </p:spPr>
+        <p:txBody>
+          <a:bodyPr wrap="none" rtlCol="0">
+            <a:spAutoFit/>
+          </a:bodyPr>
+          <a:lstStyle/>
+          <a:p>
+            <a:endParaRPr lang="en-US" dirty="0"/>
+          </a:p>
+        </p:txBody>
+      </p:sp>
+      <p:pic>
+        <p:nvPicPr>
+          <p:cNvPr id="11" name="Picture 10">
+            <a:extLst>
+              <a:ext uri="{FF2B5EF4-FFF2-40B4-BE49-F238E27FC236}">
+                <a16:creationId xmlns:a16="http://schemas.microsoft.com/office/drawing/2014/main" id="{5F765D14-DCCB-A0ED-382A-1024C8D7AD3C}"/>
+              </a:ext>
+            </a:extLst>
+          </p:cNvPr>
+          <p:cNvPicPr>
+            <a:picLocks noChangeAspect="1"/>
+          </p:cNvPicPr>
+          <p:nvPr/>
+        </p:nvPicPr>
+        <p:blipFill>
+          <a:blip r:embed="rId2">
+            <a:extLst>
+              <a:ext uri="{28A0092B-C50C-407E-A947-70E740481C1C}">
+                <a14:useLocalDpi xmlns:a14="http://schemas.microsoft.com/office/drawing/2010/main" val="0"/>
+              </a:ext>
+            </a:extLst>
+          </a:blip>
+          <a:stretch>
+            <a:fillRect/>
+          </a:stretch>
+        </p:blipFill>
+        <p:spPr>
+          <a:xfrm>
+            <a:off x="610472" y="686811"/>
+            <a:ext cx="7772400" cy="4334723"/>
+          </a:xfrm>
+          <a:prstGeom prst="rect">
+            <a:avLst/>
+          </a:prstGeom>
+        </p:spPr>
+      </p:pic>
+    </p:spTree>
+    <p:extLst>
+      <p:ext uri="{BB962C8B-B14F-4D97-AF65-F5344CB8AC3E}">
+        <p14:creationId xmlns:p14="http://schemas.microsoft.com/office/powerpoint/2010/main" val="130522750"/>
+      </p:ext>
+    </p:extLst>
+  </p:cSld>
+  <p:clrMapOvr>
+    <a:masterClrMapping/>
+  </p:clrMapOvr>
+</p:sld>
+</file>
+
+<file path=ppt/slides/slide9.xml><?xml version="1.0" encoding="utf-8"?>
+<p:sld xmlns:a="http://schemas.openxmlformats.org/drawingml/2006/main" xmlns:r="http://schemas.openxmlformats.org/officeDocument/2006/relationships" xmlns:p="http://schemas.openxmlformats.org/presentationml/2006/main" show="0">
+  <p:cSld>
+    <p:spTree>
+      <p:nvGrpSpPr>
+        <p:cNvPr id="1" name="">
+          <a:extLst>
+            <a:ext uri="{FF2B5EF4-FFF2-40B4-BE49-F238E27FC236}">
+              <a16:creationId xmlns:a16="http://schemas.microsoft.com/office/drawing/2014/main" id="{6A897679-FB0B-D47D-270C-E41F7CA88DEE}"/>
+            </a:ext>
+          </a:extLst>
+        </p:cNvPr>
+        <p:cNvGrpSpPr/>
+        <p:nvPr/>
+      </p:nvGrpSpPr>
+      <p:grpSpPr>
+        <a:xfrm>
+          <a:off x="0" y="0"/>
+          <a:ext cx="0" cy="0"/>
+          <a:chOff x="0" y="0"/>
+          <a:chExt cx="0" cy="0"/>
+        </a:xfrm>
+      </p:grpSpPr>
+      <p:sp>
+        <p:nvSpPr>
+          <p:cNvPr id="2" name="Date Placeholder 1">
+            <a:extLst>
+              <a:ext uri="{FF2B5EF4-FFF2-40B4-BE49-F238E27FC236}">
+                <a16:creationId xmlns:a16="http://schemas.microsoft.com/office/drawing/2014/main" id="{3BC868E3-1229-C49F-2D45-0E021E2D5C1E}"/>
+              </a:ext>
+            </a:extLst>
+          </p:cNvPr>
+          <p:cNvSpPr>
+            <a:spLocks noGrp="1"/>
+          </p:cNvSpPr>
+          <p:nvPr>
+            <p:ph type="dt" sz="half" idx="10"/>
+          </p:nvPr>
+        </p:nvSpPr>
+        <p:spPr/>
+        <p:txBody>
+          <a:bodyPr/>
+          <a:lstStyle/>
+          <a:p>
+            <a:fld id="{9E6D2E29-3933-614D-82C7-D215195ADAE0}" type="datetime1">
+              <a:rPr lang="en-IN" smtClean="0"/>
+              <a:t>02/07/26</a:t>
+            </a:fld>
+            <a:endParaRPr lang="en-IN"/>
+          </a:p>
+        </p:txBody>
+      </p:sp>
+      <p:sp>
+        <p:nvSpPr>
+          <p:cNvPr id="3" name="Slide Number Placeholder 2">
+            <a:extLst>
+              <a:ext uri="{FF2B5EF4-FFF2-40B4-BE49-F238E27FC236}">
+                <a16:creationId xmlns:a16="http://schemas.microsoft.com/office/drawing/2014/main" id="{7E8E7A92-02B1-069C-168E-663C25E9FC2E}"/>
+              </a:ext>
+            </a:extLst>
+          </p:cNvPr>
+          <p:cNvSpPr>
+            <a:spLocks noGrp="1"/>
+          </p:cNvSpPr>
+          <p:nvPr>
+            <p:ph type="sldNum" sz="quarter" idx="12"/>
+          </p:nvPr>
+        </p:nvSpPr>
+        <p:spPr/>
+        <p:txBody>
+          <a:bodyPr/>
+          <a:lstStyle/>
+          <a:p>
+            <a:fld id="{273EEA2F-D825-49D3-9C25-497F06EFD3F7}" type="slidenum">
+              <a:rPr lang="en-IN" smtClean="0"/>
+              <a:t>9</a:t>
+            </a:fld>
+            <a:endParaRPr lang="en-IN"/>
+          </a:p>
+        </p:txBody>
+      </p:sp>
+      <p:sp>
+        <p:nvSpPr>
+          <p:cNvPr id="5" name="Title 4">
+            <a:extLst>
+              <a:ext uri="{FF2B5EF4-FFF2-40B4-BE49-F238E27FC236}">
+                <a16:creationId xmlns:a16="http://schemas.microsoft.com/office/drawing/2014/main" id="{92B127C3-B85E-DAF4-718C-85FB995C8A7C}"/>
+              </a:ext>
+            </a:extLst>
+          </p:cNvPr>
+          <p:cNvSpPr>
+            <a:spLocks noGrp="1"/>
+          </p:cNvSpPr>
+          <p:nvPr>
+            <p:ph type="title"/>
+          </p:nvPr>
+        </p:nvSpPr>
+        <p:spPr/>
+        <p:txBody>
+          <a:bodyPr/>
+          <a:lstStyle/>
+          <a:p>
+            <a:r>
+              <a:rPr lang="en-US" dirty="0"/>
+              <a:t>RL - Equations</a:t>
+            </a:r>
+          </a:p>
+        </p:txBody>
+      </p:sp>
+      <p:sp>
+        <p:nvSpPr>
+          <p:cNvPr id="6" name="Rectangle 5">
+            <a:extLst>
+              <a:ext uri="{FF2B5EF4-FFF2-40B4-BE49-F238E27FC236}">
+                <a16:creationId xmlns:a16="http://schemas.microsoft.com/office/drawing/2014/main" id="{3083363A-8FDB-CD28-79CE-7CAF349A5A57}"/>
+              </a:ext>
+            </a:extLst>
+          </p:cNvPr>
           <p:cNvSpPr/>
           <p:nvPr/>
         </p:nvSpPr>
@@ -25005,7 +25404,13 @@
       </p:sp>
       <p:sp>
         <p:nvSpPr>
-          <p:cNvPr id="12" name="Rectangle 11"/>
+          <p:cNvPr id="12" name="Rectangle 11">
+            <a:extLst>
+              <a:ext uri="{FF2B5EF4-FFF2-40B4-BE49-F238E27FC236}">
+                <a16:creationId xmlns:a16="http://schemas.microsoft.com/office/drawing/2014/main" id="{3494FE1D-8A26-5BF9-06C0-04EC10050F43}"/>
+              </a:ext>
+            </a:extLst>
+          </p:cNvPr>
           <p:cNvSpPr/>
           <p:nvPr/>
         </p:nvSpPr>
@@ -25097,7 +25502,13 @@
       </p:sp>
       <p:pic>
         <p:nvPicPr>
-          <p:cNvPr id="15" name="Picture 14"/>
+          <p:cNvPr id="15" name="Picture 14">
+            <a:extLst>
+              <a:ext uri="{FF2B5EF4-FFF2-40B4-BE49-F238E27FC236}">
+                <a16:creationId xmlns:a16="http://schemas.microsoft.com/office/drawing/2014/main" id="{0D1FB333-7503-27CB-D3DD-1234EBE3D4EA}"/>
+              </a:ext>
+            </a:extLst>
+          </p:cNvPr>
           <p:cNvPicPr>
             <a:picLocks noChangeAspect="1"/>
           </p:cNvPicPr>
@@ -25121,7 +25532,13 @@
       </p:pic>
       <p:pic>
         <p:nvPicPr>
-          <p:cNvPr id="16" name="Picture 15"/>
+          <p:cNvPr id="16" name="Picture 15">
+            <a:extLst>
+              <a:ext uri="{FF2B5EF4-FFF2-40B4-BE49-F238E27FC236}">
+                <a16:creationId xmlns:a16="http://schemas.microsoft.com/office/drawing/2014/main" id="{7B98AC99-5076-B462-636B-4F10A4A380A3}"/>
+              </a:ext>
+            </a:extLst>
+          </p:cNvPr>
           <p:cNvPicPr>
             <a:picLocks noChangeAspect="1"/>
           </p:cNvPicPr>
@@ -25145,7 +25562,13 @@
       </p:pic>
       <p:pic>
         <p:nvPicPr>
-          <p:cNvPr id="17" name="Picture 16"/>
+          <p:cNvPr id="17" name="Picture 16">
+            <a:extLst>
+              <a:ext uri="{FF2B5EF4-FFF2-40B4-BE49-F238E27FC236}">
+                <a16:creationId xmlns:a16="http://schemas.microsoft.com/office/drawing/2014/main" id="{42958AA3-ADD0-CC74-A03D-D5836BDCFBF8}"/>
+              </a:ext>
+            </a:extLst>
+          </p:cNvPr>
           <p:cNvPicPr>
             <a:picLocks noChangeAspect="1"/>
           </p:cNvPicPr>
@@ -25169,7 +25592,13 @@
       </p:pic>
       <p:pic>
         <p:nvPicPr>
-          <p:cNvPr id="18" name="Picture 17"/>
+          <p:cNvPr id="18" name="Picture 17">
+            <a:extLst>
+              <a:ext uri="{FF2B5EF4-FFF2-40B4-BE49-F238E27FC236}">
+                <a16:creationId xmlns:a16="http://schemas.microsoft.com/office/drawing/2014/main" id="{ED98746E-F5E4-E0C2-A665-978C90A19F92}"/>
+              </a:ext>
+            </a:extLst>
+          </p:cNvPr>
           <p:cNvPicPr>
             <a:picLocks noChangeAspect="1"/>
           </p:cNvPicPr>
@@ -25191,212 +25620,42 @@
           </a:prstGeom>
         </p:spPr>
       </p:pic>
+      <p:sp>
+        <p:nvSpPr>
+          <p:cNvPr id="4" name="TextBox 3">
+            <a:extLst>
+              <a:ext uri="{FF2B5EF4-FFF2-40B4-BE49-F238E27FC236}">
+                <a16:creationId xmlns:a16="http://schemas.microsoft.com/office/drawing/2014/main" id="{D2D46CC7-E4D7-2B2E-8AB5-AF846E2ED4E8}"/>
+              </a:ext>
+            </a:extLst>
+          </p:cNvPr>
+          <p:cNvSpPr txBox="1"/>
+          <p:nvPr/>
+        </p:nvSpPr>
+        <p:spPr>
+          <a:xfrm>
+            <a:off x="4311941" y="4412609"/>
+            <a:ext cx="184731" cy="369332"/>
+          </a:xfrm>
+          <a:prstGeom prst="rect">
+            <a:avLst/>
+          </a:prstGeom>
+          <a:noFill/>
+        </p:spPr>
+        <p:txBody>
+          <a:bodyPr wrap="none" rtlCol="0">
+            <a:spAutoFit/>
+          </a:bodyPr>
+          <a:lstStyle/>
+          <a:p>
+            <a:endParaRPr lang="en-US" dirty="0"/>
+          </a:p>
+        </p:txBody>
+      </p:sp>
     </p:spTree>
     <p:extLst>
       <p:ext uri="{BB962C8B-B14F-4D97-AF65-F5344CB8AC3E}">
-        <p14:creationId xmlns:p14="http://schemas.microsoft.com/office/powerpoint/2010/main" val="130522750"/>
-      </p:ext>
-    </p:extLst>
-  </p:cSld>
-  <p:clrMapOvr>
-    <a:masterClrMapping/>
-  </p:clrMapOvr>
-</p:sld>
-</file>
-
-<file path=ppt/slides/slide9.xml><?xml version="1.0" encoding="utf-8"?>
-<p:sld xmlns:a="http://schemas.openxmlformats.org/drawingml/2006/main" xmlns:r="http://schemas.openxmlformats.org/officeDocument/2006/relationships" xmlns:p="http://schemas.openxmlformats.org/presentationml/2006/main" show="0">
-  <p:cSld>
-    <p:spTree>
-      <p:nvGrpSpPr>
-        <p:cNvPr id="1" name=""/>
-        <p:cNvGrpSpPr/>
-        <p:nvPr/>
-      </p:nvGrpSpPr>
-      <p:grpSpPr>
-        <a:xfrm>
-          <a:off x="0" y="0"/>
-          <a:ext cx="0" cy="0"/>
-          <a:chOff x="0" y="0"/>
-          <a:chExt cx="0" cy="0"/>
-        </a:xfrm>
-      </p:grpSpPr>
-      <p:sp>
-        <p:nvSpPr>
-          <p:cNvPr id="2" name="Date Placeholder 1"/>
-          <p:cNvSpPr>
-            <a:spLocks noGrp="1"/>
-          </p:cNvSpPr>
-          <p:nvPr>
-            <p:ph type="dt" sz="half" idx="10"/>
-          </p:nvPr>
-        </p:nvSpPr>
-        <p:spPr/>
-        <p:txBody>
-          <a:bodyPr/>
-          <a:lstStyle/>
-          <a:p>
-            <a:fld id="{9E6D2E29-3933-614D-82C7-D215195ADAE0}" type="datetime1">
-              <a:rPr lang="en-IN" smtClean="0"/>
-              <a:t>20-03-2022</a:t>
-            </a:fld>
-            <a:endParaRPr lang="en-IN"/>
-          </a:p>
-        </p:txBody>
-      </p:sp>
-      <p:sp>
-        <p:nvSpPr>
-          <p:cNvPr id="3" name="Slide Number Placeholder 2"/>
-          <p:cNvSpPr>
-            <a:spLocks noGrp="1"/>
-          </p:cNvSpPr>
-          <p:nvPr>
-            <p:ph type="sldNum" sz="quarter" idx="12"/>
-          </p:nvPr>
-        </p:nvSpPr>
-        <p:spPr/>
-        <p:txBody>
-          <a:bodyPr/>
-          <a:lstStyle/>
-          <a:p>
-            <a:fld id="{273EEA2F-D825-49D3-9C25-497F06EFD3F7}" type="slidenum">
-              <a:rPr lang="en-IN" smtClean="0"/>
-              <a:t>9</a:t>
-            </a:fld>
-            <a:endParaRPr lang="en-IN"/>
-          </a:p>
-        </p:txBody>
-      </p:sp>
-      <p:sp>
-        <p:nvSpPr>
-          <p:cNvPr id="5" name="Title 4"/>
-          <p:cNvSpPr>
-            <a:spLocks noGrp="1"/>
-          </p:cNvSpPr>
-          <p:nvPr>
-            <p:ph type="title"/>
-          </p:nvPr>
-        </p:nvSpPr>
-        <p:spPr>
-          <a:xfrm>
-            <a:off x="316679" y="121966"/>
-            <a:ext cx="5488220" cy="382564"/>
-          </a:xfrm>
-        </p:spPr>
-        <p:txBody>
-          <a:bodyPr/>
-          <a:lstStyle/>
-          <a:p>
-            <a:r>
-              <a:rPr lang="en-US" dirty="0"/>
-              <a:t>Model-Free Method</a:t>
-            </a:r>
-          </a:p>
-        </p:txBody>
-      </p:sp>
-      <p:sp>
-        <p:nvSpPr>
-          <p:cNvPr id="6" name="Rectangle 5"/>
-          <p:cNvSpPr/>
-          <p:nvPr/>
-        </p:nvSpPr>
-        <p:spPr>
-          <a:xfrm>
-            <a:off x="536183" y="868123"/>
-            <a:ext cx="8114657" cy="954107"/>
-          </a:xfrm>
-          <a:prstGeom prst="rect">
-            <a:avLst/>
-          </a:prstGeom>
-        </p:spPr>
-        <p:txBody>
-          <a:bodyPr wrap="square">
-            <a:spAutoFit/>
-          </a:bodyPr>
-          <a:lstStyle/>
-          <a:p>
-            <a:r>
-              <a:rPr lang="en-US" sz="1400" dirty="0">
-                <a:solidFill>
-                  <a:srgbClr val="000000"/>
-                </a:solidFill>
-                <a:latin typeface="Arial" panose="020B0604020202020204" pitchFamily="34" charset="0"/>
-                <a:ea typeface="Times New Roman" panose="02020603050405020304" pitchFamily="18" charset="0"/>
-              </a:rPr>
-              <a:t>The equations can be solved if the model of the environment p(s</a:t>
-            </a:r>
-            <a:r>
-              <a:rPr lang="en-US" sz="1000" dirty="0">
-                <a:solidFill>
-                  <a:srgbClr val="000000"/>
-                </a:solidFill>
-                <a:latin typeface="Arial" panose="020B0604020202020204" pitchFamily="34" charset="0"/>
-                <a:ea typeface="Times New Roman" panose="02020603050405020304" pitchFamily="18" charset="0"/>
-              </a:rPr>
-              <a:t>′</a:t>
-            </a:r>
-            <a:r>
-              <a:rPr lang="en-US" sz="1400" dirty="0">
-                <a:solidFill>
-                  <a:srgbClr val="000000"/>
-                </a:solidFill>
-                <a:latin typeface="Arial" panose="020B0604020202020204" pitchFamily="34" charset="0"/>
-                <a:ea typeface="Times New Roman" panose="02020603050405020304" pitchFamily="18" charset="0"/>
-              </a:rPr>
-              <a:t>,</a:t>
-            </a:r>
-            <a:r>
-              <a:rPr lang="en-US" sz="1400" dirty="0" err="1">
-                <a:solidFill>
-                  <a:srgbClr val="000000"/>
-                </a:solidFill>
-                <a:latin typeface="Arial" panose="020B0604020202020204" pitchFamily="34" charset="0"/>
-                <a:ea typeface="Times New Roman" panose="02020603050405020304" pitchFamily="18" charset="0"/>
-              </a:rPr>
-              <a:t>r|s,a</a:t>
-            </a:r>
-            <a:r>
-              <a:rPr lang="en-US" sz="1400" dirty="0">
-                <a:solidFill>
-                  <a:srgbClr val="000000"/>
-                </a:solidFill>
-                <a:latin typeface="Arial" panose="020B0604020202020204" pitchFamily="34" charset="0"/>
-                <a:ea typeface="Times New Roman" panose="02020603050405020304" pitchFamily="18" charset="0"/>
-              </a:rPr>
-              <a:t>) is available. In most real-life scenarios with large state and action spaces, the model of the environment is not available (i.e. model-free methods). In such cases, you can compute the q-function using the fact that it is the expected value of the total reward</a:t>
-            </a:r>
-            <a:endParaRPr lang="en-US" sz="1400" dirty="0"/>
-          </a:p>
-        </p:txBody>
-      </p:sp>
-      <p:pic>
-        <p:nvPicPr>
-          <p:cNvPr id="7" name="Picture 6"/>
-          <p:cNvPicPr>
-            <a:picLocks noChangeAspect="1"/>
-          </p:cNvPicPr>
-          <p:nvPr/>
-        </p:nvPicPr>
-        <p:blipFill>
-          <a:blip r:embed="rId2"/>
-          <a:stretch>
-            <a:fillRect/>
-          </a:stretch>
-        </p:blipFill>
-        <p:spPr>
-          <a:xfrm>
-            <a:off x="1839074" y="1822230"/>
-            <a:ext cx="5851935" cy="2707857"/>
-          </a:xfrm>
-          <a:prstGeom prst="rect">
-            <a:avLst/>
-          </a:prstGeom>
-        </p:spPr>
-      </p:pic>
-    </p:spTree>
-    <p:extLst>
-      <p:ext uri="{BB962C8B-B14F-4D97-AF65-F5344CB8AC3E}">
-        <p14:creationId xmlns:p14="http://schemas.microsoft.com/office/powerpoint/2010/main" val="1726451625"/>
+        <p14:creationId xmlns:p14="http://schemas.microsoft.com/office/powerpoint/2010/main" val="684188206"/>
       </p:ext>
     </p:extLst>
   </p:cSld>
